--- a/TP6_Exploitation_faille_0day_Lilian_Ander.pptx
+++ b/TP6_Exploitation_faille_0day_Lilian_Ander.pptx
@@ -7,6 +7,7 @@
   <p:sldIdLst>
     <p:sldId id="256" r:id="rId2"/>
     <p:sldId id="257" r:id="rId3"/>
+    <p:sldId id="258" r:id="rId4"/>
   </p:sldIdLst>
   <p:sldSz cx="12192000" cy="6858000"/>
   <p:notesSz cx="6858000" cy="9144000"/>
@@ -105,6 +106,11 @@
       </a:defRPr>
     </a:lvl9pPr>
   </p:defaultTextStyle>
+  <p:extLst>
+    <p:ext uri="{EFAFB233-063F-42B5-8137-9DF3F51BA10A}">
+      <p15:sldGuideLst xmlns:p15="http://schemas.microsoft.com/office/powerpoint/2012/main"/>
+    </p:ext>
+  </p:extLst>
 </p:presentation>
 </file>
 
@@ -255,7 +261,7 @@
           <a:p>
             <a:fld id="{74E1E0F1-822F-F04A-BDF4-578A088DEB18}" type="datetimeFigureOut">
               <a:rPr lang="fr-FR" smtClean="0"/>
-              <a:t>07/10/2025</a:t>
+              <a:t>08/10/2025</a:t>
             </a:fld>
             <a:endParaRPr lang="fr-FR"/>
           </a:p>
@@ -453,7 +459,7 @@
           <a:p>
             <a:fld id="{74E1E0F1-822F-F04A-BDF4-578A088DEB18}" type="datetimeFigureOut">
               <a:rPr lang="fr-FR" smtClean="0"/>
-              <a:t>07/10/2025</a:t>
+              <a:t>08/10/2025</a:t>
             </a:fld>
             <a:endParaRPr lang="fr-FR"/>
           </a:p>
@@ -661,7 +667,7 @@
           <a:p>
             <a:fld id="{74E1E0F1-822F-F04A-BDF4-578A088DEB18}" type="datetimeFigureOut">
               <a:rPr lang="fr-FR" smtClean="0"/>
-              <a:t>07/10/2025</a:t>
+              <a:t>08/10/2025</a:t>
             </a:fld>
             <a:endParaRPr lang="fr-FR"/>
           </a:p>
@@ -859,7 +865,7 @@
           <a:p>
             <a:fld id="{74E1E0F1-822F-F04A-BDF4-578A088DEB18}" type="datetimeFigureOut">
               <a:rPr lang="fr-FR" smtClean="0"/>
-              <a:t>07/10/2025</a:t>
+              <a:t>08/10/2025</a:t>
             </a:fld>
             <a:endParaRPr lang="fr-FR"/>
           </a:p>
@@ -1134,7 +1140,7 @@
           <a:p>
             <a:fld id="{74E1E0F1-822F-F04A-BDF4-578A088DEB18}" type="datetimeFigureOut">
               <a:rPr lang="fr-FR" smtClean="0"/>
-              <a:t>07/10/2025</a:t>
+              <a:t>08/10/2025</a:t>
             </a:fld>
             <a:endParaRPr lang="fr-FR"/>
           </a:p>
@@ -1399,7 +1405,7 @@
           <a:p>
             <a:fld id="{74E1E0F1-822F-F04A-BDF4-578A088DEB18}" type="datetimeFigureOut">
               <a:rPr lang="fr-FR" smtClean="0"/>
-              <a:t>07/10/2025</a:t>
+              <a:t>08/10/2025</a:t>
             </a:fld>
             <a:endParaRPr lang="fr-FR"/>
           </a:p>
@@ -1811,7 +1817,7 @@
           <a:p>
             <a:fld id="{74E1E0F1-822F-F04A-BDF4-578A088DEB18}" type="datetimeFigureOut">
               <a:rPr lang="fr-FR" smtClean="0"/>
-              <a:t>07/10/2025</a:t>
+              <a:t>08/10/2025</a:t>
             </a:fld>
             <a:endParaRPr lang="fr-FR"/>
           </a:p>
@@ -1952,7 +1958,7 @@
           <a:p>
             <a:fld id="{74E1E0F1-822F-F04A-BDF4-578A088DEB18}" type="datetimeFigureOut">
               <a:rPr lang="fr-FR" smtClean="0"/>
-              <a:t>07/10/2025</a:t>
+              <a:t>08/10/2025</a:t>
             </a:fld>
             <a:endParaRPr lang="fr-FR"/>
           </a:p>
@@ -2065,7 +2071,7 @@
           <a:p>
             <a:fld id="{74E1E0F1-822F-F04A-BDF4-578A088DEB18}" type="datetimeFigureOut">
               <a:rPr lang="fr-FR" smtClean="0"/>
-              <a:t>07/10/2025</a:t>
+              <a:t>08/10/2025</a:t>
             </a:fld>
             <a:endParaRPr lang="fr-FR"/>
           </a:p>
@@ -2376,7 +2382,7 @@
           <a:p>
             <a:fld id="{74E1E0F1-822F-F04A-BDF4-578A088DEB18}" type="datetimeFigureOut">
               <a:rPr lang="fr-FR" smtClean="0"/>
-              <a:t>07/10/2025</a:t>
+              <a:t>08/10/2025</a:t>
             </a:fld>
             <a:endParaRPr lang="fr-FR"/>
           </a:p>
@@ -2664,7 +2670,7 @@
           <a:p>
             <a:fld id="{74E1E0F1-822F-F04A-BDF4-578A088DEB18}" type="datetimeFigureOut">
               <a:rPr lang="fr-FR" smtClean="0"/>
-              <a:t>07/10/2025</a:t>
+              <a:t>08/10/2025</a:t>
             </a:fld>
             <a:endParaRPr lang="fr-FR"/>
           </a:p>
@@ -2905,7 +2911,7 @@
           <a:p>
             <a:fld id="{74E1E0F1-822F-F04A-BDF4-578A088DEB18}" type="datetimeFigureOut">
               <a:rPr lang="fr-FR" smtClean="0"/>
-              <a:t>07/10/2025</a:t>
+              <a:t>08/10/2025</a:t>
             </a:fld>
             <a:endParaRPr lang="fr-FR"/>
           </a:p>
@@ -3569,12 +3575,14 @@
         </p:nvSpPr>
         <p:spPr>
           <a:xfrm>
-            <a:off x="838200" y="1307805"/>
-            <a:ext cx="10515600" cy="4869158"/>
+            <a:off x="838200" y="1307804"/>
+            <a:ext cx="10515600" cy="5185069"/>
           </a:xfrm>
         </p:spPr>
         <p:txBody>
-          <a:bodyPr/>
+          <a:bodyPr>
+            <a:normAutofit/>
+          </a:bodyPr>
           <a:lstStyle/>
           <a:p>
             <a:pPr marL="0" indent="0">
@@ -3634,12 +3642,258 @@
               <a:t>Interruption d’activité en cas de compromission d’appareils essentiels /  Fuite ou perte de données sensibles / Perturbation du fonctionnement</a:t>
             </a:r>
           </a:p>
+          <a:p>
+            <a:pPr marL="0" indent="0">
+              <a:buNone/>
+            </a:pPr>
+            <a:endParaRPr lang="fr-FR" sz="1050" dirty="0"/>
+          </a:p>
+          <a:p>
+            <a:pPr>
+              <a:buFontTx/>
+              <a:buChar char="-"/>
+            </a:pPr>
+            <a:r>
+              <a:rPr lang="fr-FR" sz="2400" dirty="0"/>
+              <a:t>Sur le plan juridiques / réglementaires :</a:t>
+            </a:r>
+          </a:p>
+          <a:p>
+            <a:pPr marL="0" indent="0">
+              <a:buNone/>
+            </a:pPr>
+            <a:r>
+              <a:rPr lang="fr-FR" sz="1050" dirty="0"/>
+              <a:t>Obligation de notifier les autorités et les personnes concernées /  Enquêtes pour non-respect du RGPD / Poursuites pour atteinte à la vie privée ou espionnage illégal</a:t>
+            </a:r>
+            <a:endParaRPr lang="fr-FR" sz="2400" dirty="0"/>
+          </a:p>
+          <a:p>
+            <a:pPr marL="0" indent="0">
+              <a:buNone/>
+            </a:pPr>
+            <a:r>
+              <a:rPr lang="fr-FR" sz="1050" dirty="0"/>
+              <a:t> </a:t>
+            </a:r>
+          </a:p>
+          <a:p>
+            <a:pPr>
+              <a:buFontTx/>
+              <a:buChar char="-"/>
+            </a:pPr>
+            <a:r>
+              <a:rPr lang="fr-FR" sz="2400" dirty="0"/>
+              <a:t>Sur le plan d’image et la confiance de marque : </a:t>
+            </a:r>
+          </a:p>
+          <a:p>
+            <a:pPr marL="0" indent="0">
+              <a:buNone/>
+            </a:pPr>
+            <a:r>
+              <a:rPr lang="fr-FR" sz="1050" dirty="0"/>
+              <a:t>Perte de confiance à tous les niveaux /  Atteinte à la réputation nationale ou institutionnelle</a:t>
+            </a:r>
+            <a:endParaRPr lang="fr-FR" sz="2400" dirty="0"/>
+          </a:p>
+          <a:p>
+            <a:pPr marL="0" indent="0">
+              <a:buNone/>
+            </a:pPr>
+            <a:endParaRPr lang="fr-FR" sz="1050" dirty="0"/>
+          </a:p>
+          <a:p>
+            <a:pPr marL="0" indent="0" algn="ctr">
+              <a:buNone/>
+            </a:pPr>
+            <a:r>
+              <a:rPr lang="fr-FR" sz="1600" b="1" dirty="0"/>
+              <a:t>Le niveau de criticité est fort.</a:t>
+            </a:r>
+          </a:p>
         </p:txBody>
       </p:sp>
     </p:spTree>
     <p:extLst>
       <p:ext uri="{BB962C8B-B14F-4D97-AF65-F5344CB8AC3E}">
         <p14:creationId xmlns:p14="http://schemas.microsoft.com/office/powerpoint/2010/main" val="2751674682"/>
+      </p:ext>
+    </p:extLst>
+  </p:cSld>
+  <p:clrMapOvr>
+    <a:masterClrMapping/>
+  </p:clrMapOvr>
+</p:sld>
+</file>
+
+<file path=ppt/slides/slide3.xml><?xml version="1.0" encoding="utf-8"?>
+<p:sld xmlns:a="http://schemas.openxmlformats.org/drawingml/2006/main" xmlns:r="http://schemas.openxmlformats.org/officeDocument/2006/relationships" xmlns:p="http://schemas.openxmlformats.org/presentationml/2006/main">
+  <p:cSld>
+    <p:spTree>
+      <p:nvGrpSpPr>
+        <p:cNvPr id="1" name=""/>
+        <p:cNvGrpSpPr/>
+        <p:nvPr/>
+      </p:nvGrpSpPr>
+      <p:grpSpPr>
+        <a:xfrm>
+          <a:off x="0" y="0"/>
+          <a:ext cx="0" cy="0"/>
+          <a:chOff x="0" y="0"/>
+          <a:chExt cx="0" cy="0"/>
+        </a:xfrm>
+      </p:grpSpPr>
+      <p:sp>
+        <p:nvSpPr>
+          <p:cNvPr id="2" name="Titre 1">
+            <a:extLst>
+              <a:ext uri="{FF2B5EF4-FFF2-40B4-BE49-F238E27FC236}">
+                <a16:creationId xmlns:a16="http://schemas.microsoft.com/office/drawing/2014/main" id="{A081C341-6E74-1596-0208-E2CBB4B32790}"/>
+              </a:ext>
+            </a:extLst>
+          </p:cNvPr>
+          <p:cNvSpPr>
+            <a:spLocks noGrp="1"/>
+          </p:cNvSpPr>
+          <p:nvPr>
+            <p:ph type="title"/>
+          </p:nvPr>
+        </p:nvSpPr>
+        <p:spPr/>
+        <p:txBody>
+          <a:bodyPr/>
+          <a:lstStyle/>
+          <a:p>
+            <a:pPr algn="ctr"/>
+            <a:r>
+              <a:rPr lang="fr-FR" dirty="0"/>
+              <a:t>Prévention et réponses</a:t>
+            </a:r>
+          </a:p>
+        </p:txBody>
+      </p:sp>
+      <p:sp>
+        <p:nvSpPr>
+          <p:cNvPr id="3" name="Espace réservé du contenu 2">
+            <a:extLst>
+              <a:ext uri="{FF2B5EF4-FFF2-40B4-BE49-F238E27FC236}">
+                <a16:creationId xmlns:a16="http://schemas.microsoft.com/office/drawing/2014/main" id="{73C25CAC-EDD9-079A-8C53-AF72458989B3}"/>
+              </a:ext>
+            </a:extLst>
+          </p:cNvPr>
+          <p:cNvSpPr>
+            <a:spLocks noGrp="1"/>
+          </p:cNvSpPr>
+          <p:nvPr>
+            <p:ph idx="1"/>
+          </p:nvPr>
+        </p:nvSpPr>
+        <p:spPr/>
+        <p:txBody>
+          <a:bodyPr/>
+          <a:lstStyle/>
+          <a:p>
+            <a:pPr marL="0" indent="0">
+              <a:buNone/>
+            </a:pPr>
+            <a:r>
+              <a:rPr lang="fr-FR" sz="2400" dirty="0"/>
+              <a:t>Les bonnes pratiques pour limiter ce type d’impacts sont :</a:t>
+            </a:r>
+          </a:p>
+          <a:p>
+            <a:pPr marL="0" indent="0">
+              <a:buNone/>
+            </a:pPr>
+            <a:r>
+              <a:rPr lang="fr-FR" sz="1050" dirty="0"/>
+              <a:t>Mettre à jour régulièrement les systèmes et applications / Limiter les droits d’accès / Mettre en place une veille de sécurité</a:t>
+            </a:r>
+          </a:p>
+          <a:p>
+            <a:pPr marL="0" indent="0">
+              <a:buNone/>
+            </a:pPr>
+            <a:endParaRPr lang="fr-FR" sz="1050" dirty="0"/>
+          </a:p>
+          <a:p>
+            <a:pPr marL="0" indent="0">
+              <a:buNone/>
+            </a:pPr>
+            <a:r>
+              <a:rPr lang="fr-FR" sz="2400" dirty="0"/>
+              <a:t>Les outils et solutions techniques sont :</a:t>
+            </a:r>
+          </a:p>
+          <a:p>
+            <a:pPr marL="0" indent="0">
+              <a:buNone/>
+            </a:pPr>
+            <a:r>
+              <a:rPr lang="fr-FR" sz="1050" dirty="0"/>
+              <a:t>Authentification </a:t>
+            </a:r>
+            <a:r>
+              <a:rPr lang="fr-FR" sz="1050" dirty="0" err="1"/>
+              <a:t>multifacteur</a:t>
+            </a:r>
+            <a:r>
+              <a:rPr lang="fr-FR" sz="1050" dirty="0"/>
+              <a:t> pour limiter les accès / Firewall applicatif et filtrage réseau / Chiffrement des données au repos et en transit</a:t>
+            </a:r>
+            <a:endParaRPr lang="fr-FR" sz="2400" dirty="0"/>
+          </a:p>
+          <a:p>
+            <a:pPr marL="0" indent="0">
+              <a:buNone/>
+            </a:pPr>
+            <a:endParaRPr lang="fr-FR" sz="1050" dirty="0"/>
+          </a:p>
+          <a:p>
+            <a:pPr marL="0" indent="0">
+              <a:buNone/>
+            </a:pPr>
+            <a:r>
+              <a:rPr lang="fr-FR" sz="2400" dirty="0"/>
+              <a:t>Les réponses à adopter en cas d’incident :</a:t>
+            </a:r>
+          </a:p>
+          <a:p>
+            <a:pPr marL="0" indent="0">
+              <a:buNone/>
+            </a:pPr>
+            <a:r>
+              <a:rPr lang="fr-FR" sz="1050" dirty="0"/>
+              <a:t>Authentification </a:t>
+            </a:r>
+            <a:r>
+              <a:rPr lang="fr-FR" sz="1050" dirty="0" err="1"/>
+              <a:t>multifaacteur</a:t>
+            </a:r>
+            <a:r>
+              <a:rPr lang="fr-FR" sz="1050" dirty="0"/>
+              <a:t> pour limiter les accès / Firewall applicatif et filtrage réseau / Chiffrement des données au repos et en transit</a:t>
+            </a:r>
+          </a:p>
+          <a:p>
+            <a:pPr marL="0" indent="0">
+              <a:buNone/>
+            </a:pPr>
+            <a:endParaRPr lang="fr-FR" sz="2400" dirty="0"/>
+          </a:p>
+          <a:p>
+            <a:pPr marL="0" indent="0">
+              <a:buNone/>
+            </a:pPr>
+            <a:endParaRPr lang="fr-FR" sz="2400" dirty="0"/>
+          </a:p>
+        </p:txBody>
+      </p:sp>
+    </p:spTree>
+    <p:extLst>
+      <p:ext uri="{BB962C8B-B14F-4D97-AF65-F5344CB8AC3E}">
+        <p14:creationId xmlns:p14="http://schemas.microsoft.com/office/powerpoint/2010/main" val="1569222927"/>
       </p:ext>
     </p:extLst>
   </p:cSld>

--- a/TP6_Exploitation_faille_0day_Lilian_Ander.pptx
+++ b/TP6_Exploitation_faille_0day_Lilian_Ander.pptx
@@ -3791,7 +3791,9 @@
         </p:nvSpPr>
         <p:spPr/>
         <p:txBody>
-          <a:bodyPr/>
+          <a:bodyPr>
+            <a:normAutofit lnSpcReduction="10000"/>
+          </a:bodyPr>
           <a:lstStyle/>
           <a:p>
             <a:pPr marL="0" indent="0">
@@ -3807,8 +3809,26 @@
               <a:buNone/>
             </a:pPr>
             <a:r>
-              <a:rPr lang="fr-FR" sz="1050" dirty="0"/>
-              <a:t>Mettre à jour régulièrement les systèmes et applications / Limiter les droits d’accès / Mettre en place une veille de sécurité</a:t>
+              <a:rPr lang="fr-FR" sz="1200" dirty="0"/>
+              <a:t>- Mettre à jour régulièrement les systèmes et applications </a:t>
+            </a:r>
+          </a:p>
+          <a:p>
+            <a:pPr marL="0" indent="0">
+              <a:buNone/>
+            </a:pPr>
+            <a:r>
+              <a:rPr lang="fr-FR" sz="1200" dirty="0"/>
+              <a:t>- Limiter les droits d’accès </a:t>
+            </a:r>
+          </a:p>
+          <a:p>
+            <a:pPr marL="0" indent="0">
+              <a:buNone/>
+            </a:pPr>
+            <a:r>
+              <a:rPr lang="fr-FR" sz="1200" dirty="0"/>
+              <a:t>- Mettre en place une veille de sécurité</a:t>
             </a:r>
           </a:p>
           <a:p>
@@ -3831,18 +3851,35 @@
               <a:buNone/>
             </a:pPr>
             <a:r>
-              <a:rPr lang="fr-FR" sz="1050" dirty="0"/>
-              <a:t>Authentification </a:t>
-            </a:r>
-            <a:r>
-              <a:rPr lang="fr-FR" sz="1050" dirty="0" err="1"/>
+              <a:rPr lang="fr-FR" sz="1200" dirty="0"/>
+              <a:t>- Authentification </a:t>
+            </a:r>
+            <a:r>
+              <a:rPr lang="fr-FR" sz="1200" dirty="0" err="1"/>
               <a:t>multifacteur</a:t>
             </a:r>
             <a:r>
-              <a:rPr lang="fr-FR" sz="1050" dirty="0"/>
-              <a:t> pour limiter les accès / Firewall applicatif et filtrage réseau / Chiffrement des données au repos et en transit</a:t>
-            </a:r>
-            <a:endParaRPr lang="fr-FR" sz="2400" dirty="0"/>
+              <a:rPr lang="fr-FR" sz="1200" dirty="0"/>
+              <a:t> pour limiter les accès </a:t>
+            </a:r>
+          </a:p>
+          <a:p>
+            <a:pPr marL="0" indent="0">
+              <a:buNone/>
+            </a:pPr>
+            <a:r>
+              <a:rPr lang="fr-FR" sz="1200" dirty="0"/>
+              <a:t>- Firewall applicatif et filtrage réseau </a:t>
+            </a:r>
+          </a:p>
+          <a:p>
+            <a:pPr marL="0" indent="0">
+              <a:buNone/>
+            </a:pPr>
+            <a:r>
+              <a:rPr lang="fr-FR" sz="1200" dirty="0"/>
+              <a:t>- Chiffrement des données au repos et en transit</a:t>
+            </a:r>
           </a:p>
           <a:p>
             <a:pPr marL="0" indent="0">
@@ -3864,17 +3901,33 @@
               <a:buNone/>
             </a:pPr>
             <a:r>
-              <a:rPr lang="fr-FR" sz="1050" dirty="0"/>
-              <a:t>Authentification </a:t>
-            </a:r>
-            <a:r>
-              <a:rPr lang="fr-FR" sz="1050" dirty="0" err="1"/>
-              <a:t>multifaacteur</a:t>
-            </a:r>
-            <a:r>
-              <a:rPr lang="fr-FR" sz="1050" dirty="0"/>
-              <a:t> pour limiter les accès / Firewall applicatif et filtrage réseau / Chiffrement des données au repos et en transit</a:t>
-            </a:r>
+              <a:rPr lang="fr-FR" sz="1200" dirty="0"/>
+              <a:t>- Isoler immédiatement les appareils suspects </a:t>
+            </a:r>
+          </a:p>
+          <a:p>
+            <a:pPr marL="0" indent="0">
+              <a:buNone/>
+            </a:pPr>
+            <a:r>
+              <a:rPr lang="fr-FR" sz="1200" dirty="0"/>
+              <a:t>- Communiquer sur l'attaque et l'impact  </a:t>
+            </a:r>
+          </a:p>
+          <a:p>
+            <a:pPr marL="0" indent="0">
+              <a:buNone/>
+            </a:pPr>
+            <a:r>
+              <a:rPr lang="fr-FR" sz="1200" dirty="0"/>
+              <a:t>- Isoler les appareils infectés</a:t>
+            </a:r>
+          </a:p>
+          <a:p>
+            <a:pPr marL="0" indent="0">
+              <a:buNone/>
+            </a:pPr>
+            <a:endParaRPr lang="fr-FR" sz="1050" dirty="0"/>
           </a:p>
           <a:p>
             <a:pPr marL="0" indent="0">

--- a/TP6_Exploitation_faille_0day_Lilian_Ander.pptx
+++ b/TP6_Exploitation_faille_0day_Lilian_Ander.pptx
@@ -4,6 +4,9 @@
   <p:sldMasterIdLst>
     <p:sldMasterId id="2147483648" r:id="rId1"/>
   </p:sldMasterIdLst>
+  <p:notesMasterIdLst>
+    <p:notesMasterId r:id="rId5"/>
+  </p:notesMasterIdLst>
   <p:sldIdLst>
     <p:sldId id="256" r:id="rId2"/>
     <p:sldId id="257" r:id="rId3"/>
@@ -114,6 +117,355 @@
 </p:presentation>
 </file>
 
+<file path=ppt/notesMasters/notesMaster1.xml><?xml version="1.0" encoding="utf-8"?>
+<p:notesMaster xmlns:a="http://schemas.openxmlformats.org/drawingml/2006/main" xmlns:r="http://schemas.openxmlformats.org/officeDocument/2006/relationships" xmlns:p="http://schemas.openxmlformats.org/presentationml/2006/main">
+  <p:cSld>
+    <p:bg>
+      <p:bgRef idx="1001">
+        <a:schemeClr val="bg1"/>
+      </p:bgRef>
+    </p:bg>
+    <p:spTree>
+      <p:nvGrpSpPr>
+        <p:cNvPr id="1" name=""/>
+        <p:cNvGrpSpPr/>
+        <p:nvPr/>
+      </p:nvGrpSpPr>
+      <p:grpSpPr>
+        <a:xfrm>
+          <a:off x="0" y="0"/>
+          <a:ext cx="0" cy="0"/>
+          <a:chOff x="0" y="0"/>
+          <a:chExt cx="0" cy="0"/>
+        </a:xfrm>
+      </p:grpSpPr>
+      <p:sp>
+        <p:nvSpPr>
+          <p:cNvPr id="2" name="Espace réservé de l'en-tête 1"/>
+          <p:cNvSpPr>
+            <a:spLocks noGrp="1"/>
+          </p:cNvSpPr>
+          <p:nvPr>
+            <p:ph type="hdr" sz="quarter"/>
+          </p:nvPr>
+        </p:nvSpPr>
+        <p:spPr>
+          <a:xfrm>
+            <a:off x="0" y="0"/>
+            <a:ext cx="2971800" cy="458788"/>
+          </a:xfrm>
+          <a:prstGeom prst="rect">
+            <a:avLst/>
+          </a:prstGeom>
+        </p:spPr>
+        <p:txBody>
+          <a:bodyPr vert="horz" lIns="91440" tIns="45720" rIns="91440" bIns="45720" rtlCol="0"/>
+          <a:lstStyle>
+            <a:lvl1pPr algn="l">
+              <a:defRPr sz="1200"/>
+            </a:lvl1pPr>
+          </a:lstStyle>
+          <a:p>
+            <a:endParaRPr lang="fr-FR"/>
+          </a:p>
+        </p:txBody>
+      </p:sp>
+      <p:sp>
+        <p:nvSpPr>
+          <p:cNvPr id="3" name="Espace réservé de la date 2"/>
+          <p:cNvSpPr>
+            <a:spLocks noGrp="1"/>
+          </p:cNvSpPr>
+          <p:nvPr>
+            <p:ph type="dt" idx="1"/>
+          </p:nvPr>
+        </p:nvSpPr>
+        <p:spPr>
+          <a:xfrm>
+            <a:off x="3884613" y="0"/>
+            <a:ext cx="2971800" cy="458788"/>
+          </a:xfrm>
+          <a:prstGeom prst="rect">
+            <a:avLst/>
+          </a:prstGeom>
+        </p:spPr>
+        <p:txBody>
+          <a:bodyPr vert="horz" lIns="91440" tIns="45720" rIns="91440" bIns="45720" rtlCol="0"/>
+          <a:lstStyle>
+            <a:lvl1pPr algn="r">
+              <a:defRPr sz="1200"/>
+            </a:lvl1pPr>
+          </a:lstStyle>
+          <a:p>
+            <a:fld id="{A3AD1527-66CD-9E4E-9A4A-E615F4AE3ADF}" type="datetimeFigureOut">
+              <a:rPr lang="fr-FR" smtClean="0"/>
+              <a:t>08/10/2025</a:t>
+            </a:fld>
+            <a:endParaRPr lang="fr-FR"/>
+          </a:p>
+        </p:txBody>
+      </p:sp>
+      <p:sp>
+        <p:nvSpPr>
+          <p:cNvPr id="4" name="Espace réservé de l'image des diapositives 3"/>
+          <p:cNvSpPr>
+            <a:spLocks noGrp="1" noRot="1" noChangeAspect="1"/>
+          </p:cNvSpPr>
+          <p:nvPr>
+            <p:ph type="sldImg" idx="2"/>
+          </p:nvPr>
+        </p:nvSpPr>
+        <p:spPr>
+          <a:xfrm>
+            <a:off x="685800" y="1143000"/>
+            <a:ext cx="5486400" cy="3086100"/>
+          </a:xfrm>
+          <a:prstGeom prst="rect">
+            <a:avLst/>
+          </a:prstGeom>
+          <a:noFill/>
+          <a:ln w="12700">
+            <a:solidFill>
+              <a:prstClr val="black"/>
+            </a:solidFill>
+          </a:ln>
+        </p:spPr>
+        <p:txBody>
+          <a:bodyPr vert="horz" lIns="91440" tIns="45720" rIns="91440" bIns="45720" rtlCol="0" anchor="ctr"/>
+          <a:lstStyle/>
+          <a:p>
+            <a:endParaRPr lang="fr-FR"/>
+          </a:p>
+        </p:txBody>
+      </p:sp>
+      <p:sp>
+        <p:nvSpPr>
+          <p:cNvPr id="5" name="Espace réservé des notes 4"/>
+          <p:cNvSpPr>
+            <a:spLocks noGrp="1"/>
+          </p:cNvSpPr>
+          <p:nvPr>
+            <p:ph type="body" sz="quarter" idx="3"/>
+          </p:nvPr>
+        </p:nvSpPr>
+        <p:spPr>
+          <a:xfrm>
+            <a:off x="685800" y="4400550"/>
+            <a:ext cx="5486400" cy="3600450"/>
+          </a:xfrm>
+          <a:prstGeom prst="rect">
+            <a:avLst/>
+          </a:prstGeom>
+        </p:spPr>
+        <p:txBody>
+          <a:bodyPr vert="horz" lIns="91440" tIns="45720" rIns="91440" bIns="45720" rtlCol="0"/>
+          <a:lstStyle/>
+          <a:p>
+            <a:pPr lvl="0"/>
+            <a:r>
+              <a:rPr lang="fr-FR"/>
+              <a:t>Cliquez pour modifier les styles du texte du masque</a:t>
+            </a:r>
+          </a:p>
+          <a:p>
+            <a:pPr lvl="1"/>
+            <a:r>
+              <a:rPr lang="fr-FR"/>
+              <a:t>Deuxième niveau</a:t>
+            </a:r>
+          </a:p>
+          <a:p>
+            <a:pPr lvl="2"/>
+            <a:r>
+              <a:rPr lang="fr-FR"/>
+              <a:t>Troisième niveau</a:t>
+            </a:r>
+          </a:p>
+          <a:p>
+            <a:pPr lvl="3"/>
+            <a:r>
+              <a:rPr lang="fr-FR"/>
+              <a:t>Quatrième niveau</a:t>
+            </a:r>
+          </a:p>
+          <a:p>
+            <a:pPr lvl="4"/>
+            <a:r>
+              <a:rPr lang="fr-FR"/>
+              <a:t>Cinquième niveau</a:t>
+            </a:r>
+          </a:p>
+        </p:txBody>
+      </p:sp>
+      <p:sp>
+        <p:nvSpPr>
+          <p:cNvPr id="6" name="Espace réservé du pied de page 5"/>
+          <p:cNvSpPr>
+            <a:spLocks noGrp="1"/>
+          </p:cNvSpPr>
+          <p:nvPr>
+            <p:ph type="ftr" sz="quarter" idx="4"/>
+          </p:nvPr>
+        </p:nvSpPr>
+        <p:spPr>
+          <a:xfrm>
+            <a:off x="0" y="8685213"/>
+            <a:ext cx="2971800" cy="458787"/>
+          </a:xfrm>
+          <a:prstGeom prst="rect">
+            <a:avLst/>
+          </a:prstGeom>
+        </p:spPr>
+        <p:txBody>
+          <a:bodyPr vert="horz" lIns="91440" tIns="45720" rIns="91440" bIns="45720" rtlCol="0" anchor="b"/>
+          <a:lstStyle>
+            <a:lvl1pPr algn="l">
+              <a:defRPr sz="1200"/>
+            </a:lvl1pPr>
+          </a:lstStyle>
+          <a:p>
+            <a:endParaRPr lang="fr-FR"/>
+          </a:p>
+        </p:txBody>
+      </p:sp>
+      <p:sp>
+        <p:nvSpPr>
+          <p:cNvPr id="7" name="Espace réservé du numéro de diapositive 6"/>
+          <p:cNvSpPr>
+            <a:spLocks noGrp="1"/>
+          </p:cNvSpPr>
+          <p:nvPr>
+            <p:ph type="sldNum" sz="quarter" idx="5"/>
+          </p:nvPr>
+        </p:nvSpPr>
+        <p:spPr>
+          <a:xfrm>
+            <a:off x="3884613" y="8685213"/>
+            <a:ext cx="2971800" cy="458787"/>
+          </a:xfrm>
+          <a:prstGeom prst="rect">
+            <a:avLst/>
+          </a:prstGeom>
+        </p:spPr>
+        <p:txBody>
+          <a:bodyPr vert="horz" lIns="91440" tIns="45720" rIns="91440" bIns="45720" rtlCol="0" anchor="b"/>
+          <a:lstStyle>
+            <a:lvl1pPr algn="r">
+              <a:defRPr sz="1200"/>
+            </a:lvl1pPr>
+          </a:lstStyle>
+          <a:p>
+            <a:fld id="{0DDA55F9-2E97-7241-9846-EC9802C82F5B}" type="slidenum">
+              <a:rPr lang="fr-FR" smtClean="0"/>
+              <a:t>‹N°›</a:t>
+            </a:fld>
+            <a:endParaRPr lang="fr-FR"/>
+          </a:p>
+        </p:txBody>
+      </p:sp>
+    </p:spTree>
+    <p:extLst>
+      <p:ext uri="{BB962C8B-B14F-4D97-AF65-F5344CB8AC3E}">
+        <p14:creationId xmlns:p14="http://schemas.microsoft.com/office/powerpoint/2010/main" val="3523067977"/>
+      </p:ext>
+    </p:extLst>
+  </p:cSld>
+  <p:clrMap bg1="lt1" tx1="dk1" bg2="lt2" tx2="dk2" accent1="accent1" accent2="accent2" accent3="accent3" accent4="accent4" accent5="accent5" accent6="accent6" hlink="hlink" folHlink="folHlink"/>
+  <p:notesStyle>
+    <a:lvl1pPr marL="0" algn="l" defTabSz="914400" rtl="0" eaLnBrk="1" latinLnBrk="0" hangingPunct="1">
+      <a:defRPr sz="1200" kern="1200">
+        <a:solidFill>
+          <a:schemeClr val="tx1"/>
+        </a:solidFill>
+        <a:latin typeface="+mn-lt"/>
+        <a:ea typeface="+mn-ea"/>
+        <a:cs typeface="+mn-cs"/>
+      </a:defRPr>
+    </a:lvl1pPr>
+    <a:lvl2pPr marL="457200" algn="l" defTabSz="914400" rtl="0" eaLnBrk="1" latinLnBrk="0" hangingPunct="1">
+      <a:defRPr sz="1200" kern="1200">
+        <a:solidFill>
+          <a:schemeClr val="tx1"/>
+        </a:solidFill>
+        <a:latin typeface="+mn-lt"/>
+        <a:ea typeface="+mn-ea"/>
+        <a:cs typeface="+mn-cs"/>
+      </a:defRPr>
+    </a:lvl2pPr>
+    <a:lvl3pPr marL="914400" algn="l" defTabSz="914400" rtl="0" eaLnBrk="1" latinLnBrk="0" hangingPunct="1">
+      <a:defRPr sz="1200" kern="1200">
+        <a:solidFill>
+          <a:schemeClr val="tx1"/>
+        </a:solidFill>
+        <a:latin typeface="+mn-lt"/>
+        <a:ea typeface="+mn-ea"/>
+        <a:cs typeface="+mn-cs"/>
+      </a:defRPr>
+    </a:lvl3pPr>
+    <a:lvl4pPr marL="1371600" algn="l" defTabSz="914400" rtl="0" eaLnBrk="1" latinLnBrk="0" hangingPunct="1">
+      <a:defRPr sz="1200" kern="1200">
+        <a:solidFill>
+          <a:schemeClr val="tx1"/>
+        </a:solidFill>
+        <a:latin typeface="+mn-lt"/>
+        <a:ea typeface="+mn-ea"/>
+        <a:cs typeface="+mn-cs"/>
+      </a:defRPr>
+    </a:lvl4pPr>
+    <a:lvl5pPr marL="1828800" algn="l" defTabSz="914400" rtl="0" eaLnBrk="1" latinLnBrk="0" hangingPunct="1">
+      <a:defRPr sz="1200" kern="1200">
+        <a:solidFill>
+          <a:schemeClr val="tx1"/>
+        </a:solidFill>
+        <a:latin typeface="+mn-lt"/>
+        <a:ea typeface="+mn-ea"/>
+        <a:cs typeface="+mn-cs"/>
+      </a:defRPr>
+    </a:lvl5pPr>
+    <a:lvl6pPr marL="2286000" algn="l" defTabSz="914400" rtl="0" eaLnBrk="1" latinLnBrk="0" hangingPunct="1">
+      <a:defRPr sz="1200" kern="1200">
+        <a:solidFill>
+          <a:schemeClr val="tx1"/>
+        </a:solidFill>
+        <a:latin typeface="+mn-lt"/>
+        <a:ea typeface="+mn-ea"/>
+        <a:cs typeface="+mn-cs"/>
+      </a:defRPr>
+    </a:lvl6pPr>
+    <a:lvl7pPr marL="2743200" algn="l" defTabSz="914400" rtl="0" eaLnBrk="1" latinLnBrk="0" hangingPunct="1">
+      <a:defRPr sz="1200" kern="1200">
+        <a:solidFill>
+          <a:schemeClr val="tx1"/>
+        </a:solidFill>
+        <a:latin typeface="+mn-lt"/>
+        <a:ea typeface="+mn-ea"/>
+        <a:cs typeface="+mn-cs"/>
+      </a:defRPr>
+    </a:lvl7pPr>
+    <a:lvl8pPr marL="3200400" algn="l" defTabSz="914400" rtl="0" eaLnBrk="1" latinLnBrk="0" hangingPunct="1">
+      <a:defRPr sz="1200" kern="1200">
+        <a:solidFill>
+          <a:schemeClr val="tx1"/>
+        </a:solidFill>
+        <a:latin typeface="+mn-lt"/>
+        <a:ea typeface="+mn-ea"/>
+        <a:cs typeface="+mn-cs"/>
+      </a:defRPr>
+    </a:lvl8pPr>
+    <a:lvl9pPr marL="3657600" algn="l" defTabSz="914400" rtl="0" eaLnBrk="1" latinLnBrk="0" hangingPunct="1">
+      <a:defRPr sz="1200" kern="1200">
+        <a:solidFill>
+          <a:schemeClr val="tx1"/>
+        </a:solidFill>
+        <a:latin typeface="+mn-lt"/>
+        <a:ea typeface="+mn-ea"/>
+        <a:cs typeface="+mn-cs"/>
+      </a:defRPr>
+    </a:lvl9pPr>
+  </p:notesStyle>
+</p:notesMaster>
+</file>
+
 <file path=ppt/slideLayouts/slideLayout1.xml><?xml version="1.0" encoding="utf-8"?>
 <p:sldLayout xmlns:a="http://schemas.openxmlformats.org/drawingml/2006/main" xmlns:r="http://schemas.openxmlformats.org/officeDocument/2006/relationships" xmlns:p="http://schemas.openxmlformats.org/presentationml/2006/main" type="title" preserve="1">
   <p:cSld name="Diapositive de titre">
@@ -259,7 +611,7 @@
           <a:bodyPr/>
           <a:lstStyle/>
           <a:p>
-            <a:fld id="{74E1E0F1-822F-F04A-BDF4-578A088DEB18}" type="datetimeFigureOut">
+            <a:fld id="{C5B6D08A-29ED-0F40-BE4B-112543CE024C}" type="datetime1">
               <a:rPr lang="fr-FR" smtClean="0"/>
               <a:t>08/10/2025</a:t>
             </a:fld>
@@ -288,7 +640,10 @@
           <a:bodyPr/>
           <a:lstStyle/>
           <a:p>
-            <a:endParaRPr lang="fr-FR"/>
+            <a:r>
+              <a:rPr lang="fr-FR"/>
+              <a:t>PICIURA Ander - MIRABEL Lilian</a:t>
+            </a:r>
           </a:p>
         </p:txBody>
       </p:sp>
@@ -457,7 +812,7 @@
           <a:bodyPr/>
           <a:lstStyle/>
           <a:p>
-            <a:fld id="{74E1E0F1-822F-F04A-BDF4-578A088DEB18}" type="datetimeFigureOut">
+            <a:fld id="{77A72BC1-1874-8D4D-8837-B8DB4BBB9254}" type="datetime1">
               <a:rPr lang="fr-FR" smtClean="0"/>
               <a:t>08/10/2025</a:t>
             </a:fld>
@@ -486,7 +841,10 @@
           <a:bodyPr/>
           <a:lstStyle/>
           <a:p>
-            <a:endParaRPr lang="fr-FR"/>
+            <a:r>
+              <a:rPr lang="fr-FR"/>
+              <a:t>PICIURA Ander - MIRABEL Lilian</a:t>
+            </a:r>
           </a:p>
         </p:txBody>
       </p:sp>
@@ -665,7 +1023,7 @@
           <a:bodyPr/>
           <a:lstStyle/>
           <a:p>
-            <a:fld id="{74E1E0F1-822F-F04A-BDF4-578A088DEB18}" type="datetimeFigureOut">
+            <a:fld id="{327F1321-2D4D-884C-861E-2CE738DFEB12}" type="datetime1">
               <a:rPr lang="fr-FR" smtClean="0"/>
               <a:t>08/10/2025</a:t>
             </a:fld>
@@ -694,7 +1052,10 @@
           <a:bodyPr/>
           <a:lstStyle/>
           <a:p>
-            <a:endParaRPr lang="fr-FR"/>
+            <a:r>
+              <a:rPr lang="fr-FR"/>
+              <a:t>PICIURA Ander - MIRABEL Lilian</a:t>
+            </a:r>
           </a:p>
         </p:txBody>
       </p:sp>
@@ -863,7 +1224,7 @@
           <a:bodyPr/>
           <a:lstStyle/>
           <a:p>
-            <a:fld id="{74E1E0F1-822F-F04A-BDF4-578A088DEB18}" type="datetimeFigureOut">
+            <a:fld id="{4F54C394-6D39-F94B-A864-4F5C2BA51027}" type="datetime1">
               <a:rPr lang="fr-FR" smtClean="0"/>
               <a:t>08/10/2025</a:t>
             </a:fld>
@@ -892,7 +1253,10 @@
           <a:bodyPr/>
           <a:lstStyle/>
           <a:p>
-            <a:endParaRPr lang="fr-FR"/>
+            <a:r>
+              <a:rPr lang="fr-FR"/>
+              <a:t>PICIURA Ander - MIRABEL Lilian</a:t>
+            </a:r>
           </a:p>
         </p:txBody>
       </p:sp>
@@ -1138,7 +1502,7 @@
           <a:bodyPr/>
           <a:lstStyle/>
           <a:p>
-            <a:fld id="{74E1E0F1-822F-F04A-BDF4-578A088DEB18}" type="datetimeFigureOut">
+            <a:fld id="{C6FA96B8-2BF0-0E49-862C-F6F635FAF71A}" type="datetime1">
               <a:rPr lang="fr-FR" smtClean="0"/>
               <a:t>08/10/2025</a:t>
             </a:fld>
@@ -1167,7 +1531,10 @@
           <a:bodyPr/>
           <a:lstStyle/>
           <a:p>
-            <a:endParaRPr lang="fr-FR"/>
+            <a:r>
+              <a:rPr lang="fr-FR"/>
+              <a:t>PICIURA Ander - MIRABEL Lilian</a:t>
+            </a:r>
           </a:p>
         </p:txBody>
       </p:sp>
@@ -1403,7 +1770,7 @@
           <a:bodyPr/>
           <a:lstStyle/>
           <a:p>
-            <a:fld id="{74E1E0F1-822F-F04A-BDF4-578A088DEB18}" type="datetimeFigureOut">
+            <a:fld id="{36F06A85-1303-2349-BB57-49EA37BA5217}" type="datetime1">
               <a:rPr lang="fr-FR" smtClean="0"/>
               <a:t>08/10/2025</a:t>
             </a:fld>
@@ -1432,7 +1799,10 @@
           <a:bodyPr/>
           <a:lstStyle/>
           <a:p>
-            <a:endParaRPr lang="fr-FR"/>
+            <a:r>
+              <a:rPr lang="fr-FR"/>
+              <a:t>PICIURA Ander - MIRABEL Lilian</a:t>
+            </a:r>
           </a:p>
         </p:txBody>
       </p:sp>
@@ -1815,7 +2185,7 @@
           <a:bodyPr/>
           <a:lstStyle/>
           <a:p>
-            <a:fld id="{74E1E0F1-822F-F04A-BDF4-578A088DEB18}" type="datetimeFigureOut">
+            <a:fld id="{DC99242F-07D9-8043-A870-6136609D36CE}" type="datetime1">
               <a:rPr lang="fr-FR" smtClean="0"/>
               <a:t>08/10/2025</a:t>
             </a:fld>
@@ -1844,7 +2214,10 @@
           <a:bodyPr/>
           <a:lstStyle/>
           <a:p>
-            <a:endParaRPr lang="fr-FR"/>
+            <a:r>
+              <a:rPr lang="fr-FR"/>
+              <a:t>PICIURA Ander - MIRABEL Lilian</a:t>
+            </a:r>
           </a:p>
         </p:txBody>
       </p:sp>
@@ -1956,7 +2329,7 @@
           <a:bodyPr/>
           <a:lstStyle/>
           <a:p>
-            <a:fld id="{74E1E0F1-822F-F04A-BDF4-578A088DEB18}" type="datetimeFigureOut">
+            <a:fld id="{B2B088BC-4391-6849-9602-11617F74056E}" type="datetime1">
               <a:rPr lang="fr-FR" smtClean="0"/>
               <a:t>08/10/2025</a:t>
             </a:fld>
@@ -1985,7 +2358,10 @@
           <a:bodyPr/>
           <a:lstStyle/>
           <a:p>
-            <a:endParaRPr lang="fr-FR"/>
+            <a:r>
+              <a:rPr lang="fr-FR"/>
+              <a:t>PICIURA Ander - MIRABEL Lilian</a:t>
+            </a:r>
           </a:p>
         </p:txBody>
       </p:sp>
@@ -2069,7 +2445,7 @@
           <a:bodyPr/>
           <a:lstStyle/>
           <a:p>
-            <a:fld id="{74E1E0F1-822F-F04A-BDF4-578A088DEB18}" type="datetimeFigureOut">
+            <a:fld id="{A5CB5F1D-0359-924A-B38E-06A431E7B969}" type="datetime1">
               <a:rPr lang="fr-FR" smtClean="0"/>
               <a:t>08/10/2025</a:t>
             </a:fld>
@@ -2098,7 +2474,10 @@
           <a:bodyPr/>
           <a:lstStyle/>
           <a:p>
-            <a:endParaRPr lang="fr-FR"/>
+            <a:r>
+              <a:rPr lang="fr-FR"/>
+              <a:t>PICIURA Ander - MIRABEL Lilian</a:t>
+            </a:r>
           </a:p>
         </p:txBody>
       </p:sp>
@@ -2380,7 +2759,7 @@
           <a:bodyPr/>
           <a:lstStyle/>
           <a:p>
-            <a:fld id="{74E1E0F1-822F-F04A-BDF4-578A088DEB18}" type="datetimeFigureOut">
+            <a:fld id="{DE038A17-4958-1340-99B5-05FAB9EDB7C8}" type="datetime1">
               <a:rPr lang="fr-FR" smtClean="0"/>
               <a:t>08/10/2025</a:t>
             </a:fld>
@@ -2409,7 +2788,10 @@
           <a:bodyPr/>
           <a:lstStyle/>
           <a:p>
-            <a:endParaRPr lang="fr-FR"/>
+            <a:r>
+              <a:rPr lang="fr-FR"/>
+              <a:t>PICIURA Ander - MIRABEL Lilian</a:t>
+            </a:r>
           </a:p>
         </p:txBody>
       </p:sp>
@@ -2668,7 +3050,7 @@
           <a:bodyPr/>
           <a:lstStyle/>
           <a:p>
-            <a:fld id="{74E1E0F1-822F-F04A-BDF4-578A088DEB18}" type="datetimeFigureOut">
+            <a:fld id="{5835D56A-66CA-444D-9833-F60B71DADDCE}" type="datetime1">
               <a:rPr lang="fr-FR" smtClean="0"/>
               <a:t>08/10/2025</a:t>
             </a:fld>
@@ -2697,7 +3079,10 @@
           <a:bodyPr/>
           <a:lstStyle/>
           <a:p>
-            <a:endParaRPr lang="fr-FR"/>
+            <a:r>
+              <a:rPr lang="fr-FR"/>
+              <a:t>PICIURA Ander - MIRABEL Lilian</a:t>
+            </a:r>
           </a:p>
         </p:txBody>
       </p:sp>
@@ -2909,7 +3294,7 @@
             </a:lvl1pPr>
           </a:lstStyle>
           <a:p>
-            <a:fld id="{74E1E0F1-822F-F04A-BDF4-578A088DEB18}" type="datetimeFigureOut">
+            <a:fld id="{BAC4FD2B-80F8-6343-B239-BF7EC7832045}" type="datetime1">
               <a:rPr lang="fr-FR" smtClean="0"/>
               <a:t>08/10/2025</a:t>
             </a:fld>
@@ -2956,7 +3341,10 @@
             </a:lvl1pPr>
           </a:lstStyle>
           <a:p>
-            <a:endParaRPr lang="fr-FR"/>
+            <a:r>
+              <a:rPr lang="fr-FR"/>
+              <a:t>PICIURA Ander - MIRABEL Lilian</a:t>
+            </a:r>
           </a:p>
         </p:txBody>
       </p:sp>
@@ -3028,6 +3416,7 @@
     <p:sldLayoutId id="2147483658" r:id="rId10"/>
     <p:sldLayoutId id="2147483659" r:id="rId11"/>
   </p:sldLayoutIdLst>
+  <p:hf hdr="0" dt="0"/>
   <p:txStyles>
     <p:titleStyle>
       <a:lvl1pPr algn="l" defTabSz="914400" rtl="0" eaLnBrk="1" latinLnBrk="0" hangingPunct="1">
@@ -3471,8 +3860,8 @@
         </p:nvSpPr>
         <p:spPr>
           <a:xfrm>
-            <a:off x="3707428" y="6169691"/>
-            <a:ext cx="4777142" cy="369332"/>
+            <a:off x="3678061" y="5816841"/>
+            <a:ext cx="4835876" cy="369332"/>
           </a:xfrm>
           <a:prstGeom prst="rect">
             <a:avLst/>
@@ -3488,8 +3877,65 @@
             <a:pPr algn="ctr"/>
             <a:r>
               <a:rPr lang="fr-FR" dirty="0"/>
-              <a:t>Cette faille appartient à la catégorie technique</a:t>
-            </a:r>
+              <a:t>Cette faille appartient à la catégorie technique.</a:t>
+            </a:r>
+          </a:p>
+        </p:txBody>
+      </p:sp>
+      <p:sp>
+        <p:nvSpPr>
+          <p:cNvPr id="3" name="Espace réservé du pied de page 2">
+            <a:extLst>
+              <a:ext uri="{FF2B5EF4-FFF2-40B4-BE49-F238E27FC236}">
+                <a16:creationId xmlns:a16="http://schemas.microsoft.com/office/drawing/2014/main" id="{33C58524-2B16-E108-8C75-D058E4A0501C}"/>
+              </a:ext>
+            </a:extLst>
+          </p:cNvPr>
+          <p:cNvSpPr>
+            <a:spLocks noGrp="1"/>
+          </p:cNvSpPr>
+          <p:nvPr>
+            <p:ph type="ftr" sz="quarter" idx="11"/>
+          </p:nvPr>
+        </p:nvSpPr>
+        <p:spPr/>
+        <p:txBody>
+          <a:bodyPr/>
+          <a:lstStyle/>
+          <a:p>
+            <a:r>
+              <a:rPr lang="fr-FR"/>
+              <a:t>PICIURA Ander - MIRABEL Lilian</a:t>
+            </a:r>
+          </a:p>
+        </p:txBody>
+      </p:sp>
+      <p:sp>
+        <p:nvSpPr>
+          <p:cNvPr id="7" name="Espace réservé du numéro de diapositive 6">
+            <a:extLst>
+              <a:ext uri="{FF2B5EF4-FFF2-40B4-BE49-F238E27FC236}">
+                <a16:creationId xmlns:a16="http://schemas.microsoft.com/office/drawing/2014/main" id="{B15BA5A3-8BFE-5283-8FC7-9E2212EC48B7}"/>
+              </a:ext>
+            </a:extLst>
+          </p:cNvPr>
+          <p:cNvSpPr>
+            <a:spLocks noGrp="1"/>
+          </p:cNvSpPr>
+          <p:nvPr>
+            <p:ph type="sldNum" sz="quarter" idx="12"/>
+          </p:nvPr>
+        </p:nvSpPr>
+        <p:spPr/>
+        <p:txBody>
+          <a:bodyPr/>
+          <a:lstStyle/>
+          <a:p>
+            <a:fld id="{EF144E42-BC24-D442-AFF0-55EAB46336FB}" type="slidenum">
+              <a:rPr lang="fr-FR" smtClean="0"/>
+              <a:t>1</a:t>
+            </a:fld>
+            <a:endParaRPr lang="fr-FR"/>
           </a:p>
         </p:txBody>
       </p:sp>
@@ -3581,7 +4027,7 @@
         </p:spPr>
         <p:txBody>
           <a:bodyPr>
-            <a:normAutofit/>
+            <a:normAutofit lnSpcReduction="10000"/>
           </a:bodyPr>
           <a:lstStyle/>
           <a:p>
@@ -3614,7 +4060,7 @@
               <a:buNone/>
             </a:pPr>
             <a:r>
-              <a:rPr lang="fr-FR" sz="1050" dirty="0"/>
+              <a:rPr lang="fr-FR" sz="1200" dirty="0"/>
               <a:t>Pertes économiques liées à la fuite d’informations stratégiques /  Achat ou remplacement de matériel compromis / Coûts élevés d’investigation et de sécurisation des systèmes</a:t>
             </a:r>
           </a:p>
@@ -3639,7 +4085,11 @@
             </a:pPr>
             <a:r>
               <a:rPr lang="fr-FR" sz="1050" dirty="0"/>
-              <a:t>Interruption d’activité en cas de compromission d’appareils essentiels /  Fuite ou perte de données sensibles / Perturbation du fonctionnement</a:t>
+              <a:t>Inte</a:t>
+            </a:r>
+            <a:r>
+              <a:rPr lang="fr-FR" sz="1200" dirty="0"/>
+              <a:t>rruption d’activité en cas de compromission d’appareils essentiels /  Fuite ou perte de données sensibles / Perturbation du fonctionnement</a:t>
             </a:r>
           </a:p>
           <a:p>
@@ -3663,10 +4113,9 @@
               <a:buNone/>
             </a:pPr>
             <a:r>
-              <a:rPr lang="fr-FR" sz="1050" dirty="0"/>
+              <a:rPr lang="fr-FR" sz="1200" dirty="0"/>
               <a:t>Obligation de notifier les autorités et les personnes concernées /  Enquêtes pour non-respect du RGPD / Poursuites pour atteinte à la vie privée ou espionnage illégal</a:t>
             </a:r>
-            <a:endParaRPr lang="fr-FR" sz="2400" dirty="0"/>
           </a:p>
           <a:p>
             <a:pPr marL="0" indent="0">
@@ -3692,13 +4141,12 @@
               <a:buNone/>
             </a:pPr>
             <a:r>
-              <a:rPr lang="fr-FR" sz="1050" dirty="0"/>
+              <a:rPr lang="fr-FR" sz="1200" dirty="0"/>
               <a:t>Perte de confiance à tous les niveaux /  Atteinte à la réputation nationale ou institutionnelle</a:t>
             </a:r>
-            <a:endParaRPr lang="fr-FR" sz="2400" dirty="0"/>
-          </a:p>
-          <a:p>
-            <a:pPr marL="0" indent="0">
+          </a:p>
+          <a:p>
+            <a:pPr marL="0" indent="0" algn="ctr">
               <a:buNone/>
             </a:pPr>
             <a:endParaRPr lang="fr-FR" sz="1050" dirty="0"/>
@@ -3711,6 +4159,63 @@
               <a:rPr lang="fr-FR" sz="1600" b="1" dirty="0"/>
               <a:t>Le niveau de criticité est fort.</a:t>
             </a:r>
+          </a:p>
+        </p:txBody>
+      </p:sp>
+      <p:sp>
+        <p:nvSpPr>
+          <p:cNvPr id="4" name="Espace réservé du pied de page 3">
+            <a:extLst>
+              <a:ext uri="{FF2B5EF4-FFF2-40B4-BE49-F238E27FC236}">
+                <a16:creationId xmlns:a16="http://schemas.microsoft.com/office/drawing/2014/main" id="{203D2484-C384-6659-8C2A-8BAEA5224B0F}"/>
+              </a:ext>
+            </a:extLst>
+          </p:cNvPr>
+          <p:cNvSpPr>
+            <a:spLocks noGrp="1"/>
+          </p:cNvSpPr>
+          <p:nvPr>
+            <p:ph type="ftr" sz="quarter" idx="11"/>
+          </p:nvPr>
+        </p:nvSpPr>
+        <p:spPr/>
+        <p:txBody>
+          <a:bodyPr/>
+          <a:lstStyle/>
+          <a:p>
+            <a:r>
+              <a:rPr lang="fr-FR"/>
+              <a:t>PICIURA Ander - MIRABEL Lilian</a:t>
+            </a:r>
+          </a:p>
+        </p:txBody>
+      </p:sp>
+      <p:sp>
+        <p:nvSpPr>
+          <p:cNvPr id="5" name="Espace réservé du numéro de diapositive 4">
+            <a:extLst>
+              <a:ext uri="{FF2B5EF4-FFF2-40B4-BE49-F238E27FC236}">
+                <a16:creationId xmlns:a16="http://schemas.microsoft.com/office/drawing/2014/main" id="{0C7A20D0-87BD-2E48-052E-D8F96A9F80B0}"/>
+              </a:ext>
+            </a:extLst>
+          </p:cNvPr>
+          <p:cNvSpPr>
+            <a:spLocks noGrp="1"/>
+          </p:cNvSpPr>
+          <p:nvPr>
+            <p:ph type="sldNum" sz="quarter" idx="12"/>
+          </p:nvPr>
+        </p:nvSpPr>
+        <p:spPr/>
+        <p:txBody>
+          <a:bodyPr/>
+          <a:lstStyle/>
+          <a:p>
+            <a:fld id="{EF144E42-BC24-D442-AFF0-55EAB46336FB}" type="slidenum">
+              <a:rPr lang="fr-FR" smtClean="0"/>
+              <a:t>2</a:t>
+            </a:fld>
+            <a:endParaRPr lang="fr-FR"/>
           </a:p>
         </p:txBody>
       </p:sp>
@@ -3792,7 +4297,7 @@
         <p:spPr/>
         <p:txBody>
           <a:bodyPr>
-            <a:normAutofit lnSpcReduction="10000"/>
+            <a:normAutofit/>
           </a:bodyPr>
           <a:lstStyle/>
           <a:p>
@@ -3902,7 +4407,7 @@
             </a:pPr>
             <a:r>
               <a:rPr lang="fr-FR" sz="1200" dirty="0"/>
-              <a:t>- Isoler immédiatement les appareils suspects </a:t>
+              <a:t>- Isoler immédiatement les appareils suspects &amp; infectés</a:t>
             </a:r>
           </a:p>
           <a:p>
@@ -3913,20 +4418,6 @@
               <a:rPr lang="fr-FR" sz="1200" dirty="0"/>
               <a:t>- Communiquer sur l'attaque et l'impact  </a:t>
             </a:r>
-          </a:p>
-          <a:p>
-            <a:pPr marL="0" indent="0">
-              <a:buNone/>
-            </a:pPr>
-            <a:r>
-              <a:rPr lang="fr-FR" sz="1200" dirty="0"/>
-              <a:t>- Isoler les appareils infectés</a:t>
-            </a:r>
-          </a:p>
-          <a:p>
-            <a:pPr marL="0" indent="0">
-              <a:buNone/>
-            </a:pPr>
             <a:endParaRPr lang="fr-FR" sz="1050" dirty="0"/>
           </a:p>
           <a:p>
@@ -3940,6 +4431,63 @@
               <a:buNone/>
             </a:pPr>
             <a:endParaRPr lang="fr-FR" sz="2400" dirty="0"/>
+          </a:p>
+        </p:txBody>
+      </p:sp>
+      <p:sp>
+        <p:nvSpPr>
+          <p:cNvPr id="4" name="Espace réservé du pied de page 3">
+            <a:extLst>
+              <a:ext uri="{FF2B5EF4-FFF2-40B4-BE49-F238E27FC236}">
+                <a16:creationId xmlns:a16="http://schemas.microsoft.com/office/drawing/2014/main" id="{4923B818-5F9F-6C4B-67AD-F3BA60E0B35E}"/>
+              </a:ext>
+            </a:extLst>
+          </p:cNvPr>
+          <p:cNvSpPr>
+            <a:spLocks noGrp="1"/>
+          </p:cNvSpPr>
+          <p:nvPr>
+            <p:ph type="ftr" sz="quarter" idx="11"/>
+          </p:nvPr>
+        </p:nvSpPr>
+        <p:spPr/>
+        <p:txBody>
+          <a:bodyPr/>
+          <a:lstStyle/>
+          <a:p>
+            <a:r>
+              <a:rPr lang="fr-FR"/>
+              <a:t>PICIURA Ander - MIRABEL Lilian</a:t>
+            </a:r>
+          </a:p>
+        </p:txBody>
+      </p:sp>
+      <p:sp>
+        <p:nvSpPr>
+          <p:cNvPr id="5" name="Espace réservé du numéro de diapositive 4">
+            <a:extLst>
+              <a:ext uri="{FF2B5EF4-FFF2-40B4-BE49-F238E27FC236}">
+                <a16:creationId xmlns:a16="http://schemas.microsoft.com/office/drawing/2014/main" id="{7AB7B0D7-8EC8-06A9-71B4-C52401F49669}"/>
+              </a:ext>
+            </a:extLst>
+          </p:cNvPr>
+          <p:cNvSpPr>
+            <a:spLocks noGrp="1"/>
+          </p:cNvSpPr>
+          <p:nvPr>
+            <p:ph type="sldNum" sz="quarter" idx="12"/>
+          </p:nvPr>
+        </p:nvSpPr>
+        <p:spPr/>
+        <p:txBody>
+          <a:bodyPr/>
+          <a:lstStyle/>
+          <a:p>
+            <a:fld id="{EF144E42-BC24-D442-AFF0-55EAB46336FB}" type="slidenum">
+              <a:rPr lang="fr-FR" smtClean="0"/>
+              <a:t>3</a:t>
+            </a:fld>
+            <a:endParaRPr lang="fr-FR"/>
           </a:p>
         </p:txBody>
       </p:sp>
@@ -4269,4 +4817,319 @@
     </a:ext>
   </a:extLst>
 </a:theme>
+</file>
+
+<file path=ppt/theme/theme2.xml><?xml version="1.0" encoding="utf-8"?>
+<a:theme xmlns:a="http://schemas.openxmlformats.org/drawingml/2006/main" name="Thème Office">
+  <a:themeElements>
+    <a:clrScheme name="Office">
+      <a:dk1>
+        <a:sysClr val="windowText" lastClr="000000"/>
+      </a:dk1>
+      <a:lt1>
+        <a:sysClr val="window" lastClr="FFFFFF"/>
+      </a:lt1>
+      <a:dk2>
+        <a:srgbClr val="0E2841"/>
+      </a:dk2>
+      <a:lt2>
+        <a:srgbClr val="E8E8E8"/>
+      </a:lt2>
+      <a:accent1>
+        <a:srgbClr val="156082"/>
+      </a:accent1>
+      <a:accent2>
+        <a:srgbClr val="E97132"/>
+      </a:accent2>
+      <a:accent3>
+        <a:srgbClr val="196B24"/>
+      </a:accent3>
+      <a:accent4>
+        <a:srgbClr val="0F9ED5"/>
+      </a:accent4>
+      <a:accent5>
+        <a:srgbClr val="A02B93"/>
+      </a:accent5>
+      <a:accent6>
+        <a:srgbClr val="4EA72E"/>
+      </a:accent6>
+      <a:hlink>
+        <a:srgbClr val="467886"/>
+      </a:hlink>
+      <a:folHlink>
+        <a:srgbClr val="96607D"/>
+      </a:folHlink>
+    </a:clrScheme>
+    <a:fontScheme name="Office">
+      <a:majorFont>
+        <a:latin typeface="Aptos Display" panose="02110004020202020204"/>
+        <a:ea typeface=""/>
+        <a:cs typeface=""/>
+        <a:font script="Jpan" typeface="游ゴシック Light"/>
+        <a:font script="Hang" typeface="맑은 고딕"/>
+        <a:font script="Hans" typeface="等线 Light"/>
+        <a:font script="Hant" typeface="新細明體"/>
+        <a:font script="Arab" typeface="Times New Roman"/>
+        <a:font script="Hebr" typeface="Times New Roman"/>
+        <a:font script="Thai" typeface="Angsana New"/>
+        <a:font script="Ethi" typeface="Nyala"/>
+        <a:font script="Beng" typeface="Vrinda"/>
+        <a:font script="Gujr" typeface="Shruti"/>
+        <a:font script="Khmr" typeface="MoolBoran"/>
+        <a:font script="Knda" typeface="Tunga"/>
+        <a:font script="Guru" typeface="Raavi"/>
+        <a:font script="Cans" typeface="Euphemia"/>
+        <a:font script="Cher" typeface="Plantagenet Cherokee"/>
+        <a:font script="Yiii" typeface="Microsoft Yi Baiti"/>
+        <a:font script="Tibt" typeface="Microsoft Himalaya"/>
+        <a:font script="Thaa" typeface="MV Boli"/>
+        <a:font script="Deva" typeface="Mangal"/>
+        <a:font script="Telu" typeface="Gautami"/>
+        <a:font script="Taml" typeface="Latha"/>
+        <a:font script="Syrc" typeface="Estrangelo Edessa"/>
+        <a:font script="Orya" typeface="Kalinga"/>
+        <a:font script="Mlym" typeface="Kartika"/>
+        <a:font script="Laoo" typeface="DokChampa"/>
+        <a:font script="Sinh" typeface="Iskoola Pota"/>
+        <a:font script="Mong" typeface="Mongolian Baiti"/>
+        <a:font script="Viet" typeface="Times New Roman"/>
+        <a:font script="Uigh" typeface="Microsoft Uighur"/>
+        <a:font script="Geor" typeface="Sylfaen"/>
+        <a:font script="Armn" typeface="Arial"/>
+        <a:font script="Bugi" typeface="Leelawadee UI"/>
+        <a:font script="Bopo" typeface="Microsoft JhengHei"/>
+        <a:font script="Java" typeface="Javanese Text"/>
+        <a:font script="Lisu" typeface="Segoe UI"/>
+        <a:font script="Mymr" typeface="Myanmar Text"/>
+        <a:font script="Nkoo" typeface="Ebrima"/>
+        <a:font script="Olck" typeface="Nirmala UI"/>
+        <a:font script="Osma" typeface="Ebrima"/>
+        <a:font script="Phag" typeface="Phagspa"/>
+        <a:font script="Syrn" typeface="Estrangelo Edessa"/>
+        <a:font script="Syrj" typeface="Estrangelo Edessa"/>
+        <a:font script="Syre" typeface="Estrangelo Edessa"/>
+        <a:font script="Sora" typeface="Nirmala UI"/>
+        <a:font script="Tale" typeface="Microsoft Tai Le"/>
+        <a:font script="Talu" typeface="Microsoft New Tai Lue"/>
+        <a:font script="Tfng" typeface="Ebrima"/>
+      </a:majorFont>
+      <a:minorFont>
+        <a:latin typeface="Aptos" panose="02110004020202020204"/>
+        <a:ea typeface=""/>
+        <a:cs typeface=""/>
+        <a:font script="Jpan" typeface="游ゴシック"/>
+        <a:font script="Hang" typeface="맑은 고딕"/>
+        <a:font script="Hans" typeface="等线"/>
+        <a:font script="Hant" typeface="新細明體"/>
+        <a:font script="Arab" typeface="Arial"/>
+        <a:font script="Hebr" typeface="Arial"/>
+        <a:font script="Thai" typeface="Cordia New"/>
+        <a:font script="Ethi" typeface="Nyala"/>
+        <a:font script="Beng" typeface="Vrinda"/>
+        <a:font script="Gujr" typeface="Shruti"/>
+        <a:font script="Khmr" typeface="DaunPenh"/>
+        <a:font script="Knda" typeface="Tunga"/>
+        <a:font script="Guru" typeface="Raavi"/>
+        <a:font script="Cans" typeface="Euphemia"/>
+        <a:font script="Cher" typeface="Plantagenet Cherokee"/>
+        <a:font script="Yiii" typeface="Microsoft Yi Baiti"/>
+        <a:font script="Tibt" typeface="Microsoft Himalaya"/>
+        <a:font script="Thaa" typeface="MV Boli"/>
+        <a:font script="Deva" typeface="Mangal"/>
+        <a:font script="Telu" typeface="Gautami"/>
+        <a:font script="Taml" typeface="Latha"/>
+        <a:font script="Syrc" typeface="Estrangelo Edessa"/>
+        <a:font script="Orya" typeface="Kalinga"/>
+        <a:font script="Mlym" typeface="Kartika"/>
+        <a:font script="Laoo" typeface="DokChampa"/>
+        <a:font script="Sinh" typeface="Iskoola Pota"/>
+        <a:font script="Mong" typeface="Mongolian Baiti"/>
+        <a:font script="Viet" typeface="Arial"/>
+        <a:font script="Uigh" typeface="Microsoft Uighur"/>
+        <a:font script="Geor" typeface="Sylfaen"/>
+        <a:font script="Armn" typeface="Arial"/>
+        <a:font script="Bugi" typeface="Leelawadee UI"/>
+        <a:font script="Bopo" typeface="Microsoft JhengHei"/>
+        <a:font script="Java" typeface="Javanese Text"/>
+        <a:font script="Lisu" typeface="Segoe UI"/>
+        <a:font script="Mymr" typeface="Myanmar Text"/>
+        <a:font script="Nkoo" typeface="Ebrima"/>
+        <a:font script="Olck" typeface="Nirmala UI"/>
+        <a:font script="Osma" typeface="Ebrima"/>
+        <a:font script="Phag" typeface="Phagspa"/>
+        <a:font script="Syrn" typeface="Estrangelo Edessa"/>
+        <a:font script="Syrj" typeface="Estrangelo Edessa"/>
+        <a:font script="Syre" typeface="Estrangelo Edessa"/>
+        <a:font script="Sora" typeface="Nirmala UI"/>
+        <a:font script="Tale" typeface="Microsoft Tai Le"/>
+        <a:font script="Talu" typeface="Microsoft New Tai Lue"/>
+        <a:font script="Tfng" typeface="Ebrima"/>
+      </a:minorFont>
+    </a:fontScheme>
+    <a:fmtScheme name="Office">
+      <a:fillStyleLst>
+        <a:solidFill>
+          <a:schemeClr val="phClr"/>
+        </a:solidFill>
+        <a:gradFill rotWithShape="1">
+          <a:gsLst>
+            <a:gs pos="0">
+              <a:schemeClr val="phClr">
+                <a:lumMod val="110000"/>
+                <a:satMod val="105000"/>
+                <a:tint val="67000"/>
+              </a:schemeClr>
+            </a:gs>
+            <a:gs pos="50000">
+              <a:schemeClr val="phClr">
+                <a:lumMod val="105000"/>
+                <a:satMod val="103000"/>
+                <a:tint val="73000"/>
+              </a:schemeClr>
+            </a:gs>
+            <a:gs pos="100000">
+              <a:schemeClr val="phClr">
+                <a:lumMod val="105000"/>
+                <a:satMod val="109000"/>
+                <a:tint val="81000"/>
+              </a:schemeClr>
+            </a:gs>
+          </a:gsLst>
+          <a:lin ang="5400000" scaled="0"/>
+        </a:gradFill>
+        <a:gradFill rotWithShape="1">
+          <a:gsLst>
+            <a:gs pos="0">
+              <a:schemeClr val="phClr">
+                <a:satMod val="103000"/>
+                <a:lumMod val="102000"/>
+                <a:tint val="94000"/>
+              </a:schemeClr>
+            </a:gs>
+            <a:gs pos="50000">
+              <a:schemeClr val="phClr">
+                <a:satMod val="110000"/>
+                <a:lumMod val="100000"/>
+                <a:shade val="100000"/>
+              </a:schemeClr>
+            </a:gs>
+            <a:gs pos="100000">
+              <a:schemeClr val="phClr">
+                <a:lumMod val="99000"/>
+                <a:satMod val="120000"/>
+                <a:shade val="78000"/>
+              </a:schemeClr>
+            </a:gs>
+          </a:gsLst>
+          <a:lin ang="5400000" scaled="0"/>
+        </a:gradFill>
+      </a:fillStyleLst>
+      <a:lnStyleLst>
+        <a:ln w="12700" cap="flat" cmpd="sng" algn="ctr">
+          <a:solidFill>
+            <a:schemeClr val="phClr"/>
+          </a:solidFill>
+          <a:prstDash val="solid"/>
+          <a:miter lim="800000"/>
+        </a:ln>
+        <a:ln w="19050" cap="flat" cmpd="sng" algn="ctr">
+          <a:solidFill>
+            <a:schemeClr val="phClr"/>
+          </a:solidFill>
+          <a:prstDash val="solid"/>
+          <a:miter lim="800000"/>
+        </a:ln>
+        <a:ln w="25400" cap="flat" cmpd="sng" algn="ctr">
+          <a:solidFill>
+            <a:schemeClr val="phClr"/>
+          </a:solidFill>
+          <a:prstDash val="solid"/>
+          <a:miter lim="800000"/>
+        </a:ln>
+      </a:lnStyleLst>
+      <a:effectStyleLst>
+        <a:effectStyle>
+          <a:effectLst/>
+        </a:effectStyle>
+        <a:effectStyle>
+          <a:effectLst/>
+        </a:effectStyle>
+        <a:effectStyle>
+          <a:effectLst>
+            <a:outerShdw blurRad="57150" dist="19050" dir="5400000" algn="ctr" rotWithShape="0">
+              <a:srgbClr val="000000">
+                <a:alpha val="63000"/>
+              </a:srgbClr>
+            </a:outerShdw>
+          </a:effectLst>
+        </a:effectStyle>
+      </a:effectStyleLst>
+      <a:bgFillStyleLst>
+        <a:solidFill>
+          <a:schemeClr val="phClr"/>
+        </a:solidFill>
+        <a:solidFill>
+          <a:schemeClr val="phClr">
+            <a:tint val="95000"/>
+            <a:satMod val="170000"/>
+          </a:schemeClr>
+        </a:solidFill>
+        <a:gradFill rotWithShape="1">
+          <a:gsLst>
+            <a:gs pos="0">
+              <a:schemeClr val="phClr">
+                <a:tint val="93000"/>
+                <a:satMod val="150000"/>
+                <a:shade val="98000"/>
+                <a:lumMod val="102000"/>
+              </a:schemeClr>
+            </a:gs>
+            <a:gs pos="50000">
+              <a:schemeClr val="phClr">
+                <a:tint val="98000"/>
+                <a:satMod val="130000"/>
+                <a:shade val="90000"/>
+                <a:lumMod val="103000"/>
+              </a:schemeClr>
+            </a:gs>
+            <a:gs pos="100000">
+              <a:schemeClr val="phClr">
+                <a:shade val="63000"/>
+                <a:satMod val="120000"/>
+              </a:schemeClr>
+            </a:gs>
+          </a:gsLst>
+          <a:lin ang="5400000" scaled="0"/>
+        </a:gradFill>
+      </a:bgFillStyleLst>
+    </a:fmtScheme>
+  </a:themeElements>
+  <a:objectDefaults>
+    <a:lnDef>
+      <a:spPr/>
+      <a:bodyPr/>
+      <a:lstStyle/>
+      <a:style>
+        <a:lnRef idx="2">
+          <a:schemeClr val="accent1"/>
+        </a:lnRef>
+        <a:fillRef idx="0">
+          <a:schemeClr val="accent1"/>
+        </a:fillRef>
+        <a:effectRef idx="1">
+          <a:schemeClr val="accent1"/>
+        </a:effectRef>
+        <a:fontRef idx="minor">
+          <a:schemeClr val="tx1"/>
+        </a:fontRef>
+      </a:style>
+    </a:lnDef>
+  </a:objectDefaults>
+  <a:extraClrSchemeLst/>
+  <a:extLst>
+    <a:ext uri="{05A4C25C-085E-4340-85A3-A5531E510DB2}">
+      <thm15:themeFamily xmlns:thm15="http://schemas.microsoft.com/office/thememl/2012/main" name="Office Theme" id="{2E142A2C-CD16-42D6-873A-C26D2A0506FA}" vid="{1BDDFF52-6CD6-40A5-AB3C-68EB2F1E4D0A}"/>
+    </a:ext>
+  </a:extLst>
+</a:theme>
 </file>
--- a/TP6_Exploitation_faille_0day_Lilian_Ander.pptx
+++ b/TP6_Exploitation_faille_0day_Lilian_Ander.pptx
@@ -5,12 +5,16 @@
     <p:sldMasterId id="2147483648" r:id="rId1"/>
   </p:sldMasterIdLst>
   <p:notesMasterIdLst>
-    <p:notesMasterId r:id="rId5"/>
+    <p:notesMasterId r:id="rId9"/>
   </p:notesMasterIdLst>
   <p:sldIdLst>
     <p:sldId id="256" r:id="rId2"/>
     <p:sldId id="257" r:id="rId3"/>
     <p:sldId id="258" r:id="rId4"/>
+    <p:sldId id="259" r:id="rId5"/>
+    <p:sldId id="260" r:id="rId6"/>
+    <p:sldId id="261" r:id="rId7"/>
+    <p:sldId id="262" r:id="rId8"/>
   </p:sldIdLst>
   <p:sldSz cx="12192000" cy="6858000"/>
   <p:notesSz cx="6858000" cy="9144000"/>
@@ -4495,6 +4499,1337 @@
     <p:extLst>
       <p:ext uri="{BB962C8B-B14F-4D97-AF65-F5344CB8AC3E}">
         <p14:creationId xmlns:p14="http://schemas.microsoft.com/office/powerpoint/2010/main" val="1569222927"/>
+      </p:ext>
+    </p:extLst>
+  </p:cSld>
+  <p:clrMapOvr>
+    <a:masterClrMapping/>
+  </p:clrMapOvr>
+</p:sld>
+</file>
+
+<file path=ppt/slides/slide4.xml><?xml version="1.0" encoding="utf-8"?>
+<p:sld xmlns:a="http://schemas.openxmlformats.org/drawingml/2006/main" xmlns:r="http://schemas.openxmlformats.org/officeDocument/2006/relationships" xmlns:p="http://schemas.openxmlformats.org/presentationml/2006/main">
+  <p:cSld>
+    <p:spTree>
+      <p:nvGrpSpPr>
+        <p:cNvPr id="1" name=""/>
+        <p:cNvGrpSpPr/>
+        <p:nvPr/>
+      </p:nvGrpSpPr>
+      <p:grpSpPr>
+        <a:xfrm>
+          <a:off x="0" y="0"/>
+          <a:ext cx="0" cy="0"/>
+          <a:chOff x="0" y="0"/>
+          <a:chExt cx="0" cy="0"/>
+        </a:xfrm>
+      </p:grpSpPr>
+      <p:sp>
+        <p:nvSpPr>
+          <p:cNvPr id="2" name="Titre 1">
+            <a:extLst>
+              <a:ext uri="{FF2B5EF4-FFF2-40B4-BE49-F238E27FC236}">
+                <a16:creationId xmlns:a16="http://schemas.microsoft.com/office/drawing/2014/main" id="{9825A0F5-CD45-712F-4059-C0F0FF8B7CCA}"/>
+              </a:ext>
+            </a:extLst>
+          </p:cNvPr>
+          <p:cNvSpPr>
+            <a:spLocks noGrp="1"/>
+          </p:cNvSpPr>
+          <p:nvPr>
+            <p:ph type="title"/>
+          </p:nvPr>
+        </p:nvSpPr>
+        <p:spPr>
+          <a:xfrm>
+            <a:off x="838200" y="2766218"/>
+            <a:ext cx="10515600" cy="1325563"/>
+          </a:xfrm>
+        </p:spPr>
+        <p:txBody>
+          <a:bodyPr/>
+          <a:lstStyle/>
+          <a:p>
+            <a:pPr algn="ctr"/>
+            <a:r>
+              <a:rPr lang="fr-FR" dirty="0"/>
+              <a:t>Atelier 2</a:t>
+            </a:r>
+          </a:p>
+        </p:txBody>
+      </p:sp>
+      <p:sp>
+        <p:nvSpPr>
+          <p:cNvPr id="4" name="Espace réservé du pied de page 3">
+            <a:extLst>
+              <a:ext uri="{FF2B5EF4-FFF2-40B4-BE49-F238E27FC236}">
+                <a16:creationId xmlns:a16="http://schemas.microsoft.com/office/drawing/2014/main" id="{8C0AA5E1-3CE3-97F8-19D0-AF8F3A0EE5D4}"/>
+              </a:ext>
+            </a:extLst>
+          </p:cNvPr>
+          <p:cNvSpPr>
+            <a:spLocks noGrp="1"/>
+          </p:cNvSpPr>
+          <p:nvPr>
+            <p:ph type="ftr" sz="quarter" idx="11"/>
+          </p:nvPr>
+        </p:nvSpPr>
+        <p:spPr/>
+        <p:txBody>
+          <a:bodyPr/>
+          <a:lstStyle/>
+          <a:p>
+            <a:r>
+              <a:rPr lang="fr-FR"/>
+              <a:t>PICIURA Ander - MIRABEL Lilian</a:t>
+            </a:r>
+          </a:p>
+        </p:txBody>
+      </p:sp>
+      <p:sp>
+        <p:nvSpPr>
+          <p:cNvPr id="5" name="Espace réservé du numéro de diapositive 4">
+            <a:extLst>
+              <a:ext uri="{FF2B5EF4-FFF2-40B4-BE49-F238E27FC236}">
+                <a16:creationId xmlns:a16="http://schemas.microsoft.com/office/drawing/2014/main" id="{13901517-A0CF-44AB-B9D2-A665BB12BAAF}"/>
+              </a:ext>
+            </a:extLst>
+          </p:cNvPr>
+          <p:cNvSpPr>
+            <a:spLocks noGrp="1"/>
+          </p:cNvSpPr>
+          <p:nvPr>
+            <p:ph type="sldNum" sz="quarter" idx="12"/>
+          </p:nvPr>
+        </p:nvSpPr>
+        <p:spPr/>
+        <p:txBody>
+          <a:bodyPr/>
+          <a:lstStyle/>
+          <a:p>
+            <a:fld id="{EF144E42-BC24-D442-AFF0-55EAB46336FB}" type="slidenum">
+              <a:rPr lang="fr-FR" smtClean="0"/>
+              <a:t>4</a:t>
+            </a:fld>
+            <a:endParaRPr lang="fr-FR"/>
+          </a:p>
+        </p:txBody>
+      </p:sp>
+    </p:spTree>
+    <p:extLst>
+      <p:ext uri="{BB962C8B-B14F-4D97-AF65-F5344CB8AC3E}">
+        <p14:creationId xmlns:p14="http://schemas.microsoft.com/office/powerpoint/2010/main" val="781541889"/>
+      </p:ext>
+    </p:extLst>
+  </p:cSld>
+  <p:clrMapOvr>
+    <a:masterClrMapping/>
+  </p:clrMapOvr>
+</p:sld>
+</file>
+
+<file path=ppt/slides/slide5.xml><?xml version="1.0" encoding="utf-8"?>
+<p:sld xmlns:a="http://schemas.openxmlformats.org/drawingml/2006/main" xmlns:r="http://schemas.openxmlformats.org/officeDocument/2006/relationships" xmlns:p="http://schemas.openxmlformats.org/presentationml/2006/main">
+  <p:cSld>
+    <p:spTree>
+      <p:nvGrpSpPr>
+        <p:cNvPr id="1" name=""/>
+        <p:cNvGrpSpPr/>
+        <p:nvPr/>
+      </p:nvGrpSpPr>
+      <p:grpSpPr>
+        <a:xfrm>
+          <a:off x="0" y="0"/>
+          <a:ext cx="0" cy="0"/>
+          <a:chOff x="0" y="0"/>
+          <a:chExt cx="0" cy="0"/>
+        </a:xfrm>
+      </p:grpSpPr>
+      <p:sp>
+        <p:nvSpPr>
+          <p:cNvPr id="2" name="Titre 1">
+            <a:extLst>
+              <a:ext uri="{FF2B5EF4-FFF2-40B4-BE49-F238E27FC236}">
+                <a16:creationId xmlns:a16="http://schemas.microsoft.com/office/drawing/2014/main" id="{49A0B714-C11C-AF13-9F12-D3BCF8F9AD22}"/>
+              </a:ext>
+            </a:extLst>
+          </p:cNvPr>
+          <p:cNvSpPr>
+            <a:spLocks noGrp="1"/>
+          </p:cNvSpPr>
+          <p:nvPr>
+            <p:ph type="title"/>
+          </p:nvPr>
+        </p:nvSpPr>
+        <p:spPr>
+          <a:xfrm>
+            <a:off x="838200" y="216269"/>
+            <a:ext cx="10515600" cy="1325563"/>
+          </a:xfrm>
+        </p:spPr>
+        <p:txBody>
+          <a:bodyPr>
+            <a:normAutofit/>
+          </a:bodyPr>
+          <a:lstStyle/>
+          <a:p>
+            <a:pPr algn="ctr"/>
+            <a:r>
+              <a:rPr lang="fr-FR" sz="3600" dirty="0"/>
+              <a:t>Liste des risques majeurs classé par gravité</a:t>
+            </a:r>
+          </a:p>
+        </p:txBody>
+      </p:sp>
+      <p:sp>
+        <p:nvSpPr>
+          <p:cNvPr id="3" name="Espace réservé du contenu 2">
+            <a:extLst>
+              <a:ext uri="{FF2B5EF4-FFF2-40B4-BE49-F238E27FC236}">
+                <a16:creationId xmlns:a16="http://schemas.microsoft.com/office/drawing/2014/main" id="{84B7D059-9A98-E80F-2D9A-02B06E9FB341}"/>
+              </a:ext>
+            </a:extLst>
+          </p:cNvPr>
+          <p:cNvSpPr>
+            <a:spLocks noGrp="1"/>
+          </p:cNvSpPr>
+          <p:nvPr>
+            <p:ph idx="1"/>
+          </p:nvPr>
+        </p:nvSpPr>
+        <p:spPr>
+          <a:xfrm>
+            <a:off x="838200" y="1541832"/>
+            <a:ext cx="10515600" cy="4518284"/>
+          </a:xfrm>
+        </p:spPr>
+        <p:txBody>
+          <a:bodyPr>
+            <a:normAutofit fontScale="85000" lnSpcReduction="20000"/>
+          </a:bodyPr>
+          <a:lstStyle/>
+          <a:p>
+            <a:pPr marL="0" indent="0">
+              <a:buNone/>
+            </a:pPr>
+            <a:r>
+              <a:rPr lang="fr-FR" dirty="0"/>
+              <a:t>1. Cyberattaque (ransomware, vol de données utilisateurs).</a:t>
+            </a:r>
+          </a:p>
+          <a:p>
+            <a:pPr marL="514350" indent="-514350">
+              <a:buAutoNum type="arabicPeriod"/>
+            </a:pPr>
+            <a:endParaRPr lang="fr-FR" dirty="0"/>
+          </a:p>
+          <a:p>
+            <a:pPr marL="0" indent="0">
+              <a:buNone/>
+            </a:pPr>
+            <a:r>
+              <a:rPr lang="fr-FR" dirty="0"/>
+              <a:t>2. Indisponibilité prolongée de l’application mobile.</a:t>
+            </a:r>
+          </a:p>
+          <a:p>
+            <a:pPr marL="0" indent="0">
+              <a:buNone/>
+            </a:pPr>
+            <a:endParaRPr lang="fr-FR" dirty="0"/>
+          </a:p>
+          <a:p>
+            <a:pPr marL="0" indent="0">
+              <a:buNone/>
+            </a:pPr>
+            <a:r>
+              <a:rPr lang="fr-FR" dirty="0"/>
+              <a:t>3. Panne du cloud provider ou perte d’accès au serveur.</a:t>
+            </a:r>
+          </a:p>
+          <a:p>
+            <a:pPr marL="0" indent="0">
+              <a:buNone/>
+            </a:pPr>
+            <a:endParaRPr lang="fr-FR" dirty="0"/>
+          </a:p>
+          <a:p>
+            <a:pPr marL="0" indent="0">
+              <a:buNone/>
+            </a:pPr>
+            <a:r>
+              <a:rPr lang="fr-FR" dirty="0"/>
+              <a:t>4. Erreur humaine lors du déploiement d’une mise à jour.</a:t>
+            </a:r>
+          </a:p>
+          <a:p>
+            <a:pPr marL="0" indent="0">
+              <a:buNone/>
+            </a:pPr>
+            <a:endParaRPr lang="fr-FR" dirty="0"/>
+          </a:p>
+          <a:p>
+            <a:pPr marL="0" indent="0">
+              <a:buNone/>
+            </a:pPr>
+            <a:r>
+              <a:rPr lang="fr-FR" dirty="0"/>
+              <a:t>5. Perte de connectivité Internet dans les bureaux.</a:t>
+            </a:r>
+          </a:p>
+          <a:p>
+            <a:pPr marL="0" indent="0">
+              <a:buNone/>
+            </a:pPr>
+            <a:endParaRPr lang="fr-FR" dirty="0"/>
+          </a:p>
+          <a:p>
+            <a:pPr marL="0" indent="0">
+              <a:buNone/>
+            </a:pPr>
+            <a:r>
+              <a:rPr lang="fr-FR" dirty="0"/>
+              <a:t>6. Bad buzz ou crise de à un incident communication suite technique.</a:t>
+            </a:r>
+          </a:p>
+          <a:p>
+            <a:pPr marL="0" indent="0">
+              <a:buNone/>
+            </a:pPr>
+            <a:endParaRPr lang="fr-FR" dirty="0"/>
+          </a:p>
+        </p:txBody>
+      </p:sp>
+      <p:sp>
+        <p:nvSpPr>
+          <p:cNvPr id="4" name="Espace réservé du pied de page 3">
+            <a:extLst>
+              <a:ext uri="{FF2B5EF4-FFF2-40B4-BE49-F238E27FC236}">
+                <a16:creationId xmlns:a16="http://schemas.microsoft.com/office/drawing/2014/main" id="{20582856-CA36-4610-4E3E-4FB4B882EDCD}"/>
+              </a:ext>
+            </a:extLst>
+          </p:cNvPr>
+          <p:cNvSpPr>
+            <a:spLocks noGrp="1"/>
+          </p:cNvSpPr>
+          <p:nvPr>
+            <p:ph type="ftr" sz="quarter" idx="11"/>
+          </p:nvPr>
+        </p:nvSpPr>
+        <p:spPr/>
+        <p:txBody>
+          <a:bodyPr/>
+          <a:lstStyle/>
+          <a:p>
+            <a:r>
+              <a:rPr lang="fr-FR"/>
+              <a:t>PICIURA Ander - MIRABEL Lilian</a:t>
+            </a:r>
+          </a:p>
+        </p:txBody>
+      </p:sp>
+      <p:sp>
+        <p:nvSpPr>
+          <p:cNvPr id="5" name="Espace réservé du numéro de diapositive 4">
+            <a:extLst>
+              <a:ext uri="{FF2B5EF4-FFF2-40B4-BE49-F238E27FC236}">
+                <a16:creationId xmlns:a16="http://schemas.microsoft.com/office/drawing/2014/main" id="{72CDA127-FE27-DE2D-54FD-DB5D50C95C61}"/>
+              </a:ext>
+            </a:extLst>
+          </p:cNvPr>
+          <p:cNvSpPr>
+            <a:spLocks noGrp="1"/>
+          </p:cNvSpPr>
+          <p:nvPr>
+            <p:ph type="sldNum" sz="quarter" idx="12"/>
+          </p:nvPr>
+        </p:nvSpPr>
+        <p:spPr/>
+        <p:txBody>
+          <a:bodyPr/>
+          <a:lstStyle/>
+          <a:p>
+            <a:fld id="{EF144E42-BC24-D442-AFF0-55EAB46336FB}" type="slidenum">
+              <a:rPr lang="fr-FR" smtClean="0"/>
+              <a:t>5</a:t>
+            </a:fld>
+            <a:endParaRPr lang="fr-FR"/>
+          </a:p>
+        </p:txBody>
+      </p:sp>
+    </p:spTree>
+    <p:extLst>
+      <p:ext uri="{BB962C8B-B14F-4D97-AF65-F5344CB8AC3E}">
+        <p14:creationId xmlns:p14="http://schemas.microsoft.com/office/powerpoint/2010/main" val="1048059859"/>
+      </p:ext>
+    </p:extLst>
+  </p:cSld>
+  <p:clrMapOvr>
+    <a:masterClrMapping/>
+  </p:clrMapOvr>
+</p:sld>
+</file>
+
+<file path=ppt/slides/slide6.xml><?xml version="1.0" encoding="utf-8"?>
+<p:sld xmlns:a="http://schemas.openxmlformats.org/drawingml/2006/main" xmlns:r="http://schemas.openxmlformats.org/officeDocument/2006/relationships" xmlns:p="http://schemas.openxmlformats.org/presentationml/2006/main">
+  <p:cSld>
+    <p:spTree>
+      <p:nvGrpSpPr>
+        <p:cNvPr id="1" name="">
+          <a:extLst>
+            <a:ext uri="{FF2B5EF4-FFF2-40B4-BE49-F238E27FC236}">
+              <a16:creationId xmlns:a16="http://schemas.microsoft.com/office/drawing/2014/main" id="{1987E15A-6DD4-A43C-BC94-3C9B76FE9E5D}"/>
+            </a:ext>
+          </a:extLst>
+        </p:cNvPr>
+        <p:cNvGrpSpPr/>
+        <p:nvPr/>
+      </p:nvGrpSpPr>
+      <p:grpSpPr>
+        <a:xfrm>
+          <a:off x="0" y="0"/>
+          <a:ext cx="0" cy="0"/>
+          <a:chOff x="0" y="0"/>
+          <a:chExt cx="0" cy="0"/>
+        </a:xfrm>
+      </p:grpSpPr>
+      <p:sp>
+        <p:nvSpPr>
+          <p:cNvPr id="2" name="Titre 1">
+            <a:extLst>
+              <a:ext uri="{FF2B5EF4-FFF2-40B4-BE49-F238E27FC236}">
+                <a16:creationId xmlns:a16="http://schemas.microsoft.com/office/drawing/2014/main" id="{ABA5A70F-FCCD-3243-BAE1-9B301AC91A26}"/>
+              </a:ext>
+            </a:extLst>
+          </p:cNvPr>
+          <p:cNvSpPr>
+            <a:spLocks noGrp="1"/>
+          </p:cNvSpPr>
+          <p:nvPr>
+            <p:ph type="title"/>
+          </p:nvPr>
+        </p:nvSpPr>
+        <p:spPr>
+          <a:xfrm>
+            <a:off x="838200" y="216269"/>
+            <a:ext cx="10515600" cy="1325563"/>
+          </a:xfrm>
+        </p:spPr>
+        <p:txBody>
+          <a:bodyPr>
+            <a:normAutofit/>
+          </a:bodyPr>
+          <a:lstStyle/>
+          <a:p>
+            <a:pPr algn="ctr"/>
+            <a:r>
+              <a:rPr lang="fr-FR" sz="3600" dirty="0"/>
+              <a:t>Liste des risques majeurs classé par probabilité</a:t>
+            </a:r>
+          </a:p>
+        </p:txBody>
+      </p:sp>
+      <p:sp>
+        <p:nvSpPr>
+          <p:cNvPr id="3" name="Espace réservé du contenu 2">
+            <a:extLst>
+              <a:ext uri="{FF2B5EF4-FFF2-40B4-BE49-F238E27FC236}">
+                <a16:creationId xmlns:a16="http://schemas.microsoft.com/office/drawing/2014/main" id="{AB8A1869-7A0C-8F1E-4536-6058FB1AEEF8}"/>
+              </a:ext>
+            </a:extLst>
+          </p:cNvPr>
+          <p:cNvSpPr>
+            <a:spLocks noGrp="1"/>
+          </p:cNvSpPr>
+          <p:nvPr>
+            <p:ph idx="1"/>
+          </p:nvPr>
+        </p:nvSpPr>
+        <p:spPr>
+          <a:xfrm>
+            <a:off x="838200" y="1541832"/>
+            <a:ext cx="10515600" cy="4635131"/>
+          </a:xfrm>
+        </p:spPr>
+        <p:txBody>
+          <a:bodyPr/>
+          <a:lstStyle/>
+          <a:p>
+            <a:pPr marL="0" indent="0">
+              <a:buNone/>
+            </a:pPr>
+            <a:r>
+              <a:rPr lang="fr-FR" dirty="0"/>
+              <a:t>3. Perte de connectivité Internet dans les bureaux.</a:t>
+            </a:r>
+          </a:p>
+          <a:p>
+            <a:pPr marL="0" indent="0">
+              <a:buNone/>
+            </a:pPr>
+            <a:r>
+              <a:rPr lang="fr-FR" dirty="0"/>
+              <a:t>1. Indisponibilité prolongée de l’application mobile.</a:t>
+            </a:r>
+          </a:p>
+          <a:p>
+            <a:pPr marL="0" indent="0">
+              <a:buNone/>
+            </a:pPr>
+            <a:r>
+              <a:rPr lang="fr-FR" dirty="0"/>
+              <a:t>2. Erreur humaine lors du déploiement d’une mise à jour.</a:t>
+            </a:r>
+          </a:p>
+          <a:p>
+            <a:pPr marL="0" indent="0">
+              <a:buNone/>
+            </a:pPr>
+            <a:r>
+              <a:rPr lang="fr-FR" dirty="0"/>
+              <a:t>4. Cyberattaque (ransomware, vol de données utilisateurs).</a:t>
+            </a:r>
+          </a:p>
+          <a:p>
+            <a:pPr marL="0" indent="0">
+              <a:buNone/>
+            </a:pPr>
+            <a:r>
+              <a:rPr lang="fr-FR" dirty="0"/>
+              <a:t>5. Panne du cloud provider ou perte d’accès au serveur.</a:t>
+            </a:r>
+          </a:p>
+          <a:p>
+            <a:pPr marL="0" indent="0">
+              <a:buNone/>
+            </a:pPr>
+            <a:r>
+              <a:rPr lang="fr-FR" dirty="0"/>
+              <a:t>6. Bad buzz ou crise de communication suite à un incident</a:t>
+            </a:r>
+          </a:p>
+          <a:p>
+            <a:pPr marL="0" indent="0">
+              <a:buNone/>
+            </a:pPr>
+            <a:r>
+              <a:rPr lang="fr-FR" dirty="0"/>
+              <a:t>technique.</a:t>
+            </a:r>
+          </a:p>
+        </p:txBody>
+      </p:sp>
+      <p:sp>
+        <p:nvSpPr>
+          <p:cNvPr id="4" name="Espace réservé du pied de page 3">
+            <a:extLst>
+              <a:ext uri="{FF2B5EF4-FFF2-40B4-BE49-F238E27FC236}">
+                <a16:creationId xmlns:a16="http://schemas.microsoft.com/office/drawing/2014/main" id="{30226A48-77C0-E18E-0307-6F56FFAED123}"/>
+              </a:ext>
+            </a:extLst>
+          </p:cNvPr>
+          <p:cNvSpPr>
+            <a:spLocks noGrp="1"/>
+          </p:cNvSpPr>
+          <p:nvPr>
+            <p:ph type="ftr" sz="quarter" idx="11"/>
+          </p:nvPr>
+        </p:nvSpPr>
+        <p:spPr/>
+        <p:txBody>
+          <a:bodyPr/>
+          <a:lstStyle/>
+          <a:p>
+            <a:r>
+              <a:rPr lang="fr-FR"/>
+              <a:t>PICIURA Ander - MIRABEL Lilian</a:t>
+            </a:r>
+          </a:p>
+        </p:txBody>
+      </p:sp>
+      <p:sp>
+        <p:nvSpPr>
+          <p:cNvPr id="5" name="Espace réservé du numéro de diapositive 4">
+            <a:extLst>
+              <a:ext uri="{FF2B5EF4-FFF2-40B4-BE49-F238E27FC236}">
+                <a16:creationId xmlns:a16="http://schemas.microsoft.com/office/drawing/2014/main" id="{B0E3E69D-48C8-033B-D0E8-78B3253C2DA5}"/>
+              </a:ext>
+            </a:extLst>
+          </p:cNvPr>
+          <p:cNvSpPr>
+            <a:spLocks noGrp="1"/>
+          </p:cNvSpPr>
+          <p:nvPr>
+            <p:ph type="sldNum" sz="quarter" idx="12"/>
+          </p:nvPr>
+        </p:nvSpPr>
+        <p:spPr/>
+        <p:txBody>
+          <a:bodyPr/>
+          <a:lstStyle/>
+          <a:p>
+            <a:fld id="{EF144E42-BC24-D442-AFF0-55EAB46336FB}" type="slidenum">
+              <a:rPr lang="fr-FR" smtClean="0"/>
+              <a:t>6</a:t>
+            </a:fld>
+            <a:endParaRPr lang="fr-FR"/>
+          </a:p>
+        </p:txBody>
+      </p:sp>
+    </p:spTree>
+    <p:extLst>
+      <p:ext uri="{BB962C8B-B14F-4D97-AF65-F5344CB8AC3E}">
+        <p14:creationId xmlns:p14="http://schemas.microsoft.com/office/powerpoint/2010/main" val="2010805261"/>
+      </p:ext>
+    </p:extLst>
+  </p:cSld>
+  <p:clrMapOvr>
+    <a:masterClrMapping/>
+  </p:clrMapOvr>
+</p:sld>
+</file>
+
+<file path=ppt/slides/slide7.xml><?xml version="1.0" encoding="utf-8"?>
+<p:sld xmlns:a="http://schemas.openxmlformats.org/drawingml/2006/main" xmlns:r="http://schemas.openxmlformats.org/officeDocument/2006/relationships" xmlns:p="http://schemas.openxmlformats.org/presentationml/2006/main">
+  <p:cSld>
+    <p:spTree>
+      <p:nvGrpSpPr>
+        <p:cNvPr id="1" name="">
+          <a:extLst>
+            <a:ext uri="{FF2B5EF4-FFF2-40B4-BE49-F238E27FC236}">
+              <a16:creationId xmlns:a16="http://schemas.microsoft.com/office/drawing/2014/main" id="{4C182FC3-7A23-F841-1737-3610605482E8}"/>
+            </a:ext>
+          </a:extLst>
+        </p:cNvPr>
+        <p:cNvGrpSpPr/>
+        <p:nvPr/>
+      </p:nvGrpSpPr>
+      <p:grpSpPr>
+        <a:xfrm>
+          <a:off x="0" y="0"/>
+          <a:ext cx="0" cy="0"/>
+          <a:chOff x="0" y="0"/>
+          <a:chExt cx="0" cy="0"/>
+        </a:xfrm>
+      </p:grpSpPr>
+      <p:graphicFrame>
+        <p:nvGraphicFramePr>
+          <p:cNvPr id="8" name="Espace réservé du contenu 7">
+            <a:extLst>
+              <a:ext uri="{FF2B5EF4-FFF2-40B4-BE49-F238E27FC236}">
+                <a16:creationId xmlns:a16="http://schemas.microsoft.com/office/drawing/2014/main" id="{918610CC-372E-2A6A-A1A0-D75D77B1C67D}"/>
+              </a:ext>
+            </a:extLst>
+          </p:cNvPr>
+          <p:cNvGraphicFramePr>
+            <a:graphicFrameLocks noGrp="1"/>
+          </p:cNvGraphicFramePr>
+          <p:nvPr>
+            <p:ph idx="1"/>
+            <p:extLst>
+              <p:ext uri="{D42A27DB-BD31-4B8C-83A1-F6EECF244321}">
+                <p14:modId xmlns:p14="http://schemas.microsoft.com/office/powerpoint/2010/main" val="4112768458"/>
+              </p:ext>
+            </p:extLst>
+          </p:nvPr>
+        </p:nvGraphicFramePr>
+        <p:xfrm>
+          <a:off x="838200" y="520995"/>
+          <a:ext cx="10515600" cy="4293576"/>
+        </p:xfrm>
+        <a:graphic>
+          <a:graphicData uri="http://schemas.openxmlformats.org/drawingml/2006/table">
+            <a:tbl>
+              <a:tblPr firstRow="1" bandRow="1">
+                <a:tableStyleId>{5C22544A-7EE6-4342-B048-85BDC9FD1C3A}</a:tableStyleId>
+              </a:tblPr>
+              <a:tblGrid>
+                <a:gridCol w="2103120">
+                  <a:extLst>
+                    <a:ext uri="{9D8B030D-6E8A-4147-A177-3AD203B41FA5}">
+                      <a16:colId xmlns:a16="http://schemas.microsoft.com/office/drawing/2014/main" val="1777297413"/>
+                    </a:ext>
+                  </a:extLst>
+                </a:gridCol>
+                <a:gridCol w="2103120">
+                  <a:extLst>
+                    <a:ext uri="{9D8B030D-6E8A-4147-A177-3AD203B41FA5}">
+                      <a16:colId xmlns:a16="http://schemas.microsoft.com/office/drawing/2014/main" val="1916337012"/>
+                    </a:ext>
+                  </a:extLst>
+                </a:gridCol>
+                <a:gridCol w="2103120">
+                  <a:extLst>
+                    <a:ext uri="{9D8B030D-6E8A-4147-A177-3AD203B41FA5}">
+                      <a16:colId xmlns:a16="http://schemas.microsoft.com/office/drawing/2014/main" val="1721789"/>
+                    </a:ext>
+                  </a:extLst>
+                </a:gridCol>
+                <a:gridCol w="2103120">
+                  <a:extLst>
+                    <a:ext uri="{9D8B030D-6E8A-4147-A177-3AD203B41FA5}">
+                      <a16:colId xmlns:a16="http://schemas.microsoft.com/office/drawing/2014/main" val="2016702794"/>
+                    </a:ext>
+                  </a:extLst>
+                </a:gridCol>
+                <a:gridCol w="2103120">
+                  <a:extLst>
+                    <a:ext uri="{9D8B030D-6E8A-4147-A177-3AD203B41FA5}">
+                      <a16:colId xmlns:a16="http://schemas.microsoft.com/office/drawing/2014/main" val="1518111543"/>
+                    </a:ext>
+                  </a:extLst>
+                </a:gridCol>
+              </a:tblGrid>
+              <a:tr h="604078">
+                <a:tc>
+                  <a:txBody>
+                    <a:bodyPr/>
+                    <a:lstStyle/>
+                    <a:p>
+                      <a:pPr algn="ctr"/>
+                      <a:r>
+                        <a:rPr lang="fr-FR" sz="1500" dirty="0"/>
+                        <a:t>Risques</a:t>
+                      </a:r>
+                    </a:p>
+                  </a:txBody>
+                  <a:tcPr/>
+                </a:tc>
+                <a:tc>
+                  <a:txBody>
+                    <a:bodyPr/>
+                    <a:lstStyle/>
+                    <a:p>
+                      <a:r>
+                        <a:rPr lang="fr-FR" sz="1500" dirty="0"/>
+                        <a:t>Probabilité</a:t>
+                      </a:r>
+                    </a:p>
+                  </a:txBody>
+                  <a:tcPr/>
+                </a:tc>
+                <a:tc>
+                  <a:txBody>
+                    <a:bodyPr/>
+                    <a:lstStyle/>
+                    <a:p>
+                      <a:r>
+                        <a:rPr lang="fr-FR" sz="1500" dirty="0"/>
+                        <a:t>Gravité</a:t>
+                      </a:r>
+                    </a:p>
+                  </a:txBody>
+                  <a:tcPr/>
+                </a:tc>
+                <a:tc>
+                  <a:txBody>
+                    <a:bodyPr/>
+                    <a:lstStyle/>
+                    <a:p>
+                      <a:r>
+                        <a:rPr lang="fr-FR" sz="1500" dirty="0"/>
+                        <a:t>Impacte usagers et partenaires</a:t>
+                      </a:r>
+                    </a:p>
+                  </a:txBody>
+                  <a:tcPr/>
+                </a:tc>
+                <a:tc>
+                  <a:txBody>
+                    <a:bodyPr/>
+                    <a:lstStyle/>
+                    <a:p>
+                      <a:endParaRPr lang="fr-FR" sz="1000" dirty="0"/>
+                    </a:p>
+                  </a:txBody>
+                  <a:tcPr/>
+                </a:tc>
+                <a:extLst>
+                  <a:ext uri="{0D108BD9-81ED-4DB2-BD59-A6C34878D82A}">
+                    <a16:rowId xmlns:a16="http://schemas.microsoft.com/office/drawing/2014/main" val="2935616801"/>
+                  </a:ext>
+                </a:extLst>
+              </a:tr>
+              <a:tr h="639932">
+                <a:tc>
+                  <a:txBody>
+                    <a:bodyPr/>
+                    <a:lstStyle/>
+                    <a:p>
+                      <a:r>
+                        <a:rPr lang="fr-FR" sz="1000" dirty="0"/>
+                        <a:t>Cyberattaque (ransomware, vol de données utilisateurs).</a:t>
+                      </a:r>
+                    </a:p>
+                  </a:txBody>
+                  <a:tcPr/>
+                </a:tc>
+                <a:tc>
+                  <a:txBody>
+                    <a:bodyPr/>
+                    <a:lstStyle/>
+                    <a:p>
+                      <a:pPr algn="ctr"/>
+                      <a:r>
+                        <a:rPr lang="fr-FR" sz="2000" dirty="0"/>
+                        <a:t>2</a:t>
+                      </a:r>
+                    </a:p>
+                  </a:txBody>
+                  <a:tcPr/>
+                </a:tc>
+                <a:tc>
+                  <a:txBody>
+                    <a:bodyPr/>
+                    <a:lstStyle/>
+                    <a:p>
+                      <a:pPr algn="ctr"/>
+                      <a:r>
+                        <a:rPr lang="fr-FR" sz="2000" dirty="0"/>
+                        <a:t>1</a:t>
+                      </a:r>
+                    </a:p>
+                  </a:txBody>
+                  <a:tcPr/>
+                </a:tc>
+                <a:tc>
+                  <a:txBody>
+                    <a:bodyPr/>
+                    <a:lstStyle/>
+                    <a:p>
+                      <a:pPr marL="0" marR="0" lvl="0" indent="0" algn="ctr" defTabSz="914400" rtl="0" eaLnBrk="1" fontAlgn="auto" latinLnBrk="0" hangingPunct="1">
+                        <a:lnSpc>
+                          <a:spcPct val="100000"/>
+                        </a:lnSpc>
+                        <a:spcBef>
+                          <a:spcPts val="0"/>
+                        </a:spcBef>
+                        <a:spcAft>
+                          <a:spcPts val="0"/>
+                        </a:spcAft>
+                        <a:buClrTx/>
+                        <a:buSzTx/>
+                        <a:buFontTx/>
+                        <a:buNone/>
+                        <a:tabLst/>
+                        <a:defRPr/>
+                      </a:pPr>
+                      <a:r>
+                        <a:rPr lang="fr-FR" sz="2000" dirty="0"/>
+                        <a:t>1</a:t>
+                      </a:r>
+                    </a:p>
+                    <a:p>
+                      <a:pPr algn="ctr"/>
+                      <a:endParaRPr lang="fr-FR" sz="2000" dirty="0"/>
+                    </a:p>
+                  </a:txBody>
+                  <a:tcPr/>
+                </a:tc>
+                <a:tc>
+                  <a:txBody>
+                    <a:bodyPr/>
+                    <a:lstStyle/>
+                    <a:p>
+                      <a:endParaRPr lang="fr-FR" sz="1000"/>
+                    </a:p>
+                  </a:txBody>
+                  <a:tcPr/>
+                </a:tc>
+                <a:extLst>
+                  <a:ext uri="{0D108BD9-81ED-4DB2-BD59-A6C34878D82A}">
+                    <a16:rowId xmlns:a16="http://schemas.microsoft.com/office/drawing/2014/main" val="1796401"/>
+                  </a:ext>
+                </a:extLst>
+              </a:tr>
+              <a:tr h="604078">
+                <a:tc>
+                  <a:txBody>
+                    <a:bodyPr/>
+                    <a:lstStyle/>
+                    <a:p>
+                      <a:pPr marL="0" marR="0" lvl="0" indent="0" algn="l" defTabSz="914400" rtl="0" eaLnBrk="1" fontAlgn="auto" latinLnBrk="0" hangingPunct="1">
+                        <a:lnSpc>
+                          <a:spcPct val="100000"/>
+                        </a:lnSpc>
+                        <a:spcBef>
+                          <a:spcPts val="0"/>
+                        </a:spcBef>
+                        <a:spcAft>
+                          <a:spcPts val="0"/>
+                        </a:spcAft>
+                        <a:buClrTx/>
+                        <a:buSzTx/>
+                        <a:buFontTx/>
+                        <a:buNone/>
+                        <a:tabLst/>
+                        <a:defRPr/>
+                      </a:pPr>
+                      <a:r>
+                        <a:rPr lang="fr-FR" sz="1000" dirty="0"/>
+                        <a:t>Indisponibilité prolongée de l’application mobile.</a:t>
+                      </a:r>
+                    </a:p>
+                    <a:p>
+                      <a:endParaRPr lang="fr-FR" sz="1000" dirty="0"/>
+                    </a:p>
+                  </a:txBody>
+                  <a:tcPr/>
+                </a:tc>
+                <a:tc>
+                  <a:txBody>
+                    <a:bodyPr/>
+                    <a:lstStyle/>
+                    <a:p>
+                      <a:pPr algn="ctr"/>
+                      <a:r>
+                        <a:rPr lang="fr-FR" sz="2000" dirty="0"/>
+                        <a:t>4</a:t>
+                      </a:r>
+                    </a:p>
+                  </a:txBody>
+                  <a:tcPr/>
+                </a:tc>
+                <a:tc>
+                  <a:txBody>
+                    <a:bodyPr/>
+                    <a:lstStyle/>
+                    <a:p>
+                      <a:pPr algn="ctr"/>
+                      <a:r>
+                        <a:rPr lang="fr-FR" sz="2000" dirty="0"/>
+                        <a:t>2</a:t>
+                      </a:r>
+                    </a:p>
+                  </a:txBody>
+                  <a:tcPr/>
+                </a:tc>
+                <a:tc>
+                  <a:txBody>
+                    <a:bodyPr/>
+                    <a:lstStyle/>
+                    <a:p>
+                      <a:pPr algn="ctr"/>
+                      <a:r>
+                        <a:rPr lang="fr-FR" sz="2000" dirty="0"/>
+                        <a:t>2</a:t>
+                      </a:r>
+                    </a:p>
+                  </a:txBody>
+                  <a:tcPr/>
+                </a:tc>
+                <a:tc>
+                  <a:txBody>
+                    <a:bodyPr/>
+                    <a:lstStyle/>
+                    <a:p>
+                      <a:endParaRPr lang="fr-FR" sz="1000"/>
+                    </a:p>
+                  </a:txBody>
+                  <a:tcPr/>
+                </a:tc>
+                <a:extLst>
+                  <a:ext uri="{0D108BD9-81ED-4DB2-BD59-A6C34878D82A}">
+                    <a16:rowId xmlns:a16="http://schemas.microsoft.com/office/drawing/2014/main" val="1341663827"/>
+                  </a:ext>
+                </a:extLst>
+              </a:tr>
+              <a:tr h="604078">
+                <a:tc>
+                  <a:txBody>
+                    <a:bodyPr/>
+                    <a:lstStyle/>
+                    <a:p>
+                      <a:pPr marL="0" marR="0" lvl="0" indent="0" algn="l" defTabSz="914400" rtl="0" eaLnBrk="1" fontAlgn="auto" latinLnBrk="0" hangingPunct="1">
+                        <a:lnSpc>
+                          <a:spcPct val="100000"/>
+                        </a:lnSpc>
+                        <a:spcBef>
+                          <a:spcPts val="0"/>
+                        </a:spcBef>
+                        <a:spcAft>
+                          <a:spcPts val="0"/>
+                        </a:spcAft>
+                        <a:buClrTx/>
+                        <a:buSzTx/>
+                        <a:buFontTx/>
+                        <a:buNone/>
+                        <a:tabLst/>
+                        <a:defRPr/>
+                      </a:pPr>
+                      <a:r>
+                        <a:rPr lang="fr-FR" sz="1000" dirty="0"/>
+                        <a:t>Panne du cloud provider ou perte d’accès au serveur.</a:t>
+                      </a:r>
+                    </a:p>
+                    <a:p>
+                      <a:endParaRPr lang="fr-FR" sz="1000" dirty="0"/>
+                    </a:p>
+                  </a:txBody>
+                  <a:tcPr/>
+                </a:tc>
+                <a:tc>
+                  <a:txBody>
+                    <a:bodyPr/>
+                    <a:lstStyle/>
+                    <a:p>
+                      <a:pPr algn="ctr"/>
+                      <a:r>
+                        <a:rPr lang="fr-FR" sz="2000" dirty="0"/>
+                        <a:t>5</a:t>
+                      </a:r>
+                    </a:p>
+                  </a:txBody>
+                  <a:tcPr/>
+                </a:tc>
+                <a:tc>
+                  <a:txBody>
+                    <a:bodyPr/>
+                    <a:lstStyle/>
+                    <a:p>
+                      <a:pPr algn="ctr"/>
+                      <a:r>
+                        <a:rPr lang="fr-FR" sz="2000" dirty="0"/>
+                        <a:t>3</a:t>
+                      </a:r>
+                    </a:p>
+                  </a:txBody>
+                  <a:tcPr/>
+                </a:tc>
+                <a:tc>
+                  <a:txBody>
+                    <a:bodyPr/>
+                    <a:lstStyle/>
+                    <a:p>
+                      <a:pPr algn="ctr"/>
+                      <a:r>
+                        <a:rPr lang="fr-FR" sz="2000" dirty="0"/>
+                        <a:t>4</a:t>
+                      </a:r>
+                    </a:p>
+                  </a:txBody>
+                  <a:tcPr/>
+                </a:tc>
+                <a:tc>
+                  <a:txBody>
+                    <a:bodyPr/>
+                    <a:lstStyle/>
+                    <a:p>
+                      <a:endParaRPr lang="fr-FR" sz="1000"/>
+                    </a:p>
+                  </a:txBody>
+                  <a:tcPr/>
+                </a:tc>
+                <a:extLst>
+                  <a:ext uri="{0D108BD9-81ED-4DB2-BD59-A6C34878D82A}">
+                    <a16:rowId xmlns:a16="http://schemas.microsoft.com/office/drawing/2014/main" val="2891209899"/>
+                  </a:ext>
+                </a:extLst>
+              </a:tr>
+              <a:tr h="0">
+                <a:tc>
+                  <a:txBody>
+                    <a:bodyPr/>
+                    <a:lstStyle/>
+                    <a:p>
+                      <a:pPr marL="0" marR="0" lvl="0" indent="0" algn="l" defTabSz="914400" rtl="0" eaLnBrk="1" fontAlgn="auto" latinLnBrk="0" hangingPunct="1">
+                        <a:lnSpc>
+                          <a:spcPct val="100000"/>
+                        </a:lnSpc>
+                        <a:spcBef>
+                          <a:spcPts val="0"/>
+                        </a:spcBef>
+                        <a:spcAft>
+                          <a:spcPts val="0"/>
+                        </a:spcAft>
+                        <a:buClrTx/>
+                        <a:buSzTx/>
+                        <a:buFontTx/>
+                        <a:buNone/>
+                        <a:tabLst/>
+                        <a:defRPr/>
+                      </a:pPr>
+                      <a:r>
+                        <a:rPr lang="fr-FR" sz="1000" dirty="0"/>
+                        <a:t>Erreur humaine lors du déploiement d’une mise à jour.</a:t>
+                      </a:r>
+                    </a:p>
+                    <a:p>
+                      <a:endParaRPr lang="fr-FR" sz="1000" dirty="0"/>
+                    </a:p>
+                  </a:txBody>
+                  <a:tcPr/>
+                </a:tc>
+                <a:tc>
+                  <a:txBody>
+                    <a:bodyPr/>
+                    <a:lstStyle/>
+                    <a:p>
+                      <a:pPr algn="ctr"/>
+                      <a:r>
+                        <a:rPr lang="fr-FR" sz="2000" dirty="0"/>
+                        <a:t>3</a:t>
+                      </a:r>
+                    </a:p>
+                  </a:txBody>
+                  <a:tcPr/>
+                </a:tc>
+                <a:tc>
+                  <a:txBody>
+                    <a:bodyPr/>
+                    <a:lstStyle/>
+                    <a:p>
+                      <a:pPr algn="ctr"/>
+                      <a:r>
+                        <a:rPr lang="fr-FR" sz="2000" dirty="0"/>
+                        <a:t>4</a:t>
+                      </a:r>
+                    </a:p>
+                  </a:txBody>
+                  <a:tcPr/>
+                </a:tc>
+                <a:tc>
+                  <a:txBody>
+                    <a:bodyPr/>
+                    <a:lstStyle/>
+                    <a:p>
+                      <a:pPr algn="ctr"/>
+                      <a:r>
+                        <a:rPr lang="fr-FR" sz="2000" dirty="0"/>
+                        <a:t>5</a:t>
+                      </a:r>
+                    </a:p>
+                  </a:txBody>
+                  <a:tcPr/>
+                </a:tc>
+                <a:tc>
+                  <a:txBody>
+                    <a:bodyPr/>
+                    <a:lstStyle/>
+                    <a:p>
+                      <a:endParaRPr lang="fr-FR" sz="1000"/>
+                    </a:p>
+                  </a:txBody>
+                  <a:tcPr/>
+                </a:tc>
+                <a:extLst>
+                  <a:ext uri="{0D108BD9-81ED-4DB2-BD59-A6C34878D82A}">
+                    <a16:rowId xmlns:a16="http://schemas.microsoft.com/office/drawing/2014/main" val="4065536059"/>
+                  </a:ext>
+                </a:extLst>
+              </a:tr>
+              <a:tr h="627584">
+                <a:tc>
+                  <a:txBody>
+                    <a:bodyPr/>
+                    <a:lstStyle/>
+                    <a:p>
+                      <a:r>
+                        <a:rPr lang="fr-FR" sz="1000"/>
+                        <a:t>Perte de connectivité Internet dans les bureaux</a:t>
+                      </a:r>
+                      <a:endParaRPr lang="fr-FR" sz="1000" dirty="0"/>
+                    </a:p>
+                  </a:txBody>
+                  <a:tcPr/>
+                </a:tc>
+                <a:tc>
+                  <a:txBody>
+                    <a:bodyPr/>
+                    <a:lstStyle/>
+                    <a:p>
+                      <a:pPr algn="ctr"/>
+                      <a:r>
+                        <a:rPr lang="fr-FR" sz="2000" dirty="0"/>
+                        <a:t>1</a:t>
+                      </a:r>
+                    </a:p>
+                  </a:txBody>
+                  <a:tcPr/>
+                </a:tc>
+                <a:tc>
+                  <a:txBody>
+                    <a:bodyPr/>
+                    <a:lstStyle/>
+                    <a:p>
+                      <a:pPr algn="ctr"/>
+                      <a:r>
+                        <a:rPr lang="fr-FR" sz="2000" dirty="0"/>
+                        <a:t>5</a:t>
+                      </a:r>
+                    </a:p>
+                  </a:txBody>
+                  <a:tcPr/>
+                </a:tc>
+                <a:tc>
+                  <a:txBody>
+                    <a:bodyPr/>
+                    <a:lstStyle/>
+                    <a:p>
+                      <a:pPr algn="ctr"/>
+                      <a:r>
+                        <a:rPr lang="fr-FR" sz="2000" dirty="0"/>
+                        <a:t>6</a:t>
+                      </a:r>
+                    </a:p>
+                  </a:txBody>
+                  <a:tcPr/>
+                </a:tc>
+                <a:tc>
+                  <a:txBody>
+                    <a:bodyPr/>
+                    <a:lstStyle/>
+                    <a:p>
+                      <a:endParaRPr lang="fr-FR" sz="1000"/>
+                    </a:p>
+                  </a:txBody>
+                  <a:tcPr/>
+                </a:tc>
+                <a:extLst>
+                  <a:ext uri="{0D108BD9-81ED-4DB2-BD59-A6C34878D82A}">
+                    <a16:rowId xmlns:a16="http://schemas.microsoft.com/office/drawing/2014/main" val="103921020"/>
+                  </a:ext>
+                </a:extLst>
+              </a:tr>
+              <a:tr h="604078">
+                <a:tc>
+                  <a:txBody>
+                    <a:bodyPr/>
+                    <a:lstStyle/>
+                    <a:p>
+                      <a:r>
+                        <a:rPr lang="fr-FR" sz="1000"/>
+                        <a:t>Bad buzz ou crise de à un incident communication suite technique</a:t>
+                      </a:r>
+                      <a:endParaRPr lang="fr-FR" sz="1000" dirty="0"/>
+                    </a:p>
+                  </a:txBody>
+                  <a:tcPr/>
+                </a:tc>
+                <a:tc>
+                  <a:txBody>
+                    <a:bodyPr/>
+                    <a:lstStyle/>
+                    <a:p>
+                      <a:pPr algn="ctr"/>
+                      <a:r>
+                        <a:rPr lang="fr-FR" sz="2000" dirty="0"/>
+                        <a:t>6</a:t>
+                      </a:r>
+                    </a:p>
+                  </a:txBody>
+                  <a:tcPr/>
+                </a:tc>
+                <a:tc>
+                  <a:txBody>
+                    <a:bodyPr/>
+                    <a:lstStyle/>
+                    <a:p>
+                      <a:pPr algn="ctr"/>
+                      <a:r>
+                        <a:rPr lang="fr-FR" sz="2000" dirty="0"/>
+                        <a:t>6</a:t>
+                      </a:r>
+                    </a:p>
+                  </a:txBody>
+                  <a:tcPr/>
+                </a:tc>
+                <a:tc>
+                  <a:txBody>
+                    <a:bodyPr/>
+                    <a:lstStyle/>
+                    <a:p>
+                      <a:pPr algn="ctr"/>
+                      <a:r>
+                        <a:rPr lang="fr-FR" sz="2000" dirty="0"/>
+                        <a:t>3</a:t>
+                      </a:r>
+                    </a:p>
+                  </a:txBody>
+                  <a:tcPr/>
+                </a:tc>
+                <a:tc>
+                  <a:txBody>
+                    <a:bodyPr/>
+                    <a:lstStyle/>
+                    <a:p>
+                      <a:endParaRPr lang="fr-FR" sz="1000" dirty="0"/>
+                    </a:p>
+                  </a:txBody>
+                  <a:tcPr/>
+                </a:tc>
+                <a:extLst>
+                  <a:ext uri="{0D108BD9-81ED-4DB2-BD59-A6C34878D82A}">
+                    <a16:rowId xmlns:a16="http://schemas.microsoft.com/office/drawing/2014/main" val="322229969"/>
+                  </a:ext>
+                </a:extLst>
+              </a:tr>
+            </a:tbl>
+          </a:graphicData>
+        </a:graphic>
+      </p:graphicFrame>
+      <p:sp>
+        <p:nvSpPr>
+          <p:cNvPr id="4" name="Espace réservé du pied de page 3">
+            <a:extLst>
+              <a:ext uri="{FF2B5EF4-FFF2-40B4-BE49-F238E27FC236}">
+                <a16:creationId xmlns:a16="http://schemas.microsoft.com/office/drawing/2014/main" id="{A322D45E-30EC-B46D-1F10-A118C9254CC2}"/>
+              </a:ext>
+            </a:extLst>
+          </p:cNvPr>
+          <p:cNvSpPr>
+            <a:spLocks noGrp="1"/>
+          </p:cNvSpPr>
+          <p:nvPr>
+            <p:ph type="ftr" sz="quarter" idx="11"/>
+          </p:nvPr>
+        </p:nvSpPr>
+        <p:spPr/>
+        <p:txBody>
+          <a:bodyPr/>
+          <a:lstStyle/>
+          <a:p>
+            <a:r>
+              <a:rPr lang="fr-FR"/>
+              <a:t>PICIURA Ander - MIRABEL Lilian</a:t>
+            </a:r>
+          </a:p>
+        </p:txBody>
+      </p:sp>
+      <p:sp>
+        <p:nvSpPr>
+          <p:cNvPr id="5" name="Espace réservé du numéro de diapositive 4">
+            <a:extLst>
+              <a:ext uri="{FF2B5EF4-FFF2-40B4-BE49-F238E27FC236}">
+                <a16:creationId xmlns:a16="http://schemas.microsoft.com/office/drawing/2014/main" id="{4B70FE3F-7703-445E-B778-EA3FD0A0E72A}"/>
+              </a:ext>
+            </a:extLst>
+          </p:cNvPr>
+          <p:cNvSpPr>
+            <a:spLocks noGrp="1"/>
+          </p:cNvSpPr>
+          <p:nvPr>
+            <p:ph type="sldNum" sz="quarter" idx="12"/>
+          </p:nvPr>
+        </p:nvSpPr>
+        <p:spPr/>
+        <p:txBody>
+          <a:bodyPr/>
+          <a:lstStyle/>
+          <a:p>
+            <a:fld id="{EF144E42-BC24-D442-AFF0-55EAB46336FB}" type="slidenum">
+              <a:rPr lang="fr-FR" smtClean="0"/>
+              <a:t>7</a:t>
+            </a:fld>
+            <a:endParaRPr lang="fr-FR"/>
+          </a:p>
+        </p:txBody>
+      </p:sp>
+    </p:spTree>
+    <p:extLst>
+      <p:ext uri="{BB962C8B-B14F-4D97-AF65-F5344CB8AC3E}">
+        <p14:creationId xmlns:p14="http://schemas.microsoft.com/office/powerpoint/2010/main" val="4294190056"/>
       </p:ext>
     </p:extLst>
   </p:cSld>

--- a/TP6_Exploitation_faille_0day_Lilian_Ander.pptx
+++ b/TP6_Exploitation_faille_0day_Lilian_Ander.pptx
@@ -5,7 +5,7 @@
     <p:sldMasterId id="2147483648" r:id="rId1"/>
   </p:sldMasterIdLst>
   <p:notesMasterIdLst>
-    <p:notesMasterId r:id="rId9"/>
+    <p:notesMasterId r:id="rId10"/>
   </p:notesMasterIdLst>
   <p:sldIdLst>
     <p:sldId id="256" r:id="rId2"/>
@@ -15,6 +15,7 @@
     <p:sldId id="260" r:id="rId6"/>
     <p:sldId id="261" r:id="rId7"/>
     <p:sldId id="262" r:id="rId8"/>
+    <p:sldId id="263" r:id="rId9"/>
   </p:sldIdLst>
   <p:sldSz cx="12192000" cy="6858000"/>
   <p:notesSz cx="6858000" cy="9144000"/>
@@ -5830,6 +5831,563 @@
     <p:extLst>
       <p:ext uri="{BB962C8B-B14F-4D97-AF65-F5344CB8AC3E}">
         <p14:creationId xmlns:p14="http://schemas.microsoft.com/office/powerpoint/2010/main" val="4294190056"/>
+      </p:ext>
+    </p:extLst>
+  </p:cSld>
+  <p:clrMapOvr>
+    <a:masterClrMapping/>
+  </p:clrMapOvr>
+</p:sld>
+</file>
+
+<file path=ppt/slides/slide8.xml><?xml version="1.0" encoding="utf-8"?>
+<p:sld xmlns:a="http://schemas.openxmlformats.org/drawingml/2006/main" xmlns:r="http://schemas.openxmlformats.org/officeDocument/2006/relationships" xmlns:p="http://schemas.openxmlformats.org/presentationml/2006/main">
+  <p:cSld>
+    <p:spTree>
+      <p:nvGrpSpPr>
+        <p:cNvPr id="1" name=""/>
+        <p:cNvGrpSpPr/>
+        <p:nvPr/>
+      </p:nvGrpSpPr>
+      <p:grpSpPr>
+        <a:xfrm>
+          <a:off x="0" y="0"/>
+          <a:ext cx="0" cy="0"/>
+          <a:chOff x="0" y="0"/>
+          <a:chExt cx="0" cy="0"/>
+        </a:xfrm>
+      </p:grpSpPr>
+      <p:sp>
+        <p:nvSpPr>
+          <p:cNvPr id="4" name="Espace réservé du pied de page 3">
+            <a:extLst>
+              <a:ext uri="{FF2B5EF4-FFF2-40B4-BE49-F238E27FC236}">
+                <a16:creationId xmlns:a16="http://schemas.microsoft.com/office/drawing/2014/main" id="{915B3F9B-3DA8-5AF1-6622-7DE26CD696A4}"/>
+              </a:ext>
+            </a:extLst>
+          </p:cNvPr>
+          <p:cNvSpPr>
+            <a:spLocks noGrp="1"/>
+          </p:cNvSpPr>
+          <p:nvPr>
+            <p:ph type="ftr" sz="quarter" idx="11"/>
+          </p:nvPr>
+        </p:nvSpPr>
+        <p:spPr/>
+        <p:txBody>
+          <a:bodyPr/>
+          <a:lstStyle/>
+          <a:p>
+            <a:r>
+              <a:rPr lang="fr-FR"/>
+              <a:t>PICIURA Ander - MIRABEL Lilian</a:t>
+            </a:r>
+          </a:p>
+        </p:txBody>
+      </p:sp>
+      <p:sp>
+        <p:nvSpPr>
+          <p:cNvPr id="5" name="Espace réservé du numéro de diapositive 4">
+            <a:extLst>
+              <a:ext uri="{FF2B5EF4-FFF2-40B4-BE49-F238E27FC236}">
+                <a16:creationId xmlns:a16="http://schemas.microsoft.com/office/drawing/2014/main" id="{9CBA4EB3-0101-9589-A944-EBD53B6AA480}"/>
+              </a:ext>
+            </a:extLst>
+          </p:cNvPr>
+          <p:cNvSpPr>
+            <a:spLocks noGrp="1"/>
+          </p:cNvSpPr>
+          <p:nvPr>
+            <p:ph type="sldNum" sz="quarter" idx="12"/>
+          </p:nvPr>
+        </p:nvSpPr>
+        <p:spPr/>
+        <p:txBody>
+          <a:bodyPr/>
+          <a:lstStyle/>
+          <a:p>
+            <a:fld id="{EF144E42-BC24-D442-AFF0-55EAB46336FB}" type="slidenum">
+              <a:rPr lang="fr-FR" smtClean="0"/>
+              <a:t>8</a:t>
+            </a:fld>
+            <a:endParaRPr lang="fr-FR"/>
+          </a:p>
+        </p:txBody>
+      </p:sp>
+      <p:graphicFrame>
+        <p:nvGraphicFramePr>
+          <p:cNvPr id="8" name="Espace réservé du contenu 7">
+            <a:extLst>
+              <a:ext uri="{FF2B5EF4-FFF2-40B4-BE49-F238E27FC236}">
+                <a16:creationId xmlns:a16="http://schemas.microsoft.com/office/drawing/2014/main" id="{FE0A765D-D937-FE44-8639-E11734A07907}"/>
+              </a:ext>
+            </a:extLst>
+          </p:cNvPr>
+          <p:cNvGraphicFramePr>
+            <a:graphicFrameLocks/>
+          </p:cNvGraphicFramePr>
+          <p:nvPr>
+            <p:extLst>
+              <p:ext uri="{D42A27DB-BD31-4B8C-83A1-F6EECF244321}">
+                <p14:modId xmlns:p14="http://schemas.microsoft.com/office/powerpoint/2010/main" val="28096909"/>
+              </p:ext>
+            </p:extLst>
+          </p:nvPr>
+        </p:nvGraphicFramePr>
+        <p:xfrm>
+          <a:off x="195648" y="136524"/>
+          <a:ext cx="11790405" cy="6066567"/>
+        </p:xfrm>
+        <a:graphic>
+          <a:graphicData uri="http://schemas.openxmlformats.org/drawingml/2006/table">
+            <a:tbl>
+              <a:tblPr firstRow="1" bandRow="1">
+                <a:tableStyleId>{5C22544A-7EE6-4342-B048-85BDC9FD1C3A}</a:tableStyleId>
+              </a:tblPr>
+              <a:tblGrid>
+                <a:gridCol w="3930135">
+                  <a:extLst>
+                    <a:ext uri="{9D8B030D-6E8A-4147-A177-3AD203B41FA5}">
+                      <a16:colId xmlns:a16="http://schemas.microsoft.com/office/drawing/2014/main" val="1777297413"/>
+                    </a:ext>
+                  </a:extLst>
+                </a:gridCol>
+                <a:gridCol w="3930135">
+                  <a:extLst>
+                    <a:ext uri="{9D8B030D-6E8A-4147-A177-3AD203B41FA5}">
+                      <a16:colId xmlns:a16="http://schemas.microsoft.com/office/drawing/2014/main" val="1916337012"/>
+                    </a:ext>
+                  </a:extLst>
+                </a:gridCol>
+                <a:gridCol w="3930135">
+                  <a:extLst>
+                    <a:ext uri="{9D8B030D-6E8A-4147-A177-3AD203B41FA5}">
+                      <a16:colId xmlns:a16="http://schemas.microsoft.com/office/drawing/2014/main" val="1721789"/>
+                    </a:ext>
+                  </a:extLst>
+                </a:gridCol>
+              </a:tblGrid>
+              <a:tr h="853526">
+                <a:tc>
+                  <a:txBody>
+                    <a:bodyPr/>
+                    <a:lstStyle/>
+                    <a:p>
+                      <a:pPr algn="ctr"/>
+                      <a:r>
+                        <a:rPr lang="fr-FR" sz="1500" dirty="0"/>
+                        <a:t>Risques</a:t>
+                      </a:r>
+                    </a:p>
+                  </a:txBody>
+                  <a:tcPr/>
+                </a:tc>
+                <a:tc>
+                  <a:txBody>
+                    <a:bodyPr/>
+                    <a:lstStyle/>
+                    <a:p>
+                      <a:r>
+                        <a:rPr lang="fr-FR" sz="1500" dirty="0"/>
+                        <a:t>RTO</a:t>
+                      </a:r>
+                    </a:p>
+                  </a:txBody>
+                  <a:tcPr/>
+                </a:tc>
+                <a:tc>
+                  <a:txBody>
+                    <a:bodyPr/>
+                    <a:lstStyle/>
+                    <a:p>
+                      <a:r>
+                        <a:rPr lang="fr-FR" sz="1500" dirty="0"/>
+                        <a:t>RPO</a:t>
+                      </a:r>
+                    </a:p>
+                  </a:txBody>
+                  <a:tcPr/>
+                </a:tc>
+                <a:extLst>
+                  <a:ext uri="{0D108BD9-81ED-4DB2-BD59-A6C34878D82A}">
+                    <a16:rowId xmlns:a16="http://schemas.microsoft.com/office/drawing/2014/main" val="2935616801"/>
+                  </a:ext>
+                </a:extLst>
+              </a:tr>
+              <a:tr h="990528">
+                <a:tc>
+                  <a:txBody>
+                    <a:bodyPr/>
+                    <a:lstStyle/>
+                    <a:p>
+                      <a:r>
+                        <a:rPr lang="fr-FR" sz="1000" dirty="0"/>
+                        <a:t>Cyberattaque (ransomware, vol de données utilisateurs).</a:t>
+                      </a:r>
+                    </a:p>
+                  </a:txBody>
+                  <a:tcPr/>
+                </a:tc>
+                <a:tc>
+                  <a:txBody>
+                    <a:bodyPr/>
+                    <a:lstStyle/>
+                    <a:p>
+                      <a:pPr algn="ctr"/>
+                      <a:r>
+                        <a:rPr lang="fr-FR" sz="2000" dirty="0"/>
+                        <a:t>3h</a:t>
+                      </a:r>
+                    </a:p>
+                  </a:txBody>
+                  <a:tcPr/>
+                </a:tc>
+                <a:tc>
+                  <a:txBody>
+                    <a:bodyPr/>
+                    <a:lstStyle/>
+                    <a:p>
+                      <a:pPr algn="ctr"/>
+                      <a:r>
+                        <a:rPr lang="fr-FR" sz="2000" dirty="0"/>
+                        <a:t>30 min</a:t>
+                      </a:r>
+                    </a:p>
+                  </a:txBody>
+                  <a:tcPr/>
+                </a:tc>
+                <a:extLst>
+                  <a:ext uri="{0D108BD9-81ED-4DB2-BD59-A6C34878D82A}">
+                    <a16:rowId xmlns:a16="http://schemas.microsoft.com/office/drawing/2014/main" val="1796401"/>
+                  </a:ext>
+                </a:extLst>
+              </a:tr>
+              <a:tr h="853526">
+                <a:tc>
+                  <a:txBody>
+                    <a:bodyPr/>
+                    <a:lstStyle/>
+                    <a:p>
+                      <a:pPr marL="0" marR="0" lvl="0" indent="0" algn="l" defTabSz="914400" rtl="0" eaLnBrk="1" fontAlgn="auto" latinLnBrk="0" hangingPunct="1">
+                        <a:lnSpc>
+                          <a:spcPct val="100000"/>
+                        </a:lnSpc>
+                        <a:spcBef>
+                          <a:spcPts val="0"/>
+                        </a:spcBef>
+                        <a:spcAft>
+                          <a:spcPts val="0"/>
+                        </a:spcAft>
+                        <a:buClrTx/>
+                        <a:buSzTx/>
+                        <a:buFontTx/>
+                        <a:buNone/>
+                        <a:tabLst/>
+                        <a:defRPr/>
+                      </a:pPr>
+                      <a:r>
+                        <a:rPr lang="fr-FR" sz="1000" dirty="0"/>
+                        <a:t>Indisponibilité prolongée de l’application mobile.</a:t>
+                      </a:r>
+                    </a:p>
+                    <a:p>
+                      <a:endParaRPr lang="fr-FR" sz="1000" dirty="0"/>
+                    </a:p>
+                  </a:txBody>
+                  <a:tcPr/>
+                </a:tc>
+                <a:tc>
+                  <a:txBody>
+                    <a:bodyPr/>
+                    <a:lstStyle/>
+                    <a:p>
+                      <a:pPr algn="ctr"/>
+                      <a:r>
+                        <a:rPr lang="fr-FR" sz="2000" dirty="0"/>
+                        <a:t>1h</a:t>
+                      </a:r>
+                    </a:p>
+                  </a:txBody>
+                  <a:tcPr/>
+                </a:tc>
+                <a:tc>
+                  <a:txBody>
+                    <a:bodyPr/>
+                    <a:lstStyle/>
+                    <a:p>
+                      <a:pPr algn="ctr"/>
+                      <a:r>
+                        <a:rPr lang="fr-FR" sz="2000" dirty="0"/>
+                        <a:t>15 min</a:t>
+                      </a:r>
+                    </a:p>
+                  </a:txBody>
+                  <a:tcPr/>
+                </a:tc>
+                <a:extLst>
+                  <a:ext uri="{0D108BD9-81ED-4DB2-BD59-A6C34878D82A}">
+                    <a16:rowId xmlns:a16="http://schemas.microsoft.com/office/drawing/2014/main" val="1341663827"/>
+                  </a:ext>
+                </a:extLst>
+              </a:tr>
+              <a:tr h="853526">
+                <a:tc>
+                  <a:txBody>
+                    <a:bodyPr/>
+                    <a:lstStyle/>
+                    <a:p>
+                      <a:pPr marL="0" marR="0" lvl="0" indent="0" algn="l" defTabSz="914400" rtl="0" eaLnBrk="1" fontAlgn="auto" latinLnBrk="0" hangingPunct="1">
+                        <a:lnSpc>
+                          <a:spcPct val="100000"/>
+                        </a:lnSpc>
+                        <a:spcBef>
+                          <a:spcPts val="0"/>
+                        </a:spcBef>
+                        <a:spcAft>
+                          <a:spcPts val="0"/>
+                        </a:spcAft>
+                        <a:buClrTx/>
+                        <a:buSzTx/>
+                        <a:buFontTx/>
+                        <a:buNone/>
+                        <a:tabLst/>
+                        <a:defRPr/>
+                      </a:pPr>
+                      <a:r>
+                        <a:rPr lang="fr-FR" sz="1000" dirty="0"/>
+                        <a:t>Panne du cloud provider ou perte d’accès au serveur.</a:t>
+                      </a:r>
+                    </a:p>
+                    <a:p>
+                      <a:endParaRPr lang="fr-FR" sz="1000" dirty="0"/>
+                    </a:p>
+                  </a:txBody>
+                  <a:tcPr/>
+                </a:tc>
+                <a:tc>
+                  <a:txBody>
+                    <a:bodyPr/>
+                    <a:lstStyle/>
+                    <a:p>
+                      <a:pPr algn="ctr"/>
+                      <a:r>
+                        <a:rPr lang="fr-FR" sz="2000" dirty="0"/>
+                        <a:t>2h</a:t>
+                      </a:r>
+                    </a:p>
+                  </a:txBody>
+                  <a:tcPr/>
+                </a:tc>
+                <a:tc>
+                  <a:txBody>
+                    <a:bodyPr/>
+                    <a:lstStyle/>
+                    <a:p>
+                      <a:pPr algn="ctr"/>
+                      <a:r>
+                        <a:rPr lang="fr-FR" sz="2000" dirty="0"/>
+                        <a:t>15 min -30 min</a:t>
+                      </a:r>
+                    </a:p>
+                  </a:txBody>
+                  <a:tcPr/>
+                </a:tc>
+                <a:extLst>
+                  <a:ext uri="{0D108BD9-81ED-4DB2-BD59-A6C34878D82A}">
+                    <a16:rowId xmlns:a16="http://schemas.microsoft.com/office/drawing/2014/main" val="2891209899"/>
+                  </a:ext>
+                </a:extLst>
+              </a:tr>
+              <a:tr h="775196">
+                <a:tc>
+                  <a:txBody>
+                    <a:bodyPr/>
+                    <a:lstStyle/>
+                    <a:p>
+                      <a:pPr marL="0" marR="0" lvl="0" indent="0" algn="l" defTabSz="914400" rtl="0" eaLnBrk="1" fontAlgn="auto" latinLnBrk="0" hangingPunct="1">
+                        <a:lnSpc>
+                          <a:spcPct val="100000"/>
+                        </a:lnSpc>
+                        <a:spcBef>
+                          <a:spcPts val="0"/>
+                        </a:spcBef>
+                        <a:spcAft>
+                          <a:spcPts val="0"/>
+                        </a:spcAft>
+                        <a:buClrTx/>
+                        <a:buSzTx/>
+                        <a:buFontTx/>
+                        <a:buNone/>
+                        <a:tabLst/>
+                        <a:defRPr/>
+                      </a:pPr>
+                      <a:r>
+                        <a:rPr lang="fr-FR" sz="1000" dirty="0"/>
+                        <a:t>Erreur humaine lors du déploiement d’une mise à jour.</a:t>
+                      </a:r>
+                    </a:p>
+                    <a:p>
+                      <a:endParaRPr lang="fr-FR" sz="1000" dirty="0"/>
+                    </a:p>
+                  </a:txBody>
+                  <a:tcPr/>
+                </a:tc>
+                <a:tc>
+                  <a:txBody>
+                    <a:bodyPr/>
+                    <a:lstStyle/>
+                    <a:p>
+                      <a:pPr algn="ctr"/>
+                      <a:r>
+                        <a:rPr lang="fr-FR" sz="2000" dirty="0"/>
+                        <a:t>1h</a:t>
+                      </a:r>
+                    </a:p>
+                  </a:txBody>
+                  <a:tcPr/>
+                </a:tc>
+                <a:tc>
+                  <a:txBody>
+                    <a:bodyPr/>
+                    <a:lstStyle/>
+                    <a:p>
+                      <a:pPr algn="ctr"/>
+                      <a:r>
+                        <a:rPr lang="fr-FR" sz="2000" dirty="0"/>
+                        <a:t>15 min</a:t>
+                      </a:r>
+                    </a:p>
+                  </a:txBody>
+                  <a:tcPr/>
+                </a:tc>
+                <a:extLst>
+                  <a:ext uri="{0D108BD9-81ED-4DB2-BD59-A6C34878D82A}">
+                    <a16:rowId xmlns:a16="http://schemas.microsoft.com/office/drawing/2014/main" val="4065536059"/>
+                  </a:ext>
+                </a:extLst>
+              </a:tr>
+              <a:tr h="886739">
+                <a:tc>
+                  <a:txBody>
+                    <a:bodyPr/>
+                    <a:lstStyle/>
+                    <a:p>
+                      <a:r>
+                        <a:rPr lang="fr-FR" sz="1000"/>
+                        <a:t>Perte de connectivité Internet dans les bureaux</a:t>
+                      </a:r>
+                      <a:endParaRPr lang="fr-FR" sz="1000" dirty="0"/>
+                    </a:p>
+                  </a:txBody>
+                  <a:tcPr/>
+                </a:tc>
+                <a:tc>
+                  <a:txBody>
+                    <a:bodyPr/>
+                    <a:lstStyle/>
+                    <a:p>
+                      <a:pPr algn="ctr"/>
+                      <a:r>
+                        <a:rPr lang="fr-FR" sz="2000" dirty="0"/>
+                        <a:t>3h</a:t>
+                      </a:r>
+                    </a:p>
+                  </a:txBody>
+                  <a:tcPr/>
+                </a:tc>
+                <a:tc>
+                  <a:txBody>
+                    <a:bodyPr/>
+                    <a:lstStyle/>
+                    <a:p>
+                      <a:pPr algn="ctr"/>
+                      <a:r>
+                        <a:rPr lang="fr-FR" sz="2000" dirty="0"/>
+                        <a:t>? (1h)</a:t>
+                      </a:r>
+                    </a:p>
+                  </a:txBody>
+                  <a:tcPr/>
+                </a:tc>
+                <a:extLst>
+                  <a:ext uri="{0D108BD9-81ED-4DB2-BD59-A6C34878D82A}">
+                    <a16:rowId xmlns:a16="http://schemas.microsoft.com/office/drawing/2014/main" val="103921020"/>
+                  </a:ext>
+                </a:extLst>
+              </a:tr>
+              <a:tr h="853526">
+                <a:tc>
+                  <a:txBody>
+                    <a:bodyPr/>
+                    <a:lstStyle/>
+                    <a:p>
+                      <a:r>
+                        <a:rPr lang="fr-FR" sz="1000"/>
+                        <a:t>Bad buzz ou crise de à un incident communication suite technique</a:t>
+                      </a:r>
+                      <a:endParaRPr lang="fr-FR" sz="1000" dirty="0"/>
+                    </a:p>
+                  </a:txBody>
+                  <a:tcPr/>
+                </a:tc>
+                <a:tc>
+                  <a:txBody>
+                    <a:bodyPr/>
+                    <a:lstStyle/>
+                    <a:p>
+                      <a:pPr algn="ctr"/>
+                      <a:r>
+                        <a:rPr lang="fr-FR" sz="2000" dirty="0"/>
+                        <a:t>2h</a:t>
+                      </a:r>
+                    </a:p>
+                  </a:txBody>
+                  <a:tcPr/>
+                </a:tc>
+                <a:tc>
+                  <a:txBody>
+                    <a:bodyPr/>
+                    <a:lstStyle/>
+                    <a:p>
+                      <a:pPr marL="0" marR="0" lvl="0" indent="0" algn="ctr" defTabSz="914400" rtl="0" eaLnBrk="1" fontAlgn="auto" latinLnBrk="0" hangingPunct="1">
+                        <a:lnSpc>
+                          <a:spcPct val="100000"/>
+                        </a:lnSpc>
+                        <a:spcBef>
+                          <a:spcPts val="0"/>
+                        </a:spcBef>
+                        <a:spcAft>
+                          <a:spcPts val="0"/>
+                        </a:spcAft>
+                        <a:buClrTx/>
+                        <a:buSzTx/>
+                        <a:buFontTx/>
+                        <a:buNone/>
+                        <a:tabLst/>
+                        <a:defRPr/>
+                      </a:pPr>
+                      <a:r>
+                        <a:rPr lang="fr-FR" sz="2000" dirty="0"/>
+                        <a:t>? (1h)</a:t>
+                      </a:r>
+                    </a:p>
+                  </a:txBody>
+                  <a:tcPr/>
+                </a:tc>
+                <a:extLst>
+                  <a:ext uri="{0D108BD9-81ED-4DB2-BD59-A6C34878D82A}">
+                    <a16:rowId xmlns:a16="http://schemas.microsoft.com/office/drawing/2014/main" val="322229969"/>
+                  </a:ext>
+                </a:extLst>
+              </a:tr>
+            </a:tbl>
+          </a:graphicData>
+        </a:graphic>
+      </p:graphicFrame>
+    </p:spTree>
+    <p:extLst>
+      <p:ext uri="{BB962C8B-B14F-4D97-AF65-F5344CB8AC3E}">
+        <p14:creationId xmlns:p14="http://schemas.microsoft.com/office/powerpoint/2010/main" val="501046550"/>
       </p:ext>
     </p:extLst>
   </p:cSld>

--- a/TP6_Exploitation_faille_0day_Lilian_Ander.pptx
+++ b/TP6_Exploitation_faille_0day_Lilian_Ander.pptx
@@ -5,17 +5,15 @@
     <p:sldMasterId id="2147483648" r:id="rId1"/>
   </p:sldMasterIdLst>
   <p:notesMasterIdLst>
-    <p:notesMasterId r:id="rId10"/>
+    <p:notesMasterId r:id="rId8"/>
   </p:notesMasterIdLst>
   <p:sldIdLst>
     <p:sldId id="256" r:id="rId2"/>
     <p:sldId id="257" r:id="rId3"/>
     <p:sldId id="258" r:id="rId4"/>
     <p:sldId id="259" r:id="rId5"/>
-    <p:sldId id="260" r:id="rId6"/>
-    <p:sldId id="261" r:id="rId7"/>
-    <p:sldId id="262" r:id="rId8"/>
-    <p:sldId id="263" r:id="rId9"/>
+    <p:sldId id="262" r:id="rId6"/>
+    <p:sldId id="263" r:id="rId7"/>
   </p:sldIdLst>
   <p:sldSz cx="12192000" cy="6858000"/>
   <p:notesSz cx="6858000" cy="9144000"/>
@@ -4631,467 +4629,6 @@
 </file>
 
 <file path=ppt/slides/slide5.xml><?xml version="1.0" encoding="utf-8"?>
-<p:sld xmlns:a="http://schemas.openxmlformats.org/drawingml/2006/main" xmlns:r="http://schemas.openxmlformats.org/officeDocument/2006/relationships" xmlns:p="http://schemas.openxmlformats.org/presentationml/2006/main">
-  <p:cSld>
-    <p:spTree>
-      <p:nvGrpSpPr>
-        <p:cNvPr id="1" name=""/>
-        <p:cNvGrpSpPr/>
-        <p:nvPr/>
-      </p:nvGrpSpPr>
-      <p:grpSpPr>
-        <a:xfrm>
-          <a:off x="0" y="0"/>
-          <a:ext cx="0" cy="0"/>
-          <a:chOff x="0" y="0"/>
-          <a:chExt cx="0" cy="0"/>
-        </a:xfrm>
-      </p:grpSpPr>
-      <p:sp>
-        <p:nvSpPr>
-          <p:cNvPr id="2" name="Titre 1">
-            <a:extLst>
-              <a:ext uri="{FF2B5EF4-FFF2-40B4-BE49-F238E27FC236}">
-                <a16:creationId xmlns:a16="http://schemas.microsoft.com/office/drawing/2014/main" id="{49A0B714-C11C-AF13-9F12-D3BCF8F9AD22}"/>
-              </a:ext>
-            </a:extLst>
-          </p:cNvPr>
-          <p:cNvSpPr>
-            <a:spLocks noGrp="1"/>
-          </p:cNvSpPr>
-          <p:nvPr>
-            <p:ph type="title"/>
-          </p:nvPr>
-        </p:nvSpPr>
-        <p:spPr>
-          <a:xfrm>
-            <a:off x="838200" y="216269"/>
-            <a:ext cx="10515600" cy="1325563"/>
-          </a:xfrm>
-        </p:spPr>
-        <p:txBody>
-          <a:bodyPr>
-            <a:normAutofit/>
-          </a:bodyPr>
-          <a:lstStyle/>
-          <a:p>
-            <a:pPr algn="ctr"/>
-            <a:r>
-              <a:rPr lang="fr-FR" sz="3600" dirty="0"/>
-              <a:t>Liste des risques majeurs classé par gravité</a:t>
-            </a:r>
-          </a:p>
-        </p:txBody>
-      </p:sp>
-      <p:sp>
-        <p:nvSpPr>
-          <p:cNvPr id="3" name="Espace réservé du contenu 2">
-            <a:extLst>
-              <a:ext uri="{FF2B5EF4-FFF2-40B4-BE49-F238E27FC236}">
-                <a16:creationId xmlns:a16="http://schemas.microsoft.com/office/drawing/2014/main" id="{84B7D059-9A98-E80F-2D9A-02B06E9FB341}"/>
-              </a:ext>
-            </a:extLst>
-          </p:cNvPr>
-          <p:cNvSpPr>
-            <a:spLocks noGrp="1"/>
-          </p:cNvSpPr>
-          <p:nvPr>
-            <p:ph idx="1"/>
-          </p:nvPr>
-        </p:nvSpPr>
-        <p:spPr>
-          <a:xfrm>
-            <a:off x="838200" y="1541832"/>
-            <a:ext cx="10515600" cy="4518284"/>
-          </a:xfrm>
-        </p:spPr>
-        <p:txBody>
-          <a:bodyPr>
-            <a:normAutofit fontScale="85000" lnSpcReduction="20000"/>
-          </a:bodyPr>
-          <a:lstStyle/>
-          <a:p>
-            <a:pPr marL="0" indent="0">
-              <a:buNone/>
-            </a:pPr>
-            <a:r>
-              <a:rPr lang="fr-FR" dirty="0"/>
-              <a:t>1. Cyberattaque (ransomware, vol de données utilisateurs).</a:t>
-            </a:r>
-          </a:p>
-          <a:p>
-            <a:pPr marL="514350" indent="-514350">
-              <a:buAutoNum type="arabicPeriod"/>
-            </a:pPr>
-            <a:endParaRPr lang="fr-FR" dirty="0"/>
-          </a:p>
-          <a:p>
-            <a:pPr marL="0" indent="0">
-              <a:buNone/>
-            </a:pPr>
-            <a:r>
-              <a:rPr lang="fr-FR" dirty="0"/>
-              <a:t>2. Indisponibilité prolongée de l’application mobile.</a:t>
-            </a:r>
-          </a:p>
-          <a:p>
-            <a:pPr marL="0" indent="0">
-              <a:buNone/>
-            </a:pPr>
-            <a:endParaRPr lang="fr-FR" dirty="0"/>
-          </a:p>
-          <a:p>
-            <a:pPr marL="0" indent="0">
-              <a:buNone/>
-            </a:pPr>
-            <a:r>
-              <a:rPr lang="fr-FR" dirty="0"/>
-              <a:t>3. Panne du cloud provider ou perte d’accès au serveur.</a:t>
-            </a:r>
-          </a:p>
-          <a:p>
-            <a:pPr marL="0" indent="0">
-              <a:buNone/>
-            </a:pPr>
-            <a:endParaRPr lang="fr-FR" dirty="0"/>
-          </a:p>
-          <a:p>
-            <a:pPr marL="0" indent="0">
-              <a:buNone/>
-            </a:pPr>
-            <a:r>
-              <a:rPr lang="fr-FR" dirty="0"/>
-              <a:t>4. Erreur humaine lors du déploiement d’une mise à jour.</a:t>
-            </a:r>
-          </a:p>
-          <a:p>
-            <a:pPr marL="0" indent="0">
-              <a:buNone/>
-            </a:pPr>
-            <a:endParaRPr lang="fr-FR" dirty="0"/>
-          </a:p>
-          <a:p>
-            <a:pPr marL="0" indent="0">
-              <a:buNone/>
-            </a:pPr>
-            <a:r>
-              <a:rPr lang="fr-FR" dirty="0"/>
-              <a:t>5. Perte de connectivité Internet dans les bureaux.</a:t>
-            </a:r>
-          </a:p>
-          <a:p>
-            <a:pPr marL="0" indent="0">
-              <a:buNone/>
-            </a:pPr>
-            <a:endParaRPr lang="fr-FR" dirty="0"/>
-          </a:p>
-          <a:p>
-            <a:pPr marL="0" indent="0">
-              <a:buNone/>
-            </a:pPr>
-            <a:r>
-              <a:rPr lang="fr-FR" dirty="0"/>
-              <a:t>6. Bad buzz ou crise de à un incident communication suite technique.</a:t>
-            </a:r>
-          </a:p>
-          <a:p>
-            <a:pPr marL="0" indent="0">
-              <a:buNone/>
-            </a:pPr>
-            <a:endParaRPr lang="fr-FR" dirty="0"/>
-          </a:p>
-        </p:txBody>
-      </p:sp>
-      <p:sp>
-        <p:nvSpPr>
-          <p:cNvPr id="4" name="Espace réservé du pied de page 3">
-            <a:extLst>
-              <a:ext uri="{FF2B5EF4-FFF2-40B4-BE49-F238E27FC236}">
-                <a16:creationId xmlns:a16="http://schemas.microsoft.com/office/drawing/2014/main" id="{20582856-CA36-4610-4E3E-4FB4B882EDCD}"/>
-              </a:ext>
-            </a:extLst>
-          </p:cNvPr>
-          <p:cNvSpPr>
-            <a:spLocks noGrp="1"/>
-          </p:cNvSpPr>
-          <p:nvPr>
-            <p:ph type="ftr" sz="quarter" idx="11"/>
-          </p:nvPr>
-        </p:nvSpPr>
-        <p:spPr/>
-        <p:txBody>
-          <a:bodyPr/>
-          <a:lstStyle/>
-          <a:p>
-            <a:r>
-              <a:rPr lang="fr-FR"/>
-              <a:t>PICIURA Ander - MIRABEL Lilian</a:t>
-            </a:r>
-          </a:p>
-        </p:txBody>
-      </p:sp>
-      <p:sp>
-        <p:nvSpPr>
-          <p:cNvPr id="5" name="Espace réservé du numéro de diapositive 4">
-            <a:extLst>
-              <a:ext uri="{FF2B5EF4-FFF2-40B4-BE49-F238E27FC236}">
-                <a16:creationId xmlns:a16="http://schemas.microsoft.com/office/drawing/2014/main" id="{72CDA127-FE27-DE2D-54FD-DB5D50C95C61}"/>
-              </a:ext>
-            </a:extLst>
-          </p:cNvPr>
-          <p:cNvSpPr>
-            <a:spLocks noGrp="1"/>
-          </p:cNvSpPr>
-          <p:nvPr>
-            <p:ph type="sldNum" sz="quarter" idx="12"/>
-          </p:nvPr>
-        </p:nvSpPr>
-        <p:spPr/>
-        <p:txBody>
-          <a:bodyPr/>
-          <a:lstStyle/>
-          <a:p>
-            <a:fld id="{EF144E42-BC24-D442-AFF0-55EAB46336FB}" type="slidenum">
-              <a:rPr lang="fr-FR" smtClean="0"/>
-              <a:t>5</a:t>
-            </a:fld>
-            <a:endParaRPr lang="fr-FR"/>
-          </a:p>
-        </p:txBody>
-      </p:sp>
-    </p:spTree>
-    <p:extLst>
-      <p:ext uri="{BB962C8B-B14F-4D97-AF65-F5344CB8AC3E}">
-        <p14:creationId xmlns:p14="http://schemas.microsoft.com/office/powerpoint/2010/main" val="1048059859"/>
-      </p:ext>
-    </p:extLst>
-  </p:cSld>
-  <p:clrMapOvr>
-    <a:masterClrMapping/>
-  </p:clrMapOvr>
-</p:sld>
-</file>
-
-<file path=ppt/slides/slide6.xml><?xml version="1.0" encoding="utf-8"?>
-<p:sld xmlns:a="http://schemas.openxmlformats.org/drawingml/2006/main" xmlns:r="http://schemas.openxmlformats.org/officeDocument/2006/relationships" xmlns:p="http://schemas.openxmlformats.org/presentationml/2006/main">
-  <p:cSld>
-    <p:spTree>
-      <p:nvGrpSpPr>
-        <p:cNvPr id="1" name="">
-          <a:extLst>
-            <a:ext uri="{FF2B5EF4-FFF2-40B4-BE49-F238E27FC236}">
-              <a16:creationId xmlns:a16="http://schemas.microsoft.com/office/drawing/2014/main" id="{1987E15A-6DD4-A43C-BC94-3C9B76FE9E5D}"/>
-            </a:ext>
-          </a:extLst>
-        </p:cNvPr>
-        <p:cNvGrpSpPr/>
-        <p:nvPr/>
-      </p:nvGrpSpPr>
-      <p:grpSpPr>
-        <a:xfrm>
-          <a:off x="0" y="0"/>
-          <a:ext cx="0" cy="0"/>
-          <a:chOff x="0" y="0"/>
-          <a:chExt cx="0" cy="0"/>
-        </a:xfrm>
-      </p:grpSpPr>
-      <p:sp>
-        <p:nvSpPr>
-          <p:cNvPr id="2" name="Titre 1">
-            <a:extLst>
-              <a:ext uri="{FF2B5EF4-FFF2-40B4-BE49-F238E27FC236}">
-                <a16:creationId xmlns:a16="http://schemas.microsoft.com/office/drawing/2014/main" id="{ABA5A70F-FCCD-3243-BAE1-9B301AC91A26}"/>
-              </a:ext>
-            </a:extLst>
-          </p:cNvPr>
-          <p:cNvSpPr>
-            <a:spLocks noGrp="1"/>
-          </p:cNvSpPr>
-          <p:nvPr>
-            <p:ph type="title"/>
-          </p:nvPr>
-        </p:nvSpPr>
-        <p:spPr>
-          <a:xfrm>
-            <a:off x="838200" y="216269"/>
-            <a:ext cx="10515600" cy="1325563"/>
-          </a:xfrm>
-        </p:spPr>
-        <p:txBody>
-          <a:bodyPr>
-            <a:normAutofit/>
-          </a:bodyPr>
-          <a:lstStyle/>
-          <a:p>
-            <a:pPr algn="ctr"/>
-            <a:r>
-              <a:rPr lang="fr-FR" sz="3600" dirty="0"/>
-              <a:t>Liste des risques majeurs classé par probabilité</a:t>
-            </a:r>
-          </a:p>
-        </p:txBody>
-      </p:sp>
-      <p:sp>
-        <p:nvSpPr>
-          <p:cNvPr id="3" name="Espace réservé du contenu 2">
-            <a:extLst>
-              <a:ext uri="{FF2B5EF4-FFF2-40B4-BE49-F238E27FC236}">
-                <a16:creationId xmlns:a16="http://schemas.microsoft.com/office/drawing/2014/main" id="{AB8A1869-7A0C-8F1E-4536-6058FB1AEEF8}"/>
-              </a:ext>
-            </a:extLst>
-          </p:cNvPr>
-          <p:cNvSpPr>
-            <a:spLocks noGrp="1"/>
-          </p:cNvSpPr>
-          <p:nvPr>
-            <p:ph idx="1"/>
-          </p:nvPr>
-        </p:nvSpPr>
-        <p:spPr>
-          <a:xfrm>
-            <a:off x="838200" y="1541832"/>
-            <a:ext cx="10515600" cy="4635131"/>
-          </a:xfrm>
-        </p:spPr>
-        <p:txBody>
-          <a:bodyPr/>
-          <a:lstStyle/>
-          <a:p>
-            <a:pPr marL="0" indent="0">
-              <a:buNone/>
-            </a:pPr>
-            <a:r>
-              <a:rPr lang="fr-FR" dirty="0"/>
-              <a:t>3. Perte de connectivité Internet dans les bureaux.</a:t>
-            </a:r>
-          </a:p>
-          <a:p>
-            <a:pPr marL="0" indent="0">
-              <a:buNone/>
-            </a:pPr>
-            <a:r>
-              <a:rPr lang="fr-FR" dirty="0"/>
-              <a:t>1. Indisponibilité prolongée de l’application mobile.</a:t>
-            </a:r>
-          </a:p>
-          <a:p>
-            <a:pPr marL="0" indent="0">
-              <a:buNone/>
-            </a:pPr>
-            <a:r>
-              <a:rPr lang="fr-FR" dirty="0"/>
-              <a:t>2. Erreur humaine lors du déploiement d’une mise à jour.</a:t>
-            </a:r>
-          </a:p>
-          <a:p>
-            <a:pPr marL="0" indent="0">
-              <a:buNone/>
-            </a:pPr>
-            <a:r>
-              <a:rPr lang="fr-FR" dirty="0"/>
-              <a:t>4. Cyberattaque (ransomware, vol de données utilisateurs).</a:t>
-            </a:r>
-          </a:p>
-          <a:p>
-            <a:pPr marL="0" indent="0">
-              <a:buNone/>
-            </a:pPr>
-            <a:r>
-              <a:rPr lang="fr-FR" dirty="0"/>
-              <a:t>5. Panne du cloud provider ou perte d’accès au serveur.</a:t>
-            </a:r>
-          </a:p>
-          <a:p>
-            <a:pPr marL="0" indent="0">
-              <a:buNone/>
-            </a:pPr>
-            <a:r>
-              <a:rPr lang="fr-FR" dirty="0"/>
-              <a:t>6. Bad buzz ou crise de communication suite à un incident</a:t>
-            </a:r>
-          </a:p>
-          <a:p>
-            <a:pPr marL="0" indent="0">
-              <a:buNone/>
-            </a:pPr>
-            <a:r>
-              <a:rPr lang="fr-FR" dirty="0"/>
-              <a:t>technique.</a:t>
-            </a:r>
-          </a:p>
-        </p:txBody>
-      </p:sp>
-      <p:sp>
-        <p:nvSpPr>
-          <p:cNvPr id="4" name="Espace réservé du pied de page 3">
-            <a:extLst>
-              <a:ext uri="{FF2B5EF4-FFF2-40B4-BE49-F238E27FC236}">
-                <a16:creationId xmlns:a16="http://schemas.microsoft.com/office/drawing/2014/main" id="{30226A48-77C0-E18E-0307-6F56FFAED123}"/>
-              </a:ext>
-            </a:extLst>
-          </p:cNvPr>
-          <p:cNvSpPr>
-            <a:spLocks noGrp="1"/>
-          </p:cNvSpPr>
-          <p:nvPr>
-            <p:ph type="ftr" sz="quarter" idx="11"/>
-          </p:nvPr>
-        </p:nvSpPr>
-        <p:spPr/>
-        <p:txBody>
-          <a:bodyPr/>
-          <a:lstStyle/>
-          <a:p>
-            <a:r>
-              <a:rPr lang="fr-FR"/>
-              <a:t>PICIURA Ander - MIRABEL Lilian</a:t>
-            </a:r>
-          </a:p>
-        </p:txBody>
-      </p:sp>
-      <p:sp>
-        <p:nvSpPr>
-          <p:cNvPr id="5" name="Espace réservé du numéro de diapositive 4">
-            <a:extLst>
-              <a:ext uri="{FF2B5EF4-FFF2-40B4-BE49-F238E27FC236}">
-                <a16:creationId xmlns:a16="http://schemas.microsoft.com/office/drawing/2014/main" id="{B0E3E69D-48C8-033B-D0E8-78B3253C2DA5}"/>
-              </a:ext>
-            </a:extLst>
-          </p:cNvPr>
-          <p:cNvSpPr>
-            <a:spLocks noGrp="1"/>
-          </p:cNvSpPr>
-          <p:nvPr>
-            <p:ph type="sldNum" sz="quarter" idx="12"/>
-          </p:nvPr>
-        </p:nvSpPr>
-        <p:spPr/>
-        <p:txBody>
-          <a:bodyPr/>
-          <a:lstStyle/>
-          <a:p>
-            <a:fld id="{EF144E42-BC24-D442-AFF0-55EAB46336FB}" type="slidenum">
-              <a:rPr lang="fr-FR" smtClean="0"/>
-              <a:t>6</a:t>
-            </a:fld>
-            <a:endParaRPr lang="fr-FR"/>
-          </a:p>
-        </p:txBody>
-      </p:sp>
-    </p:spTree>
-    <p:extLst>
-      <p:ext uri="{BB962C8B-B14F-4D97-AF65-F5344CB8AC3E}">
-        <p14:creationId xmlns:p14="http://schemas.microsoft.com/office/powerpoint/2010/main" val="2010805261"/>
-      </p:ext>
-    </p:extLst>
-  </p:cSld>
-  <p:clrMapOvr>
-    <a:masterClrMapping/>
-  </p:clrMapOvr>
-</p:sld>
-</file>
-
-<file path=ppt/slides/slide7.xml><?xml version="1.0" encoding="utf-8"?>
 <p:sld xmlns:a="http://schemas.openxmlformats.org/drawingml/2006/main" xmlns:r="http://schemas.openxmlformats.org/officeDocument/2006/relationships" xmlns:p="http://schemas.openxmlformats.org/presentationml/2006/main">
   <p:cSld>
     <p:spTree>
@@ -5821,7 +5358,7 @@
           <a:p>
             <a:fld id="{EF144E42-BC24-D442-AFF0-55EAB46336FB}" type="slidenum">
               <a:rPr lang="fr-FR" smtClean="0"/>
-              <a:t>7</a:t>
+              <a:t>5</a:t>
             </a:fld>
             <a:endParaRPr lang="fr-FR"/>
           </a:p>
@@ -5840,7 +5377,7 @@
 </p:sld>
 </file>
 
-<file path=ppt/slides/slide8.xml><?xml version="1.0" encoding="utf-8"?>
+<file path=ppt/slides/slide6.xml><?xml version="1.0" encoding="utf-8"?>
 <p:sld xmlns:a="http://schemas.openxmlformats.org/drawingml/2006/main" xmlns:r="http://schemas.openxmlformats.org/officeDocument/2006/relationships" xmlns:p="http://schemas.openxmlformats.org/presentationml/2006/main">
   <p:cSld>
     <p:spTree>
@@ -5908,7 +5445,7 @@
           <a:p>
             <a:fld id="{EF144E42-BC24-D442-AFF0-55EAB46336FB}" type="slidenum">
               <a:rPr lang="fr-FR" smtClean="0"/>
-              <a:t>8</a:t>
+              <a:t>6</a:t>
             </a:fld>
             <a:endParaRPr lang="fr-FR"/>
           </a:p>

--- a/TP6_Exploitation_faille_0day_Lilian_Ander.pptx
+++ b/TP6_Exploitation_faille_0day_Lilian_Ander.pptx
@@ -5,7 +5,7 @@
     <p:sldMasterId id="2147483648" r:id="rId1"/>
   </p:sldMasterIdLst>
   <p:notesMasterIdLst>
-    <p:notesMasterId r:id="rId8"/>
+    <p:notesMasterId r:id="rId9"/>
   </p:notesMasterIdLst>
   <p:sldIdLst>
     <p:sldId id="256" r:id="rId2"/>
@@ -14,6 +14,7 @@
     <p:sldId id="259" r:id="rId5"/>
     <p:sldId id="262" r:id="rId6"/>
     <p:sldId id="263" r:id="rId7"/>
+    <p:sldId id="264" r:id="rId8"/>
   </p:sldIdLst>
   <p:sldSz cx="12192000" cy="6858000"/>
   <p:notesSz cx="6858000" cy="9144000"/>
@@ -5925,6 +5926,519 @@
     <p:extLst>
       <p:ext uri="{BB962C8B-B14F-4D97-AF65-F5344CB8AC3E}">
         <p14:creationId xmlns:p14="http://schemas.microsoft.com/office/powerpoint/2010/main" val="501046550"/>
+      </p:ext>
+    </p:extLst>
+  </p:cSld>
+  <p:clrMapOvr>
+    <a:masterClrMapping/>
+  </p:clrMapOvr>
+</p:sld>
+</file>
+
+<file path=ppt/slides/slide7.xml><?xml version="1.0" encoding="utf-8"?>
+<p:sld xmlns:a="http://schemas.openxmlformats.org/drawingml/2006/main" xmlns:r="http://schemas.openxmlformats.org/officeDocument/2006/relationships" xmlns:p="http://schemas.openxmlformats.org/presentationml/2006/main">
+  <p:cSld>
+    <p:spTree>
+      <p:nvGrpSpPr>
+        <p:cNvPr id="1" name=""/>
+        <p:cNvGrpSpPr/>
+        <p:nvPr/>
+      </p:nvGrpSpPr>
+      <p:grpSpPr>
+        <a:xfrm>
+          <a:off x="0" y="0"/>
+          <a:ext cx="0" cy="0"/>
+          <a:chOff x="0" y="0"/>
+          <a:chExt cx="0" cy="0"/>
+        </a:xfrm>
+      </p:grpSpPr>
+      <p:sp>
+        <p:nvSpPr>
+          <p:cNvPr id="2" name="Titre 1">
+            <a:extLst>
+              <a:ext uri="{FF2B5EF4-FFF2-40B4-BE49-F238E27FC236}">
+                <a16:creationId xmlns:a16="http://schemas.microsoft.com/office/drawing/2014/main" id="{A4C0BAC4-6283-8E82-C4DC-E470683EBB61}"/>
+              </a:ext>
+            </a:extLst>
+          </p:cNvPr>
+          <p:cNvSpPr>
+            <a:spLocks noGrp="1"/>
+          </p:cNvSpPr>
+          <p:nvPr>
+            <p:ph type="title"/>
+          </p:nvPr>
+        </p:nvSpPr>
+        <p:spPr>
+          <a:xfrm>
+            <a:off x="838200" y="238770"/>
+            <a:ext cx="10515600" cy="795632"/>
+          </a:xfrm>
+        </p:spPr>
+        <p:txBody>
+          <a:bodyPr/>
+          <a:lstStyle/>
+          <a:p>
+            <a:r>
+              <a:rPr lang="fr-FR" dirty="0"/>
+              <a:t>Plan de Continuité d’Activité </a:t>
+            </a:r>
+          </a:p>
+        </p:txBody>
+      </p:sp>
+      <p:sp>
+        <p:nvSpPr>
+          <p:cNvPr id="3" name="Espace réservé du contenu 2">
+            <a:extLst>
+              <a:ext uri="{FF2B5EF4-FFF2-40B4-BE49-F238E27FC236}">
+                <a16:creationId xmlns:a16="http://schemas.microsoft.com/office/drawing/2014/main" id="{972A0CA3-7FF7-C5AF-4129-561C37E2EE17}"/>
+              </a:ext>
+            </a:extLst>
+          </p:cNvPr>
+          <p:cNvSpPr>
+            <a:spLocks noGrp="1"/>
+          </p:cNvSpPr>
+          <p:nvPr>
+            <p:ph idx="1"/>
+          </p:nvPr>
+        </p:nvSpPr>
+        <p:spPr>
+          <a:xfrm>
+            <a:off x="838200" y="1163637"/>
+            <a:ext cx="10515600" cy="4530725"/>
+          </a:xfrm>
+        </p:spPr>
+        <p:txBody>
+          <a:bodyPr>
+            <a:normAutofit/>
+          </a:bodyPr>
+          <a:lstStyle/>
+          <a:p>
+            <a:pPr marL="0" indent="0">
+              <a:buNone/>
+            </a:pPr>
+            <a:r>
+              <a:rPr lang="fr-FR" sz="1800" b="1" dirty="0"/>
+              <a:t>Définissez les activités vitales à maintenir en cas d’incident</a:t>
+            </a:r>
+          </a:p>
+          <a:p>
+            <a:pPr marL="0" indent="0">
+              <a:buNone/>
+            </a:pPr>
+            <a:r>
+              <a:rPr lang="fr-FR" sz="1400" dirty="0"/>
+              <a:t>- La disponibilité des application Mobile et Web</a:t>
+            </a:r>
+          </a:p>
+          <a:p>
+            <a:pPr marL="0" indent="0">
+              <a:buNone/>
+            </a:pPr>
+            <a:r>
+              <a:rPr lang="fr-FR" sz="1400" dirty="0"/>
+              <a:t>- Les systèmes de paiement</a:t>
+            </a:r>
+          </a:p>
+          <a:p>
+            <a:pPr marL="0" indent="0">
+              <a:buNone/>
+            </a:pPr>
+            <a:r>
+              <a:rPr lang="fr-FR" sz="1400" dirty="0"/>
+              <a:t>- Les bases de données</a:t>
+            </a:r>
+          </a:p>
+          <a:p>
+            <a:pPr marL="0" indent="0">
+              <a:buNone/>
+            </a:pPr>
+            <a:endParaRPr lang="fr-FR" sz="1000" dirty="0"/>
+          </a:p>
+          <a:p>
+            <a:pPr marL="0" indent="0">
+              <a:buNone/>
+            </a:pPr>
+            <a:r>
+              <a:rPr lang="fr-FR" sz="1800" b="1" dirty="0"/>
+              <a:t>Proposez des moyens de continuité minimale</a:t>
+            </a:r>
+          </a:p>
+          <a:p>
+            <a:pPr marL="0" indent="0">
+              <a:buNone/>
+            </a:pPr>
+            <a:r>
+              <a:rPr lang="fr-FR" sz="1800" dirty="0"/>
+              <a:t>-</a:t>
+            </a:r>
+            <a:r>
+              <a:rPr lang="fr-FR" sz="1400" dirty="0"/>
+              <a:t> Des serveurs de secours</a:t>
+            </a:r>
+          </a:p>
+          <a:p>
+            <a:pPr marL="0" indent="0">
+              <a:buNone/>
+            </a:pPr>
+            <a:r>
+              <a:rPr lang="fr-FR" sz="1400" dirty="0"/>
+              <a:t>- Des sauvegardes régulières prêt à prendre le relais</a:t>
+            </a:r>
+          </a:p>
+          <a:p>
+            <a:pPr marL="0" indent="0">
+              <a:buNone/>
+            </a:pPr>
+            <a:r>
+              <a:rPr lang="fr-FR" sz="1400" dirty="0"/>
+              <a:t>- Autoriser le télétravail avec la mise en place d’un VPN</a:t>
+            </a:r>
+          </a:p>
+          <a:p>
+            <a:pPr marL="0" indent="0">
+              <a:buNone/>
+            </a:pPr>
+            <a:endParaRPr lang="fr-FR" sz="1000" dirty="0"/>
+          </a:p>
+          <a:p>
+            <a:pPr marL="0" indent="0">
+              <a:buNone/>
+            </a:pPr>
+            <a:r>
+              <a:rPr lang="fr-FR" sz="1800" b="1" dirty="0"/>
+              <a:t>Proposez des moyens de continuité minimale</a:t>
+            </a:r>
+          </a:p>
+          <a:p>
+            <a:pPr marL="0" indent="0">
+              <a:buNone/>
+            </a:pPr>
+            <a:endParaRPr lang="fr-FR" sz="1800" b="1" dirty="0"/>
+          </a:p>
+        </p:txBody>
+      </p:sp>
+      <p:sp>
+        <p:nvSpPr>
+          <p:cNvPr id="4" name="Espace réservé du pied de page 3">
+            <a:extLst>
+              <a:ext uri="{FF2B5EF4-FFF2-40B4-BE49-F238E27FC236}">
+                <a16:creationId xmlns:a16="http://schemas.microsoft.com/office/drawing/2014/main" id="{271C7A77-6469-5B6D-697C-48B1FA688F2F}"/>
+              </a:ext>
+            </a:extLst>
+          </p:cNvPr>
+          <p:cNvSpPr>
+            <a:spLocks noGrp="1"/>
+          </p:cNvSpPr>
+          <p:nvPr>
+            <p:ph type="ftr" sz="quarter" idx="11"/>
+          </p:nvPr>
+        </p:nvSpPr>
+        <p:spPr/>
+        <p:txBody>
+          <a:bodyPr/>
+          <a:lstStyle/>
+          <a:p>
+            <a:r>
+              <a:rPr lang="fr-FR"/>
+              <a:t>PICIURA Ander - MIRABEL Lilian</a:t>
+            </a:r>
+          </a:p>
+        </p:txBody>
+      </p:sp>
+      <p:sp>
+        <p:nvSpPr>
+          <p:cNvPr id="5" name="Espace réservé du numéro de diapositive 4">
+            <a:extLst>
+              <a:ext uri="{FF2B5EF4-FFF2-40B4-BE49-F238E27FC236}">
+                <a16:creationId xmlns:a16="http://schemas.microsoft.com/office/drawing/2014/main" id="{28289B22-5F4D-D01E-18E4-96039CE8E1AB}"/>
+              </a:ext>
+            </a:extLst>
+          </p:cNvPr>
+          <p:cNvSpPr>
+            <a:spLocks noGrp="1"/>
+          </p:cNvSpPr>
+          <p:nvPr>
+            <p:ph type="sldNum" sz="quarter" idx="12"/>
+          </p:nvPr>
+        </p:nvSpPr>
+        <p:spPr/>
+        <p:txBody>
+          <a:bodyPr/>
+          <a:lstStyle/>
+          <a:p>
+            <a:fld id="{EF144E42-BC24-D442-AFF0-55EAB46336FB}" type="slidenum">
+              <a:rPr lang="fr-FR" smtClean="0"/>
+              <a:t>7</a:t>
+            </a:fld>
+            <a:endParaRPr lang="fr-FR"/>
+          </a:p>
+        </p:txBody>
+      </p:sp>
+      <p:graphicFrame>
+        <p:nvGraphicFramePr>
+          <p:cNvPr id="6" name="Tableau 5">
+            <a:extLst>
+              <a:ext uri="{FF2B5EF4-FFF2-40B4-BE49-F238E27FC236}">
+                <a16:creationId xmlns:a16="http://schemas.microsoft.com/office/drawing/2014/main" id="{2B7E2238-892B-7FD8-065D-1CBDCD4B6AD6}"/>
+              </a:ext>
+            </a:extLst>
+          </p:cNvPr>
+          <p:cNvGraphicFramePr>
+            <a:graphicFrameLocks noGrp="1"/>
+          </p:cNvGraphicFramePr>
+          <p:nvPr>
+            <p:extLst>
+              <p:ext uri="{D42A27DB-BD31-4B8C-83A1-F6EECF244321}">
+                <p14:modId xmlns:p14="http://schemas.microsoft.com/office/powerpoint/2010/main" val="543018999"/>
+              </p:ext>
+            </p:extLst>
+          </p:nvPr>
+        </p:nvGraphicFramePr>
+        <p:xfrm>
+          <a:off x="6517054" y="3428999"/>
+          <a:ext cx="5674946" cy="3017520"/>
+        </p:xfrm>
+        <a:graphic>
+          <a:graphicData uri="http://schemas.openxmlformats.org/drawingml/2006/table">
+            <a:tbl>
+              <a:tblPr firstRow="1" bandRow="1">
+                <a:tableStyleId>{5C22544A-7EE6-4342-B048-85BDC9FD1C3A}</a:tableStyleId>
+              </a:tblPr>
+              <a:tblGrid>
+                <a:gridCol w="1922611">
+                  <a:extLst>
+                    <a:ext uri="{9D8B030D-6E8A-4147-A177-3AD203B41FA5}">
+                      <a16:colId xmlns:a16="http://schemas.microsoft.com/office/drawing/2014/main" val="228330033"/>
+                    </a:ext>
+                  </a:extLst>
+                </a:gridCol>
+                <a:gridCol w="3752335">
+                  <a:extLst>
+                    <a:ext uri="{9D8B030D-6E8A-4147-A177-3AD203B41FA5}">
+                      <a16:colId xmlns:a16="http://schemas.microsoft.com/office/drawing/2014/main" val="3130860348"/>
+                    </a:ext>
+                  </a:extLst>
+                </a:gridCol>
+              </a:tblGrid>
+              <a:tr h="266110">
+                <a:tc>
+                  <a:txBody>
+                    <a:bodyPr/>
+                    <a:lstStyle/>
+                    <a:p>
+                      <a:r>
+                        <a:rPr lang="fr-FR" dirty="0"/>
+                        <a:t>Acteurs</a:t>
+                      </a:r>
+                    </a:p>
+                  </a:txBody>
+                  <a:tcPr/>
+                </a:tc>
+                <a:tc>
+                  <a:txBody>
+                    <a:bodyPr/>
+                    <a:lstStyle/>
+                    <a:p>
+                      <a:r>
+                        <a:rPr lang="fr-FR" dirty="0"/>
+                        <a:t>Rôles</a:t>
+                      </a:r>
+                    </a:p>
+                  </a:txBody>
+                  <a:tcPr/>
+                </a:tc>
+                <a:extLst>
+                  <a:ext uri="{0D108BD9-81ED-4DB2-BD59-A6C34878D82A}">
+                    <a16:rowId xmlns:a16="http://schemas.microsoft.com/office/drawing/2014/main" val="407577561"/>
+                  </a:ext>
+                </a:extLst>
+              </a:tr>
+              <a:tr h="209303">
+                <a:tc>
+                  <a:txBody>
+                    <a:bodyPr/>
+                    <a:lstStyle/>
+                    <a:p>
+                      <a:r>
+                        <a:rPr lang="fr-FR" sz="1800" dirty="0"/>
+                        <a:t>Direction</a:t>
+                      </a:r>
+                      <a:endParaRPr lang="fr-FR" dirty="0"/>
+                    </a:p>
+                  </a:txBody>
+                  <a:tcPr/>
+                </a:tc>
+                <a:tc>
+                  <a:txBody>
+                    <a:bodyPr/>
+                    <a:lstStyle/>
+                    <a:p>
+                      <a:r>
+                        <a:rPr lang="fr-FR" dirty="0"/>
+                        <a:t>Prise de direction stratégique</a:t>
+                      </a:r>
+                    </a:p>
+                  </a:txBody>
+                  <a:tcPr/>
+                </a:tc>
+                <a:extLst>
+                  <a:ext uri="{0D108BD9-81ED-4DB2-BD59-A6C34878D82A}">
+                    <a16:rowId xmlns:a16="http://schemas.microsoft.com/office/drawing/2014/main" val="2661752065"/>
+                  </a:ext>
+                </a:extLst>
+              </a:tr>
+              <a:tr h="209303">
+                <a:tc>
+                  <a:txBody>
+                    <a:bodyPr/>
+                    <a:lstStyle/>
+                    <a:p>
+                      <a:r>
+                        <a:rPr lang="fr-FR" sz="1800" dirty="0"/>
+                        <a:t>DSI</a:t>
+                      </a:r>
+                      <a:endParaRPr lang="fr-FR" dirty="0"/>
+                    </a:p>
+                  </a:txBody>
+                  <a:tcPr/>
+                </a:tc>
+                <a:tc>
+                  <a:txBody>
+                    <a:bodyPr/>
+                    <a:lstStyle/>
+                    <a:p>
+                      <a:r>
+                        <a:rPr lang="fr-FR" dirty="0"/>
+                        <a:t>Gestion de l’IT est des solutions de continuité</a:t>
+                      </a:r>
+                    </a:p>
+                  </a:txBody>
+                  <a:tcPr/>
+                </a:tc>
+                <a:extLst>
+                  <a:ext uri="{0D108BD9-81ED-4DB2-BD59-A6C34878D82A}">
+                    <a16:rowId xmlns:a16="http://schemas.microsoft.com/office/drawing/2014/main" val="1045770869"/>
+                  </a:ext>
+                </a:extLst>
+              </a:tr>
+              <a:tr h="209303">
+                <a:tc>
+                  <a:txBody>
+                    <a:bodyPr/>
+                    <a:lstStyle/>
+                    <a:p>
+                      <a:r>
+                        <a:rPr lang="fr-FR" sz="1800" dirty="0"/>
+                        <a:t>DevOps</a:t>
+                      </a:r>
+                      <a:endParaRPr lang="fr-FR" dirty="0"/>
+                    </a:p>
+                  </a:txBody>
+                  <a:tcPr/>
+                </a:tc>
+                <a:tc>
+                  <a:txBody>
+                    <a:bodyPr/>
+                    <a:lstStyle/>
+                    <a:p>
+                      <a:r>
+                        <a:rPr lang="fr-FR" dirty="0"/>
+                        <a:t>Maintient de l’</a:t>
+                      </a:r>
+                      <a:r>
+                        <a:rPr lang="fr-FR" dirty="0" err="1"/>
+                        <a:t>infrastucture</a:t>
+                      </a:r>
+                      <a:r>
+                        <a:rPr lang="fr-FR" dirty="0"/>
+                        <a:t> et des incidents techniques</a:t>
+                      </a:r>
+                    </a:p>
+                  </a:txBody>
+                  <a:tcPr/>
+                </a:tc>
+                <a:extLst>
+                  <a:ext uri="{0D108BD9-81ED-4DB2-BD59-A6C34878D82A}">
+                    <a16:rowId xmlns:a16="http://schemas.microsoft.com/office/drawing/2014/main" val="3186470985"/>
+                  </a:ext>
+                </a:extLst>
+              </a:tr>
+              <a:tr h="209303">
+                <a:tc>
+                  <a:txBody>
+                    <a:bodyPr/>
+                    <a:lstStyle/>
+                    <a:p>
+                      <a:r>
+                        <a:rPr lang="fr-FR" sz="1800" dirty="0"/>
+                        <a:t>Support</a:t>
+                      </a:r>
+                      <a:endParaRPr lang="fr-FR" dirty="0"/>
+                    </a:p>
+                  </a:txBody>
+                  <a:tcPr/>
+                </a:tc>
+                <a:tc>
+                  <a:txBody>
+                    <a:bodyPr/>
+                    <a:lstStyle/>
+                    <a:p>
+                      <a:r>
+                        <a:rPr lang="fr-FR" dirty="0"/>
+                        <a:t>Réponse au demande technique</a:t>
+                      </a:r>
+                    </a:p>
+                  </a:txBody>
+                  <a:tcPr/>
+                </a:tc>
+                <a:extLst>
+                  <a:ext uri="{0D108BD9-81ED-4DB2-BD59-A6C34878D82A}">
+                    <a16:rowId xmlns:a16="http://schemas.microsoft.com/office/drawing/2014/main" val="1305539947"/>
+                  </a:ext>
+                </a:extLst>
+              </a:tr>
+              <a:tr h="209303">
+                <a:tc>
+                  <a:txBody>
+                    <a:bodyPr/>
+                    <a:lstStyle/>
+                    <a:p>
+                      <a:r>
+                        <a:rPr lang="fr-FR" sz="1800" dirty="0"/>
+                        <a:t>Communication</a:t>
+                      </a:r>
+                      <a:endParaRPr lang="fr-FR" dirty="0"/>
+                    </a:p>
+                  </a:txBody>
+                  <a:tcPr/>
+                </a:tc>
+                <a:tc>
+                  <a:txBody>
+                    <a:bodyPr/>
+                    <a:lstStyle/>
+                    <a:p>
+                      <a:r>
+                        <a:rPr lang="fr-FR" dirty="0"/>
+                        <a:t>Gestion de la communication entre les équipes</a:t>
+                      </a:r>
+                    </a:p>
+                  </a:txBody>
+                  <a:tcPr/>
+                </a:tc>
+                <a:extLst>
+                  <a:ext uri="{0D108BD9-81ED-4DB2-BD59-A6C34878D82A}">
+                    <a16:rowId xmlns:a16="http://schemas.microsoft.com/office/drawing/2014/main" val="3479322519"/>
+                  </a:ext>
+                </a:extLst>
+              </a:tr>
+            </a:tbl>
+          </a:graphicData>
+        </a:graphic>
+      </p:graphicFrame>
+    </p:spTree>
+    <p:extLst>
+      <p:ext uri="{BB962C8B-B14F-4D97-AF65-F5344CB8AC3E}">
+        <p14:creationId xmlns:p14="http://schemas.microsoft.com/office/powerpoint/2010/main" val="3641645090"/>
       </p:ext>
     </p:extLst>
   </p:cSld>

--- a/TP6_Exploitation_faille_0day_Lilian_Ander.pptx
+++ b/TP6_Exploitation_faille_0day_Lilian_Ander.pptx
@@ -5,7 +5,7 @@
     <p:sldMasterId id="2147483648" r:id="rId1"/>
   </p:sldMasterIdLst>
   <p:notesMasterIdLst>
-    <p:notesMasterId r:id="rId9"/>
+    <p:notesMasterId r:id="rId10"/>
   </p:notesMasterIdLst>
   <p:sldIdLst>
     <p:sldId id="256" r:id="rId2"/>
@@ -15,6 +15,7 @@
     <p:sldId id="262" r:id="rId6"/>
     <p:sldId id="263" r:id="rId7"/>
     <p:sldId id="264" r:id="rId8"/>
+    <p:sldId id="265" r:id="rId9"/>
   </p:sldIdLst>
   <p:sldSz cx="12192000" cy="6858000"/>
   <p:notesSz cx="6858000" cy="9144000"/>
@@ -6439,6 +6440,243 @@
     <p:extLst>
       <p:ext uri="{BB962C8B-B14F-4D97-AF65-F5344CB8AC3E}">
         <p14:creationId xmlns:p14="http://schemas.microsoft.com/office/powerpoint/2010/main" val="3641645090"/>
+      </p:ext>
+    </p:extLst>
+  </p:cSld>
+  <p:clrMapOvr>
+    <a:masterClrMapping/>
+  </p:clrMapOvr>
+</p:sld>
+</file>
+
+<file path=ppt/slides/slide8.xml><?xml version="1.0" encoding="utf-8"?>
+<p:sld xmlns:a="http://schemas.openxmlformats.org/drawingml/2006/main" xmlns:r="http://schemas.openxmlformats.org/officeDocument/2006/relationships" xmlns:p="http://schemas.openxmlformats.org/presentationml/2006/main">
+  <p:cSld>
+    <p:spTree>
+      <p:nvGrpSpPr>
+        <p:cNvPr id="1" name=""/>
+        <p:cNvGrpSpPr/>
+        <p:nvPr/>
+      </p:nvGrpSpPr>
+      <p:grpSpPr>
+        <a:xfrm>
+          <a:off x="0" y="0"/>
+          <a:ext cx="0" cy="0"/>
+          <a:chOff x="0" y="0"/>
+          <a:chExt cx="0" cy="0"/>
+        </a:xfrm>
+      </p:grpSpPr>
+      <p:sp>
+        <p:nvSpPr>
+          <p:cNvPr id="3" name="Espace réservé du contenu 2">
+            <a:extLst>
+              <a:ext uri="{FF2B5EF4-FFF2-40B4-BE49-F238E27FC236}">
+                <a16:creationId xmlns:a16="http://schemas.microsoft.com/office/drawing/2014/main" id="{7F6607C5-8744-2DA8-280B-A1786B695664}"/>
+              </a:ext>
+            </a:extLst>
+          </p:cNvPr>
+          <p:cNvSpPr>
+            <a:spLocks noGrp="1"/>
+          </p:cNvSpPr>
+          <p:nvPr>
+            <p:ph idx="1"/>
+          </p:nvPr>
+        </p:nvSpPr>
+        <p:spPr>
+          <a:xfrm>
+            <a:off x="838200" y="1149178"/>
+            <a:ext cx="10515600" cy="5027785"/>
+          </a:xfrm>
+        </p:spPr>
+        <p:txBody>
+          <a:bodyPr/>
+          <a:lstStyle/>
+          <a:p>
+            <a:pPr marL="0" indent="0">
+              <a:buNone/>
+            </a:pPr>
+            <a:r>
+              <a:rPr lang="fr-FR" b="1" dirty="0"/>
+              <a:t>Proposez une stratégie de sauvegarde et de restauration</a:t>
+            </a:r>
+          </a:p>
+          <a:p>
+            <a:pPr>
+              <a:buFontTx/>
+              <a:buChar char="-"/>
+            </a:pPr>
+            <a:r>
+              <a:rPr lang="fr-FR" sz="1800" dirty="0"/>
+              <a:t>Sauvegarde quotidienne et automatique des données</a:t>
+            </a:r>
+          </a:p>
+          <a:p>
+            <a:pPr>
+              <a:buFontTx/>
+              <a:buChar char="-"/>
+            </a:pPr>
+            <a:r>
+              <a:rPr lang="fr-FR" sz="1800" dirty="0"/>
+              <a:t>Utilisation de divers supports de stockages de données (cloud, disques, etc.)</a:t>
+            </a:r>
+          </a:p>
+          <a:p>
+            <a:pPr>
+              <a:buFontTx/>
+              <a:buChar char="-"/>
+            </a:pPr>
+            <a:r>
+              <a:rPr lang="fr-FR" sz="1800" dirty="0"/>
+              <a:t>Utilisation d’un système de </a:t>
+            </a:r>
+            <a:r>
+              <a:rPr lang="fr-FR" sz="1800" dirty="0" err="1"/>
+              <a:t>versionning</a:t>
+            </a:r>
+            <a:r>
+              <a:rPr lang="fr-FR" sz="1800" dirty="0"/>
+              <a:t> pour le SI (</a:t>
+            </a:r>
+            <a:r>
+              <a:rPr lang="fr-FR" sz="1800" dirty="0" err="1"/>
+              <a:t>github</a:t>
+            </a:r>
+            <a:r>
+              <a:rPr lang="fr-FR" sz="1800" dirty="0"/>
+              <a:t>, git)</a:t>
+            </a:r>
+          </a:p>
+          <a:p>
+            <a:pPr>
+              <a:buFontTx/>
+              <a:buChar char="-"/>
+            </a:pPr>
+            <a:endParaRPr lang="fr-FR" sz="1800"/>
+          </a:p>
+          <a:p>
+            <a:pPr>
+              <a:buFontTx/>
+              <a:buChar char="-"/>
+            </a:pPr>
+            <a:endParaRPr lang="fr-FR" sz="1800" dirty="0"/>
+          </a:p>
+        </p:txBody>
+      </p:sp>
+      <p:sp>
+        <p:nvSpPr>
+          <p:cNvPr id="4" name="Espace réservé du pied de page 3">
+            <a:extLst>
+              <a:ext uri="{FF2B5EF4-FFF2-40B4-BE49-F238E27FC236}">
+                <a16:creationId xmlns:a16="http://schemas.microsoft.com/office/drawing/2014/main" id="{6DA69D77-0AED-1B9F-655F-3CB02B9521C0}"/>
+              </a:ext>
+            </a:extLst>
+          </p:cNvPr>
+          <p:cNvSpPr>
+            <a:spLocks noGrp="1"/>
+          </p:cNvSpPr>
+          <p:nvPr>
+            <p:ph type="ftr" sz="quarter" idx="11"/>
+          </p:nvPr>
+        </p:nvSpPr>
+        <p:spPr/>
+        <p:txBody>
+          <a:bodyPr/>
+          <a:lstStyle/>
+          <a:p>
+            <a:r>
+              <a:rPr lang="fr-FR"/>
+              <a:t>PICIURA Ander - MIRABEL Lilian</a:t>
+            </a:r>
+          </a:p>
+        </p:txBody>
+      </p:sp>
+      <p:sp>
+        <p:nvSpPr>
+          <p:cNvPr id="5" name="Espace réservé du numéro de diapositive 4">
+            <a:extLst>
+              <a:ext uri="{FF2B5EF4-FFF2-40B4-BE49-F238E27FC236}">
+                <a16:creationId xmlns:a16="http://schemas.microsoft.com/office/drawing/2014/main" id="{6CCAEB9D-1C87-3C2D-AD84-7D4CB66F1D5F}"/>
+              </a:ext>
+            </a:extLst>
+          </p:cNvPr>
+          <p:cNvSpPr>
+            <a:spLocks noGrp="1"/>
+          </p:cNvSpPr>
+          <p:nvPr>
+            <p:ph type="sldNum" sz="quarter" idx="12"/>
+          </p:nvPr>
+        </p:nvSpPr>
+        <p:spPr/>
+        <p:txBody>
+          <a:bodyPr/>
+          <a:lstStyle/>
+          <a:p>
+            <a:fld id="{EF144E42-BC24-D442-AFF0-55EAB46336FB}" type="slidenum">
+              <a:rPr lang="fr-FR" smtClean="0"/>
+              <a:t>8</a:t>
+            </a:fld>
+            <a:endParaRPr lang="fr-FR"/>
+          </a:p>
+        </p:txBody>
+      </p:sp>
+      <p:sp>
+        <p:nvSpPr>
+          <p:cNvPr id="8" name="Titre 1">
+            <a:extLst>
+              <a:ext uri="{FF2B5EF4-FFF2-40B4-BE49-F238E27FC236}">
+                <a16:creationId xmlns:a16="http://schemas.microsoft.com/office/drawing/2014/main" id="{2D2CFAD4-DCE8-55A5-FA23-37EFFBE7AB09}"/>
+              </a:ext>
+            </a:extLst>
+          </p:cNvPr>
+          <p:cNvSpPr txBox="1">
+            <a:spLocks/>
+          </p:cNvSpPr>
+          <p:nvPr/>
+        </p:nvSpPr>
+        <p:spPr>
+          <a:xfrm>
+            <a:off x="838200" y="238770"/>
+            <a:ext cx="10515600" cy="795632"/>
+          </a:xfrm>
+          <a:prstGeom prst="rect">
+            <a:avLst/>
+          </a:prstGeom>
+        </p:spPr>
+        <p:txBody>
+          <a:bodyPr vert="horz" lIns="91440" tIns="45720" rIns="91440" bIns="45720" rtlCol="0" anchor="ctr">
+            <a:normAutofit/>
+          </a:bodyPr>
+          <a:lstStyle>
+            <a:lvl1pPr algn="l" defTabSz="914400" rtl="0" eaLnBrk="1" latinLnBrk="0" hangingPunct="1">
+              <a:lnSpc>
+                <a:spcPct val="90000"/>
+              </a:lnSpc>
+              <a:spcBef>
+                <a:spcPct val="0"/>
+              </a:spcBef>
+              <a:buNone/>
+              <a:defRPr sz="4400" kern="1200">
+                <a:solidFill>
+                  <a:schemeClr val="tx1"/>
+                </a:solidFill>
+                <a:latin typeface="+mj-lt"/>
+                <a:ea typeface="+mj-ea"/>
+                <a:cs typeface="+mj-cs"/>
+              </a:defRPr>
+            </a:lvl1pPr>
+          </a:lstStyle>
+          <a:p>
+            <a:r>
+              <a:rPr lang="fr-FR" dirty="0"/>
+              <a:t>Plan de Reprise d’Activité </a:t>
+            </a:r>
+          </a:p>
+        </p:txBody>
+      </p:sp>
+    </p:spTree>
+    <p:extLst>
+      <p:ext uri="{BB962C8B-B14F-4D97-AF65-F5344CB8AC3E}">
+        <p14:creationId xmlns:p14="http://schemas.microsoft.com/office/powerpoint/2010/main" val="3349946933"/>
       </p:ext>
     </p:extLst>
   </p:cSld>

--- a/TP6_Exploitation_faille_0day_Lilian_Ander.pptx
+++ b/TP6_Exploitation_faille_0day_Lilian_Ander.pptx
@@ -5,7 +5,7 @@
     <p:sldMasterId id="2147483648" r:id="rId1"/>
   </p:sldMasterIdLst>
   <p:notesMasterIdLst>
-    <p:notesMasterId r:id="rId10"/>
+    <p:notesMasterId r:id="rId12"/>
   </p:notesMasterIdLst>
   <p:sldIdLst>
     <p:sldId id="256" r:id="rId2"/>
@@ -16,6 +16,8 @@
     <p:sldId id="263" r:id="rId7"/>
     <p:sldId id="264" r:id="rId8"/>
     <p:sldId id="265" r:id="rId9"/>
+    <p:sldId id="266" r:id="rId10"/>
+    <p:sldId id="267" r:id="rId11"/>
   </p:sldIdLst>
   <p:sldSz cx="12192000" cy="6858000"/>
   <p:notesSz cx="6858000" cy="9144000"/>
@@ -3948,6 +3950,143 @@
     <p:extLst>
       <p:ext uri="{BB962C8B-B14F-4D97-AF65-F5344CB8AC3E}">
         <p14:creationId xmlns:p14="http://schemas.microsoft.com/office/powerpoint/2010/main" val="3287964140"/>
+      </p:ext>
+    </p:extLst>
+  </p:cSld>
+  <p:clrMapOvr>
+    <a:masterClrMapping/>
+  </p:clrMapOvr>
+</p:sld>
+</file>
+
+<file path=ppt/slides/slide10.xml><?xml version="1.0" encoding="utf-8"?>
+<p:sld xmlns:a="http://schemas.openxmlformats.org/drawingml/2006/main" xmlns:r="http://schemas.openxmlformats.org/officeDocument/2006/relationships" xmlns:p="http://schemas.openxmlformats.org/presentationml/2006/main">
+  <p:cSld>
+    <p:spTree>
+      <p:nvGrpSpPr>
+        <p:cNvPr id="1" name=""/>
+        <p:cNvGrpSpPr/>
+        <p:nvPr/>
+      </p:nvGrpSpPr>
+      <p:grpSpPr>
+        <a:xfrm>
+          <a:off x="0" y="0"/>
+          <a:ext cx="0" cy="0"/>
+          <a:chOff x="0" y="0"/>
+          <a:chExt cx="0" cy="0"/>
+        </a:xfrm>
+      </p:grpSpPr>
+      <p:sp>
+        <p:nvSpPr>
+          <p:cNvPr id="2" name="Titre 1">
+            <a:extLst>
+              <a:ext uri="{FF2B5EF4-FFF2-40B4-BE49-F238E27FC236}">
+                <a16:creationId xmlns:a16="http://schemas.microsoft.com/office/drawing/2014/main" id="{9EA4878E-C162-9487-A85B-191EA9700E9B}"/>
+              </a:ext>
+            </a:extLst>
+          </p:cNvPr>
+          <p:cNvSpPr>
+            <a:spLocks noGrp="1"/>
+          </p:cNvSpPr>
+          <p:nvPr>
+            <p:ph type="title"/>
+          </p:nvPr>
+        </p:nvSpPr>
+        <p:spPr/>
+        <p:txBody>
+          <a:bodyPr/>
+          <a:lstStyle/>
+          <a:p>
+            <a:endParaRPr lang="fr-FR"/>
+          </a:p>
+        </p:txBody>
+      </p:sp>
+      <p:sp>
+        <p:nvSpPr>
+          <p:cNvPr id="3" name="Espace réservé du contenu 2">
+            <a:extLst>
+              <a:ext uri="{FF2B5EF4-FFF2-40B4-BE49-F238E27FC236}">
+                <a16:creationId xmlns:a16="http://schemas.microsoft.com/office/drawing/2014/main" id="{F8C38C2D-D08E-76BA-90A4-72786E65D00B}"/>
+              </a:ext>
+            </a:extLst>
+          </p:cNvPr>
+          <p:cNvSpPr>
+            <a:spLocks noGrp="1"/>
+          </p:cNvSpPr>
+          <p:nvPr>
+            <p:ph idx="1"/>
+          </p:nvPr>
+        </p:nvSpPr>
+        <p:spPr/>
+        <p:txBody>
+          <a:bodyPr/>
+          <a:lstStyle/>
+          <a:p>
+            <a:endParaRPr lang="fr-FR"/>
+          </a:p>
+        </p:txBody>
+      </p:sp>
+      <p:sp>
+        <p:nvSpPr>
+          <p:cNvPr id="4" name="Espace réservé du pied de page 3">
+            <a:extLst>
+              <a:ext uri="{FF2B5EF4-FFF2-40B4-BE49-F238E27FC236}">
+                <a16:creationId xmlns:a16="http://schemas.microsoft.com/office/drawing/2014/main" id="{B93DAA80-D962-A203-22E7-53E858C1A0AD}"/>
+              </a:ext>
+            </a:extLst>
+          </p:cNvPr>
+          <p:cNvSpPr>
+            <a:spLocks noGrp="1"/>
+          </p:cNvSpPr>
+          <p:nvPr>
+            <p:ph type="ftr" sz="quarter" idx="11"/>
+          </p:nvPr>
+        </p:nvSpPr>
+        <p:spPr/>
+        <p:txBody>
+          <a:bodyPr/>
+          <a:lstStyle/>
+          <a:p>
+            <a:r>
+              <a:rPr lang="fr-FR"/>
+              <a:t>PICIURA Ander - MIRABEL Lilian</a:t>
+            </a:r>
+          </a:p>
+        </p:txBody>
+      </p:sp>
+      <p:sp>
+        <p:nvSpPr>
+          <p:cNvPr id="5" name="Espace réservé du numéro de diapositive 4">
+            <a:extLst>
+              <a:ext uri="{FF2B5EF4-FFF2-40B4-BE49-F238E27FC236}">
+                <a16:creationId xmlns:a16="http://schemas.microsoft.com/office/drawing/2014/main" id="{97F68BEA-F38E-97E2-48AA-CD2107A16576}"/>
+              </a:ext>
+            </a:extLst>
+          </p:cNvPr>
+          <p:cNvSpPr>
+            <a:spLocks noGrp="1"/>
+          </p:cNvSpPr>
+          <p:nvPr>
+            <p:ph type="sldNum" sz="quarter" idx="12"/>
+          </p:nvPr>
+        </p:nvSpPr>
+        <p:spPr/>
+        <p:txBody>
+          <a:bodyPr/>
+          <a:lstStyle/>
+          <a:p>
+            <a:fld id="{EF144E42-BC24-D442-AFF0-55EAB46336FB}" type="slidenum">
+              <a:rPr lang="fr-FR" smtClean="0"/>
+              <a:t>10</a:t>
+            </a:fld>
+            <a:endParaRPr lang="fr-FR"/>
+          </a:p>
+        </p:txBody>
+      </p:sp>
+    </p:spTree>
+    <p:extLst>
+      <p:ext uri="{BB962C8B-B14F-4D97-AF65-F5344CB8AC3E}">
+        <p14:creationId xmlns:p14="http://schemas.microsoft.com/office/powerpoint/2010/main" val="936469010"/>
       </p:ext>
     </p:extLst>
   </p:cSld>
@@ -6489,7 +6628,9 @@
           </a:xfrm>
         </p:spPr>
         <p:txBody>
-          <a:bodyPr/>
+          <a:bodyPr>
+            <a:normAutofit/>
+          </a:bodyPr>
           <a:lstStyle/>
           <a:p>
             <a:pPr marL="0" indent="0">
@@ -6545,13 +6686,6 @@
               <a:rPr lang="fr-FR" sz="1800" dirty="0"/>
               <a:t>, git)</a:t>
             </a:r>
-          </a:p>
-          <a:p>
-            <a:pPr>
-              <a:buFontTx/>
-              <a:buChar char="-"/>
-            </a:pPr>
-            <a:endParaRPr lang="fr-FR" sz="1800"/>
           </a:p>
           <a:p>
             <a:pPr>
@@ -6559,6 +6693,66 @@
               <a:buChar char="-"/>
             </a:pPr>
             <a:endParaRPr lang="fr-FR" sz="1800" dirty="0"/>
+          </a:p>
+          <a:p>
+            <a:pPr marL="0" indent="0">
+              <a:buNone/>
+            </a:pPr>
+            <a:r>
+              <a:rPr lang="fr-FR" b="1" dirty="0"/>
+              <a:t>Décrivez les étapes de reprise après incident</a:t>
+            </a:r>
+          </a:p>
+          <a:p>
+            <a:pPr marL="514350" indent="-514350">
+              <a:buAutoNum type="arabicPeriod"/>
+            </a:pPr>
+            <a:r>
+              <a:rPr lang="fr-FR" sz="1900" dirty="0"/>
+              <a:t>Analyse et vérification sur l’impact  et l’incidence du système et des données.</a:t>
+            </a:r>
+          </a:p>
+          <a:p>
+            <a:pPr marL="514350" indent="-514350">
+              <a:buAutoNum type="arabicPeriod"/>
+            </a:pPr>
+            <a:r>
+              <a:rPr lang="fr-FR" sz="1900" dirty="0"/>
+              <a:t>Décision des différents acteurs sur les actions à entreprendre.</a:t>
+            </a:r>
+          </a:p>
+          <a:p>
+            <a:pPr marL="514350" indent="-514350">
+              <a:buAutoNum type="arabicPeriod"/>
+            </a:pPr>
+            <a:r>
+              <a:rPr lang="fr-FR" sz="1900" dirty="0"/>
+              <a:t>Phase de test pour la validation des bons fonctionnements du système.</a:t>
+            </a:r>
+          </a:p>
+          <a:p>
+            <a:pPr marL="514350" indent="-514350">
+              <a:buAutoNum type="arabicPeriod"/>
+            </a:pPr>
+            <a:r>
+              <a:rPr lang="fr-FR" sz="1900" dirty="0"/>
+              <a:t>Communication signaler la correction du problème.</a:t>
+            </a:r>
+          </a:p>
+          <a:p>
+            <a:pPr marL="514350" indent="-514350">
+              <a:buAutoNum type="arabicPeriod"/>
+            </a:pPr>
+            <a:r>
+              <a:rPr lang="fr-FR" sz="1900" dirty="0"/>
+              <a:t>Re-disponibilité du service et retour a la normal.</a:t>
+            </a:r>
+          </a:p>
+          <a:p>
+            <a:pPr marL="0" indent="0">
+              <a:buNone/>
+            </a:pPr>
+            <a:endParaRPr lang="fr-FR" dirty="0"/>
           </a:p>
         </p:txBody>
       </p:sp>
@@ -6677,6 +6871,146 @@
     <p:extLst>
       <p:ext uri="{BB962C8B-B14F-4D97-AF65-F5344CB8AC3E}">
         <p14:creationId xmlns:p14="http://schemas.microsoft.com/office/powerpoint/2010/main" val="3349946933"/>
+      </p:ext>
+    </p:extLst>
+  </p:cSld>
+  <p:clrMapOvr>
+    <a:masterClrMapping/>
+  </p:clrMapOvr>
+</p:sld>
+</file>
+
+<file path=ppt/slides/slide9.xml><?xml version="1.0" encoding="utf-8"?>
+<p:sld xmlns:a="http://schemas.openxmlformats.org/drawingml/2006/main" xmlns:r="http://schemas.openxmlformats.org/officeDocument/2006/relationships" xmlns:p="http://schemas.openxmlformats.org/presentationml/2006/main">
+  <p:cSld>
+    <p:spTree>
+      <p:nvGrpSpPr>
+        <p:cNvPr id="1" name=""/>
+        <p:cNvGrpSpPr/>
+        <p:nvPr/>
+      </p:nvGrpSpPr>
+      <p:grpSpPr>
+        <a:xfrm>
+          <a:off x="0" y="0"/>
+          <a:ext cx="0" cy="0"/>
+          <a:chOff x="0" y="0"/>
+          <a:chExt cx="0" cy="0"/>
+        </a:xfrm>
+      </p:grpSpPr>
+      <p:sp>
+        <p:nvSpPr>
+          <p:cNvPr id="2" name="Titre 1">
+            <a:extLst>
+              <a:ext uri="{FF2B5EF4-FFF2-40B4-BE49-F238E27FC236}">
+                <a16:creationId xmlns:a16="http://schemas.microsoft.com/office/drawing/2014/main" id="{A6A785F6-CB24-B3F1-DDF4-AA80F84FF2B9}"/>
+              </a:ext>
+            </a:extLst>
+          </p:cNvPr>
+          <p:cNvSpPr>
+            <a:spLocks noGrp="1"/>
+          </p:cNvSpPr>
+          <p:nvPr>
+            <p:ph type="title"/>
+          </p:nvPr>
+        </p:nvSpPr>
+        <p:spPr/>
+        <p:txBody>
+          <a:bodyPr/>
+          <a:lstStyle/>
+          <a:p>
+            <a:r>
+              <a:rPr lang="fr-FR" dirty="0"/>
+              <a:t>Schéma simplifié</a:t>
+            </a:r>
+          </a:p>
+        </p:txBody>
+      </p:sp>
+      <p:sp>
+        <p:nvSpPr>
+          <p:cNvPr id="3" name="Espace réservé du contenu 2">
+            <a:extLst>
+              <a:ext uri="{FF2B5EF4-FFF2-40B4-BE49-F238E27FC236}">
+                <a16:creationId xmlns:a16="http://schemas.microsoft.com/office/drawing/2014/main" id="{159B9E37-71C8-26A3-AEE9-02166F45F244}"/>
+              </a:ext>
+            </a:extLst>
+          </p:cNvPr>
+          <p:cNvSpPr>
+            <a:spLocks noGrp="1"/>
+          </p:cNvSpPr>
+          <p:nvPr>
+            <p:ph idx="1"/>
+          </p:nvPr>
+        </p:nvSpPr>
+        <p:spPr/>
+        <p:txBody>
+          <a:bodyPr/>
+          <a:lstStyle/>
+          <a:p>
+            <a:endParaRPr lang="fr-FR" dirty="0"/>
+          </a:p>
+        </p:txBody>
+      </p:sp>
+      <p:sp>
+        <p:nvSpPr>
+          <p:cNvPr id="4" name="Espace réservé du pied de page 3">
+            <a:extLst>
+              <a:ext uri="{FF2B5EF4-FFF2-40B4-BE49-F238E27FC236}">
+                <a16:creationId xmlns:a16="http://schemas.microsoft.com/office/drawing/2014/main" id="{48234254-AF9E-26C1-1B25-8150666DE003}"/>
+              </a:ext>
+            </a:extLst>
+          </p:cNvPr>
+          <p:cNvSpPr>
+            <a:spLocks noGrp="1"/>
+          </p:cNvSpPr>
+          <p:nvPr>
+            <p:ph type="ftr" sz="quarter" idx="11"/>
+          </p:nvPr>
+        </p:nvSpPr>
+        <p:spPr/>
+        <p:txBody>
+          <a:bodyPr/>
+          <a:lstStyle/>
+          <a:p>
+            <a:r>
+              <a:rPr lang="fr-FR"/>
+              <a:t>PICIURA Ander - MIRABEL Lilian</a:t>
+            </a:r>
+          </a:p>
+        </p:txBody>
+      </p:sp>
+      <p:sp>
+        <p:nvSpPr>
+          <p:cNvPr id="5" name="Espace réservé du numéro de diapositive 4">
+            <a:extLst>
+              <a:ext uri="{FF2B5EF4-FFF2-40B4-BE49-F238E27FC236}">
+                <a16:creationId xmlns:a16="http://schemas.microsoft.com/office/drawing/2014/main" id="{19EF4814-C6BF-9ABD-4797-6C1A8863C560}"/>
+              </a:ext>
+            </a:extLst>
+          </p:cNvPr>
+          <p:cNvSpPr>
+            <a:spLocks noGrp="1"/>
+          </p:cNvSpPr>
+          <p:nvPr>
+            <p:ph type="sldNum" sz="quarter" idx="12"/>
+          </p:nvPr>
+        </p:nvSpPr>
+        <p:spPr/>
+        <p:txBody>
+          <a:bodyPr/>
+          <a:lstStyle/>
+          <a:p>
+            <a:fld id="{EF144E42-BC24-D442-AFF0-55EAB46336FB}" type="slidenum">
+              <a:rPr lang="fr-FR" smtClean="0"/>
+              <a:t>9</a:t>
+            </a:fld>
+            <a:endParaRPr lang="fr-FR"/>
+          </a:p>
+        </p:txBody>
+      </p:sp>
+    </p:spTree>
+    <p:extLst>
+      <p:ext uri="{BB962C8B-B14F-4D97-AF65-F5344CB8AC3E}">
+        <p14:creationId xmlns:p14="http://schemas.microsoft.com/office/powerpoint/2010/main" val="2065482170"/>
       </p:ext>
     </p:extLst>
   </p:cSld>

--- a/TP6_Exploitation_faille_0day_Lilian_Ander.pptx
+++ b/TP6_Exploitation_faille_0day_Lilian_Ander.pptx
@@ -3997,7 +3997,10 @@
           <a:bodyPr/>
           <a:lstStyle/>
           <a:p>
-            <a:endParaRPr lang="fr-FR"/>
+            <a:r>
+              <a:rPr lang="fr-FR" dirty="0"/>
+              <a:t>Fiche PRA/PCA</a:t>
+            </a:r>
           </a:p>
         </p:txBody>
       </p:sp>
@@ -4022,7 +4025,91 @@
           <a:bodyPr/>
           <a:lstStyle/>
           <a:p>
-            <a:endParaRPr lang="fr-FR"/>
+            <a:pPr marL="0" indent="0">
+              <a:buNone/>
+            </a:pPr>
+            <a:r>
+              <a:rPr lang="fr-FR" b="1" dirty="0"/>
+              <a:t>Contexte et Enjeux </a:t>
+            </a:r>
+            <a:r>
+              <a:rPr lang="fr-FR" dirty="0"/>
+              <a:t>: La startup </a:t>
+            </a:r>
+            <a:r>
+              <a:rPr lang="fr-FR" dirty="0" err="1"/>
+              <a:t>Covoit’Ouest</a:t>
+            </a:r>
+            <a:r>
+              <a:rPr lang="fr-FR" dirty="0"/>
+              <a:t> situé a La Rochelle </a:t>
+            </a:r>
+          </a:p>
+          <a:p>
+            <a:pPr marL="0" indent="0">
+              <a:buNone/>
+            </a:pPr>
+            <a:r>
+              <a:rPr lang="fr-FR" dirty="0"/>
+              <a:t>est une entreprise qui dépend principalement de ses Systèmes d’Information.</a:t>
+            </a:r>
+          </a:p>
+          <a:p>
+            <a:pPr marL="0" indent="0">
+              <a:buNone/>
+            </a:pPr>
+            <a:endParaRPr lang="fr-FR" dirty="0"/>
+          </a:p>
+          <a:p>
+            <a:pPr marL="0" indent="0">
+              <a:buNone/>
+            </a:pPr>
+            <a:r>
+              <a:rPr lang="fr-FR" dirty="0"/>
+              <a:t>Les enjeux sont donc importants pour </a:t>
+            </a:r>
+            <a:r>
+              <a:rPr lang="fr-FR" dirty="0" err="1"/>
+              <a:t>Covoit’Ouest</a:t>
+            </a:r>
+            <a:r>
+              <a:rPr lang="fr-FR" dirty="0"/>
+              <a:t> pour :</a:t>
+            </a:r>
+          </a:p>
+          <a:p>
+            <a:pPr>
+              <a:buFontTx/>
+              <a:buChar char="-"/>
+            </a:pPr>
+            <a:r>
+              <a:rPr lang="fr-FR" dirty="0"/>
+              <a:t>De garder une continuité du service permanant.</a:t>
+            </a:r>
+          </a:p>
+          <a:p>
+            <a:pPr>
+              <a:buFontTx/>
+              <a:buChar char="-"/>
+            </a:pPr>
+            <a:r>
+              <a:rPr lang="fr-FR" dirty="0"/>
+              <a:t>Limiter les pertes et vol </a:t>
+            </a:r>
+            <a:r>
+              <a:rPr lang="fr-FR"/>
+              <a:t>de données.</a:t>
+            </a:r>
+            <a:endParaRPr lang="fr-FR" dirty="0"/>
+          </a:p>
+          <a:p>
+            <a:pPr marL="0" indent="0">
+              <a:buNone/>
+            </a:pPr>
+            <a:r>
+              <a:rPr lang="fr-FR" dirty="0"/>
+              <a:t>- Préserver la stabilité économique de l’entreprise.</a:t>
+            </a:r>
           </a:p>
         </p:txBody>
       </p:sp>

--- a/TP6_Exploitation_faille_0day_Lilian_Ander.pptx
+++ b/TP6_Exploitation_faille_0day_Lilian_Ander.pptx
@@ -5,7 +5,7 @@
     <p:sldMasterId id="2147483648" r:id="rId1"/>
   </p:sldMasterIdLst>
   <p:notesMasterIdLst>
-    <p:notesMasterId r:id="rId12"/>
+    <p:notesMasterId r:id="rId14"/>
   </p:notesMasterIdLst>
   <p:sldIdLst>
     <p:sldId id="256" r:id="rId2"/>
@@ -18,6 +18,8 @@
     <p:sldId id="265" r:id="rId9"/>
     <p:sldId id="266" r:id="rId10"/>
     <p:sldId id="267" r:id="rId11"/>
+    <p:sldId id="269" r:id="rId12"/>
+    <p:sldId id="268" r:id="rId13"/>
   </p:sldIdLst>
   <p:sldSz cx="12192000" cy="6858000"/>
   <p:notesSz cx="6858000" cy="9144000"/>
@@ -4094,13 +4096,8 @@
             </a:pPr>
             <a:r>
               <a:rPr lang="fr-FR" dirty="0"/>
-              <a:t>Limiter les pertes et vol </a:t>
-            </a:r>
-            <a:r>
-              <a:rPr lang="fr-FR"/>
-              <a:t>de données.</a:t>
-            </a:r>
-            <a:endParaRPr lang="fr-FR" dirty="0"/>
+              <a:t>Limiter les pertes et vol de données.</a:t>
+            </a:r>
           </a:p>
           <a:p>
             <a:pPr marL="0" indent="0">
@@ -4174,6 +4171,310 @@
     <p:extLst>
       <p:ext uri="{BB962C8B-B14F-4D97-AF65-F5344CB8AC3E}">
         <p14:creationId xmlns:p14="http://schemas.microsoft.com/office/powerpoint/2010/main" val="936469010"/>
+      </p:ext>
+    </p:extLst>
+  </p:cSld>
+  <p:clrMapOvr>
+    <a:masterClrMapping/>
+  </p:clrMapOvr>
+</p:sld>
+</file>
+
+<file path=ppt/slides/slide11.xml><?xml version="1.0" encoding="utf-8"?>
+<p:sld xmlns:a="http://schemas.openxmlformats.org/drawingml/2006/main" xmlns:r="http://schemas.openxmlformats.org/officeDocument/2006/relationships" xmlns:p="http://schemas.openxmlformats.org/presentationml/2006/main">
+  <p:cSld>
+    <p:spTree>
+      <p:nvGrpSpPr>
+        <p:cNvPr id="1" name=""/>
+        <p:cNvGrpSpPr/>
+        <p:nvPr/>
+      </p:nvGrpSpPr>
+      <p:grpSpPr>
+        <a:xfrm>
+          <a:off x="0" y="0"/>
+          <a:ext cx="0" cy="0"/>
+          <a:chOff x="0" y="0"/>
+          <a:chExt cx="0" cy="0"/>
+        </a:xfrm>
+      </p:grpSpPr>
+      <p:sp>
+        <p:nvSpPr>
+          <p:cNvPr id="2" name="Titre 1">
+            <a:extLst>
+              <a:ext uri="{FF2B5EF4-FFF2-40B4-BE49-F238E27FC236}">
+                <a16:creationId xmlns:a16="http://schemas.microsoft.com/office/drawing/2014/main" id="{77DE5D65-0CDF-DF6D-1245-ECE8D618A02F}"/>
+              </a:ext>
+            </a:extLst>
+          </p:cNvPr>
+          <p:cNvSpPr>
+            <a:spLocks noGrp="1"/>
+          </p:cNvSpPr>
+          <p:nvPr>
+            <p:ph type="title"/>
+          </p:nvPr>
+        </p:nvSpPr>
+        <p:spPr/>
+        <p:txBody>
+          <a:bodyPr/>
+          <a:lstStyle/>
+          <a:p>
+            <a:r>
+              <a:rPr lang="fr-FR" dirty="0"/>
+              <a:t>MATRICE RTO/RPO</a:t>
+            </a:r>
+          </a:p>
+        </p:txBody>
+      </p:sp>
+      <p:sp>
+        <p:nvSpPr>
+          <p:cNvPr id="3" name="Espace réservé du contenu 2">
+            <a:extLst>
+              <a:ext uri="{FF2B5EF4-FFF2-40B4-BE49-F238E27FC236}">
+                <a16:creationId xmlns:a16="http://schemas.microsoft.com/office/drawing/2014/main" id="{7B0B372A-17B3-4871-25A2-C8EE589FBE98}"/>
+              </a:ext>
+            </a:extLst>
+          </p:cNvPr>
+          <p:cNvSpPr>
+            <a:spLocks noGrp="1"/>
+          </p:cNvSpPr>
+          <p:nvPr>
+            <p:ph idx="1"/>
+          </p:nvPr>
+        </p:nvSpPr>
+        <p:spPr/>
+        <p:txBody>
+          <a:bodyPr/>
+          <a:lstStyle/>
+          <a:p>
+            <a:endParaRPr lang="fr-FR" dirty="0"/>
+          </a:p>
+        </p:txBody>
+      </p:sp>
+      <p:sp>
+        <p:nvSpPr>
+          <p:cNvPr id="4" name="Espace réservé du pied de page 3">
+            <a:extLst>
+              <a:ext uri="{FF2B5EF4-FFF2-40B4-BE49-F238E27FC236}">
+                <a16:creationId xmlns:a16="http://schemas.microsoft.com/office/drawing/2014/main" id="{3A3DDA9E-C759-9AEE-8015-D67931DF89D3}"/>
+              </a:ext>
+            </a:extLst>
+          </p:cNvPr>
+          <p:cNvSpPr>
+            <a:spLocks noGrp="1"/>
+          </p:cNvSpPr>
+          <p:nvPr>
+            <p:ph type="ftr" sz="quarter" idx="11"/>
+          </p:nvPr>
+        </p:nvSpPr>
+        <p:spPr/>
+        <p:txBody>
+          <a:bodyPr/>
+          <a:lstStyle/>
+          <a:p>
+            <a:r>
+              <a:rPr lang="fr-FR"/>
+              <a:t>PICIURA Ander - MIRABEL Lilian</a:t>
+            </a:r>
+          </a:p>
+        </p:txBody>
+      </p:sp>
+      <p:sp>
+        <p:nvSpPr>
+          <p:cNvPr id="5" name="Espace réservé du numéro de diapositive 4">
+            <a:extLst>
+              <a:ext uri="{FF2B5EF4-FFF2-40B4-BE49-F238E27FC236}">
+                <a16:creationId xmlns:a16="http://schemas.microsoft.com/office/drawing/2014/main" id="{3ABBE135-05B1-B7DE-C1D4-964D6801F186}"/>
+              </a:ext>
+            </a:extLst>
+          </p:cNvPr>
+          <p:cNvSpPr>
+            <a:spLocks noGrp="1"/>
+          </p:cNvSpPr>
+          <p:nvPr>
+            <p:ph type="sldNum" sz="quarter" idx="12"/>
+          </p:nvPr>
+        </p:nvSpPr>
+        <p:spPr/>
+        <p:txBody>
+          <a:bodyPr/>
+          <a:lstStyle/>
+          <a:p>
+            <a:fld id="{EF144E42-BC24-D442-AFF0-55EAB46336FB}" type="slidenum">
+              <a:rPr lang="fr-FR" smtClean="0"/>
+              <a:t>11</a:t>
+            </a:fld>
+            <a:endParaRPr lang="fr-FR"/>
+          </a:p>
+        </p:txBody>
+      </p:sp>
+    </p:spTree>
+    <p:extLst>
+      <p:ext uri="{BB962C8B-B14F-4D97-AF65-F5344CB8AC3E}">
+        <p14:creationId xmlns:p14="http://schemas.microsoft.com/office/powerpoint/2010/main" val="3945105676"/>
+      </p:ext>
+    </p:extLst>
+  </p:cSld>
+  <p:clrMapOvr>
+    <a:masterClrMapping/>
+  </p:clrMapOvr>
+</p:sld>
+</file>
+
+<file path=ppt/slides/slide12.xml><?xml version="1.0" encoding="utf-8"?>
+<p:sld xmlns:a="http://schemas.openxmlformats.org/drawingml/2006/main" xmlns:r="http://schemas.openxmlformats.org/officeDocument/2006/relationships" xmlns:p="http://schemas.openxmlformats.org/presentationml/2006/main">
+  <p:cSld>
+    <p:spTree>
+      <p:nvGrpSpPr>
+        <p:cNvPr id="1" name=""/>
+        <p:cNvGrpSpPr/>
+        <p:nvPr/>
+      </p:nvGrpSpPr>
+      <p:grpSpPr>
+        <a:xfrm>
+          <a:off x="0" y="0"/>
+          <a:ext cx="0" cy="0"/>
+          <a:chOff x="0" y="0"/>
+          <a:chExt cx="0" cy="0"/>
+        </a:xfrm>
+      </p:grpSpPr>
+      <p:sp>
+        <p:nvSpPr>
+          <p:cNvPr id="2" name="Titre 1">
+            <a:extLst>
+              <a:ext uri="{FF2B5EF4-FFF2-40B4-BE49-F238E27FC236}">
+                <a16:creationId xmlns:a16="http://schemas.microsoft.com/office/drawing/2014/main" id="{CE20B45D-C344-9144-A8AF-AC4D198EC632}"/>
+              </a:ext>
+            </a:extLst>
+          </p:cNvPr>
+          <p:cNvSpPr>
+            <a:spLocks noGrp="1"/>
+          </p:cNvSpPr>
+          <p:nvPr>
+            <p:ph type="title"/>
+          </p:nvPr>
+        </p:nvSpPr>
+        <p:spPr/>
+        <p:txBody>
+          <a:bodyPr/>
+          <a:lstStyle/>
+          <a:p>
+            <a:endParaRPr lang="fr-FR"/>
+          </a:p>
+        </p:txBody>
+      </p:sp>
+      <p:sp>
+        <p:nvSpPr>
+          <p:cNvPr id="3" name="Espace réservé du contenu 2">
+            <a:extLst>
+              <a:ext uri="{FF2B5EF4-FFF2-40B4-BE49-F238E27FC236}">
+                <a16:creationId xmlns:a16="http://schemas.microsoft.com/office/drawing/2014/main" id="{471A7F75-C87F-5ADA-F230-19F66191C217}"/>
+              </a:ext>
+            </a:extLst>
+          </p:cNvPr>
+          <p:cNvSpPr>
+            <a:spLocks noGrp="1"/>
+          </p:cNvSpPr>
+          <p:nvPr>
+            <p:ph idx="1"/>
+          </p:nvPr>
+        </p:nvSpPr>
+        <p:spPr/>
+        <p:txBody>
+          <a:bodyPr/>
+          <a:lstStyle/>
+          <a:p>
+            <a:r>
+              <a:rPr lang="fr-FR" dirty="0"/>
+              <a:t>Les principales mesures techniques et organisationnelles.</a:t>
+            </a:r>
+          </a:p>
+          <a:p>
+            <a:endParaRPr lang="fr-FR" dirty="0"/>
+          </a:p>
+          <a:p>
+            <a:endParaRPr lang="fr-FR" dirty="0"/>
+          </a:p>
+          <a:p>
+            <a:r>
+              <a:rPr lang="fr-FR" dirty="0"/>
+              <a:t>Les procédures de test et de mise à jour annuelle du plan.</a:t>
+            </a:r>
+          </a:p>
+          <a:p>
+            <a:endParaRPr lang="fr-FR" dirty="0"/>
+          </a:p>
+          <a:p>
+            <a:endParaRPr lang="fr-FR" dirty="0"/>
+          </a:p>
+          <a:p>
+            <a:r>
+              <a:rPr lang="fr-FR" dirty="0"/>
+              <a:t>Une courte stratégie de communication de crise (qui parle, à qui, comment ?)</a:t>
+            </a:r>
+          </a:p>
+        </p:txBody>
+      </p:sp>
+      <p:sp>
+        <p:nvSpPr>
+          <p:cNvPr id="4" name="Espace réservé du pied de page 3">
+            <a:extLst>
+              <a:ext uri="{FF2B5EF4-FFF2-40B4-BE49-F238E27FC236}">
+                <a16:creationId xmlns:a16="http://schemas.microsoft.com/office/drawing/2014/main" id="{47215B20-6B5F-C641-94FB-DF98F27FCD01}"/>
+              </a:ext>
+            </a:extLst>
+          </p:cNvPr>
+          <p:cNvSpPr>
+            <a:spLocks noGrp="1"/>
+          </p:cNvSpPr>
+          <p:nvPr>
+            <p:ph type="ftr" sz="quarter" idx="11"/>
+          </p:nvPr>
+        </p:nvSpPr>
+        <p:spPr/>
+        <p:txBody>
+          <a:bodyPr/>
+          <a:lstStyle/>
+          <a:p>
+            <a:r>
+              <a:rPr lang="fr-FR"/>
+              <a:t>PICIURA Ander - MIRABEL Lilian</a:t>
+            </a:r>
+          </a:p>
+        </p:txBody>
+      </p:sp>
+      <p:sp>
+        <p:nvSpPr>
+          <p:cNvPr id="5" name="Espace réservé du numéro de diapositive 4">
+            <a:extLst>
+              <a:ext uri="{FF2B5EF4-FFF2-40B4-BE49-F238E27FC236}">
+                <a16:creationId xmlns:a16="http://schemas.microsoft.com/office/drawing/2014/main" id="{AC2678BF-0775-97DD-F00C-BA4CDFEA6770}"/>
+              </a:ext>
+            </a:extLst>
+          </p:cNvPr>
+          <p:cNvSpPr>
+            <a:spLocks noGrp="1"/>
+          </p:cNvSpPr>
+          <p:nvPr>
+            <p:ph type="sldNum" sz="quarter" idx="12"/>
+          </p:nvPr>
+        </p:nvSpPr>
+        <p:spPr/>
+        <p:txBody>
+          <a:bodyPr/>
+          <a:lstStyle/>
+          <a:p>
+            <a:fld id="{EF144E42-BC24-D442-AFF0-55EAB46336FB}" type="slidenum">
+              <a:rPr lang="fr-FR" smtClean="0"/>
+              <a:t>12</a:t>
+            </a:fld>
+            <a:endParaRPr lang="fr-FR"/>
+          </a:p>
+        </p:txBody>
+      </p:sp>
+    </p:spTree>
+    <p:extLst>
+      <p:ext uri="{BB962C8B-B14F-4D97-AF65-F5344CB8AC3E}">
+        <p14:creationId xmlns:p14="http://schemas.microsoft.com/office/powerpoint/2010/main" val="1138713686"/>
       </p:ext>
     </p:extLst>
   </p:cSld>

--- a/TP6_Exploitation_faille_0day_Lilian_Ander.pptx
+++ b/TP6_Exploitation_faille_0day_Lilian_Ander.pptx
@@ -4339,31 +4339,6 @@
       </p:grpSpPr>
       <p:sp>
         <p:nvSpPr>
-          <p:cNvPr id="2" name="Titre 1">
-            <a:extLst>
-              <a:ext uri="{FF2B5EF4-FFF2-40B4-BE49-F238E27FC236}">
-                <a16:creationId xmlns:a16="http://schemas.microsoft.com/office/drawing/2014/main" id="{CE20B45D-C344-9144-A8AF-AC4D198EC632}"/>
-              </a:ext>
-            </a:extLst>
-          </p:cNvPr>
-          <p:cNvSpPr>
-            <a:spLocks noGrp="1"/>
-          </p:cNvSpPr>
-          <p:nvPr>
-            <p:ph type="title"/>
-          </p:nvPr>
-        </p:nvSpPr>
-        <p:spPr/>
-        <p:txBody>
-          <a:bodyPr/>
-          <a:lstStyle/>
-          <a:p>
-            <a:endParaRPr lang="fr-FR"/>
-          </a:p>
-        </p:txBody>
-      </p:sp>
-      <p:sp>
-        <p:nvSpPr>
           <p:cNvPr id="3" name="Espace réservé du contenu 2">
             <a:extLst>
               <a:ext uri="{FF2B5EF4-FFF2-40B4-BE49-F238E27FC236}">
@@ -4378,9 +4353,16 @@
             <p:ph idx="1"/>
           </p:nvPr>
         </p:nvSpPr>
-        <p:spPr/>
-        <p:txBody>
-          <a:bodyPr/>
+        <p:spPr>
+          <a:xfrm>
+            <a:off x="838200" y="531628"/>
+            <a:ext cx="10515600" cy="5645335"/>
+          </a:xfrm>
+        </p:spPr>
+        <p:txBody>
+          <a:bodyPr>
+            <a:normAutofit fontScale="92500" lnSpcReduction="20000"/>
+          </a:bodyPr>
           <a:lstStyle/>
           <a:p>
             <a:r>
@@ -4389,9 +4371,53 @@
             </a:r>
           </a:p>
           <a:p>
-            <a:endParaRPr lang="fr-FR" dirty="0"/>
-          </a:p>
-          <a:p>
+            <a:pPr marL="0" indent="0">
+              <a:buNone/>
+            </a:pPr>
+            <a:r>
+              <a:rPr lang="fr-FR" sz="1900" dirty="0"/>
+              <a:t>- Sauvegarde quotidienne automatisée.</a:t>
+            </a:r>
+          </a:p>
+          <a:p>
+            <a:pPr marL="0" indent="0">
+              <a:buNone/>
+            </a:pPr>
+            <a:r>
+              <a:rPr lang="fr-FR" sz="1900" dirty="0"/>
+              <a:t>- Redondance des serveurs critiques.</a:t>
+            </a:r>
+          </a:p>
+          <a:p>
+            <a:pPr marL="0" indent="0">
+              <a:buNone/>
+            </a:pPr>
+            <a:r>
+              <a:rPr lang="fr-FR" sz="1900" dirty="0"/>
+              <a:t>- </a:t>
+            </a:r>
+            <a:r>
+              <a:rPr lang="fr-FR" sz="2000" dirty="0"/>
+              <a:t>Formation annuelle des employés</a:t>
+            </a:r>
+            <a:r>
+              <a:rPr lang="fr-FR" sz="1900" dirty="0"/>
+              <a:t>.</a:t>
+            </a:r>
+          </a:p>
+          <a:p>
+            <a:pPr marL="0" indent="0">
+              <a:buNone/>
+            </a:pPr>
+            <a:r>
+              <a:rPr lang="fr-FR" sz="1900" dirty="0"/>
+              <a:t>- Chiffrement des données.</a:t>
+            </a:r>
+          </a:p>
+          <a:p>
+            <a:pPr marL="0" indent="0">
+              <a:buNone/>
+            </a:pPr>
             <a:endParaRPr lang="fr-FR" dirty="0"/>
           </a:p>
           <a:p>
@@ -4401,16 +4427,79 @@
             </a:r>
           </a:p>
           <a:p>
-            <a:endParaRPr lang="fr-FR" dirty="0"/>
-          </a:p>
-          <a:p>
-            <a:endParaRPr lang="fr-FR" dirty="0"/>
+            <a:pPr marL="0" indent="0">
+              <a:buNone/>
+            </a:pPr>
+            <a:r>
+              <a:rPr lang="fr-FR" dirty="0"/>
+              <a:t>- </a:t>
+            </a:r>
+            <a:r>
+              <a:rPr lang="fr-FR" sz="1900" dirty="0"/>
+              <a:t>Audit annuel du plan PRA/PCA</a:t>
+            </a:r>
+          </a:p>
+          <a:p>
+            <a:pPr marL="0" indent="0">
+              <a:buNone/>
+            </a:pPr>
+            <a:r>
+              <a:rPr lang="fr-FR" sz="1900" dirty="0"/>
+              <a:t>- Mise à jour annuelle</a:t>
+            </a:r>
+          </a:p>
+          <a:p>
+            <a:pPr>
+              <a:buFontTx/>
+              <a:buChar char="-"/>
+            </a:pPr>
+            <a:r>
+              <a:rPr lang="fr-FR" sz="1900" dirty="0"/>
+              <a:t>Compte rendu de test documenté</a:t>
+            </a:r>
+          </a:p>
+          <a:p>
+            <a:pPr marL="0" indent="0">
+              <a:buNone/>
+            </a:pPr>
+            <a:endParaRPr lang="fr-FR" sz="1900" dirty="0"/>
           </a:p>
           <a:p>
             <a:r>
               <a:rPr lang="fr-FR" dirty="0"/>
               <a:t>Une courte stratégie de communication de crise (qui parle, à qui, comment ?)</a:t>
             </a:r>
+          </a:p>
+          <a:p>
+            <a:pPr>
+              <a:buFontTx/>
+              <a:buChar char="-"/>
+            </a:pPr>
+            <a:r>
+              <a:rPr lang="fr-FR" sz="1900" dirty="0"/>
+              <a:t>E-mail d’urgence à l’ensemble du personnel.</a:t>
+            </a:r>
+          </a:p>
+          <a:p>
+            <a:pPr>
+              <a:buFontTx/>
+              <a:buChar char="-"/>
+            </a:pPr>
+            <a:r>
+              <a:rPr lang="fr-FR" sz="1900" dirty="0"/>
+              <a:t>Message sur l’intranet interne ou Slack / Teams.</a:t>
+            </a:r>
+          </a:p>
+          <a:p>
+            <a:pPr>
+              <a:buFontTx/>
+              <a:buChar char="-"/>
+            </a:pPr>
+            <a:r>
+              <a:rPr lang="fr-FR" sz="2000" dirty="0"/>
+              <a:t>Le DSI informe immédiatement le Directeur Général </a:t>
+            </a:r>
+            <a:endParaRPr lang="fr-FR" sz="1900" dirty="0"/>
           </a:p>
         </p:txBody>
       </p:sp>

--- a/TP6_Exploitation_faille_0day_Lilian_Ander.pptx
+++ b/TP6_Exploitation_faille_0day_Lilian_Ander.pptx
@@ -4225,31 +4225,38 @@
           </a:p>
         </p:txBody>
       </p:sp>
-      <p:sp>
-        <p:nvSpPr>
-          <p:cNvPr id="3" name="Espace réservé du contenu 2">
-            <a:extLst>
-              <a:ext uri="{FF2B5EF4-FFF2-40B4-BE49-F238E27FC236}">
-                <a16:creationId xmlns:a16="http://schemas.microsoft.com/office/drawing/2014/main" id="{7B0B372A-17B3-4871-25A2-C8EE589FBE98}"/>
-              </a:ext>
-            </a:extLst>
-          </p:cNvPr>
-          <p:cNvSpPr>
-            <a:spLocks noGrp="1"/>
-          </p:cNvSpPr>
+      <p:pic>
+        <p:nvPicPr>
+          <p:cNvPr id="8" name="Espace réservé du contenu 7">
+            <a:extLst>
+              <a:ext uri="{FF2B5EF4-FFF2-40B4-BE49-F238E27FC236}">
+                <a16:creationId xmlns:a16="http://schemas.microsoft.com/office/drawing/2014/main" id="{C35F8FE9-6FEA-6F7A-25A4-E512D4747B1A}"/>
+              </a:ext>
+            </a:extLst>
+          </p:cNvPr>
+          <p:cNvPicPr>
+            <a:picLocks noGrp="1" noChangeAspect="1"/>
+          </p:cNvPicPr>
           <p:nvPr>
             <p:ph idx="1"/>
           </p:nvPr>
-        </p:nvSpPr>
-        <p:spPr/>
-        <p:txBody>
-          <a:bodyPr/>
-          <a:lstStyle/>
-          <a:p>
-            <a:endParaRPr lang="fr-FR" dirty="0"/>
-          </a:p>
-        </p:txBody>
-      </p:sp>
+        </p:nvPicPr>
+        <p:blipFill>
+          <a:blip r:embed="rId2"/>
+          <a:stretch>
+            <a:fillRect/>
+          </a:stretch>
+        </p:blipFill>
+        <p:spPr>
+          <a:xfrm>
+            <a:off x="689903" y="1914525"/>
+            <a:ext cx="11245009" cy="4257675"/>
+          </a:xfrm>
+          <a:prstGeom prst="rect">
+            <a:avLst/>
+          </a:prstGeom>
+        </p:spPr>
+      </p:pic>
       <p:sp>
         <p:nvSpPr>
           <p:cNvPr id="4" name="Espace réservé du pied de page 3">
@@ -4304,6 +4311,158 @@
               <a:t>11</a:t>
             </a:fld>
             <a:endParaRPr lang="fr-FR"/>
+          </a:p>
+        </p:txBody>
+      </p:sp>
+      <p:cxnSp>
+        <p:nvCxnSpPr>
+          <p:cNvPr id="10" name="Connecteur droit avec flèche 9">
+            <a:extLst>
+              <a:ext uri="{FF2B5EF4-FFF2-40B4-BE49-F238E27FC236}">
+                <a16:creationId xmlns:a16="http://schemas.microsoft.com/office/drawing/2014/main" id="{C85BB4D7-2A7A-D61E-AF60-6085050017C4}"/>
+              </a:ext>
+            </a:extLst>
+          </p:cNvPr>
+          <p:cNvCxnSpPr>
+            <a:cxnSpLocks/>
+          </p:cNvCxnSpPr>
+          <p:nvPr/>
+        </p:nvCxnSpPr>
+        <p:spPr>
+          <a:xfrm flipV="1">
+            <a:off x="555551" y="2424223"/>
+            <a:ext cx="0" cy="3747977"/>
+          </a:xfrm>
+          <a:prstGeom prst="straightConnector1">
+            <a:avLst/>
+          </a:prstGeom>
+          <a:ln>
+            <a:tailEnd type="triangle"/>
+          </a:ln>
+        </p:spPr>
+        <p:style>
+          <a:lnRef idx="2">
+            <a:schemeClr val="accent1"/>
+          </a:lnRef>
+          <a:fillRef idx="0">
+            <a:schemeClr val="accent1"/>
+          </a:fillRef>
+          <a:effectRef idx="1">
+            <a:schemeClr val="accent1"/>
+          </a:effectRef>
+          <a:fontRef idx="minor">
+            <a:schemeClr val="tx1"/>
+          </a:fontRef>
+        </p:style>
+      </p:cxnSp>
+      <p:cxnSp>
+        <p:nvCxnSpPr>
+          <p:cNvPr id="12" name="Connecteur droit avec flèche 11">
+            <a:extLst>
+              <a:ext uri="{FF2B5EF4-FFF2-40B4-BE49-F238E27FC236}">
+                <a16:creationId xmlns:a16="http://schemas.microsoft.com/office/drawing/2014/main" id="{5DD027EA-39DD-2F5E-02AF-863E6720543D}"/>
+              </a:ext>
+            </a:extLst>
+          </p:cNvPr>
+          <p:cNvCxnSpPr>
+            <a:cxnSpLocks/>
+          </p:cNvCxnSpPr>
+          <p:nvPr/>
+        </p:nvCxnSpPr>
+        <p:spPr>
+          <a:xfrm>
+            <a:off x="2041451" y="1690688"/>
+            <a:ext cx="9893461" cy="0"/>
+          </a:xfrm>
+          <a:prstGeom prst="straightConnector1">
+            <a:avLst/>
+          </a:prstGeom>
+          <a:ln>
+            <a:tailEnd type="triangle"/>
+          </a:ln>
+        </p:spPr>
+        <p:style>
+          <a:lnRef idx="2">
+            <a:schemeClr val="accent1"/>
+          </a:lnRef>
+          <a:fillRef idx="0">
+            <a:schemeClr val="accent1"/>
+          </a:fillRef>
+          <a:effectRef idx="1">
+            <a:schemeClr val="accent1"/>
+          </a:effectRef>
+          <a:fontRef idx="minor">
+            <a:schemeClr val="tx1"/>
+          </a:fontRef>
+        </p:style>
+      </p:cxnSp>
+      <p:sp>
+        <p:nvSpPr>
+          <p:cNvPr id="17" name="ZoneTexte 16">
+            <a:extLst>
+              <a:ext uri="{FF2B5EF4-FFF2-40B4-BE49-F238E27FC236}">
+                <a16:creationId xmlns:a16="http://schemas.microsoft.com/office/drawing/2014/main" id="{CEF6DFE1-F2FA-B406-D954-8C359CE42F8F}"/>
+              </a:ext>
+            </a:extLst>
+          </p:cNvPr>
+          <p:cNvSpPr txBox="1"/>
+          <p:nvPr/>
+        </p:nvSpPr>
+        <p:spPr>
+          <a:xfrm>
+            <a:off x="5869172" y="1282186"/>
+            <a:ext cx="1871330" cy="369332"/>
+          </a:xfrm>
+          <a:prstGeom prst="rect">
+            <a:avLst/>
+          </a:prstGeom>
+          <a:noFill/>
+        </p:spPr>
+        <p:txBody>
+          <a:bodyPr wrap="square" rtlCol="0">
+            <a:spAutoFit/>
+          </a:bodyPr>
+          <a:lstStyle/>
+          <a:p>
+            <a:r>
+              <a:rPr lang="fr-FR" dirty="0"/>
+              <a:t>Gravité</a:t>
+            </a:r>
+          </a:p>
+        </p:txBody>
+      </p:sp>
+      <p:sp>
+        <p:nvSpPr>
+          <p:cNvPr id="18" name="ZoneTexte 17">
+            <a:extLst>
+              <a:ext uri="{FF2B5EF4-FFF2-40B4-BE49-F238E27FC236}">
+                <a16:creationId xmlns:a16="http://schemas.microsoft.com/office/drawing/2014/main" id="{D6559B6C-C0F8-97C3-8883-EE9FAE416F52}"/>
+              </a:ext>
+            </a:extLst>
+          </p:cNvPr>
+          <p:cNvSpPr txBox="1"/>
+          <p:nvPr/>
+        </p:nvSpPr>
+        <p:spPr>
+          <a:xfrm rot="16200000">
+            <a:off x="-564780" y="3858696"/>
+            <a:ext cx="1871330" cy="369332"/>
+          </a:xfrm>
+          <a:prstGeom prst="rect">
+            <a:avLst/>
+          </a:prstGeom>
+          <a:noFill/>
+        </p:spPr>
+        <p:txBody>
+          <a:bodyPr wrap="square" rtlCol="0">
+            <a:spAutoFit/>
+          </a:bodyPr>
+          <a:lstStyle/>
+          <a:p>
+            <a:r>
+              <a:rPr lang="fr-FR" dirty="0"/>
+              <a:t>Probabilité</a:t>
+            </a:r>
           </a:p>
         </p:txBody>
       </p:sp>
@@ -5782,10 +5941,9 @@
                     <a:lstStyle/>
                     <a:p>
                       <a:r>
-                        <a:rPr lang="fr-FR" sz="1000"/>
+                        <a:rPr lang="fr-FR" sz="1000" dirty="0"/>
                         <a:t>Perte de connectivité Internet dans les bureaux</a:t>
                       </a:r>
-                      <a:endParaRPr lang="fr-FR" sz="1000" dirty="0"/>
                     </a:p>
                   </a:txBody>
                   <a:tcPr/>
@@ -5855,10 +6013,9 @@
                     <a:lstStyle/>
                     <a:p>
                       <a:r>
-                        <a:rPr lang="fr-FR" sz="1000"/>
+                        <a:rPr lang="fr-FR" sz="1000" dirty="0"/>
                         <a:t>Bad buzz ou crise de à un incident communication suite technique</a:t>
                       </a:r>
-                      <a:endParaRPr lang="fr-FR" sz="1000" dirty="0"/>
                     </a:p>
                   </a:txBody>
                   <a:tcPr/>
@@ -6806,7 +6963,7 @@
           <p:nvPr>
             <p:extLst>
               <p:ext uri="{D42A27DB-BD31-4B8C-83A1-F6EECF244321}">
-                <p14:modId xmlns:p14="http://schemas.microsoft.com/office/powerpoint/2010/main" val="543018999"/>
+                <p14:modId xmlns:p14="http://schemas.microsoft.com/office/powerpoint/2010/main" val="2357998041"/>
               </p:ext>
             </p:extLst>
           </p:nvPr>
@@ -6960,7 +7117,7 @@
                     <a:p>
                       <a:r>
                         <a:rPr lang="fr-FR" dirty="0"/>
-                        <a:t>Maintient de l’</a:t>
+                        <a:t>Maintien de l’</a:t>
                       </a:r>
                       <a:r>
                         <a:rPr lang="fr-FR" dirty="0" err="1"/>

--- a/TP6_Exploitation_faille_0day_Lilian_Ander.pptx
+++ b/TP6_Exploitation_faille_0day_Lilian_Ander.pptx
@@ -5,21 +5,23 @@
     <p:sldMasterId id="2147483648" r:id="rId1"/>
   </p:sldMasterIdLst>
   <p:notesMasterIdLst>
-    <p:notesMasterId r:id="rId14"/>
+    <p:notesMasterId r:id="rId16"/>
   </p:notesMasterIdLst>
   <p:sldIdLst>
-    <p:sldId id="256" r:id="rId2"/>
-    <p:sldId id="257" r:id="rId3"/>
-    <p:sldId id="258" r:id="rId4"/>
-    <p:sldId id="259" r:id="rId5"/>
-    <p:sldId id="262" r:id="rId6"/>
-    <p:sldId id="263" r:id="rId7"/>
-    <p:sldId id="264" r:id="rId8"/>
-    <p:sldId id="265" r:id="rId9"/>
-    <p:sldId id="266" r:id="rId10"/>
-    <p:sldId id="267" r:id="rId11"/>
-    <p:sldId id="269" r:id="rId12"/>
-    <p:sldId id="268" r:id="rId13"/>
+    <p:sldId id="271" r:id="rId2"/>
+    <p:sldId id="256" r:id="rId3"/>
+    <p:sldId id="257" r:id="rId4"/>
+    <p:sldId id="258" r:id="rId5"/>
+    <p:sldId id="259" r:id="rId6"/>
+    <p:sldId id="262" r:id="rId7"/>
+    <p:sldId id="263" r:id="rId8"/>
+    <p:sldId id="264" r:id="rId9"/>
+    <p:sldId id="270" r:id="rId10"/>
+    <p:sldId id="265" r:id="rId11"/>
+    <p:sldId id="266" r:id="rId12"/>
+    <p:sldId id="267" r:id="rId13"/>
+    <p:sldId id="269" r:id="rId14"/>
+    <p:sldId id="268" r:id="rId15"/>
   </p:sldIdLst>
   <p:sldSz cx="12192000" cy="6858000"/>
   <p:notesSz cx="6858000" cy="9144000"/>
@@ -3714,7 +3716,13 @@
   <p:cSld>
     <p:spTree>
       <p:nvGrpSpPr>
-        <p:cNvPr id="1" name=""/>
+        <p:cNvPr id="1" name="">
+          <a:extLst>
+            <a:ext uri="{FF2B5EF4-FFF2-40B4-BE49-F238E27FC236}">
+              <a16:creationId xmlns:a16="http://schemas.microsoft.com/office/drawing/2014/main" id="{16DB910C-CBAE-71A6-A314-37116185EEEB}"/>
+            </a:ext>
+          </a:extLst>
+        </p:cNvPr>
         <p:cNvGrpSpPr/>
         <p:nvPr/>
       </p:nvGrpSpPr>
@@ -3731,42 +3739,98 @@
           <p:cNvPr id="2" name="Titre 1">
             <a:extLst>
               <a:ext uri="{FF2B5EF4-FFF2-40B4-BE49-F238E27FC236}">
-                <a16:creationId xmlns:a16="http://schemas.microsoft.com/office/drawing/2014/main" id="{6C02A83A-3580-38BD-F2BC-CECE03E1C4D0}"/>
-              </a:ext>
-            </a:extLst>
-          </p:cNvPr>
-          <p:cNvSpPr>
-            <a:spLocks noGrp="1"/>
-          </p:cNvSpPr>
-          <p:nvPr>
-            <p:ph type="ctrTitle"/>
+                <a16:creationId xmlns:a16="http://schemas.microsoft.com/office/drawing/2014/main" id="{A8523B53-C60E-9294-A650-D434706664F7}"/>
+              </a:ext>
+            </a:extLst>
+          </p:cNvPr>
+          <p:cNvSpPr>
+            <a:spLocks noGrp="1"/>
+          </p:cNvSpPr>
+          <p:nvPr>
+            <p:ph type="title"/>
           </p:nvPr>
         </p:nvSpPr>
         <p:spPr>
           <a:xfrm>
-            <a:off x="1524000" y="318977"/>
-            <a:ext cx="9144000" cy="904986"/>
+            <a:off x="838200" y="480218"/>
+            <a:ext cx="10515600" cy="1325563"/>
           </a:xfrm>
         </p:spPr>
         <p:txBody>
-          <a:bodyPr>
-            <a:normAutofit fontScale="90000"/>
-          </a:bodyPr>
-          <a:lstStyle/>
-          <a:p>
+          <a:bodyPr/>
+          <a:lstStyle/>
+          <a:p>
+            <a:pPr algn="ctr"/>
             <a:r>
               <a:rPr lang="fr-FR" dirty="0"/>
-              <a:t>Exploitation de failles 0-day</a:t>
-            </a:r>
-          </a:p>
-        </p:txBody>
-      </p:sp>
-      <p:sp>
-        <p:nvSpPr>
-          <p:cNvPr id="4" name="ZoneTexte 3">
-            <a:extLst>
-              <a:ext uri="{FF2B5EF4-FFF2-40B4-BE49-F238E27FC236}">
-                <a16:creationId xmlns:a16="http://schemas.microsoft.com/office/drawing/2014/main" id="{282D0C6B-8523-1E28-18EC-D0974EFF0A05}"/>
+              <a:t>Atelier 1</a:t>
+            </a:r>
+          </a:p>
+        </p:txBody>
+      </p:sp>
+      <p:sp>
+        <p:nvSpPr>
+          <p:cNvPr id="4" name="Espace réservé du pied de page 3">
+            <a:extLst>
+              <a:ext uri="{FF2B5EF4-FFF2-40B4-BE49-F238E27FC236}">
+                <a16:creationId xmlns:a16="http://schemas.microsoft.com/office/drawing/2014/main" id="{57405137-6541-3C5C-4B66-A42FB2B96412}"/>
+              </a:ext>
+            </a:extLst>
+          </p:cNvPr>
+          <p:cNvSpPr>
+            <a:spLocks noGrp="1"/>
+          </p:cNvSpPr>
+          <p:nvPr>
+            <p:ph type="ftr" sz="quarter" idx="11"/>
+          </p:nvPr>
+        </p:nvSpPr>
+        <p:spPr/>
+        <p:txBody>
+          <a:bodyPr/>
+          <a:lstStyle/>
+          <a:p>
+            <a:r>
+              <a:rPr lang="fr-FR"/>
+              <a:t>PICIURA Ander - MIRABEL Lilian</a:t>
+            </a:r>
+          </a:p>
+        </p:txBody>
+      </p:sp>
+      <p:sp>
+        <p:nvSpPr>
+          <p:cNvPr id="5" name="Espace réservé du numéro de diapositive 4">
+            <a:extLst>
+              <a:ext uri="{FF2B5EF4-FFF2-40B4-BE49-F238E27FC236}">
+                <a16:creationId xmlns:a16="http://schemas.microsoft.com/office/drawing/2014/main" id="{0BEAF4B3-6F1F-5F40-C1B9-30912C4532F7}"/>
+              </a:ext>
+            </a:extLst>
+          </p:cNvPr>
+          <p:cNvSpPr>
+            <a:spLocks noGrp="1"/>
+          </p:cNvSpPr>
+          <p:nvPr>
+            <p:ph type="sldNum" sz="quarter" idx="12"/>
+          </p:nvPr>
+        </p:nvSpPr>
+        <p:spPr/>
+        <p:txBody>
+          <a:bodyPr/>
+          <a:lstStyle/>
+          <a:p>
+            <a:fld id="{EF144E42-BC24-D442-AFF0-55EAB46336FB}" type="slidenum">
+              <a:rPr lang="fr-FR" smtClean="0"/>
+              <a:t>1</a:t>
+            </a:fld>
+            <a:endParaRPr lang="fr-FR"/>
+          </a:p>
+        </p:txBody>
+      </p:sp>
+      <p:sp>
+        <p:nvSpPr>
+          <p:cNvPr id="3" name="ZoneTexte 2">
+            <a:extLst>
+              <a:ext uri="{FF2B5EF4-FFF2-40B4-BE49-F238E27FC236}">
+                <a16:creationId xmlns:a16="http://schemas.microsoft.com/office/drawing/2014/main" id="{2DE2E0A7-F7FC-4599-8F76-77AB5BD9A2DA}"/>
               </a:ext>
             </a:extLst>
           </p:cNvPr>
@@ -3775,8 +3839,8 @@
         </p:nvSpPr>
         <p:spPr>
           <a:xfrm>
-            <a:off x="746275" y="1616149"/>
-            <a:ext cx="10699449" cy="646331"/>
+            <a:off x="6536724" y="2113005"/>
+            <a:ext cx="184731" cy="369332"/>
           </a:xfrm>
           <a:prstGeom prst="rect">
             <a:avLst/>
@@ -3784,174 +3848,97 @@
           <a:noFill/>
         </p:spPr>
         <p:txBody>
-          <a:bodyPr wrap="square" rtlCol="0">
+          <a:bodyPr wrap="none" rtlCol="0">
             <a:spAutoFit/>
           </a:bodyPr>
           <a:lstStyle/>
           <a:p>
-            <a:r>
-              <a:rPr lang="fr-FR" dirty="0"/>
-              <a:t>Une faille 0-day est une vulnérabilité informatique inconnue du fabricant et sans correctif disponible, que des pirates peuvent exploiter avant qu’elle ne soit corrigée.</a:t>
-            </a:r>
-          </a:p>
-        </p:txBody>
-      </p:sp>
-      <p:sp>
-        <p:nvSpPr>
-          <p:cNvPr id="5" name="ZoneTexte 4">
-            <a:extLst>
-              <a:ext uri="{FF2B5EF4-FFF2-40B4-BE49-F238E27FC236}">
-                <a16:creationId xmlns:a16="http://schemas.microsoft.com/office/drawing/2014/main" id="{7EA1C454-6DED-6F7D-C18D-29C8368B699E}"/>
-              </a:ext>
-            </a:extLst>
-          </p:cNvPr>
-          <p:cNvSpPr txBox="1"/>
+            <a:endParaRPr lang="fr-FR" dirty="0"/>
+          </a:p>
+        </p:txBody>
+      </p:sp>
+      <p:sp>
+        <p:nvSpPr>
+          <p:cNvPr id="6" name="Titre 1">
+            <a:extLst>
+              <a:ext uri="{FF2B5EF4-FFF2-40B4-BE49-F238E27FC236}">
+                <a16:creationId xmlns:a16="http://schemas.microsoft.com/office/drawing/2014/main" id="{8AAB2CFC-DC19-C335-A285-EE56A2FE6630}"/>
+              </a:ext>
+            </a:extLst>
+          </p:cNvPr>
+          <p:cNvSpPr txBox="1">
+            <a:spLocks/>
+          </p:cNvSpPr>
           <p:nvPr/>
         </p:nvSpPr>
         <p:spPr>
           <a:xfrm>
-            <a:off x="746275" y="2654666"/>
-            <a:ext cx="10699449" cy="2954655"/>
+            <a:off x="838200" y="2766218"/>
+            <a:ext cx="10515600" cy="1325563"/>
           </a:xfrm>
           <a:prstGeom prst="rect">
             <a:avLst/>
           </a:prstGeom>
-          <a:noFill/>
         </p:spPr>
         <p:txBody>
-          <a:bodyPr wrap="square" rtlCol="0">
-            <a:spAutoFit/>
+          <a:bodyPr vert="horz" lIns="91440" tIns="45720" rIns="91440" bIns="45720" rtlCol="0" anchor="ctr">
+            <a:normAutofit fontScale="85000" lnSpcReduction="20000"/>
           </a:bodyPr>
-          <a:lstStyle/>
-          <a:p>
-            <a:r>
-              <a:rPr lang="fr-FR" sz="2400" b="1" dirty="0"/>
-              <a:t>Exemple concret</a:t>
-            </a:r>
-          </a:p>
-          <a:p>
+          <a:lstStyle>
+            <a:lvl1pPr algn="l" defTabSz="914400" rtl="0" eaLnBrk="1" latinLnBrk="0" hangingPunct="1">
+              <a:lnSpc>
+                <a:spcPct val="90000"/>
+              </a:lnSpc>
+              <a:spcBef>
+                <a:spcPct val="0"/>
+              </a:spcBef>
+              <a:buNone/>
+              <a:defRPr sz="4400" kern="1200">
+                <a:solidFill>
+                  <a:schemeClr val="tx1"/>
+                </a:solidFill>
+                <a:latin typeface="+mj-lt"/>
+                <a:ea typeface="+mj-ea"/>
+                <a:cs typeface="+mj-cs"/>
+              </a:defRPr>
+            </a:lvl1pPr>
+          </a:lstStyle>
+          <a:p>
+            <a:pPr algn="ctr"/>
             <a:r>
               <a:rPr lang="fr-FR" dirty="0"/>
-              <a:t>En 2021, une enquête internationale (Projet Pegasus) a révélé que le logiciel espion Pegasus avait été utilisé pour cibler les téléphones de plusieurs chefs d’État et responsables politiques, dont Emmanuel Macron, le président français.</a:t>
-            </a:r>
-          </a:p>
-          <a:p>
+              <a:t>Lilian Mirabel</a:t>
+            </a:r>
+          </a:p>
+          <a:p>
+            <a:pPr algn="ctr"/>
+            <a:r>
+              <a:rPr lang="fr-FR" dirty="0"/>
+              <a:t>&amp; </a:t>
+            </a:r>
+          </a:p>
+          <a:p>
+            <a:pPr algn="ctr"/>
+            <a:r>
+              <a:rPr lang="fr-FR" dirty="0" err="1"/>
+              <a:t>Ander</a:t>
+            </a:r>
+            <a:r>
+              <a:rPr lang="fr-FR" dirty="0"/>
+              <a:t> </a:t>
+            </a:r>
+            <a:r>
+              <a:rPr lang="fr-FR" dirty="0" err="1"/>
+              <a:t>Piciura</a:t>
+            </a:r>
             <a:endParaRPr lang="fr-FR" dirty="0"/>
-          </a:p>
-          <a:p>
-            <a:r>
-              <a:rPr lang="fr-FR" dirty="0"/>
-              <a:t>Le spyware exploitait des failles 0-day dans iOS (le système d’Apple) pour s’installer à distance sans action de l’utilisateur.</a:t>
-            </a:r>
-          </a:p>
-          <a:p>
-            <a:endParaRPr lang="fr-FR" dirty="0"/>
-          </a:p>
-          <a:p>
-            <a:r>
-              <a:rPr lang="fr-FR" dirty="0"/>
-              <a:t>Une fois infiltré, Pegasus pouvait lire les messages, écouter les appels, activer le micro ou la caméra du téléphone, transformant ainsi l’appareil en véritable outil d’espionnage.</a:t>
-            </a:r>
-          </a:p>
-        </p:txBody>
-      </p:sp>
-      <p:sp>
-        <p:nvSpPr>
-          <p:cNvPr id="6" name="ZoneTexte 5">
-            <a:extLst>
-              <a:ext uri="{FF2B5EF4-FFF2-40B4-BE49-F238E27FC236}">
-                <a16:creationId xmlns:a16="http://schemas.microsoft.com/office/drawing/2014/main" id="{F5FDC0C3-79A3-A4B4-0406-5778C21F8D6F}"/>
-              </a:ext>
-            </a:extLst>
-          </p:cNvPr>
-          <p:cNvSpPr txBox="1"/>
-          <p:nvPr/>
-        </p:nvSpPr>
-        <p:spPr>
-          <a:xfrm>
-            <a:off x="3678061" y="5816841"/>
-            <a:ext cx="4835876" cy="369332"/>
-          </a:xfrm>
-          <a:prstGeom prst="rect">
-            <a:avLst/>
-          </a:prstGeom>
-          <a:noFill/>
-        </p:spPr>
-        <p:txBody>
-          <a:bodyPr wrap="none" rtlCol="0">
-            <a:spAutoFit/>
-          </a:bodyPr>
-          <a:lstStyle/>
-          <a:p>
-            <a:pPr algn="ctr"/>
-            <a:r>
-              <a:rPr lang="fr-FR" dirty="0"/>
-              <a:t>Cette faille appartient à la catégorie technique.</a:t>
-            </a:r>
-          </a:p>
-        </p:txBody>
-      </p:sp>
-      <p:sp>
-        <p:nvSpPr>
-          <p:cNvPr id="3" name="Espace réservé du pied de page 2">
-            <a:extLst>
-              <a:ext uri="{FF2B5EF4-FFF2-40B4-BE49-F238E27FC236}">
-                <a16:creationId xmlns:a16="http://schemas.microsoft.com/office/drawing/2014/main" id="{33C58524-2B16-E108-8C75-D058E4A0501C}"/>
-              </a:ext>
-            </a:extLst>
-          </p:cNvPr>
-          <p:cNvSpPr>
-            <a:spLocks noGrp="1"/>
-          </p:cNvSpPr>
-          <p:nvPr>
-            <p:ph type="ftr" sz="quarter" idx="11"/>
-          </p:nvPr>
-        </p:nvSpPr>
-        <p:spPr/>
-        <p:txBody>
-          <a:bodyPr/>
-          <a:lstStyle/>
-          <a:p>
-            <a:r>
-              <a:rPr lang="fr-FR"/>
-              <a:t>PICIURA Ander - MIRABEL Lilian</a:t>
-            </a:r>
-          </a:p>
-        </p:txBody>
-      </p:sp>
-      <p:sp>
-        <p:nvSpPr>
-          <p:cNvPr id="7" name="Espace réservé du numéro de diapositive 6">
-            <a:extLst>
-              <a:ext uri="{FF2B5EF4-FFF2-40B4-BE49-F238E27FC236}">
-                <a16:creationId xmlns:a16="http://schemas.microsoft.com/office/drawing/2014/main" id="{B15BA5A3-8BFE-5283-8FC7-9E2212EC48B7}"/>
-              </a:ext>
-            </a:extLst>
-          </p:cNvPr>
-          <p:cNvSpPr>
-            <a:spLocks noGrp="1"/>
-          </p:cNvSpPr>
-          <p:nvPr>
-            <p:ph type="sldNum" sz="quarter" idx="12"/>
-          </p:nvPr>
-        </p:nvSpPr>
-        <p:spPr/>
-        <p:txBody>
-          <a:bodyPr/>
-          <a:lstStyle/>
-          <a:p>
-            <a:fld id="{EF144E42-BC24-D442-AFF0-55EAB46336FB}" type="slidenum">
-              <a:rPr lang="fr-FR" smtClean="0"/>
-              <a:t>1</a:t>
-            </a:fld>
-            <a:endParaRPr lang="fr-FR"/>
           </a:p>
         </p:txBody>
       </p:sp>
     </p:spTree>
     <p:extLst>
       <p:ext uri="{BB962C8B-B14F-4D97-AF65-F5344CB8AC3E}">
-        <p14:creationId xmlns:p14="http://schemas.microsoft.com/office/powerpoint/2010/main" val="3287964140"/>
+        <p14:creationId xmlns:p14="http://schemas.microsoft.com/office/powerpoint/2010/main" val="237868849"/>
       </p:ext>
     </p:extLst>
   </p:cSld>
@@ -3980,38 +3967,10 @@
       </p:grpSpPr>
       <p:sp>
         <p:nvSpPr>
-          <p:cNvPr id="2" name="Titre 1">
-            <a:extLst>
-              <a:ext uri="{FF2B5EF4-FFF2-40B4-BE49-F238E27FC236}">
-                <a16:creationId xmlns:a16="http://schemas.microsoft.com/office/drawing/2014/main" id="{9EA4878E-C162-9487-A85B-191EA9700E9B}"/>
-              </a:ext>
-            </a:extLst>
-          </p:cNvPr>
-          <p:cNvSpPr>
-            <a:spLocks noGrp="1"/>
-          </p:cNvSpPr>
-          <p:nvPr>
-            <p:ph type="title"/>
-          </p:nvPr>
-        </p:nvSpPr>
-        <p:spPr/>
-        <p:txBody>
-          <a:bodyPr/>
-          <a:lstStyle/>
-          <a:p>
-            <a:r>
-              <a:rPr lang="fr-FR" dirty="0"/>
-              <a:t>Fiche PRA/PCA</a:t>
-            </a:r>
-          </a:p>
-        </p:txBody>
-      </p:sp>
-      <p:sp>
-        <p:nvSpPr>
           <p:cNvPr id="3" name="Espace réservé du contenu 2">
             <a:extLst>
               <a:ext uri="{FF2B5EF4-FFF2-40B4-BE49-F238E27FC236}">
-                <a16:creationId xmlns:a16="http://schemas.microsoft.com/office/drawing/2014/main" id="{F8C38C2D-D08E-76BA-90A4-72786E65D00B}"/>
+                <a16:creationId xmlns:a16="http://schemas.microsoft.com/office/drawing/2014/main" id="{7F6607C5-8744-2DA8-280B-A1786B695664}"/>
               </a:ext>
             </a:extLst>
           </p:cNvPr>
@@ -4022,9 +3981,16 @@
             <p:ph idx="1"/>
           </p:nvPr>
         </p:nvSpPr>
-        <p:spPr/>
-        <p:txBody>
-          <a:bodyPr/>
+        <p:spPr>
+          <a:xfrm>
+            <a:off x="838200" y="1149178"/>
+            <a:ext cx="10515600" cy="5027785"/>
+          </a:xfrm>
+        </p:spPr>
+        <p:txBody>
+          <a:bodyPr>
+            <a:normAutofit/>
+          </a:bodyPr>
           <a:lstStyle/>
           <a:p>
             <a:pPr marL="0" indent="0">
@@ -4032,51 +3998,7 @@
             </a:pPr>
             <a:r>
               <a:rPr lang="fr-FR" b="1" dirty="0"/>
-              <a:t>Contexte et Enjeux </a:t>
-            </a:r>
-            <a:r>
-              <a:rPr lang="fr-FR" dirty="0"/>
-              <a:t>: La startup </a:t>
-            </a:r>
-            <a:r>
-              <a:rPr lang="fr-FR" dirty="0" err="1"/>
-              <a:t>Covoit’Ouest</a:t>
-            </a:r>
-            <a:r>
-              <a:rPr lang="fr-FR" dirty="0"/>
-              <a:t> situé a La Rochelle </a:t>
-            </a:r>
-          </a:p>
-          <a:p>
-            <a:pPr marL="0" indent="0">
-              <a:buNone/>
-            </a:pPr>
-            <a:r>
-              <a:rPr lang="fr-FR" dirty="0"/>
-              <a:t>est une entreprise qui dépend principalement de ses Systèmes d’Information.</a:t>
-            </a:r>
-          </a:p>
-          <a:p>
-            <a:pPr marL="0" indent="0">
-              <a:buNone/>
-            </a:pPr>
-            <a:endParaRPr lang="fr-FR" dirty="0"/>
-          </a:p>
-          <a:p>
-            <a:pPr marL="0" indent="0">
-              <a:buNone/>
-            </a:pPr>
-            <a:r>
-              <a:rPr lang="fr-FR" dirty="0"/>
-              <a:t>Les enjeux sont donc importants pour </a:t>
-            </a:r>
-            <a:r>
-              <a:rPr lang="fr-FR" dirty="0" err="1"/>
-              <a:t>Covoit’Ouest</a:t>
-            </a:r>
-            <a:r>
-              <a:rPr lang="fr-FR" dirty="0"/>
-              <a:t> pour :</a:t>
+              <a:t>Proposez une stratégie de sauvegarde et de restauration</a:t>
             </a:r>
           </a:p>
           <a:p>
@@ -4085,8 +4007,8 @@
               <a:buChar char="-"/>
             </a:pPr>
             <a:r>
-              <a:rPr lang="fr-FR" dirty="0"/>
-              <a:t>De garder une continuité du service permanant.</a:t>
+              <a:rPr lang="fr-FR" sz="1800" dirty="0"/>
+              <a:t>Sauvegarde quotidienne et automatique des données</a:t>
             </a:r>
           </a:p>
           <a:p>
@@ -4095,18 +4017,102 @@
               <a:buChar char="-"/>
             </a:pPr>
             <a:r>
-              <a:rPr lang="fr-FR" dirty="0"/>
-              <a:t>Limiter les pertes et vol de données.</a:t>
-            </a:r>
+              <a:rPr lang="fr-FR" sz="1800" dirty="0"/>
+              <a:t>Utilisation de divers supports de stockages de données (cloud, disques, etc.)</a:t>
+            </a:r>
+          </a:p>
+          <a:p>
+            <a:pPr>
+              <a:buFontTx/>
+              <a:buChar char="-"/>
+            </a:pPr>
+            <a:r>
+              <a:rPr lang="fr-FR" sz="1800" dirty="0"/>
+              <a:t>Utilisation d’un système de </a:t>
+            </a:r>
+            <a:r>
+              <a:rPr lang="fr-FR" sz="1800" dirty="0" err="1"/>
+              <a:t>versionning</a:t>
+            </a:r>
+            <a:r>
+              <a:rPr lang="fr-FR" sz="1800" dirty="0"/>
+              <a:t> pour le SI (</a:t>
+            </a:r>
+            <a:r>
+              <a:rPr lang="fr-FR" sz="1800" dirty="0" err="1"/>
+              <a:t>github</a:t>
+            </a:r>
+            <a:r>
+              <a:rPr lang="fr-FR" sz="1800" dirty="0"/>
+              <a:t>, git)</a:t>
+            </a:r>
+          </a:p>
+          <a:p>
+            <a:pPr>
+              <a:buFontTx/>
+              <a:buChar char="-"/>
+            </a:pPr>
+            <a:endParaRPr lang="fr-FR" sz="1800" dirty="0"/>
           </a:p>
           <a:p>
             <a:pPr marL="0" indent="0">
               <a:buNone/>
             </a:pPr>
             <a:r>
-              <a:rPr lang="fr-FR" dirty="0"/>
-              <a:t>- Préserver la stabilité économique de l’entreprise.</a:t>
-            </a:r>
+              <a:rPr lang="fr-FR" b="1" dirty="0"/>
+              <a:t>Décrivez les étapes de reprise après incident</a:t>
+            </a:r>
+          </a:p>
+          <a:p>
+            <a:pPr marL="514350" indent="-514350">
+              <a:buAutoNum type="arabicPeriod"/>
+            </a:pPr>
+            <a:r>
+              <a:rPr lang="fr-FR" sz="1900" dirty="0"/>
+              <a:t>Analyse et vérification sur l’impact  et l’incidence du système et des données.</a:t>
+            </a:r>
+          </a:p>
+          <a:p>
+            <a:pPr marL="514350" indent="-514350">
+              <a:buAutoNum type="arabicPeriod"/>
+            </a:pPr>
+            <a:r>
+              <a:rPr lang="fr-FR" sz="1900" dirty="0"/>
+              <a:t>Décision des différents acteurs sur les actions à entreprendre.</a:t>
+            </a:r>
+          </a:p>
+          <a:p>
+            <a:pPr marL="514350" indent="-514350">
+              <a:buAutoNum type="arabicPeriod"/>
+            </a:pPr>
+            <a:r>
+              <a:rPr lang="fr-FR" sz="1900" dirty="0"/>
+              <a:t>Phase de test pour la validation des bons fonctionnements du système.</a:t>
+            </a:r>
+          </a:p>
+          <a:p>
+            <a:pPr marL="514350" indent="-514350">
+              <a:buAutoNum type="arabicPeriod"/>
+            </a:pPr>
+            <a:r>
+              <a:rPr lang="fr-FR" sz="1900" dirty="0"/>
+              <a:t>Communication signaler la correction du problème.</a:t>
+            </a:r>
+          </a:p>
+          <a:p>
+            <a:pPr marL="514350" indent="-514350">
+              <a:buAutoNum type="arabicPeriod"/>
+            </a:pPr>
+            <a:r>
+              <a:rPr lang="fr-FR" sz="1900" dirty="0"/>
+              <a:t>Re-disponibilité du service et retour a la normal.</a:t>
+            </a:r>
+          </a:p>
+          <a:p>
+            <a:pPr marL="0" indent="0">
+              <a:buNone/>
+            </a:pPr>
+            <a:endParaRPr lang="fr-FR" dirty="0"/>
           </a:p>
         </p:txBody>
       </p:sp>
@@ -4115,7 +4121,7 @@
           <p:cNvPr id="4" name="Espace réservé du pied de page 3">
             <a:extLst>
               <a:ext uri="{FF2B5EF4-FFF2-40B4-BE49-F238E27FC236}">
-                <a16:creationId xmlns:a16="http://schemas.microsoft.com/office/drawing/2014/main" id="{B93DAA80-D962-A203-22E7-53E858C1A0AD}"/>
+                <a16:creationId xmlns:a16="http://schemas.microsoft.com/office/drawing/2014/main" id="{6DA69D77-0AED-1B9F-655F-3CB02B9521C0}"/>
               </a:ext>
             </a:extLst>
           </p:cNvPr>
@@ -4143,7 +4149,7 @@
           <p:cNvPr id="5" name="Espace réservé du numéro de diapositive 4">
             <a:extLst>
               <a:ext uri="{FF2B5EF4-FFF2-40B4-BE49-F238E27FC236}">
-                <a16:creationId xmlns:a16="http://schemas.microsoft.com/office/drawing/2014/main" id="{97F68BEA-F38E-97E2-48AA-CD2107A16576}"/>
+                <a16:creationId xmlns:a16="http://schemas.microsoft.com/office/drawing/2014/main" id="{6CCAEB9D-1C87-3C2D-AD84-7D4CB66F1D5F}"/>
               </a:ext>
             </a:extLst>
           </p:cNvPr>
@@ -4167,10 +4173,64 @@
           </a:p>
         </p:txBody>
       </p:sp>
+      <p:sp>
+        <p:nvSpPr>
+          <p:cNvPr id="8" name="Titre 1">
+            <a:extLst>
+              <a:ext uri="{FF2B5EF4-FFF2-40B4-BE49-F238E27FC236}">
+                <a16:creationId xmlns:a16="http://schemas.microsoft.com/office/drawing/2014/main" id="{2D2CFAD4-DCE8-55A5-FA23-37EFFBE7AB09}"/>
+              </a:ext>
+            </a:extLst>
+          </p:cNvPr>
+          <p:cNvSpPr txBox="1">
+            <a:spLocks/>
+          </p:cNvSpPr>
+          <p:nvPr/>
+        </p:nvSpPr>
+        <p:spPr>
+          <a:xfrm>
+            <a:off x="838200" y="238770"/>
+            <a:ext cx="10515600" cy="795632"/>
+          </a:xfrm>
+          <a:prstGeom prst="rect">
+            <a:avLst/>
+          </a:prstGeom>
+        </p:spPr>
+        <p:txBody>
+          <a:bodyPr vert="horz" lIns="91440" tIns="45720" rIns="91440" bIns="45720" rtlCol="0" anchor="ctr">
+            <a:normAutofit/>
+          </a:bodyPr>
+          <a:lstStyle>
+            <a:lvl1pPr algn="l" defTabSz="914400" rtl="0" eaLnBrk="1" latinLnBrk="0" hangingPunct="1">
+              <a:lnSpc>
+                <a:spcPct val="90000"/>
+              </a:lnSpc>
+              <a:spcBef>
+                <a:spcPct val="0"/>
+              </a:spcBef>
+              <a:buNone/>
+              <a:defRPr sz="4400" kern="1200">
+                <a:solidFill>
+                  <a:schemeClr val="tx1"/>
+                </a:solidFill>
+                <a:latin typeface="+mj-lt"/>
+                <a:ea typeface="+mj-ea"/>
+                <a:cs typeface="+mj-cs"/>
+              </a:defRPr>
+            </a:lvl1pPr>
+          </a:lstStyle>
+          <a:p>
+            <a:r>
+              <a:rPr lang="fr-FR" dirty="0"/>
+              <a:t>Plan de Reprise d’Activité </a:t>
+            </a:r>
+          </a:p>
+        </p:txBody>
+      </p:sp>
     </p:spTree>
     <p:extLst>
       <p:ext uri="{BB962C8B-B14F-4D97-AF65-F5344CB8AC3E}">
-        <p14:creationId xmlns:p14="http://schemas.microsoft.com/office/powerpoint/2010/main" val="936469010"/>
+        <p14:creationId xmlns:p14="http://schemas.microsoft.com/office/powerpoint/2010/main" val="3349946933"/>
       </p:ext>
     </p:extLst>
   </p:cSld>
@@ -4202,6 +4262,383 @@
           <p:cNvPr id="2" name="Titre 1">
             <a:extLst>
               <a:ext uri="{FF2B5EF4-FFF2-40B4-BE49-F238E27FC236}">
+                <a16:creationId xmlns:a16="http://schemas.microsoft.com/office/drawing/2014/main" id="{A6A785F6-CB24-B3F1-DDF4-AA80F84FF2B9}"/>
+              </a:ext>
+            </a:extLst>
+          </p:cNvPr>
+          <p:cNvSpPr>
+            <a:spLocks noGrp="1"/>
+          </p:cNvSpPr>
+          <p:nvPr>
+            <p:ph type="title"/>
+          </p:nvPr>
+        </p:nvSpPr>
+        <p:spPr/>
+        <p:txBody>
+          <a:bodyPr/>
+          <a:lstStyle/>
+          <a:p>
+            <a:r>
+              <a:rPr lang="fr-FR" dirty="0"/>
+              <a:t>Schéma simplifié</a:t>
+            </a:r>
+          </a:p>
+        </p:txBody>
+      </p:sp>
+      <p:sp>
+        <p:nvSpPr>
+          <p:cNvPr id="3" name="Espace réservé du contenu 2">
+            <a:extLst>
+              <a:ext uri="{FF2B5EF4-FFF2-40B4-BE49-F238E27FC236}">
+                <a16:creationId xmlns:a16="http://schemas.microsoft.com/office/drawing/2014/main" id="{159B9E37-71C8-26A3-AEE9-02166F45F244}"/>
+              </a:ext>
+            </a:extLst>
+          </p:cNvPr>
+          <p:cNvSpPr>
+            <a:spLocks noGrp="1"/>
+          </p:cNvSpPr>
+          <p:nvPr>
+            <p:ph idx="1"/>
+          </p:nvPr>
+        </p:nvSpPr>
+        <p:spPr/>
+        <p:txBody>
+          <a:bodyPr/>
+          <a:lstStyle/>
+          <a:p>
+            <a:endParaRPr lang="fr-FR" dirty="0"/>
+          </a:p>
+        </p:txBody>
+      </p:sp>
+      <p:sp>
+        <p:nvSpPr>
+          <p:cNvPr id="4" name="Espace réservé du pied de page 3">
+            <a:extLst>
+              <a:ext uri="{FF2B5EF4-FFF2-40B4-BE49-F238E27FC236}">
+                <a16:creationId xmlns:a16="http://schemas.microsoft.com/office/drawing/2014/main" id="{48234254-AF9E-26C1-1B25-8150666DE003}"/>
+              </a:ext>
+            </a:extLst>
+          </p:cNvPr>
+          <p:cNvSpPr>
+            <a:spLocks noGrp="1"/>
+          </p:cNvSpPr>
+          <p:nvPr>
+            <p:ph type="ftr" sz="quarter" idx="11"/>
+          </p:nvPr>
+        </p:nvSpPr>
+        <p:spPr/>
+        <p:txBody>
+          <a:bodyPr/>
+          <a:lstStyle/>
+          <a:p>
+            <a:r>
+              <a:rPr lang="fr-FR"/>
+              <a:t>PICIURA Ander - MIRABEL Lilian</a:t>
+            </a:r>
+          </a:p>
+        </p:txBody>
+      </p:sp>
+      <p:sp>
+        <p:nvSpPr>
+          <p:cNvPr id="5" name="Espace réservé du numéro de diapositive 4">
+            <a:extLst>
+              <a:ext uri="{FF2B5EF4-FFF2-40B4-BE49-F238E27FC236}">
+                <a16:creationId xmlns:a16="http://schemas.microsoft.com/office/drawing/2014/main" id="{19EF4814-C6BF-9ABD-4797-6C1A8863C560}"/>
+              </a:ext>
+            </a:extLst>
+          </p:cNvPr>
+          <p:cNvSpPr>
+            <a:spLocks noGrp="1"/>
+          </p:cNvSpPr>
+          <p:nvPr>
+            <p:ph type="sldNum" sz="quarter" idx="12"/>
+          </p:nvPr>
+        </p:nvSpPr>
+        <p:spPr/>
+        <p:txBody>
+          <a:bodyPr/>
+          <a:lstStyle/>
+          <a:p>
+            <a:fld id="{EF144E42-BC24-D442-AFF0-55EAB46336FB}" type="slidenum">
+              <a:rPr lang="fr-FR" smtClean="0"/>
+              <a:t>11</a:t>
+            </a:fld>
+            <a:endParaRPr lang="fr-FR"/>
+          </a:p>
+        </p:txBody>
+      </p:sp>
+    </p:spTree>
+    <p:extLst>
+      <p:ext uri="{BB962C8B-B14F-4D97-AF65-F5344CB8AC3E}">
+        <p14:creationId xmlns:p14="http://schemas.microsoft.com/office/powerpoint/2010/main" val="2065482170"/>
+      </p:ext>
+    </p:extLst>
+  </p:cSld>
+  <p:clrMapOvr>
+    <a:masterClrMapping/>
+  </p:clrMapOvr>
+</p:sld>
+</file>
+
+<file path=ppt/slides/slide12.xml><?xml version="1.0" encoding="utf-8"?>
+<p:sld xmlns:a="http://schemas.openxmlformats.org/drawingml/2006/main" xmlns:r="http://schemas.openxmlformats.org/officeDocument/2006/relationships" xmlns:p="http://schemas.openxmlformats.org/presentationml/2006/main">
+  <p:cSld>
+    <p:spTree>
+      <p:nvGrpSpPr>
+        <p:cNvPr id="1" name=""/>
+        <p:cNvGrpSpPr/>
+        <p:nvPr/>
+      </p:nvGrpSpPr>
+      <p:grpSpPr>
+        <a:xfrm>
+          <a:off x="0" y="0"/>
+          <a:ext cx="0" cy="0"/>
+          <a:chOff x="0" y="0"/>
+          <a:chExt cx="0" cy="0"/>
+        </a:xfrm>
+      </p:grpSpPr>
+      <p:sp>
+        <p:nvSpPr>
+          <p:cNvPr id="2" name="Titre 1">
+            <a:extLst>
+              <a:ext uri="{FF2B5EF4-FFF2-40B4-BE49-F238E27FC236}">
+                <a16:creationId xmlns:a16="http://schemas.microsoft.com/office/drawing/2014/main" id="{9EA4878E-C162-9487-A85B-191EA9700E9B}"/>
+              </a:ext>
+            </a:extLst>
+          </p:cNvPr>
+          <p:cNvSpPr>
+            <a:spLocks noGrp="1"/>
+          </p:cNvSpPr>
+          <p:nvPr>
+            <p:ph type="title"/>
+          </p:nvPr>
+        </p:nvSpPr>
+        <p:spPr/>
+        <p:txBody>
+          <a:bodyPr/>
+          <a:lstStyle/>
+          <a:p>
+            <a:r>
+              <a:rPr lang="fr-FR" dirty="0"/>
+              <a:t>Fiche PRA/PCA</a:t>
+            </a:r>
+          </a:p>
+        </p:txBody>
+      </p:sp>
+      <p:sp>
+        <p:nvSpPr>
+          <p:cNvPr id="3" name="Espace réservé du contenu 2">
+            <a:extLst>
+              <a:ext uri="{FF2B5EF4-FFF2-40B4-BE49-F238E27FC236}">
+                <a16:creationId xmlns:a16="http://schemas.microsoft.com/office/drawing/2014/main" id="{F8C38C2D-D08E-76BA-90A4-72786E65D00B}"/>
+              </a:ext>
+            </a:extLst>
+          </p:cNvPr>
+          <p:cNvSpPr>
+            <a:spLocks noGrp="1"/>
+          </p:cNvSpPr>
+          <p:nvPr>
+            <p:ph idx="1"/>
+          </p:nvPr>
+        </p:nvSpPr>
+        <p:spPr>
+          <a:xfrm>
+            <a:off x="838200" y="1690688"/>
+            <a:ext cx="10515600" cy="4351338"/>
+          </a:xfrm>
+        </p:spPr>
+        <p:txBody>
+          <a:bodyPr>
+            <a:normAutofit lnSpcReduction="10000"/>
+          </a:bodyPr>
+          <a:lstStyle/>
+          <a:p>
+            <a:pPr marL="0" indent="0">
+              <a:buNone/>
+            </a:pPr>
+            <a:r>
+              <a:rPr lang="fr-FR" b="1" dirty="0"/>
+              <a:t>Contexte et Enjeux </a:t>
+            </a:r>
+            <a:r>
+              <a:rPr lang="fr-FR" dirty="0"/>
+              <a:t>: La startup </a:t>
+            </a:r>
+            <a:r>
+              <a:rPr lang="fr-FR" dirty="0" err="1"/>
+              <a:t>Covoit’Ouest</a:t>
+            </a:r>
+            <a:r>
+              <a:rPr lang="fr-FR" dirty="0"/>
+              <a:t> situé a La Rochelle </a:t>
+            </a:r>
+          </a:p>
+          <a:p>
+            <a:pPr marL="0" indent="0">
+              <a:buNone/>
+            </a:pPr>
+            <a:r>
+              <a:rPr lang="fr-FR" dirty="0"/>
+              <a:t>est une entreprise qui dépend principalement de ses Systèmes d’Information.</a:t>
+            </a:r>
+          </a:p>
+          <a:p>
+            <a:pPr marL="0" indent="0">
+              <a:buNone/>
+            </a:pPr>
+            <a:endParaRPr lang="fr-FR" dirty="0"/>
+          </a:p>
+          <a:p>
+            <a:pPr marL="0" indent="0">
+              <a:buNone/>
+            </a:pPr>
+            <a:r>
+              <a:rPr lang="fr-FR" dirty="0"/>
+              <a:t>Les enjeux sont donc importants pour </a:t>
+            </a:r>
+            <a:r>
+              <a:rPr lang="fr-FR" dirty="0" err="1"/>
+              <a:t>Covoit’Ouest</a:t>
+            </a:r>
+            <a:r>
+              <a:rPr lang="fr-FR" dirty="0"/>
+              <a:t> pour :</a:t>
+            </a:r>
+          </a:p>
+          <a:p>
+            <a:pPr>
+              <a:buFontTx/>
+              <a:buChar char="-"/>
+            </a:pPr>
+            <a:r>
+              <a:rPr lang="fr-FR" dirty="0"/>
+              <a:t>De garder une continuité du service permanant.</a:t>
+            </a:r>
+          </a:p>
+          <a:p>
+            <a:pPr>
+              <a:buFontTx/>
+              <a:buChar char="-"/>
+            </a:pPr>
+            <a:r>
+              <a:rPr lang="fr-FR" dirty="0"/>
+              <a:t>Limiter les pertes et vol de données.</a:t>
+            </a:r>
+          </a:p>
+          <a:p>
+            <a:pPr>
+              <a:buFontTx/>
+              <a:buChar char="-"/>
+            </a:pPr>
+            <a:r>
+              <a:rPr lang="fr-FR" dirty="0"/>
+              <a:t>Préserver la stabilité économique de l’entreprise.</a:t>
+            </a:r>
+          </a:p>
+          <a:p>
+            <a:pPr>
+              <a:buFontTx/>
+              <a:buChar char="-"/>
+            </a:pPr>
+            <a:r>
+              <a:rPr lang="fr-FR" dirty="0"/>
+              <a:t>Garder la confiance des clients / partenaires</a:t>
+            </a:r>
+          </a:p>
+        </p:txBody>
+      </p:sp>
+      <p:sp>
+        <p:nvSpPr>
+          <p:cNvPr id="4" name="Espace réservé du pied de page 3">
+            <a:extLst>
+              <a:ext uri="{FF2B5EF4-FFF2-40B4-BE49-F238E27FC236}">
+                <a16:creationId xmlns:a16="http://schemas.microsoft.com/office/drawing/2014/main" id="{B93DAA80-D962-A203-22E7-53E858C1A0AD}"/>
+              </a:ext>
+            </a:extLst>
+          </p:cNvPr>
+          <p:cNvSpPr>
+            <a:spLocks noGrp="1"/>
+          </p:cNvSpPr>
+          <p:nvPr>
+            <p:ph type="ftr" sz="quarter" idx="11"/>
+          </p:nvPr>
+        </p:nvSpPr>
+        <p:spPr/>
+        <p:txBody>
+          <a:bodyPr/>
+          <a:lstStyle/>
+          <a:p>
+            <a:r>
+              <a:rPr lang="fr-FR"/>
+              <a:t>PICIURA Ander - MIRABEL Lilian</a:t>
+            </a:r>
+          </a:p>
+        </p:txBody>
+      </p:sp>
+      <p:sp>
+        <p:nvSpPr>
+          <p:cNvPr id="5" name="Espace réservé du numéro de diapositive 4">
+            <a:extLst>
+              <a:ext uri="{FF2B5EF4-FFF2-40B4-BE49-F238E27FC236}">
+                <a16:creationId xmlns:a16="http://schemas.microsoft.com/office/drawing/2014/main" id="{97F68BEA-F38E-97E2-48AA-CD2107A16576}"/>
+              </a:ext>
+            </a:extLst>
+          </p:cNvPr>
+          <p:cNvSpPr>
+            <a:spLocks noGrp="1"/>
+          </p:cNvSpPr>
+          <p:nvPr>
+            <p:ph type="sldNum" sz="quarter" idx="12"/>
+          </p:nvPr>
+        </p:nvSpPr>
+        <p:spPr/>
+        <p:txBody>
+          <a:bodyPr/>
+          <a:lstStyle/>
+          <a:p>
+            <a:fld id="{EF144E42-BC24-D442-AFF0-55EAB46336FB}" type="slidenum">
+              <a:rPr lang="fr-FR" smtClean="0"/>
+              <a:t>12</a:t>
+            </a:fld>
+            <a:endParaRPr lang="fr-FR"/>
+          </a:p>
+        </p:txBody>
+      </p:sp>
+    </p:spTree>
+    <p:extLst>
+      <p:ext uri="{BB962C8B-B14F-4D97-AF65-F5344CB8AC3E}">
+        <p14:creationId xmlns:p14="http://schemas.microsoft.com/office/powerpoint/2010/main" val="936469010"/>
+      </p:ext>
+    </p:extLst>
+  </p:cSld>
+  <p:clrMapOvr>
+    <a:masterClrMapping/>
+  </p:clrMapOvr>
+</p:sld>
+</file>
+
+<file path=ppt/slides/slide13.xml><?xml version="1.0" encoding="utf-8"?>
+<p:sld xmlns:a="http://schemas.openxmlformats.org/drawingml/2006/main" xmlns:r="http://schemas.openxmlformats.org/officeDocument/2006/relationships" xmlns:p="http://schemas.openxmlformats.org/presentationml/2006/main">
+  <p:cSld>
+    <p:spTree>
+      <p:nvGrpSpPr>
+        <p:cNvPr id="1" name=""/>
+        <p:cNvGrpSpPr/>
+        <p:nvPr/>
+      </p:nvGrpSpPr>
+      <p:grpSpPr>
+        <a:xfrm>
+          <a:off x="0" y="0"/>
+          <a:ext cx="0" cy="0"/>
+          <a:chOff x="0" y="0"/>
+          <a:chExt cx="0" cy="0"/>
+        </a:xfrm>
+      </p:grpSpPr>
+      <p:sp>
+        <p:nvSpPr>
+          <p:cNvPr id="2" name="Titre 1">
+            <a:extLst>
+              <a:ext uri="{FF2B5EF4-FFF2-40B4-BE49-F238E27FC236}">
                 <a16:creationId xmlns:a16="http://schemas.microsoft.com/office/drawing/2014/main" id="{77DE5D65-0CDF-DF6D-1245-ECE8D618A02F}"/>
               </a:ext>
             </a:extLst>
@@ -4220,7 +4657,7 @@
           <a:p>
             <a:r>
               <a:rPr lang="fr-FR" dirty="0"/>
-              <a:t>MATRICE RTO/RPO</a:t>
+              <a:t>MATRICE DE CRITICITÉ</a:t>
             </a:r>
           </a:p>
         </p:txBody>
@@ -4308,7 +4745,7 @@
           <a:p>
             <a:fld id="{EF144E42-BC24-D442-AFF0-55EAB46336FB}" type="slidenum">
               <a:rPr lang="fr-FR" smtClean="0"/>
-              <a:t>11</a:t>
+              <a:t>13</a:t>
             </a:fld>
             <a:endParaRPr lang="fr-FR"/>
           </a:p>
@@ -4479,7 +4916,7 @@
 </p:sld>
 </file>
 
-<file path=ppt/slides/slide12.xml><?xml version="1.0" encoding="utf-8"?>
+<file path=ppt/slides/slide14.xml><?xml version="1.0" encoding="utf-8"?>
 <p:sld xmlns:a="http://schemas.openxmlformats.org/drawingml/2006/main" xmlns:r="http://schemas.openxmlformats.org/officeDocument/2006/relationships" xmlns:p="http://schemas.openxmlformats.org/presentationml/2006/main">
   <p:cSld>
     <p:spTree>
@@ -4713,7 +5150,7 @@
           <a:p>
             <a:fld id="{EF144E42-BC24-D442-AFF0-55EAB46336FB}" type="slidenum">
               <a:rPr lang="fr-FR" smtClean="0"/>
-              <a:t>12</a:t>
+              <a:t>14</a:t>
             </a:fld>
             <a:endParaRPr lang="fr-FR"/>
           </a:p>
@@ -4754,200 +5191,172 @@
           <p:cNvPr id="2" name="Titre 1">
             <a:extLst>
               <a:ext uri="{FF2B5EF4-FFF2-40B4-BE49-F238E27FC236}">
-                <a16:creationId xmlns:a16="http://schemas.microsoft.com/office/drawing/2014/main" id="{109CD0AB-8CEC-13AA-1000-0A6ABA4136BB}"/>
-              </a:ext>
-            </a:extLst>
-          </p:cNvPr>
-          <p:cNvSpPr>
-            <a:spLocks noGrp="1"/>
-          </p:cNvSpPr>
-          <p:nvPr>
-            <p:ph type="title"/>
+                <a16:creationId xmlns:a16="http://schemas.microsoft.com/office/drawing/2014/main" id="{6C02A83A-3580-38BD-F2BC-CECE03E1C4D0}"/>
+              </a:ext>
+            </a:extLst>
+          </p:cNvPr>
+          <p:cNvSpPr>
+            <a:spLocks noGrp="1"/>
+          </p:cNvSpPr>
+          <p:nvPr>
+            <p:ph type="ctrTitle"/>
           </p:nvPr>
         </p:nvSpPr>
         <p:spPr>
           <a:xfrm>
-            <a:off x="838200" y="365126"/>
-            <a:ext cx="10515600" cy="804456"/>
+            <a:off x="1524000" y="318977"/>
+            <a:ext cx="9144000" cy="904986"/>
           </a:xfrm>
         </p:spPr>
         <p:txBody>
-          <a:bodyPr/>
-          <a:lstStyle/>
-          <a:p>
-            <a:pPr algn="ctr"/>
+          <a:bodyPr>
+            <a:normAutofit fontScale="90000"/>
+          </a:bodyPr>
+          <a:lstStyle/>
+          <a:p>
             <a:r>
               <a:rPr lang="fr-FR" dirty="0"/>
-              <a:t>Impacts et enjeux</a:t>
-            </a:r>
-          </a:p>
-        </p:txBody>
-      </p:sp>
-      <p:sp>
-        <p:nvSpPr>
-          <p:cNvPr id="3" name="Espace réservé du contenu 2">
-            <a:extLst>
-              <a:ext uri="{FF2B5EF4-FFF2-40B4-BE49-F238E27FC236}">
-                <a16:creationId xmlns:a16="http://schemas.microsoft.com/office/drawing/2014/main" id="{1E783D3D-8EEF-FDD9-39F0-1E93A0C7918A}"/>
-              </a:ext>
-            </a:extLst>
-          </p:cNvPr>
-          <p:cNvSpPr>
-            <a:spLocks noGrp="1"/>
-          </p:cNvSpPr>
-          <p:nvPr>
-            <p:ph idx="1"/>
-          </p:nvPr>
+              <a:t>Exploitation de failles 0-day</a:t>
+            </a:r>
+          </a:p>
+        </p:txBody>
+      </p:sp>
+      <p:sp>
+        <p:nvSpPr>
+          <p:cNvPr id="4" name="ZoneTexte 3">
+            <a:extLst>
+              <a:ext uri="{FF2B5EF4-FFF2-40B4-BE49-F238E27FC236}">
+                <a16:creationId xmlns:a16="http://schemas.microsoft.com/office/drawing/2014/main" id="{282D0C6B-8523-1E28-18EC-D0974EFF0A05}"/>
+              </a:ext>
+            </a:extLst>
+          </p:cNvPr>
+          <p:cNvSpPr txBox="1"/>
+          <p:nvPr/>
         </p:nvSpPr>
         <p:spPr>
           <a:xfrm>
-            <a:off x="838200" y="1307804"/>
-            <a:ext cx="10515600" cy="5185069"/>
+            <a:off x="746275" y="1616149"/>
+            <a:ext cx="10699449" cy="646331"/>
           </a:xfrm>
+          <a:prstGeom prst="rect">
+            <a:avLst/>
+          </a:prstGeom>
+          <a:noFill/>
         </p:spPr>
         <p:txBody>
-          <a:bodyPr>
-            <a:normAutofit lnSpcReduction="10000"/>
+          <a:bodyPr wrap="square" rtlCol="0">
+            <a:spAutoFit/>
           </a:bodyPr>
           <a:lstStyle/>
           <a:p>
-            <a:pPr marL="0" indent="0">
-              <a:buNone/>
-            </a:pPr>
             <a:r>
               <a:rPr lang="fr-FR" dirty="0"/>
-              <a:t>Les conséquences possibles d’une telle attaque sont :</a:t>
-            </a:r>
-          </a:p>
-          <a:p>
-            <a:pPr marL="0" indent="0">
-              <a:buNone/>
-            </a:pPr>
-            <a:endParaRPr lang="fr-FR" sz="1500" dirty="0"/>
-          </a:p>
-          <a:p>
-            <a:pPr>
-              <a:buFontTx/>
-              <a:buChar char="-"/>
-            </a:pPr>
-            <a:r>
-              <a:rPr lang="fr-FR" sz="2400" dirty="0"/>
-              <a:t>Sur le plan Financier : </a:t>
-            </a:r>
-          </a:p>
-          <a:p>
-            <a:pPr marL="0" indent="0">
-              <a:buNone/>
-            </a:pPr>
-            <a:r>
-              <a:rPr lang="fr-FR" sz="1200" dirty="0"/>
-              <a:t>Pertes économiques liées à la fuite d’informations stratégiques /  Achat ou remplacement de matériel compromis / Coûts élevés d’investigation et de sécurisation des systèmes</a:t>
-            </a:r>
-          </a:p>
-          <a:p>
-            <a:pPr marL="0" indent="0">
-              <a:buNone/>
-            </a:pPr>
-            <a:endParaRPr lang="fr-FR" sz="1050" dirty="0"/>
-          </a:p>
-          <a:p>
-            <a:pPr marL="0" indent="0">
-              <a:buNone/>
-            </a:pPr>
-            <a:r>
-              <a:rPr lang="fr-FR" sz="2400" dirty="0"/>
-              <a:t>- Sur le plan Organisationnelles : </a:t>
-            </a:r>
-          </a:p>
-          <a:p>
-            <a:pPr marL="0" indent="0">
-              <a:buNone/>
-            </a:pPr>
-            <a:r>
-              <a:rPr lang="fr-FR" sz="1050" dirty="0"/>
-              <a:t>Inte</a:t>
-            </a:r>
-            <a:r>
-              <a:rPr lang="fr-FR" sz="1200" dirty="0"/>
-              <a:t>rruption d’activité en cas de compromission d’appareils essentiels /  Fuite ou perte de données sensibles / Perturbation du fonctionnement</a:t>
-            </a:r>
-          </a:p>
-          <a:p>
-            <a:pPr marL="0" indent="0">
-              <a:buNone/>
-            </a:pPr>
-            <a:endParaRPr lang="fr-FR" sz="1050" dirty="0"/>
-          </a:p>
-          <a:p>
-            <a:pPr>
-              <a:buFontTx/>
-              <a:buChar char="-"/>
-            </a:pPr>
-            <a:r>
-              <a:rPr lang="fr-FR" sz="2400" dirty="0"/>
-              <a:t>Sur le plan juridiques / réglementaires :</a:t>
-            </a:r>
-          </a:p>
-          <a:p>
-            <a:pPr marL="0" indent="0">
-              <a:buNone/>
-            </a:pPr>
-            <a:r>
-              <a:rPr lang="fr-FR" sz="1200" dirty="0"/>
-              <a:t>Obligation de notifier les autorités et les personnes concernées /  Enquêtes pour non-respect du RGPD / Poursuites pour atteinte à la vie privée ou espionnage illégal</a:t>
-            </a:r>
-          </a:p>
-          <a:p>
-            <a:pPr marL="0" indent="0">
-              <a:buNone/>
-            </a:pPr>
-            <a:r>
-              <a:rPr lang="fr-FR" sz="1050" dirty="0"/>
-              <a:t> </a:t>
-            </a:r>
-          </a:p>
-          <a:p>
-            <a:pPr>
-              <a:buFontTx/>
-              <a:buChar char="-"/>
-            </a:pPr>
-            <a:r>
-              <a:rPr lang="fr-FR" sz="2400" dirty="0"/>
-              <a:t>Sur le plan d’image et la confiance de marque : </a:t>
-            </a:r>
-          </a:p>
-          <a:p>
-            <a:pPr marL="0" indent="0">
-              <a:buNone/>
-            </a:pPr>
-            <a:r>
-              <a:rPr lang="fr-FR" sz="1200" dirty="0"/>
-              <a:t>Perte de confiance à tous les niveaux /  Atteinte à la réputation nationale ou institutionnelle</a:t>
-            </a:r>
-          </a:p>
-          <a:p>
-            <a:pPr marL="0" indent="0" algn="ctr">
-              <a:buNone/>
-            </a:pPr>
-            <a:endParaRPr lang="fr-FR" sz="1050" dirty="0"/>
-          </a:p>
-          <a:p>
-            <a:pPr marL="0" indent="0" algn="ctr">
-              <a:buNone/>
-            </a:pPr>
-            <a:r>
-              <a:rPr lang="fr-FR" sz="1600" b="1" dirty="0"/>
-              <a:t>Le niveau de criticité est fort.</a:t>
-            </a:r>
-          </a:p>
-        </p:txBody>
-      </p:sp>
-      <p:sp>
-        <p:nvSpPr>
-          <p:cNvPr id="4" name="Espace réservé du pied de page 3">
-            <a:extLst>
-              <a:ext uri="{FF2B5EF4-FFF2-40B4-BE49-F238E27FC236}">
-                <a16:creationId xmlns:a16="http://schemas.microsoft.com/office/drawing/2014/main" id="{203D2484-C384-6659-8C2A-8BAEA5224B0F}"/>
+              <a:t>Une faille 0-day est une vulnérabilité informatique inconnue du fabricant et sans correctif disponible, que des pirates peuvent exploiter avant qu’elle ne soit corrigée.</a:t>
+            </a:r>
+          </a:p>
+        </p:txBody>
+      </p:sp>
+      <p:sp>
+        <p:nvSpPr>
+          <p:cNvPr id="5" name="ZoneTexte 4">
+            <a:extLst>
+              <a:ext uri="{FF2B5EF4-FFF2-40B4-BE49-F238E27FC236}">
+                <a16:creationId xmlns:a16="http://schemas.microsoft.com/office/drawing/2014/main" id="{7EA1C454-6DED-6F7D-C18D-29C8368B699E}"/>
+              </a:ext>
+            </a:extLst>
+          </p:cNvPr>
+          <p:cNvSpPr txBox="1"/>
+          <p:nvPr/>
+        </p:nvSpPr>
+        <p:spPr>
+          <a:xfrm>
+            <a:off x="746275" y="2654666"/>
+            <a:ext cx="10699449" cy="2954655"/>
+          </a:xfrm>
+          <a:prstGeom prst="rect">
+            <a:avLst/>
+          </a:prstGeom>
+          <a:noFill/>
+        </p:spPr>
+        <p:txBody>
+          <a:bodyPr wrap="square" rtlCol="0">
+            <a:spAutoFit/>
+          </a:bodyPr>
+          <a:lstStyle/>
+          <a:p>
+            <a:r>
+              <a:rPr lang="fr-FR" sz="2400" b="1" dirty="0"/>
+              <a:t>Exemple concret</a:t>
+            </a:r>
+          </a:p>
+          <a:p>
+            <a:r>
+              <a:rPr lang="fr-FR" dirty="0"/>
+              <a:t>En 2021, une enquête internationale (Projet Pegasus) a révélé que le logiciel espion Pegasus avait été utilisé pour cibler les téléphones de plusieurs chefs d’État et responsables politiques, dont Emmanuel Macron, le président français.</a:t>
+            </a:r>
+          </a:p>
+          <a:p>
+            <a:endParaRPr lang="fr-FR" dirty="0"/>
+          </a:p>
+          <a:p>
+            <a:r>
+              <a:rPr lang="fr-FR" dirty="0"/>
+              <a:t>Le spyware exploitait des failles 0-day dans iOS (le système d’Apple) pour s’installer à distance sans action de l’utilisateur.</a:t>
+            </a:r>
+          </a:p>
+          <a:p>
+            <a:endParaRPr lang="fr-FR" dirty="0"/>
+          </a:p>
+          <a:p>
+            <a:r>
+              <a:rPr lang="fr-FR" dirty="0"/>
+              <a:t>Une fois infiltré, Pegasus pouvait lire les messages, écouter les appels, activer le micro ou la caméra du téléphone, transformant ainsi l’appareil en véritable outil d’espionnage.</a:t>
+            </a:r>
+          </a:p>
+        </p:txBody>
+      </p:sp>
+      <p:sp>
+        <p:nvSpPr>
+          <p:cNvPr id="6" name="ZoneTexte 5">
+            <a:extLst>
+              <a:ext uri="{FF2B5EF4-FFF2-40B4-BE49-F238E27FC236}">
+                <a16:creationId xmlns:a16="http://schemas.microsoft.com/office/drawing/2014/main" id="{F5FDC0C3-79A3-A4B4-0406-5778C21F8D6F}"/>
+              </a:ext>
+            </a:extLst>
+          </p:cNvPr>
+          <p:cNvSpPr txBox="1"/>
+          <p:nvPr/>
+        </p:nvSpPr>
+        <p:spPr>
+          <a:xfrm>
+            <a:off x="3678061" y="5816841"/>
+            <a:ext cx="4835876" cy="369332"/>
+          </a:xfrm>
+          <a:prstGeom prst="rect">
+            <a:avLst/>
+          </a:prstGeom>
+          <a:noFill/>
+        </p:spPr>
+        <p:txBody>
+          <a:bodyPr wrap="none" rtlCol="0">
+            <a:spAutoFit/>
+          </a:bodyPr>
+          <a:lstStyle/>
+          <a:p>
+            <a:pPr algn="ctr"/>
+            <a:r>
+              <a:rPr lang="fr-FR" dirty="0"/>
+              <a:t>Cette faille appartient à la catégorie technique.</a:t>
+            </a:r>
+          </a:p>
+        </p:txBody>
+      </p:sp>
+      <p:sp>
+        <p:nvSpPr>
+          <p:cNvPr id="3" name="Espace réservé du pied de page 2">
+            <a:extLst>
+              <a:ext uri="{FF2B5EF4-FFF2-40B4-BE49-F238E27FC236}">
+                <a16:creationId xmlns:a16="http://schemas.microsoft.com/office/drawing/2014/main" id="{33C58524-2B16-E108-8C75-D058E4A0501C}"/>
               </a:ext>
             </a:extLst>
           </p:cNvPr>
@@ -4972,10 +5381,10 @@
       </p:sp>
       <p:sp>
         <p:nvSpPr>
-          <p:cNvPr id="5" name="Espace réservé du numéro de diapositive 4">
-            <a:extLst>
-              <a:ext uri="{FF2B5EF4-FFF2-40B4-BE49-F238E27FC236}">
-                <a16:creationId xmlns:a16="http://schemas.microsoft.com/office/drawing/2014/main" id="{0C7A20D0-87BD-2E48-052E-D8F96A9F80B0}"/>
+          <p:cNvPr id="7" name="Espace réservé du numéro de diapositive 6">
+            <a:extLst>
+              <a:ext uri="{FF2B5EF4-FFF2-40B4-BE49-F238E27FC236}">
+                <a16:creationId xmlns:a16="http://schemas.microsoft.com/office/drawing/2014/main" id="{B15BA5A3-8BFE-5283-8FC7-9E2212EC48B7}"/>
               </a:ext>
             </a:extLst>
           </p:cNvPr>
@@ -5002,7 +5411,7 @@
     </p:spTree>
     <p:extLst>
       <p:ext uri="{BB962C8B-B14F-4D97-AF65-F5344CB8AC3E}">
-        <p14:creationId xmlns:p14="http://schemas.microsoft.com/office/powerpoint/2010/main" val="2751674682"/>
+        <p14:creationId xmlns:p14="http://schemas.microsoft.com/office/powerpoint/2010/main" val="3287964140"/>
       </p:ext>
     </p:extLst>
   </p:cSld>
@@ -5034,7 +5443,7 @@
           <p:cNvPr id="2" name="Titre 1">
             <a:extLst>
               <a:ext uri="{FF2B5EF4-FFF2-40B4-BE49-F238E27FC236}">
-                <a16:creationId xmlns:a16="http://schemas.microsoft.com/office/drawing/2014/main" id="{A081C341-6E74-1596-0208-E2CBB4B32790}"/>
+                <a16:creationId xmlns:a16="http://schemas.microsoft.com/office/drawing/2014/main" id="{109CD0AB-8CEC-13AA-1000-0A6ABA4136BB}"/>
               </a:ext>
             </a:extLst>
           </p:cNvPr>
@@ -5045,7 +5454,12 @@
             <p:ph type="title"/>
           </p:nvPr>
         </p:nvSpPr>
-        <p:spPr/>
+        <p:spPr>
+          <a:xfrm>
+            <a:off x="838200" y="365126"/>
+            <a:ext cx="10515600" cy="804456"/>
+          </a:xfrm>
+        </p:spPr>
         <p:txBody>
           <a:bodyPr/>
           <a:lstStyle/>
@@ -5053,7 +5467,7 @@
             <a:pPr algn="ctr"/>
             <a:r>
               <a:rPr lang="fr-FR" dirty="0"/>
-              <a:t>Prévention et réponses</a:t>
+              <a:t>Impacts et enjeux</a:t>
             </a:r>
           </a:p>
         </p:txBody>
@@ -5063,7 +5477,7 @@
           <p:cNvPr id="3" name="Espace réservé du contenu 2">
             <a:extLst>
               <a:ext uri="{FF2B5EF4-FFF2-40B4-BE49-F238E27FC236}">
-                <a16:creationId xmlns:a16="http://schemas.microsoft.com/office/drawing/2014/main" id="{73C25CAC-EDD9-079A-8C53-AF72458989B3}"/>
+                <a16:creationId xmlns:a16="http://schemas.microsoft.com/office/drawing/2014/main" id="{1E783D3D-8EEF-FDD9-39F0-1E93A0C7918A}"/>
               </a:ext>
             </a:extLst>
           </p:cNvPr>
@@ -5074,10 +5488,15 @@
             <p:ph idx="1"/>
           </p:nvPr>
         </p:nvSpPr>
-        <p:spPr/>
+        <p:spPr>
+          <a:xfrm>
+            <a:off x="838200" y="1307804"/>
+            <a:ext cx="10515600" cy="5185069"/>
+          </a:xfrm>
+        </p:spPr>
         <p:txBody>
           <a:bodyPr>
-            <a:normAutofit/>
+            <a:normAutofit lnSpcReduction="10000"/>
           </a:bodyPr>
           <a:lstStyle/>
           <a:p>
@@ -5085,8 +5504,24 @@
               <a:buNone/>
             </a:pPr>
             <a:r>
+              <a:rPr lang="fr-FR" dirty="0"/>
+              <a:t>Les conséquences possibles d’une telle attaque sont :</a:t>
+            </a:r>
+          </a:p>
+          <a:p>
+            <a:pPr marL="0" indent="0">
+              <a:buNone/>
+            </a:pPr>
+            <a:endParaRPr lang="fr-FR" sz="1500" dirty="0"/>
+          </a:p>
+          <a:p>
+            <a:pPr>
+              <a:buFontTx/>
+              <a:buChar char="-"/>
+            </a:pPr>
+            <a:r>
               <a:rPr lang="fr-FR" sz="2400" dirty="0"/>
-              <a:t>Les bonnes pratiques pour limiter ce type d’impacts sont :</a:t>
+              <a:t>Sur le plan Financier : </a:t>
             </a:r>
           </a:p>
           <a:p>
@@ -5095,25 +5530,7 @@
             </a:pPr>
             <a:r>
               <a:rPr lang="fr-FR" sz="1200" dirty="0"/>
-              <a:t>- Mettre à jour régulièrement les systèmes et applications </a:t>
-            </a:r>
-          </a:p>
-          <a:p>
-            <a:pPr marL="0" indent="0">
-              <a:buNone/>
-            </a:pPr>
-            <a:r>
-              <a:rPr lang="fr-FR" sz="1200" dirty="0"/>
-              <a:t>- Limiter les droits d’accès </a:t>
-            </a:r>
-          </a:p>
-          <a:p>
-            <a:pPr marL="0" indent="0">
-              <a:buNone/>
-            </a:pPr>
-            <a:r>
-              <a:rPr lang="fr-FR" sz="1200" dirty="0"/>
-              <a:t>- Mettre en place une veille de sécurité</a:t>
+              <a:t>Pertes économiques liées à la fuite d’informations stratégiques /  Achat ou remplacement de matériel compromis / Coûts élevés d’investigation et de sécurisation des systèmes</a:t>
             </a:r>
           </a:p>
           <a:p>
@@ -5128,7 +5545,7 @@
             </a:pPr>
             <a:r>
               <a:rPr lang="fr-FR" sz="2400" dirty="0"/>
-              <a:t>Les outils et solutions techniques sont :</a:t>
+              <a:t>- Sur le plan Organisationnelles : </a:t>
             </a:r>
           </a:p>
           <a:p>
@@ -5136,34 +5553,12 @@
               <a:buNone/>
             </a:pPr>
             <a:r>
+              <a:rPr lang="fr-FR" sz="1050" dirty="0"/>
+              <a:t>Inte</a:t>
+            </a:r>
+            <a:r>
               <a:rPr lang="fr-FR" sz="1200" dirty="0"/>
-              <a:t>- Authentification </a:t>
-            </a:r>
-            <a:r>
-              <a:rPr lang="fr-FR" sz="1200" dirty="0" err="1"/>
-              <a:t>multifacteur</a:t>
-            </a:r>
-            <a:r>
-              <a:rPr lang="fr-FR" sz="1200" dirty="0"/>
-              <a:t> pour limiter les accès </a:t>
-            </a:r>
-          </a:p>
-          <a:p>
-            <a:pPr marL="0" indent="0">
-              <a:buNone/>
-            </a:pPr>
-            <a:r>
-              <a:rPr lang="fr-FR" sz="1200" dirty="0"/>
-              <a:t>- Firewall applicatif et filtrage réseau </a:t>
-            </a:r>
-          </a:p>
-          <a:p>
-            <a:pPr marL="0" indent="0">
-              <a:buNone/>
-            </a:pPr>
-            <a:r>
-              <a:rPr lang="fr-FR" sz="1200" dirty="0"/>
-              <a:t>- Chiffrement des données au repos et en transit</a:t>
+              <a:t>rruption d’activité en cas de compromission d’appareils essentiels /  Fuite ou perte de données sensibles / Perturbation du fonctionnement</a:t>
             </a:r>
           </a:p>
           <a:p>
@@ -5173,12 +5568,41 @@
             <a:endParaRPr lang="fr-FR" sz="1050" dirty="0"/>
           </a:p>
           <a:p>
+            <a:pPr>
+              <a:buFontTx/>
+              <a:buChar char="-"/>
+            </a:pPr>
+            <a:r>
+              <a:rPr lang="fr-FR" sz="2400" dirty="0"/>
+              <a:t>Sur le plan juridiques / réglementaires :</a:t>
+            </a:r>
+          </a:p>
+          <a:p>
             <a:pPr marL="0" indent="0">
               <a:buNone/>
             </a:pPr>
             <a:r>
+              <a:rPr lang="fr-FR" sz="1200" dirty="0"/>
+              <a:t>Obligation de notifier les autorités et les personnes concernées /  Enquêtes pour non-respect du RGPD / Poursuites pour atteinte à la vie privée ou espionnage illégal</a:t>
+            </a:r>
+          </a:p>
+          <a:p>
+            <a:pPr marL="0" indent="0">
+              <a:buNone/>
+            </a:pPr>
+            <a:r>
+              <a:rPr lang="fr-FR" sz="1050" dirty="0"/>
+              <a:t> </a:t>
+            </a:r>
+          </a:p>
+          <a:p>
+            <a:pPr>
+              <a:buFontTx/>
+              <a:buChar char="-"/>
+            </a:pPr>
+            <a:r>
               <a:rPr lang="fr-FR" sz="2400" dirty="0"/>
-              <a:t>Les réponses à adopter en cas d’incident :</a:t>
+              <a:t>Sur le plan d’image et la confiance de marque : </a:t>
             </a:r>
           </a:p>
           <a:p>
@@ -5187,30 +5611,23 @@
             </a:pPr>
             <a:r>
               <a:rPr lang="fr-FR" sz="1200" dirty="0"/>
-              <a:t>- Isoler immédiatement les appareils suspects &amp; infectés</a:t>
-            </a:r>
-          </a:p>
-          <a:p>
-            <a:pPr marL="0" indent="0">
+              <a:t>Perte de confiance à tous les niveaux /  Atteinte à la réputation nationale ou institutionnelle</a:t>
+            </a:r>
+          </a:p>
+          <a:p>
+            <a:pPr marL="0" indent="0" algn="ctr">
               <a:buNone/>
             </a:pPr>
-            <a:r>
-              <a:rPr lang="fr-FR" sz="1200" dirty="0"/>
-              <a:t>- Communiquer sur l'attaque et l'impact  </a:t>
-            </a:r>
             <a:endParaRPr lang="fr-FR" sz="1050" dirty="0"/>
           </a:p>
           <a:p>
-            <a:pPr marL="0" indent="0">
+            <a:pPr marL="0" indent="0" algn="ctr">
               <a:buNone/>
             </a:pPr>
-            <a:endParaRPr lang="fr-FR" sz="2400" dirty="0"/>
-          </a:p>
-          <a:p>
-            <a:pPr marL="0" indent="0">
-              <a:buNone/>
-            </a:pPr>
-            <a:endParaRPr lang="fr-FR" sz="2400" dirty="0"/>
+            <a:r>
+              <a:rPr lang="fr-FR" sz="1600" b="1" dirty="0"/>
+              <a:t>Le niveau de criticité est fort.</a:t>
+            </a:r>
           </a:p>
         </p:txBody>
       </p:sp>
@@ -5219,7 +5636,7 @@
           <p:cNvPr id="4" name="Espace réservé du pied de page 3">
             <a:extLst>
               <a:ext uri="{FF2B5EF4-FFF2-40B4-BE49-F238E27FC236}">
-                <a16:creationId xmlns:a16="http://schemas.microsoft.com/office/drawing/2014/main" id="{4923B818-5F9F-6C4B-67AD-F3BA60E0B35E}"/>
+                <a16:creationId xmlns:a16="http://schemas.microsoft.com/office/drawing/2014/main" id="{203D2484-C384-6659-8C2A-8BAEA5224B0F}"/>
               </a:ext>
             </a:extLst>
           </p:cNvPr>
@@ -5247,7 +5664,7 @@
           <p:cNvPr id="5" name="Espace réservé du numéro de diapositive 4">
             <a:extLst>
               <a:ext uri="{FF2B5EF4-FFF2-40B4-BE49-F238E27FC236}">
-                <a16:creationId xmlns:a16="http://schemas.microsoft.com/office/drawing/2014/main" id="{7AB7B0D7-8EC8-06A9-71B4-C52401F49669}"/>
+                <a16:creationId xmlns:a16="http://schemas.microsoft.com/office/drawing/2014/main" id="{0C7A20D0-87BD-2E48-052E-D8F96A9F80B0}"/>
               </a:ext>
             </a:extLst>
           </p:cNvPr>
@@ -5274,7 +5691,7 @@
     </p:spTree>
     <p:extLst>
       <p:ext uri="{BB962C8B-B14F-4D97-AF65-F5344CB8AC3E}">
-        <p14:creationId xmlns:p14="http://schemas.microsoft.com/office/powerpoint/2010/main" val="1569222927"/>
+        <p14:creationId xmlns:p14="http://schemas.microsoft.com/office/powerpoint/2010/main" val="2751674682"/>
       </p:ext>
     </p:extLst>
   </p:cSld>
@@ -5306,6 +5723,278 @@
           <p:cNvPr id="2" name="Titre 1">
             <a:extLst>
               <a:ext uri="{FF2B5EF4-FFF2-40B4-BE49-F238E27FC236}">
+                <a16:creationId xmlns:a16="http://schemas.microsoft.com/office/drawing/2014/main" id="{A081C341-6E74-1596-0208-E2CBB4B32790}"/>
+              </a:ext>
+            </a:extLst>
+          </p:cNvPr>
+          <p:cNvSpPr>
+            <a:spLocks noGrp="1"/>
+          </p:cNvSpPr>
+          <p:nvPr>
+            <p:ph type="title"/>
+          </p:nvPr>
+        </p:nvSpPr>
+        <p:spPr/>
+        <p:txBody>
+          <a:bodyPr/>
+          <a:lstStyle/>
+          <a:p>
+            <a:pPr algn="ctr"/>
+            <a:r>
+              <a:rPr lang="fr-FR" dirty="0"/>
+              <a:t>Prévention et réponses</a:t>
+            </a:r>
+          </a:p>
+        </p:txBody>
+      </p:sp>
+      <p:sp>
+        <p:nvSpPr>
+          <p:cNvPr id="3" name="Espace réservé du contenu 2">
+            <a:extLst>
+              <a:ext uri="{FF2B5EF4-FFF2-40B4-BE49-F238E27FC236}">
+                <a16:creationId xmlns:a16="http://schemas.microsoft.com/office/drawing/2014/main" id="{73C25CAC-EDD9-079A-8C53-AF72458989B3}"/>
+              </a:ext>
+            </a:extLst>
+          </p:cNvPr>
+          <p:cNvSpPr>
+            <a:spLocks noGrp="1"/>
+          </p:cNvSpPr>
+          <p:nvPr>
+            <p:ph idx="1"/>
+          </p:nvPr>
+        </p:nvSpPr>
+        <p:spPr/>
+        <p:txBody>
+          <a:bodyPr>
+            <a:normAutofit/>
+          </a:bodyPr>
+          <a:lstStyle/>
+          <a:p>
+            <a:pPr marL="0" indent="0">
+              <a:buNone/>
+            </a:pPr>
+            <a:r>
+              <a:rPr lang="fr-FR" sz="2400" dirty="0"/>
+              <a:t>Les bonnes pratiques pour limiter ce type d’impacts sont :</a:t>
+            </a:r>
+          </a:p>
+          <a:p>
+            <a:pPr marL="0" indent="0">
+              <a:buNone/>
+            </a:pPr>
+            <a:r>
+              <a:rPr lang="fr-FR" sz="1200" dirty="0"/>
+              <a:t>- Mettre à jour régulièrement les systèmes et applications </a:t>
+            </a:r>
+          </a:p>
+          <a:p>
+            <a:pPr marL="0" indent="0">
+              <a:buNone/>
+            </a:pPr>
+            <a:r>
+              <a:rPr lang="fr-FR" sz="1200" dirty="0"/>
+              <a:t>- Limiter les droits d’accès </a:t>
+            </a:r>
+          </a:p>
+          <a:p>
+            <a:pPr marL="0" indent="0">
+              <a:buNone/>
+            </a:pPr>
+            <a:r>
+              <a:rPr lang="fr-FR" sz="1200" dirty="0"/>
+              <a:t>- Mettre en place une veille de sécurité</a:t>
+            </a:r>
+          </a:p>
+          <a:p>
+            <a:pPr marL="0" indent="0">
+              <a:buNone/>
+            </a:pPr>
+            <a:endParaRPr lang="fr-FR" sz="1050" dirty="0"/>
+          </a:p>
+          <a:p>
+            <a:pPr marL="0" indent="0">
+              <a:buNone/>
+            </a:pPr>
+            <a:r>
+              <a:rPr lang="fr-FR" sz="2400" dirty="0"/>
+              <a:t>Les outils et solutions techniques sont :</a:t>
+            </a:r>
+          </a:p>
+          <a:p>
+            <a:pPr marL="0" indent="0">
+              <a:buNone/>
+            </a:pPr>
+            <a:r>
+              <a:rPr lang="fr-FR" sz="1200" dirty="0"/>
+              <a:t>- Authentification </a:t>
+            </a:r>
+            <a:r>
+              <a:rPr lang="fr-FR" sz="1200" dirty="0" err="1"/>
+              <a:t>multifacteur</a:t>
+            </a:r>
+            <a:r>
+              <a:rPr lang="fr-FR" sz="1200" dirty="0"/>
+              <a:t> pour limiter les accès </a:t>
+            </a:r>
+          </a:p>
+          <a:p>
+            <a:pPr marL="0" indent="0">
+              <a:buNone/>
+            </a:pPr>
+            <a:r>
+              <a:rPr lang="fr-FR" sz="1200" dirty="0"/>
+              <a:t>- Firewall applicatif et filtrage réseau </a:t>
+            </a:r>
+          </a:p>
+          <a:p>
+            <a:pPr marL="0" indent="0">
+              <a:buNone/>
+            </a:pPr>
+            <a:r>
+              <a:rPr lang="fr-FR" sz="1200" dirty="0"/>
+              <a:t>- Chiffrement des données au repos et en transit</a:t>
+            </a:r>
+          </a:p>
+          <a:p>
+            <a:pPr marL="0" indent="0">
+              <a:buNone/>
+            </a:pPr>
+            <a:endParaRPr lang="fr-FR" sz="1050" dirty="0"/>
+          </a:p>
+          <a:p>
+            <a:pPr marL="0" indent="0">
+              <a:buNone/>
+            </a:pPr>
+            <a:r>
+              <a:rPr lang="fr-FR" sz="2400" dirty="0"/>
+              <a:t>Les réponses à adopter en cas d’incident :</a:t>
+            </a:r>
+          </a:p>
+          <a:p>
+            <a:pPr marL="0" indent="0">
+              <a:buNone/>
+            </a:pPr>
+            <a:r>
+              <a:rPr lang="fr-FR" sz="1200" dirty="0"/>
+              <a:t>- Isoler immédiatement les appareils suspects &amp; infectés</a:t>
+            </a:r>
+          </a:p>
+          <a:p>
+            <a:pPr marL="0" indent="0">
+              <a:buNone/>
+            </a:pPr>
+            <a:r>
+              <a:rPr lang="fr-FR" sz="1200" dirty="0"/>
+              <a:t>- Communiquer sur l'attaque et l'impact  </a:t>
+            </a:r>
+            <a:endParaRPr lang="fr-FR" sz="1050" dirty="0"/>
+          </a:p>
+          <a:p>
+            <a:pPr marL="0" indent="0">
+              <a:buNone/>
+            </a:pPr>
+            <a:endParaRPr lang="fr-FR" sz="2400" dirty="0"/>
+          </a:p>
+          <a:p>
+            <a:pPr marL="0" indent="0">
+              <a:buNone/>
+            </a:pPr>
+            <a:endParaRPr lang="fr-FR" sz="2400" dirty="0"/>
+          </a:p>
+        </p:txBody>
+      </p:sp>
+      <p:sp>
+        <p:nvSpPr>
+          <p:cNvPr id="4" name="Espace réservé du pied de page 3">
+            <a:extLst>
+              <a:ext uri="{FF2B5EF4-FFF2-40B4-BE49-F238E27FC236}">
+                <a16:creationId xmlns:a16="http://schemas.microsoft.com/office/drawing/2014/main" id="{4923B818-5F9F-6C4B-67AD-F3BA60E0B35E}"/>
+              </a:ext>
+            </a:extLst>
+          </p:cNvPr>
+          <p:cNvSpPr>
+            <a:spLocks noGrp="1"/>
+          </p:cNvSpPr>
+          <p:nvPr>
+            <p:ph type="ftr" sz="quarter" idx="11"/>
+          </p:nvPr>
+        </p:nvSpPr>
+        <p:spPr/>
+        <p:txBody>
+          <a:bodyPr/>
+          <a:lstStyle/>
+          <a:p>
+            <a:r>
+              <a:rPr lang="fr-FR"/>
+              <a:t>PICIURA Ander - MIRABEL Lilian</a:t>
+            </a:r>
+          </a:p>
+        </p:txBody>
+      </p:sp>
+      <p:sp>
+        <p:nvSpPr>
+          <p:cNvPr id="5" name="Espace réservé du numéro de diapositive 4">
+            <a:extLst>
+              <a:ext uri="{FF2B5EF4-FFF2-40B4-BE49-F238E27FC236}">
+                <a16:creationId xmlns:a16="http://schemas.microsoft.com/office/drawing/2014/main" id="{7AB7B0D7-8EC8-06A9-71B4-C52401F49669}"/>
+              </a:ext>
+            </a:extLst>
+          </p:cNvPr>
+          <p:cNvSpPr>
+            <a:spLocks noGrp="1"/>
+          </p:cNvSpPr>
+          <p:nvPr>
+            <p:ph type="sldNum" sz="quarter" idx="12"/>
+          </p:nvPr>
+        </p:nvSpPr>
+        <p:spPr/>
+        <p:txBody>
+          <a:bodyPr/>
+          <a:lstStyle/>
+          <a:p>
+            <a:fld id="{EF144E42-BC24-D442-AFF0-55EAB46336FB}" type="slidenum">
+              <a:rPr lang="fr-FR" smtClean="0"/>
+              <a:t>4</a:t>
+            </a:fld>
+            <a:endParaRPr lang="fr-FR"/>
+          </a:p>
+        </p:txBody>
+      </p:sp>
+    </p:spTree>
+    <p:extLst>
+      <p:ext uri="{BB962C8B-B14F-4D97-AF65-F5344CB8AC3E}">
+        <p14:creationId xmlns:p14="http://schemas.microsoft.com/office/powerpoint/2010/main" val="1569222927"/>
+      </p:ext>
+    </p:extLst>
+  </p:cSld>
+  <p:clrMapOvr>
+    <a:masterClrMapping/>
+  </p:clrMapOvr>
+</p:sld>
+</file>
+
+<file path=ppt/slides/slide5.xml><?xml version="1.0" encoding="utf-8"?>
+<p:sld xmlns:a="http://schemas.openxmlformats.org/drawingml/2006/main" xmlns:r="http://schemas.openxmlformats.org/officeDocument/2006/relationships" xmlns:p="http://schemas.openxmlformats.org/presentationml/2006/main">
+  <p:cSld>
+    <p:spTree>
+      <p:nvGrpSpPr>
+        <p:cNvPr id="1" name=""/>
+        <p:cNvGrpSpPr/>
+        <p:nvPr/>
+      </p:nvGrpSpPr>
+      <p:grpSpPr>
+        <a:xfrm>
+          <a:off x="0" y="0"/>
+          <a:ext cx="0" cy="0"/>
+          <a:chOff x="0" y="0"/>
+          <a:chExt cx="0" cy="0"/>
+        </a:xfrm>
+      </p:grpSpPr>
+      <p:sp>
+        <p:nvSpPr>
+          <p:cNvPr id="2" name="Titre 1">
+            <a:extLst>
+              <a:ext uri="{FF2B5EF4-FFF2-40B4-BE49-F238E27FC236}">
                 <a16:creationId xmlns:a16="http://schemas.microsoft.com/office/drawing/2014/main" id="{9825A0F5-CD45-712F-4059-C0F0FF8B7CCA}"/>
               </a:ext>
             </a:extLst>
@@ -5316,79 +6005,157 @@
           <p:nvPr>
             <p:ph type="title"/>
           </p:nvPr>
+        </p:nvSpPr>
+        <p:spPr>
+          <a:xfrm>
+            <a:off x="838200" y="480218"/>
+            <a:ext cx="10515600" cy="1325563"/>
+          </a:xfrm>
+        </p:spPr>
+        <p:txBody>
+          <a:bodyPr/>
+          <a:lstStyle/>
+          <a:p>
+            <a:pPr algn="ctr"/>
+            <a:r>
+              <a:rPr lang="fr-FR" dirty="0"/>
+              <a:t>Atelier 2</a:t>
+            </a:r>
+          </a:p>
+        </p:txBody>
+      </p:sp>
+      <p:sp>
+        <p:nvSpPr>
+          <p:cNvPr id="4" name="Espace réservé du pied de page 3">
+            <a:extLst>
+              <a:ext uri="{FF2B5EF4-FFF2-40B4-BE49-F238E27FC236}">
+                <a16:creationId xmlns:a16="http://schemas.microsoft.com/office/drawing/2014/main" id="{8C0AA5E1-3CE3-97F8-19D0-AF8F3A0EE5D4}"/>
+              </a:ext>
+            </a:extLst>
+          </p:cNvPr>
+          <p:cNvSpPr>
+            <a:spLocks noGrp="1"/>
+          </p:cNvSpPr>
+          <p:nvPr>
+            <p:ph type="ftr" sz="quarter" idx="11"/>
+          </p:nvPr>
+        </p:nvSpPr>
+        <p:spPr/>
+        <p:txBody>
+          <a:bodyPr/>
+          <a:lstStyle/>
+          <a:p>
+            <a:r>
+              <a:rPr lang="fr-FR"/>
+              <a:t>PICIURA Ander - MIRABEL Lilian</a:t>
+            </a:r>
+          </a:p>
+        </p:txBody>
+      </p:sp>
+      <p:sp>
+        <p:nvSpPr>
+          <p:cNvPr id="5" name="Espace réservé du numéro de diapositive 4">
+            <a:extLst>
+              <a:ext uri="{FF2B5EF4-FFF2-40B4-BE49-F238E27FC236}">
+                <a16:creationId xmlns:a16="http://schemas.microsoft.com/office/drawing/2014/main" id="{13901517-A0CF-44AB-B9D2-A665BB12BAAF}"/>
+              </a:ext>
+            </a:extLst>
+          </p:cNvPr>
+          <p:cNvSpPr>
+            <a:spLocks noGrp="1"/>
+          </p:cNvSpPr>
+          <p:nvPr>
+            <p:ph type="sldNum" sz="quarter" idx="12"/>
+          </p:nvPr>
+        </p:nvSpPr>
+        <p:spPr/>
+        <p:txBody>
+          <a:bodyPr/>
+          <a:lstStyle/>
+          <a:p>
+            <a:fld id="{EF144E42-BC24-D442-AFF0-55EAB46336FB}" type="slidenum">
+              <a:rPr lang="fr-FR" smtClean="0"/>
+              <a:t>5</a:t>
+            </a:fld>
+            <a:endParaRPr lang="fr-FR"/>
+          </a:p>
+        </p:txBody>
+      </p:sp>
+      <p:sp>
+        <p:nvSpPr>
+          <p:cNvPr id="6" name="Titre 1">
+            <a:extLst>
+              <a:ext uri="{FF2B5EF4-FFF2-40B4-BE49-F238E27FC236}">
+                <a16:creationId xmlns:a16="http://schemas.microsoft.com/office/drawing/2014/main" id="{E2CB4E63-C33E-C0EB-820C-2A633533B07D}"/>
+              </a:ext>
+            </a:extLst>
+          </p:cNvPr>
+          <p:cNvSpPr txBox="1">
+            <a:spLocks/>
+          </p:cNvSpPr>
+          <p:nvPr/>
         </p:nvSpPr>
         <p:spPr>
           <a:xfrm>
             <a:off x="838200" y="2766218"/>
             <a:ext cx="10515600" cy="1325563"/>
           </a:xfrm>
+          <a:prstGeom prst="rect">
+            <a:avLst/>
+          </a:prstGeom>
         </p:spPr>
         <p:txBody>
-          <a:bodyPr/>
-          <a:lstStyle/>
+          <a:bodyPr vert="horz" lIns="91440" tIns="45720" rIns="91440" bIns="45720" rtlCol="0" anchor="ctr">
+            <a:normAutofit fontScale="85000" lnSpcReduction="20000"/>
+          </a:bodyPr>
+          <a:lstStyle>
+            <a:lvl1pPr algn="l" defTabSz="914400" rtl="0" eaLnBrk="1" latinLnBrk="0" hangingPunct="1">
+              <a:lnSpc>
+                <a:spcPct val="90000"/>
+              </a:lnSpc>
+              <a:spcBef>
+                <a:spcPct val="0"/>
+              </a:spcBef>
+              <a:buNone/>
+              <a:defRPr sz="4400" kern="1200">
+                <a:solidFill>
+                  <a:schemeClr val="tx1"/>
+                </a:solidFill>
+                <a:latin typeface="+mj-lt"/>
+                <a:ea typeface="+mj-ea"/>
+                <a:cs typeface="+mj-cs"/>
+              </a:defRPr>
+            </a:lvl1pPr>
+          </a:lstStyle>
           <a:p>
             <a:pPr algn="ctr"/>
             <a:r>
               <a:rPr lang="fr-FR" dirty="0"/>
-              <a:t>Atelier 2</a:t>
-            </a:r>
-          </a:p>
-        </p:txBody>
-      </p:sp>
-      <p:sp>
-        <p:nvSpPr>
-          <p:cNvPr id="4" name="Espace réservé du pied de page 3">
-            <a:extLst>
-              <a:ext uri="{FF2B5EF4-FFF2-40B4-BE49-F238E27FC236}">
-                <a16:creationId xmlns:a16="http://schemas.microsoft.com/office/drawing/2014/main" id="{8C0AA5E1-3CE3-97F8-19D0-AF8F3A0EE5D4}"/>
-              </a:ext>
-            </a:extLst>
-          </p:cNvPr>
-          <p:cNvSpPr>
-            <a:spLocks noGrp="1"/>
-          </p:cNvSpPr>
-          <p:nvPr>
-            <p:ph type="ftr" sz="quarter" idx="11"/>
-          </p:nvPr>
-        </p:nvSpPr>
-        <p:spPr/>
-        <p:txBody>
-          <a:bodyPr/>
-          <a:lstStyle/>
-          <a:p>
-            <a:r>
-              <a:rPr lang="fr-FR"/>
-              <a:t>PICIURA Ander - MIRABEL Lilian</a:t>
-            </a:r>
-          </a:p>
-        </p:txBody>
-      </p:sp>
-      <p:sp>
-        <p:nvSpPr>
-          <p:cNvPr id="5" name="Espace réservé du numéro de diapositive 4">
-            <a:extLst>
-              <a:ext uri="{FF2B5EF4-FFF2-40B4-BE49-F238E27FC236}">
-                <a16:creationId xmlns:a16="http://schemas.microsoft.com/office/drawing/2014/main" id="{13901517-A0CF-44AB-B9D2-A665BB12BAAF}"/>
-              </a:ext>
-            </a:extLst>
-          </p:cNvPr>
-          <p:cNvSpPr>
-            <a:spLocks noGrp="1"/>
-          </p:cNvSpPr>
-          <p:nvPr>
-            <p:ph type="sldNum" sz="quarter" idx="12"/>
-          </p:nvPr>
-        </p:nvSpPr>
-        <p:spPr/>
-        <p:txBody>
-          <a:bodyPr/>
-          <a:lstStyle/>
-          <a:p>
-            <a:fld id="{EF144E42-BC24-D442-AFF0-55EAB46336FB}" type="slidenum">
-              <a:rPr lang="fr-FR" smtClean="0"/>
-              <a:t>4</a:t>
-            </a:fld>
-            <a:endParaRPr lang="fr-FR"/>
+              <a:t>Lilian Mirabel</a:t>
+            </a:r>
+          </a:p>
+          <a:p>
+            <a:pPr algn="ctr"/>
+            <a:r>
+              <a:rPr lang="fr-FR" dirty="0"/>
+              <a:t>&amp; </a:t>
+            </a:r>
+          </a:p>
+          <a:p>
+            <a:pPr algn="ctr"/>
+            <a:r>
+              <a:rPr lang="fr-FR" dirty="0" err="1"/>
+              <a:t>Ander</a:t>
+            </a:r>
+            <a:r>
+              <a:rPr lang="fr-FR" dirty="0"/>
+              <a:t> </a:t>
+            </a:r>
+            <a:r>
+              <a:rPr lang="fr-FR" dirty="0" err="1"/>
+              <a:t>Piciura</a:t>
+            </a:r>
+            <a:endParaRPr lang="fr-FR" dirty="0"/>
           </a:p>
         </p:txBody>
       </p:sp>
@@ -5405,7 +6172,7 @@
 </p:sld>
 </file>
 
-<file path=ppt/slides/slide5.xml><?xml version="1.0" encoding="utf-8"?>
+<file path=ppt/slides/slide6.xml><?xml version="1.0" encoding="utf-8"?>
 <p:sld xmlns:a="http://schemas.openxmlformats.org/drawingml/2006/main" xmlns:r="http://schemas.openxmlformats.org/officeDocument/2006/relationships" xmlns:p="http://schemas.openxmlformats.org/presentationml/2006/main">
   <p:cSld>
     <p:spTree>
@@ -6133,9 +6900,44 @@
           <a:p>
             <a:fld id="{EF144E42-BC24-D442-AFF0-55EAB46336FB}" type="slidenum">
               <a:rPr lang="fr-FR" smtClean="0"/>
-              <a:t>5</a:t>
+              <a:t>6</a:t>
             </a:fld>
             <a:endParaRPr lang="fr-FR"/>
+          </a:p>
+        </p:txBody>
+      </p:sp>
+      <p:sp>
+        <p:nvSpPr>
+          <p:cNvPr id="2" name="ZoneTexte 1">
+            <a:extLst>
+              <a:ext uri="{FF2B5EF4-FFF2-40B4-BE49-F238E27FC236}">
+                <a16:creationId xmlns:a16="http://schemas.microsoft.com/office/drawing/2014/main" id="{3594AB0C-2E3B-D47E-900E-F62155D20509}"/>
+              </a:ext>
+            </a:extLst>
+          </p:cNvPr>
+          <p:cNvSpPr txBox="1"/>
+          <p:nvPr/>
+        </p:nvSpPr>
+        <p:spPr>
+          <a:xfrm>
+            <a:off x="3283403" y="5400794"/>
+            <a:ext cx="5625194" cy="369332"/>
+          </a:xfrm>
+          <a:prstGeom prst="rect">
+            <a:avLst/>
+          </a:prstGeom>
+          <a:noFill/>
+        </p:spPr>
+        <p:txBody>
+          <a:bodyPr wrap="none" rtlCol="0">
+            <a:spAutoFit/>
+          </a:bodyPr>
+          <a:lstStyle/>
+          <a:p>
+            <a:r>
+              <a:rPr lang="fr-FR" dirty="0"/>
+              <a:t>1 correspond au niveau le plus élevé et 5 au plus faible.</a:t>
+            </a:r>
           </a:p>
         </p:txBody>
       </p:sp>
@@ -6152,7 +6954,7 @@
 </p:sld>
 </file>
 
-<file path=ppt/slides/slide6.xml><?xml version="1.0" encoding="utf-8"?>
+<file path=ppt/slides/slide7.xml><?xml version="1.0" encoding="utf-8"?>
 <p:sld xmlns:a="http://schemas.openxmlformats.org/drawingml/2006/main" xmlns:r="http://schemas.openxmlformats.org/officeDocument/2006/relationships" xmlns:p="http://schemas.openxmlformats.org/presentationml/2006/main">
   <p:cSld>
     <p:spTree>
@@ -6220,7 +7022,7 @@
           <a:p>
             <a:fld id="{EF144E42-BC24-D442-AFF0-55EAB46336FB}" type="slidenum">
               <a:rPr lang="fr-FR" smtClean="0"/>
-              <a:t>6</a:t>
+              <a:t>7</a:t>
             </a:fld>
             <a:endParaRPr lang="fr-FR"/>
           </a:p>
@@ -6709,7 +7511,7 @@
 </p:sld>
 </file>
 
-<file path=ppt/slides/slide7.xml><?xml version="1.0" encoding="utf-8"?>
+<file path=ppt/slides/slide8.xml><?xml version="1.0" encoding="utf-8"?>
 <p:sld xmlns:a="http://schemas.openxmlformats.org/drawingml/2006/main" xmlns:r="http://schemas.openxmlformats.org/officeDocument/2006/relationships" xmlns:p="http://schemas.openxmlformats.org/presentationml/2006/main">
   <p:cSld>
     <p:spTree>
@@ -6777,7 +7579,7 @@
         </p:nvSpPr>
         <p:spPr>
           <a:xfrm>
-            <a:off x="838200" y="1163637"/>
+            <a:off x="838200" y="1430013"/>
             <a:ext cx="10515600" cy="4530725"/>
           </a:xfrm>
         </p:spPr>
@@ -6826,6 +7628,24 @@
             <a:pPr marL="0" indent="0">
               <a:buNone/>
             </a:pPr>
+            <a:r>
+              <a:rPr lang="fr-FR" sz="1400" dirty="0"/>
+              <a:t>- Outils de communication interne</a:t>
+            </a:r>
+          </a:p>
+          <a:p>
+            <a:pPr marL="0" indent="0">
+              <a:buNone/>
+            </a:pPr>
+            <a:r>
+              <a:rPr lang="fr-FR" sz="1400" dirty="0"/>
+              <a:t>- Supervision du système</a:t>
+            </a:r>
+          </a:p>
+          <a:p>
+            <a:pPr marL="0" indent="0">
+              <a:buNone/>
+            </a:pPr>
             <a:endParaRPr lang="fr-FR" sz="1000" dirty="0"/>
           </a:p>
           <a:p>
@@ -6872,16 +7692,31 @@
             <a:pPr marL="0" indent="0">
               <a:buNone/>
             </a:pPr>
+            <a:r>
+              <a:rPr lang="fr-FR" sz="1400" dirty="0"/>
+              <a:t>- Réseau de secours</a:t>
+            </a:r>
+          </a:p>
+          <a:p>
+            <a:pPr marL="0" indent="0">
+              <a:buNone/>
+            </a:pPr>
+            <a:r>
+              <a:rPr lang="fr-FR" sz="1400" dirty="0"/>
+              <a:t>- Supervision et sécurité</a:t>
+            </a:r>
+          </a:p>
+          <a:p>
+            <a:pPr marL="0" indent="0">
+              <a:buNone/>
+            </a:pPr>
+            <a:endParaRPr lang="fr-FR" sz="1400" dirty="0"/>
+          </a:p>
+          <a:p>
+            <a:pPr marL="0" indent="0">
+              <a:buNone/>
+            </a:pPr>
             <a:endParaRPr lang="fr-FR" sz="1000" dirty="0"/>
-          </a:p>
-          <a:p>
-            <a:pPr marL="0" indent="0">
-              <a:buNone/>
-            </a:pPr>
-            <a:r>
-              <a:rPr lang="fr-FR" sz="1800" b="1" dirty="0"/>
-              <a:t>Proposez des moyens de continuité minimale</a:t>
-            </a:r>
           </a:p>
           <a:p>
             <a:pPr marL="0" indent="0">
@@ -6942,7 +7777,123 @@
           <a:p>
             <a:fld id="{EF144E42-BC24-D442-AFF0-55EAB46336FB}" type="slidenum">
               <a:rPr lang="fr-FR" smtClean="0"/>
-              <a:t>7</a:t>
+              <a:t>8</a:t>
+            </a:fld>
+            <a:endParaRPr lang="fr-FR"/>
+          </a:p>
+        </p:txBody>
+      </p:sp>
+    </p:spTree>
+    <p:extLst>
+      <p:ext uri="{BB962C8B-B14F-4D97-AF65-F5344CB8AC3E}">
+        <p14:creationId xmlns:p14="http://schemas.microsoft.com/office/powerpoint/2010/main" val="3641645090"/>
+      </p:ext>
+    </p:extLst>
+  </p:cSld>
+  <p:clrMapOvr>
+    <a:masterClrMapping/>
+  </p:clrMapOvr>
+</p:sld>
+</file>
+
+<file path=ppt/slides/slide9.xml><?xml version="1.0" encoding="utf-8"?>
+<p:sld xmlns:a="http://schemas.openxmlformats.org/drawingml/2006/main" xmlns:r="http://schemas.openxmlformats.org/officeDocument/2006/relationships" xmlns:p="http://schemas.openxmlformats.org/presentationml/2006/main">
+  <p:cSld>
+    <p:spTree>
+      <p:nvGrpSpPr>
+        <p:cNvPr id="1" name=""/>
+        <p:cNvGrpSpPr/>
+        <p:nvPr/>
+      </p:nvGrpSpPr>
+      <p:grpSpPr>
+        <a:xfrm>
+          <a:off x="0" y="0"/>
+          <a:ext cx="0" cy="0"/>
+          <a:chOff x="0" y="0"/>
+          <a:chExt cx="0" cy="0"/>
+        </a:xfrm>
+      </p:grpSpPr>
+      <p:sp>
+        <p:nvSpPr>
+          <p:cNvPr id="2" name="Titre 1">
+            <a:extLst>
+              <a:ext uri="{FF2B5EF4-FFF2-40B4-BE49-F238E27FC236}">
+                <a16:creationId xmlns:a16="http://schemas.microsoft.com/office/drawing/2014/main" id="{FD9888B1-27AA-D8A4-0082-A445F93FA9D4}"/>
+              </a:ext>
+            </a:extLst>
+          </p:cNvPr>
+          <p:cNvSpPr>
+            <a:spLocks noGrp="1"/>
+          </p:cNvSpPr>
+          <p:nvPr>
+            <p:ph type="title"/>
+          </p:nvPr>
+        </p:nvSpPr>
+        <p:spPr/>
+        <p:txBody>
+          <a:bodyPr/>
+          <a:lstStyle/>
+          <a:p>
+            <a:pPr algn="ctr"/>
+            <a:r>
+              <a:rPr lang="fr-FR" dirty="0"/>
+              <a:t>Décrivez le rôle des acteurs</a:t>
+            </a:r>
+          </a:p>
+        </p:txBody>
+      </p:sp>
+      <p:sp>
+        <p:nvSpPr>
+          <p:cNvPr id="4" name="Espace réservé du pied de page 3">
+            <a:extLst>
+              <a:ext uri="{FF2B5EF4-FFF2-40B4-BE49-F238E27FC236}">
+                <a16:creationId xmlns:a16="http://schemas.microsoft.com/office/drawing/2014/main" id="{AA4CBC67-7767-BA60-6491-D67CDDF7D78E}"/>
+              </a:ext>
+            </a:extLst>
+          </p:cNvPr>
+          <p:cNvSpPr>
+            <a:spLocks noGrp="1"/>
+          </p:cNvSpPr>
+          <p:nvPr>
+            <p:ph type="ftr" sz="quarter" idx="11"/>
+          </p:nvPr>
+        </p:nvSpPr>
+        <p:spPr/>
+        <p:txBody>
+          <a:bodyPr/>
+          <a:lstStyle/>
+          <a:p>
+            <a:r>
+              <a:rPr lang="fr-FR"/>
+              <a:t>PICIURA Ander - MIRABEL Lilian</a:t>
+            </a:r>
+          </a:p>
+        </p:txBody>
+      </p:sp>
+      <p:sp>
+        <p:nvSpPr>
+          <p:cNvPr id="5" name="Espace réservé du numéro de diapositive 4">
+            <a:extLst>
+              <a:ext uri="{FF2B5EF4-FFF2-40B4-BE49-F238E27FC236}">
+                <a16:creationId xmlns:a16="http://schemas.microsoft.com/office/drawing/2014/main" id="{3B897E1B-4391-0D82-0419-BA8F83FAA7BF}"/>
+              </a:ext>
+            </a:extLst>
+          </p:cNvPr>
+          <p:cNvSpPr>
+            <a:spLocks noGrp="1"/>
+          </p:cNvSpPr>
+          <p:nvPr>
+            <p:ph type="sldNum" sz="quarter" idx="12"/>
+          </p:nvPr>
+        </p:nvSpPr>
+        <p:spPr/>
+        <p:txBody>
+          <a:bodyPr/>
+          <a:lstStyle/>
+          <a:p>
+            <a:fld id="{EF144E42-BC24-D442-AFF0-55EAB46336FB}" type="slidenum">
+              <a:rPr lang="fr-FR" smtClean="0"/>
+              <a:t>9</a:t>
             </a:fld>
             <a:endParaRPr lang="fr-FR"/>
           </a:p>
@@ -6953,7 +7904,7 @@
           <p:cNvPr id="6" name="Tableau 5">
             <a:extLst>
               <a:ext uri="{FF2B5EF4-FFF2-40B4-BE49-F238E27FC236}">
-                <a16:creationId xmlns:a16="http://schemas.microsoft.com/office/drawing/2014/main" id="{2B7E2238-892B-7FD8-065D-1CBDCD4B6AD6}"/>
+                <a16:creationId xmlns:a16="http://schemas.microsoft.com/office/drawing/2014/main" id="{E0A13D25-30C3-2A88-A061-0ADDE6725E66}"/>
               </a:ext>
             </a:extLst>
           </p:cNvPr>
@@ -6963,14 +7914,14 @@
           <p:nvPr>
             <p:extLst>
               <p:ext uri="{D42A27DB-BD31-4B8C-83A1-F6EECF244321}">
-                <p14:modId xmlns:p14="http://schemas.microsoft.com/office/powerpoint/2010/main" val="2357998041"/>
+                <p14:modId xmlns:p14="http://schemas.microsoft.com/office/powerpoint/2010/main" val="2937740239"/>
               </p:ext>
             </p:extLst>
           </p:nvPr>
         </p:nvGraphicFramePr>
         <p:xfrm>
-          <a:off x="6517054" y="3428999"/>
-          <a:ext cx="5674946" cy="3017520"/>
+          <a:off x="2135890" y="1841157"/>
+          <a:ext cx="7920219" cy="4024596"/>
         </p:xfrm>
         <a:graphic>
           <a:graphicData uri="http://schemas.openxmlformats.org/drawingml/2006/table">
@@ -6979,14 +7930,14 @@
                 <a:tableStyleId>{5C22544A-7EE6-4342-B048-85BDC9FD1C3A}</a:tableStyleId>
               </a:tblPr>
               <a:tblGrid>
-                <a:gridCol w="1922611">
+                <a:gridCol w="2683285">
                   <a:extLst>
                     <a:ext uri="{9D8B030D-6E8A-4147-A177-3AD203B41FA5}">
                       <a16:colId xmlns:a16="http://schemas.microsoft.com/office/drawing/2014/main" val="228330033"/>
                     </a:ext>
                   </a:extLst>
                 </a:gridCol>
-                <a:gridCol w="3752335">
+                <a:gridCol w="5236934">
                   <a:extLst>
                     <a:ext uri="{9D8B030D-6E8A-4147-A177-3AD203B41FA5}">
                       <a16:colId xmlns:a16="http://schemas.microsoft.com/office/drawing/2014/main" val="3130860348"/>
@@ -6994,7 +7945,7 @@
                   </a:extLst>
                 </a:gridCol>
               </a:tblGrid>
-              <a:tr h="266110">
+              <a:tr h="487830">
                 <a:tc>
                   <a:txBody>
                     <a:bodyPr/>
@@ -7027,7 +7978,7 @@
                   </a:ext>
                 </a:extLst>
               </a:tr>
-              <a:tr h="209303">
+              <a:tr h="487830">
                 <a:tc>
                   <a:txBody>
                     <a:bodyPr/>
@@ -7061,7 +8012,7 @@
                   </a:ext>
                 </a:extLst>
               </a:tr>
-              <a:tr h="209303">
+              <a:tr h="853702">
                 <a:tc>
                   <a:txBody>
                     <a:bodyPr/>
@@ -7095,7 +8046,7 @@
                   </a:ext>
                 </a:extLst>
               </a:tr>
-              <a:tr h="209303">
+              <a:tr h="853702">
                 <a:tc>
                   <a:txBody>
                     <a:bodyPr/>
@@ -7137,7 +8088,7 @@
                   </a:ext>
                 </a:extLst>
               </a:tr>
-              <a:tr h="209303">
+              <a:tr h="487830">
                 <a:tc>
                   <a:txBody>
                     <a:bodyPr/>
@@ -7171,7 +8122,7 @@
                   </a:ext>
                 </a:extLst>
               </a:tr>
-              <a:tr h="209303">
+              <a:tr h="853702">
                 <a:tc>
                   <a:txBody>
                     <a:bodyPr/>
@@ -7212,439 +8163,7 @@
     </p:spTree>
     <p:extLst>
       <p:ext uri="{BB962C8B-B14F-4D97-AF65-F5344CB8AC3E}">
-        <p14:creationId xmlns:p14="http://schemas.microsoft.com/office/powerpoint/2010/main" val="3641645090"/>
-      </p:ext>
-    </p:extLst>
-  </p:cSld>
-  <p:clrMapOvr>
-    <a:masterClrMapping/>
-  </p:clrMapOvr>
-</p:sld>
-</file>
-
-<file path=ppt/slides/slide8.xml><?xml version="1.0" encoding="utf-8"?>
-<p:sld xmlns:a="http://schemas.openxmlformats.org/drawingml/2006/main" xmlns:r="http://schemas.openxmlformats.org/officeDocument/2006/relationships" xmlns:p="http://schemas.openxmlformats.org/presentationml/2006/main">
-  <p:cSld>
-    <p:spTree>
-      <p:nvGrpSpPr>
-        <p:cNvPr id="1" name=""/>
-        <p:cNvGrpSpPr/>
-        <p:nvPr/>
-      </p:nvGrpSpPr>
-      <p:grpSpPr>
-        <a:xfrm>
-          <a:off x="0" y="0"/>
-          <a:ext cx="0" cy="0"/>
-          <a:chOff x="0" y="0"/>
-          <a:chExt cx="0" cy="0"/>
-        </a:xfrm>
-      </p:grpSpPr>
-      <p:sp>
-        <p:nvSpPr>
-          <p:cNvPr id="3" name="Espace réservé du contenu 2">
-            <a:extLst>
-              <a:ext uri="{FF2B5EF4-FFF2-40B4-BE49-F238E27FC236}">
-                <a16:creationId xmlns:a16="http://schemas.microsoft.com/office/drawing/2014/main" id="{7F6607C5-8744-2DA8-280B-A1786B695664}"/>
-              </a:ext>
-            </a:extLst>
-          </p:cNvPr>
-          <p:cNvSpPr>
-            <a:spLocks noGrp="1"/>
-          </p:cNvSpPr>
-          <p:nvPr>
-            <p:ph idx="1"/>
-          </p:nvPr>
-        </p:nvSpPr>
-        <p:spPr>
-          <a:xfrm>
-            <a:off x="838200" y="1149178"/>
-            <a:ext cx="10515600" cy="5027785"/>
-          </a:xfrm>
-        </p:spPr>
-        <p:txBody>
-          <a:bodyPr>
-            <a:normAutofit/>
-          </a:bodyPr>
-          <a:lstStyle/>
-          <a:p>
-            <a:pPr marL="0" indent="0">
-              <a:buNone/>
-            </a:pPr>
-            <a:r>
-              <a:rPr lang="fr-FR" b="1" dirty="0"/>
-              <a:t>Proposez une stratégie de sauvegarde et de restauration</a:t>
-            </a:r>
-          </a:p>
-          <a:p>
-            <a:pPr>
-              <a:buFontTx/>
-              <a:buChar char="-"/>
-            </a:pPr>
-            <a:r>
-              <a:rPr lang="fr-FR" sz="1800" dirty="0"/>
-              <a:t>Sauvegarde quotidienne et automatique des données</a:t>
-            </a:r>
-          </a:p>
-          <a:p>
-            <a:pPr>
-              <a:buFontTx/>
-              <a:buChar char="-"/>
-            </a:pPr>
-            <a:r>
-              <a:rPr lang="fr-FR" sz="1800" dirty="0"/>
-              <a:t>Utilisation de divers supports de stockages de données (cloud, disques, etc.)</a:t>
-            </a:r>
-          </a:p>
-          <a:p>
-            <a:pPr>
-              <a:buFontTx/>
-              <a:buChar char="-"/>
-            </a:pPr>
-            <a:r>
-              <a:rPr lang="fr-FR" sz="1800" dirty="0"/>
-              <a:t>Utilisation d’un système de </a:t>
-            </a:r>
-            <a:r>
-              <a:rPr lang="fr-FR" sz="1800" dirty="0" err="1"/>
-              <a:t>versionning</a:t>
-            </a:r>
-            <a:r>
-              <a:rPr lang="fr-FR" sz="1800" dirty="0"/>
-              <a:t> pour le SI (</a:t>
-            </a:r>
-            <a:r>
-              <a:rPr lang="fr-FR" sz="1800" dirty="0" err="1"/>
-              <a:t>github</a:t>
-            </a:r>
-            <a:r>
-              <a:rPr lang="fr-FR" sz="1800" dirty="0"/>
-              <a:t>, git)</a:t>
-            </a:r>
-          </a:p>
-          <a:p>
-            <a:pPr>
-              <a:buFontTx/>
-              <a:buChar char="-"/>
-            </a:pPr>
-            <a:endParaRPr lang="fr-FR" sz="1800" dirty="0"/>
-          </a:p>
-          <a:p>
-            <a:pPr marL="0" indent="0">
-              <a:buNone/>
-            </a:pPr>
-            <a:r>
-              <a:rPr lang="fr-FR" b="1" dirty="0"/>
-              <a:t>Décrivez les étapes de reprise après incident</a:t>
-            </a:r>
-          </a:p>
-          <a:p>
-            <a:pPr marL="514350" indent="-514350">
-              <a:buAutoNum type="arabicPeriod"/>
-            </a:pPr>
-            <a:r>
-              <a:rPr lang="fr-FR" sz="1900" dirty="0"/>
-              <a:t>Analyse et vérification sur l’impact  et l’incidence du système et des données.</a:t>
-            </a:r>
-          </a:p>
-          <a:p>
-            <a:pPr marL="514350" indent="-514350">
-              <a:buAutoNum type="arabicPeriod"/>
-            </a:pPr>
-            <a:r>
-              <a:rPr lang="fr-FR" sz="1900" dirty="0"/>
-              <a:t>Décision des différents acteurs sur les actions à entreprendre.</a:t>
-            </a:r>
-          </a:p>
-          <a:p>
-            <a:pPr marL="514350" indent="-514350">
-              <a:buAutoNum type="arabicPeriod"/>
-            </a:pPr>
-            <a:r>
-              <a:rPr lang="fr-FR" sz="1900" dirty="0"/>
-              <a:t>Phase de test pour la validation des bons fonctionnements du système.</a:t>
-            </a:r>
-          </a:p>
-          <a:p>
-            <a:pPr marL="514350" indent="-514350">
-              <a:buAutoNum type="arabicPeriod"/>
-            </a:pPr>
-            <a:r>
-              <a:rPr lang="fr-FR" sz="1900" dirty="0"/>
-              <a:t>Communication signaler la correction du problème.</a:t>
-            </a:r>
-          </a:p>
-          <a:p>
-            <a:pPr marL="514350" indent="-514350">
-              <a:buAutoNum type="arabicPeriod"/>
-            </a:pPr>
-            <a:r>
-              <a:rPr lang="fr-FR" sz="1900" dirty="0"/>
-              <a:t>Re-disponibilité du service et retour a la normal.</a:t>
-            </a:r>
-          </a:p>
-          <a:p>
-            <a:pPr marL="0" indent="0">
-              <a:buNone/>
-            </a:pPr>
-            <a:endParaRPr lang="fr-FR" dirty="0"/>
-          </a:p>
-        </p:txBody>
-      </p:sp>
-      <p:sp>
-        <p:nvSpPr>
-          <p:cNvPr id="4" name="Espace réservé du pied de page 3">
-            <a:extLst>
-              <a:ext uri="{FF2B5EF4-FFF2-40B4-BE49-F238E27FC236}">
-                <a16:creationId xmlns:a16="http://schemas.microsoft.com/office/drawing/2014/main" id="{6DA69D77-0AED-1B9F-655F-3CB02B9521C0}"/>
-              </a:ext>
-            </a:extLst>
-          </p:cNvPr>
-          <p:cNvSpPr>
-            <a:spLocks noGrp="1"/>
-          </p:cNvSpPr>
-          <p:nvPr>
-            <p:ph type="ftr" sz="quarter" idx="11"/>
-          </p:nvPr>
-        </p:nvSpPr>
-        <p:spPr/>
-        <p:txBody>
-          <a:bodyPr/>
-          <a:lstStyle/>
-          <a:p>
-            <a:r>
-              <a:rPr lang="fr-FR"/>
-              <a:t>PICIURA Ander - MIRABEL Lilian</a:t>
-            </a:r>
-          </a:p>
-        </p:txBody>
-      </p:sp>
-      <p:sp>
-        <p:nvSpPr>
-          <p:cNvPr id="5" name="Espace réservé du numéro de diapositive 4">
-            <a:extLst>
-              <a:ext uri="{FF2B5EF4-FFF2-40B4-BE49-F238E27FC236}">
-                <a16:creationId xmlns:a16="http://schemas.microsoft.com/office/drawing/2014/main" id="{6CCAEB9D-1C87-3C2D-AD84-7D4CB66F1D5F}"/>
-              </a:ext>
-            </a:extLst>
-          </p:cNvPr>
-          <p:cNvSpPr>
-            <a:spLocks noGrp="1"/>
-          </p:cNvSpPr>
-          <p:nvPr>
-            <p:ph type="sldNum" sz="quarter" idx="12"/>
-          </p:nvPr>
-        </p:nvSpPr>
-        <p:spPr/>
-        <p:txBody>
-          <a:bodyPr/>
-          <a:lstStyle/>
-          <a:p>
-            <a:fld id="{EF144E42-BC24-D442-AFF0-55EAB46336FB}" type="slidenum">
-              <a:rPr lang="fr-FR" smtClean="0"/>
-              <a:t>8</a:t>
-            </a:fld>
-            <a:endParaRPr lang="fr-FR"/>
-          </a:p>
-        </p:txBody>
-      </p:sp>
-      <p:sp>
-        <p:nvSpPr>
-          <p:cNvPr id="8" name="Titre 1">
-            <a:extLst>
-              <a:ext uri="{FF2B5EF4-FFF2-40B4-BE49-F238E27FC236}">
-                <a16:creationId xmlns:a16="http://schemas.microsoft.com/office/drawing/2014/main" id="{2D2CFAD4-DCE8-55A5-FA23-37EFFBE7AB09}"/>
-              </a:ext>
-            </a:extLst>
-          </p:cNvPr>
-          <p:cNvSpPr txBox="1">
-            <a:spLocks/>
-          </p:cNvSpPr>
-          <p:nvPr/>
-        </p:nvSpPr>
-        <p:spPr>
-          <a:xfrm>
-            <a:off x="838200" y="238770"/>
-            <a:ext cx="10515600" cy="795632"/>
-          </a:xfrm>
-          <a:prstGeom prst="rect">
-            <a:avLst/>
-          </a:prstGeom>
-        </p:spPr>
-        <p:txBody>
-          <a:bodyPr vert="horz" lIns="91440" tIns="45720" rIns="91440" bIns="45720" rtlCol="0" anchor="ctr">
-            <a:normAutofit/>
-          </a:bodyPr>
-          <a:lstStyle>
-            <a:lvl1pPr algn="l" defTabSz="914400" rtl="0" eaLnBrk="1" latinLnBrk="0" hangingPunct="1">
-              <a:lnSpc>
-                <a:spcPct val="90000"/>
-              </a:lnSpc>
-              <a:spcBef>
-                <a:spcPct val="0"/>
-              </a:spcBef>
-              <a:buNone/>
-              <a:defRPr sz="4400" kern="1200">
-                <a:solidFill>
-                  <a:schemeClr val="tx1"/>
-                </a:solidFill>
-                <a:latin typeface="+mj-lt"/>
-                <a:ea typeface="+mj-ea"/>
-                <a:cs typeface="+mj-cs"/>
-              </a:defRPr>
-            </a:lvl1pPr>
-          </a:lstStyle>
-          <a:p>
-            <a:r>
-              <a:rPr lang="fr-FR" dirty="0"/>
-              <a:t>Plan de Reprise d’Activité </a:t>
-            </a:r>
-          </a:p>
-        </p:txBody>
-      </p:sp>
-    </p:spTree>
-    <p:extLst>
-      <p:ext uri="{BB962C8B-B14F-4D97-AF65-F5344CB8AC3E}">
-        <p14:creationId xmlns:p14="http://schemas.microsoft.com/office/powerpoint/2010/main" val="3349946933"/>
-      </p:ext>
-    </p:extLst>
-  </p:cSld>
-  <p:clrMapOvr>
-    <a:masterClrMapping/>
-  </p:clrMapOvr>
-</p:sld>
-</file>
-
-<file path=ppt/slides/slide9.xml><?xml version="1.0" encoding="utf-8"?>
-<p:sld xmlns:a="http://schemas.openxmlformats.org/drawingml/2006/main" xmlns:r="http://schemas.openxmlformats.org/officeDocument/2006/relationships" xmlns:p="http://schemas.openxmlformats.org/presentationml/2006/main">
-  <p:cSld>
-    <p:spTree>
-      <p:nvGrpSpPr>
-        <p:cNvPr id="1" name=""/>
-        <p:cNvGrpSpPr/>
-        <p:nvPr/>
-      </p:nvGrpSpPr>
-      <p:grpSpPr>
-        <a:xfrm>
-          <a:off x="0" y="0"/>
-          <a:ext cx="0" cy="0"/>
-          <a:chOff x="0" y="0"/>
-          <a:chExt cx="0" cy="0"/>
-        </a:xfrm>
-      </p:grpSpPr>
-      <p:sp>
-        <p:nvSpPr>
-          <p:cNvPr id="2" name="Titre 1">
-            <a:extLst>
-              <a:ext uri="{FF2B5EF4-FFF2-40B4-BE49-F238E27FC236}">
-                <a16:creationId xmlns:a16="http://schemas.microsoft.com/office/drawing/2014/main" id="{A6A785F6-CB24-B3F1-DDF4-AA80F84FF2B9}"/>
-              </a:ext>
-            </a:extLst>
-          </p:cNvPr>
-          <p:cNvSpPr>
-            <a:spLocks noGrp="1"/>
-          </p:cNvSpPr>
-          <p:nvPr>
-            <p:ph type="title"/>
-          </p:nvPr>
-        </p:nvSpPr>
-        <p:spPr/>
-        <p:txBody>
-          <a:bodyPr/>
-          <a:lstStyle/>
-          <a:p>
-            <a:r>
-              <a:rPr lang="fr-FR" dirty="0"/>
-              <a:t>Schéma simplifié</a:t>
-            </a:r>
-          </a:p>
-        </p:txBody>
-      </p:sp>
-      <p:sp>
-        <p:nvSpPr>
-          <p:cNvPr id="3" name="Espace réservé du contenu 2">
-            <a:extLst>
-              <a:ext uri="{FF2B5EF4-FFF2-40B4-BE49-F238E27FC236}">
-                <a16:creationId xmlns:a16="http://schemas.microsoft.com/office/drawing/2014/main" id="{159B9E37-71C8-26A3-AEE9-02166F45F244}"/>
-              </a:ext>
-            </a:extLst>
-          </p:cNvPr>
-          <p:cNvSpPr>
-            <a:spLocks noGrp="1"/>
-          </p:cNvSpPr>
-          <p:nvPr>
-            <p:ph idx="1"/>
-          </p:nvPr>
-        </p:nvSpPr>
-        <p:spPr/>
-        <p:txBody>
-          <a:bodyPr/>
-          <a:lstStyle/>
-          <a:p>
-            <a:endParaRPr lang="fr-FR" dirty="0"/>
-          </a:p>
-        </p:txBody>
-      </p:sp>
-      <p:sp>
-        <p:nvSpPr>
-          <p:cNvPr id="4" name="Espace réservé du pied de page 3">
-            <a:extLst>
-              <a:ext uri="{FF2B5EF4-FFF2-40B4-BE49-F238E27FC236}">
-                <a16:creationId xmlns:a16="http://schemas.microsoft.com/office/drawing/2014/main" id="{48234254-AF9E-26C1-1B25-8150666DE003}"/>
-              </a:ext>
-            </a:extLst>
-          </p:cNvPr>
-          <p:cNvSpPr>
-            <a:spLocks noGrp="1"/>
-          </p:cNvSpPr>
-          <p:nvPr>
-            <p:ph type="ftr" sz="quarter" idx="11"/>
-          </p:nvPr>
-        </p:nvSpPr>
-        <p:spPr/>
-        <p:txBody>
-          <a:bodyPr/>
-          <a:lstStyle/>
-          <a:p>
-            <a:r>
-              <a:rPr lang="fr-FR"/>
-              <a:t>PICIURA Ander - MIRABEL Lilian</a:t>
-            </a:r>
-          </a:p>
-        </p:txBody>
-      </p:sp>
-      <p:sp>
-        <p:nvSpPr>
-          <p:cNvPr id="5" name="Espace réservé du numéro de diapositive 4">
-            <a:extLst>
-              <a:ext uri="{FF2B5EF4-FFF2-40B4-BE49-F238E27FC236}">
-                <a16:creationId xmlns:a16="http://schemas.microsoft.com/office/drawing/2014/main" id="{19EF4814-C6BF-9ABD-4797-6C1A8863C560}"/>
-              </a:ext>
-            </a:extLst>
-          </p:cNvPr>
-          <p:cNvSpPr>
-            <a:spLocks noGrp="1"/>
-          </p:cNvSpPr>
-          <p:nvPr>
-            <p:ph type="sldNum" sz="quarter" idx="12"/>
-          </p:nvPr>
-        </p:nvSpPr>
-        <p:spPr/>
-        <p:txBody>
-          <a:bodyPr/>
-          <a:lstStyle/>
-          <a:p>
-            <a:fld id="{EF144E42-BC24-D442-AFF0-55EAB46336FB}" type="slidenum">
-              <a:rPr lang="fr-FR" smtClean="0"/>
-              <a:t>9</a:t>
-            </a:fld>
-            <a:endParaRPr lang="fr-FR"/>
-          </a:p>
-        </p:txBody>
-      </p:sp>
-    </p:spTree>
-    <p:extLst>
-      <p:ext uri="{BB962C8B-B14F-4D97-AF65-F5344CB8AC3E}">
-        <p14:creationId xmlns:p14="http://schemas.microsoft.com/office/powerpoint/2010/main" val="2065482170"/>
+        <p14:creationId xmlns:p14="http://schemas.microsoft.com/office/powerpoint/2010/main" val="1930148341"/>
       </p:ext>
     </p:extLst>
   </p:cSld>

--- a/TP6_Exploitation_faille_0day_Lilian_Ander.pptx
+++ b/TP6_Exploitation_faille_0day_Lilian_Ander.pptx
@@ -210,7 +210,7 @@
           <a:p>
             <a:fld id="{A3AD1527-66CD-9E4E-9A4A-E615F4AE3ADF}" type="datetimeFigureOut">
               <a:rPr lang="fr-FR" smtClean="0"/>
-              <a:t>08/10/2025</a:t>
+              <a:t>09/10/2025</a:t>
             </a:fld>
             <a:endParaRPr lang="fr-FR"/>
           </a:p>
@@ -624,7 +624,7 @@
           <a:p>
             <a:fld id="{C5B6D08A-29ED-0F40-BE4B-112543CE024C}" type="datetime1">
               <a:rPr lang="fr-FR" smtClean="0"/>
-              <a:t>08/10/2025</a:t>
+              <a:t>09/10/2025</a:t>
             </a:fld>
             <a:endParaRPr lang="fr-FR"/>
           </a:p>
@@ -825,7 +825,7 @@
           <a:p>
             <a:fld id="{77A72BC1-1874-8D4D-8837-B8DB4BBB9254}" type="datetime1">
               <a:rPr lang="fr-FR" smtClean="0"/>
-              <a:t>08/10/2025</a:t>
+              <a:t>09/10/2025</a:t>
             </a:fld>
             <a:endParaRPr lang="fr-FR"/>
           </a:p>
@@ -1036,7 +1036,7 @@
           <a:p>
             <a:fld id="{327F1321-2D4D-884C-861E-2CE738DFEB12}" type="datetime1">
               <a:rPr lang="fr-FR" smtClean="0"/>
-              <a:t>08/10/2025</a:t>
+              <a:t>09/10/2025</a:t>
             </a:fld>
             <a:endParaRPr lang="fr-FR"/>
           </a:p>
@@ -1237,7 +1237,7 @@
           <a:p>
             <a:fld id="{4F54C394-6D39-F94B-A864-4F5C2BA51027}" type="datetime1">
               <a:rPr lang="fr-FR" smtClean="0"/>
-              <a:t>08/10/2025</a:t>
+              <a:t>09/10/2025</a:t>
             </a:fld>
             <a:endParaRPr lang="fr-FR"/>
           </a:p>
@@ -1515,7 +1515,7 @@
           <a:p>
             <a:fld id="{C6FA96B8-2BF0-0E49-862C-F6F635FAF71A}" type="datetime1">
               <a:rPr lang="fr-FR" smtClean="0"/>
-              <a:t>08/10/2025</a:t>
+              <a:t>09/10/2025</a:t>
             </a:fld>
             <a:endParaRPr lang="fr-FR"/>
           </a:p>
@@ -1783,7 +1783,7 @@
           <a:p>
             <a:fld id="{36F06A85-1303-2349-BB57-49EA37BA5217}" type="datetime1">
               <a:rPr lang="fr-FR" smtClean="0"/>
-              <a:t>08/10/2025</a:t>
+              <a:t>09/10/2025</a:t>
             </a:fld>
             <a:endParaRPr lang="fr-FR"/>
           </a:p>
@@ -2198,7 +2198,7 @@
           <a:p>
             <a:fld id="{DC99242F-07D9-8043-A870-6136609D36CE}" type="datetime1">
               <a:rPr lang="fr-FR" smtClean="0"/>
-              <a:t>08/10/2025</a:t>
+              <a:t>09/10/2025</a:t>
             </a:fld>
             <a:endParaRPr lang="fr-FR"/>
           </a:p>
@@ -2342,7 +2342,7 @@
           <a:p>
             <a:fld id="{B2B088BC-4391-6849-9602-11617F74056E}" type="datetime1">
               <a:rPr lang="fr-FR" smtClean="0"/>
-              <a:t>08/10/2025</a:t>
+              <a:t>09/10/2025</a:t>
             </a:fld>
             <a:endParaRPr lang="fr-FR"/>
           </a:p>
@@ -2458,7 +2458,7 @@
           <a:p>
             <a:fld id="{A5CB5F1D-0359-924A-B38E-06A431E7B969}" type="datetime1">
               <a:rPr lang="fr-FR" smtClean="0"/>
-              <a:t>08/10/2025</a:t>
+              <a:t>09/10/2025</a:t>
             </a:fld>
             <a:endParaRPr lang="fr-FR"/>
           </a:p>
@@ -2772,7 +2772,7 @@
           <a:p>
             <a:fld id="{DE038A17-4958-1340-99B5-05FAB9EDB7C8}" type="datetime1">
               <a:rPr lang="fr-FR" smtClean="0"/>
-              <a:t>08/10/2025</a:t>
+              <a:t>09/10/2025</a:t>
             </a:fld>
             <a:endParaRPr lang="fr-FR"/>
           </a:p>
@@ -3063,7 +3063,7 @@
           <a:p>
             <a:fld id="{5835D56A-66CA-444D-9833-F60B71DADDCE}" type="datetime1">
               <a:rPr lang="fr-FR" smtClean="0"/>
-              <a:t>08/10/2025</a:t>
+              <a:t>09/10/2025</a:t>
             </a:fld>
             <a:endParaRPr lang="fr-FR"/>
           </a:p>
@@ -3307,7 +3307,7 @@
           <a:p>
             <a:fld id="{BAC4FD2B-80F8-6343-B239-BF7EC7832045}" type="datetime1">
               <a:rPr lang="fr-FR" smtClean="0"/>
-              <a:t>08/10/2025</a:t>
+              <a:t>09/10/2025</a:t>
             </a:fld>
             <a:endParaRPr lang="fr-FR"/>
           </a:p>
@@ -4243,6 +4243,14 @@
 <file path=ppt/slides/slide11.xml><?xml version="1.0" encoding="utf-8"?>
 <p:sld xmlns:a="http://schemas.openxmlformats.org/drawingml/2006/main" xmlns:r="http://schemas.openxmlformats.org/officeDocument/2006/relationships" xmlns:p="http://schemas.openxmlformats.org/presentationml/2006/main">
   <p:cSld>
+    <p:bg>
+      <p:bgPr>
+        <a:solidFill>
+          <a:schemeClr val="bg1"/>
+        </a:solidFill>
+        <a:effectLst/>
+      </p:bgPr>
+    </p:bg>
     <p:spTree>
       <p:nvGrpSpPr>
         <p:cNvPr id="1" name=""/>
@@ -4259,6 +4267,72 @@
       </p:grpSpPr>
       <p:sp>
         <p:nvSpPr>
+          <p:cNvPr id="12" name="Down Arrow 7">
+            <a:extLst>
+              <a:ext uri="{FF2B5EF4-FFF2-40B4-BE49-F238E27FC236}">
+                <a16:creationId xmlns:a16="http://schemas.microsoft.com/office/drawing/2014/main" id="{D4771268-CB57-404A-9271-370EB28F6090}"/>
+              </a:ext>
+              <a:ext uri="{C183D7F6-B498-43B3-948B-1728B52AA6E4}">
+                <adec:decorative xmlns:adec="http://schemas.microsoft.com/office/drawing/2017/decorative" val="1"/>
+              </a:ext>
+            </a:extLst>
+          </p:cNvPr>
+          <p:cNvSpPr>
+            <a:spLocks noGrp="1" noRot="1" noChangeAspect="1" noMove="1" noResize="1" noEditPoints="1" noAdjustHandles="1" noChangeArrowheads="1" noChangeShapeType="1" noTextEdit="1"/>
+          </p:cNvSpPr>
+          <p:nvPr>
+            <p:extLst>
+              <p:ext uri="{386F3935-93C4-4BCD-93E2-E3B085C9AB24}">
+                <p16:designElem xmlns:p16="http://schemas.microsoft.com/office/powerpoint/2015/main" val="1"/>
+              </p:ext>
+            </p:extLst>
+          </p:nvPr>
+        </p:nvSpPr>
+        <p:spPr>
+          <a:xfrm rot="16200000">
+            <a:off x="800100" y="1491343"/>
+            <a:ext cx="3333749" cy="3499103"/>
+          </a:xfrm>
+          <a:prstGeom prst="downArrow">
+            <a:avLst>
+              <a:gd name="adj1" fmla="val 100000"/>
+              <a:gd name="adj2" fmla="val 15788"/>
+            </a:avLst>
+          </a:prstGeom>
+          <a:solidFill>
+            <a:srgbClr val="404040"/>
+          </a:solidFill>
+          <a:ln w="53975">
+            <a:noFill/>
+          </a:ln>
+        </p:spPr>
+        <p:style>
+          <a:lnRef idx="2">
+            <a:schemeClr val="accent1">
+              <a:shade val="50000"/>
+            </a:schemeClr>
+          </a:lnRef>
+          <a:fillRef idx="1">
+            <a:schemeClr val="accent1"/>
+          </a:fillRef>
+          <a:effectRef idx="0">
+            <a:schemeClr val="accent1"/>
+          </a:effectRef>
+          <a:fontRef idx="minor">
+            <a:schemeClr val="lt1"/>
+          </a:fontRef>
+        </p:style>
+        <p:txBody>
+          <a:bodyPr rtlCol="0" anchor="ctr"/>
+          <a:lstStyle/>
+          <a:p>
+            <a:pPr algn="ctr"/>
+            <a:endParaRPr lang="en-US"/>
+          </a:p>
+        </p:txBody>
+      </p:sp>
+      <p:sp>
+        <p:nvSpPr>
           <p:cNvPr id="2" name="Titre 1">
             <a:extLst>
               <a:ext uri="{FF2B5EF4-FFF2-40B4-BE49-F238E27FC236}">
@@ -4273,43 +4347,66 @@
             <p:ph type="title"/>
           </p:nvPr>
         </p:nvSpPr>
-        <p:spPr/>
-        <p:txBody>
-          <a:bodyPr/>
-          <a:lstStyle/>
-          <a:p>
-            <a:r>
-              <a:rPr lang="fr-FR" dirty="0"/>
+        <p:spPr>
+          <a:xfrm>
+            <a:off x="1028700" y="1967266"/>
+            <a:ext cx="2628900" cy="2547257"/>
+          </a:xfrm>
+          <a:noFill/>
+        </p:spPr>
+        <p:txBody>
+          <a:bodyPr vert="horz" lIns="91440" tIns="45720" rIns="91440" bIns="45720" rtlCol="0" anchor="ctr">
+            <a:normAutofit/>
+          </a:bodyPr>
+          <a:lstStyle/>
+          <a:p>
+            <a:pPr algn="ctr"/>
+            <a:r>
+              <a:rPr lang="en-US" sz="3600" kern="1200">
+                <a:solidFill>
+                  <a:srgbClr val="FFFFFF"/>
+                </a:solidFill>
+                <a:latin typeface="+mj-lt"/>
+                <a:ea typeface="+mj-ea"/>
+                <a:cs typeface="+mj-cs"/>
+              </a:rPr>
               <a:t>Schéma simplifié</a:t>
             </a:r>
           </a:p>
         </p:txBody>
       </p:sp>
-      <p:sp>
-        <p:nvSpPr>
-          <p:cNvPr id="3" name="Espace réservé du contenu 2">
-            <a:extLst>
-              <a:ext uri="{FF2B5EF4-FFF2-40B4-BE49-F238E27FC236}">
-                <a16:creationId xmlns:a16="http://schemas.microsoft.com/office/drawing/2014/main" id="{159B9E37-71C8-26A3-AEE9-02166F45F244}"/>
-              </a:ext>
-            </a:extLst>
-          </p:cNvPr>
-          <p:cNvSpPr>
-            <a:spLocks noGrp="1"/>
-          </p:cNvSpPr>
+      <p:pic>
+        <p:nvPicPr>
+          <p:cNvPr id="7" name="Espace réservé du contenu 6" descr="Une image contenant diagramme, Dessin technique, Plan, schématique&#10;&#10;Le contenu généré par l’IA peut être incorrect.">
+            <a:extLst>
+              <a:ext uri="{FF2B5EF4-FFF2-40B4-BE49-F238E27FC236}">
+                <a16:creationId xmlns:a16="http://schemas.microsoft.com/office/drawing/2014/main" id="{BCBE7602-A1D3-A9CE-20EF-8BF65731FE93}"/>
+              </a:ext>
+            </a:extLst>
+          </p:cNvPr>
+          <p:cNvPicPr>
+            <a:picLocks noGrp="1" noChangeAspect="1"/>
+          </p:cNvPicPr>
           <p:nvPr>
             <p:ph idx="1"/>
           </p:nvPr>
-        </p:nvSpPr>
-        <p:spPr/>
-        <p:txBody>
-          <a:bodyPr/>
-          <a:lstStyle/>
-          <a:p>
-            <a:endParaRPr lang="fr-FR" dirty="0"/>
-          </a:p>
-        </p:txBody>
-      </p:sp>
+        </p:nvPicPr>
+        <p:blipFill>
+          <a:blip r:embed="rId2"/>
+          <a:stretch>
+            <a:fillRect/>
+          </a:stretch>
+        </p:blipFill>
+        <p:spPr>
+          <a:xfrm>
+            <a:off x="5654773" y="643466"/>
+            <a:ext cx="5025786" cy="5568739"/>
+          </a:xfrm>
+          <a:prstGeom prst="rect">
+            <a:avLst/>
+          </a:prstGeom>
+        </p:spPr>
+      </p:pic>
       <p:sp>
         <p:nvSpPr>
           <p:cNvPr id="4" name="Espace réservé du pied de page 3">
@@ -4326,13 +4423,34 @@
             <p:ph type="ftr" sz="quarter" idx="11"/>
           </p:nvPr>
         </p:nvSpPr>
-        <p:spPr/>
-        <p:txBody>
-          <a:bodyPr/>
-          <a:lstStyle/>
-          <a:p>
-            <a:r>
-              <a:rPr lang="fr-FR"/>
+        <p:spPr>
+          <a:xfrm>
+            <a:off x="1028700" y="6356350"/>
+            <a:ext cx="6210300" cy="365125"/>
+          </a:xfrm>
+        </p:spPr>
+        <p:txBody>
+          <a:bodyPr vert="horz" lIns="91440" tIns="45720" rIns="91440" bIns="45720" rtlCol="0" anchor="ctr">
+            <a:normAutofit/>
+          </a:bodyPr>
+          <a:lstStyle/>
+          <a:p>
+            <a:pPr algn="l">
+              <a:spcAft>
+                <a:spcPts val="600"/>
+              </a:spcAft>
+            </a:pPr>
+            <a:r>
+              <a:rPr lang="en-US" kern="1200">
+                <a:solidFill>
+                  <a:schemeClr val="tx1">
+                    <a:alpha val="80000"/>
+                  </a:schemeClr>
+                </a:solidFill>
+                <a:latin typeface="+mn-lt"/>
+                <a:ea typeface="+mn-ea"/>
+                <a:cs typeface="+mn-cs"/>
+              </a:rPr>
               <a:t>PICIURA Ander - MIRABEL Lilian</a:t>
             </a:r>
           </a:p>
@@ -4354,16 +4472,45 @@
             <p:ph type="sldNum" sz="quarter" idx="12"/>
           </p:nvPr>
         </p:nvSpPr>
-        <p:spPr/>
-        <p:txBody>
-          <a:bodyPr/>
-          <a:lstStyle/>
-          <a:p>
+        <p:spPr>
+          <a:xfrm>
+            <a:off x="11034184" y="6356350"/>
+            <a:ext cx="514349" cy="365125"/>
+          </a:xfrm>
+        </p:spPr>
+        <p:txBody>
+          <a:bodyPr vert="horz" lIns="91440" tIns="45720" rIns="91440" bIns="45720" rtlCol="0" anchor="ctr">
+            <a:normAutofit/>
+          </a:bodyPr>
+          <a:lstStyle/>
+          <a:p>
+            <a:pPr>
+              <a:spcAft>
+                <a:spcPts val="600"/>
+              </a:spcAft>
+            </a:pPr>
             <a:fld id="{EF144E42-BC24-D442-AFF0-55EAB46336FB}" type="slidenum">
-              <a:rPr lang="fr-FR" smtClean="0"/>
+              <a:rPr lang="en-US">
+                <a:solidFill>
+                  <a:schemeClr val="tx1">
+                    <a:alpha val="80000"/>
+                  </a:schemeClr>
+                </a:solidFill>
+              </a:rPr>
+              <a:pPr>
+                <a:spcAft>
+                  <a:spcPts val="600"/>
+                </a:spcAft>
+              </a:pPr>
               <a:t>11</a:t>
             </a:fld>
-            <a:endParaRPr lang="fr-FR"/>
+            <a:endParaRPr lang="en-US">
+              <a:solidFill>
+                <a:schemeClr val="tx1">
+                  <a:alpha val="80000"/>
+                </a:schemeClr>
+              </a:solidFill>
+            </a:endParaRPr>
           </a:p>
         </p:txBody>
       </p:sp>
